--- a/documents/经典游戏回廊 2· 项目汇报.pptx
+++ b/documents/经典游戏回廊 2· 项目汇报.pptx
@@ -5,7 +5,7 @@
     <p:sldMasterId id="2147483648" r:id="rId1"/>
   </p:sldMasterIdLst>
   <p:notesMasterIdLst>
-    <p:notesMasterId r:id="rId16"/>
+    <p:notesMasterId r:id="rId15"/>
   </p:notesMasterIdLst>
   <p:sldIdLst>
     <p:sldId id="256" r:id="rId2"/>
@@ -18,10 +18,9 @@
     <p:sldId id="263" r:id="rId9"/>
     <p:sldId id="264" r:id="rId10"/>
     <p:sldId id="265" r:id="rId11"/>
-    <p:sldId id="266" r:id="rId12"/>
-    <p:sldId id="267" r:id="rId13"/>
-    <p:sldId id="268" r:id="rId14"/>
-    <p:sldId id="269" r:id="rId15"/>
+    <p:sldId id="267" r:id="rId12"/>
+    <p:sldId id="268" r:id="rId13"/>
+    <p:sldId id="269" r:id="rId14"/>
   </p:sldIdLst>
   <p:sldSz cx="12192000" cy="6858000"/>
   <p:notesSz cx="6858000" cy="9144000"/>
@@ -696,8 +695,8 @@
         </p:nvSpPr>
         <p:spPr>
           <a:xfrm>
-            <a:off x="2857680" y="512640"/>
-            <a:ext cx="3428640" cy="2566800"/>
+            <a:off x="2290763" y="512763"/>
+            <a:ext cx="4562475" cy="2566987"/>
           </a:xfrm>
           <a:prstGeom prst="rect">
             <a:avLst/>
@@ -1252,7 +1251,7 @@
       </p:grpSpPr>
       <p:sp>
         <p:nvSpPr>
-          <p:cNvPr id="419" name="PlaceHolder 1"/>
+          <p:cNvPr id="425" name="PlaceHolder 1"/>
           <p:cNvSpPr>
             <a:spLocks noGrp="1"/>
           </p:cNvSpPr>
@@ -1295,12 +1294,12 @@
       </p:sp>
       <p:sp>
         <p:nvSpPr>
-          <p:cNvPr id="420" name="PlaceHolder 2"/>
+          <p:cNvPr id="426" name="PlaceHolder 2"/>
           <p:cNvSpPr>
             <a:spLocks noGrp="1"/>
           </p:cNvSpPr>
           <p:nvPr>
-            <p:ph type="dt" idx="34"/>
+            <p:ph type="dt" idx="37"/>
           </p:nvPr>
         </p:nvSpPr>
         <p:spPr>
@@ -1364,7 +1363,7 @@
       </p:sp>
       <p:sp>
         <p:nvSpPr>
-          <p:cNvPr id="421" name="PlaceHolder 3"/>
+          <p:cNvPr id="427" name="PlaceHolder 3"/>
           <p:cNvSpPr>
             <a:spLocks noGrp="1" noRot="1" noChangeAspect="1"/>
           </p:cNvSpPr>
@@ -1387,7 +1386,7 @@
       </p:sp>
       <p:sp>
         <p:nvSpPr>
-          <p:cNvPr id="422" name="PlaceHolder 4"/>
+          <p:cNvPr id="428" name="PlaceHolder 4"/>
           <p:cNvSpPr>
             <a:spLocks noGrp="1"/>
           </p:cNvSpPr>
@@ -1431,7 +1430,7 @@
                 <a:uFillTx/>
                 <a:latin typeface="Noto Sans CJK SC"/>
               </a:rPr>
-              <a:t>回顾整个开发过程，我们制定了清晰的里程碑计划。从第一周完成界面开发，到第二周完成所有游戏的核心代码，再到第三周进行整合和测试，每一步都按计划推进。目前，除了最后的代码整合和</a:t>
+              <a:t>在项目开发中，我们遇到了一些挑战，但也收获了不少亮点。技术亮点包括统一的多游戏架构、高性能的</a:t>
             </a:r>
             <a:r>
               <a:rPr lang="en-US" sz="1400" b="0" u="none" strike="noStrike">
@@ -1441,7 +1440,7 @@
                 <a:uFillTx/>
                 <a:latin typeface="Noto Sans CJK SC"/>
               </a:rPr>
-              <a:t>PPT</a:t>
+              <a:t>Canvas</a:t>
             </a:r>
             <a:r>
               <a:rPr lang="zh-CN" sz="1400" b="0" u="none" strike="noStrike">
@@ -1451,7 +1450,7 @@
                 <a:uFillTx/>
                 <a:latin typeface="Noto Sans CJK SC"/>
               </a:rPr>
-              <a:t>制作外，大部分工作已经完成。这个进度条也直观地展示了我们当前的完成状态。</a:t>
+              <a:t>渲染以及跨平台的输入适配。针对碰撞检测、俄罗斯方块旋转等技术难点，我们都通过成熟的算法和设计模式找到了有效的解决方案，确保了游戏的可玩性和稳定性。</a:t>
             </a:r>
             <a:endParaRPr lang="en-US" sz="1400" b="0" u="none" strike="noStrike">
               <a:solidFill>
@@ -1465,12 +1464,12 @@
       </p:sp>
       <p:sp>
         <p:nvSpPr>
-          <p:cNvPr id="423" name="PlaceHolder 5"/>
+          <p:cNvPr id="429" name="PlaceHolder 5"/>
           <p:cNvSpPr>
             <a:spLocks noGrp="1"/>
           </p:cNvSpPr>
           <p:nvPr>
-            <p:ph type="ftr" idx="35"/>
+            <p:ph type="ftr" idx="38"/>
           </p:nvPr>
         </p:nvSpPr>
         <p:spPr>
@@ -1507,12 +1506,12 @@
       </p:sp>
       <p:sp>
         <p:nvSpPr>
-          <p:cNvPr id="424" name="PlaceHolder 6"/>
+          <p:cNvPr id="430" name="PlaceHolder 6"/>
           <p:cNvSpPr>
             <a:spLocks noGrp="1"/>
           </p:cNvSpPr>
           <p:nvPr>
-            <p:ph type="sldNum" idx="36"/>
+            <p:ph type="sldNum" idx="39"/>
           </p:nvPr>
         </p:nvSpPr>
         <p:spPr>
@@ -1601,7 +1600,7 @@
       </p:grpSpPr>
       <p:sp>
         <p:nvSpPr>
-          <p:cNvPr id="425" name="PlaceHolder 1"/>
+          <p:cNvPr id="431" name="PlaceHolder 1"/>
           <p:cNvSpPr>
             <a:spLocks noGrp="1"/>
           </p:cNvSpPr>
@@ -1644,12 +1643,12 @@
       </p:sp>
       <p:sp>
         <p:nvSpPr>
-          <p:cNvPr id="426" name="PlaceHolder 2"/>
+          <p:cNvPr id="432" name="PlaceHolder 2"/>
           <p:cNvSpPr>
             <a:spLocks noGrp="1"/>
           </p:cNvSpPr>
           <p:nvPr>
-            <p:ph type="dt" idx="37"/>
+            <p:ph type="dt" idx="40"/>
           </p:nvPr>
         </p:nvSpPr>
         <p:spPr>
@@ -1713,7 +1712,7 @@
       </p:sp>
       <p:sp>
         <p:nvSpPr>
-          <p:cNvPr id="427" name="PlaceHolder 3"/>
+          <p:cNvPr id="433" name="PlaceHolder 3"/>
           <p:cNvSpPr>
             <a:spLocks noGrp="1" noRot="1" noChangeAspect="1"/>
           </p:cNvSpPr>
@@ -1736,7 +1735,7 @@
       </p:sp>
       <p:sp>
         <p:nvSpPr>
-          <p:cNvPr id="428" name="PlaceHolder 4"/>
+          <p:cNvPr id="434" name="PlaceHolder 4"/>
           <p:cNvSpPr>
             <a:spLocks noGrp="1"/>
           </p:cNvSpPr>
@@ -1780,7 +1779,7 @@
                 <a:uFillTx/>
                 <a:latin typeface="Noto Sans CJK SC"/>
               </a:rPr>
-              <a:t>在项目开发中，我们遇到了一些挑战，但也收获了不少亮点。技术亮点包括统一的多游戏架构、高性能的</a:t>
+              <a:t>这是我们项目的代码仓库结构和</a:t>
             </a:r>
             <a:r>
               <a:rPr lang="en-US" sz="1400" b="0" u="none" strike="noStrike">
@@ -1790,7 +1789,7 @@
                 <a:uFillTx/>
                 <a:latin typeface="Noto Sans CJK SC"/>
               </a:rPr>
-              <a:t>Canvas</a:t>
+              <a:t>Git</a:t>
             </a:r>
             <a:r>
               <a:rPr lang="zh-CN" sz="1400" b="0" u="none" strike="noStrike">
@@ -1800,7 +1799,87 @@
                 <a:uFillTx/>
                 <a:latin typeface="Noto Sans CJK SC"/>
               </a:rPr>
-              <a:t>渲染以及跨平台的输入适配。针对碰撞检测、俄罗斯方块旋转等技术难点，我们都通过成熟的算法和设计模式找到了有效的解决方案，确保了游戏的可玩性和稳定性。</a:t>
+              <a:t>分支策略。文件结构清晰，每个游戏都是一个独立的</a:t>
+            </a:r>
+            <a:r>
+              <a:rPr lang="en-US" sz="1400" b="0" u="none" strike="noStrike">
+                <a:solidFill>
+                  <a:srgbClr val="000000"/>
+                </a:solidFill>
+                <a:uFillTx/>
+                <a:latin typeface="Noto Sans CJK SC"/>
+              </a:rPr>
+              <a:t>HTML</a:t>
+            </a:r>
+            <a:r>
+              <a:rPr lang="zh-CN" sz="1400" b="0" u="none" strike="noStrike">
+                <a:solidFill>
+                  <a:srgbClr val="000000"/>
+                </a:solidFill>
+                <a:uFillTx/>
+                <a:latin typeface="Noto Sans CJK SC"/>
+              </a:rPr>
+              <a:t>文件，便于维护和扩展。我们采用了</a:t>
+            </a:r>
+            <a:r>
+              <a:rPr lang="en-US" sz="1400" b="0" u="none" strike="noStrike">
+                <a:solidFill>
+                  <a:srgbClr val="000000"/>
+                </a:solidFill>
+                <a:uFillTx/>
+                <a:latin typeface="Noto Sans CJK SC"/>
+              </a:rPr>
+              <a:t>Git Flow</a:t>
+            </a:r>
+            <a:r>
+              <a:rPr lang="zh-CN" sz="1400" b="0" u="none" strike="noStrike">
+                <a:solidFill>
+                  <a:srgbClr val="000000"/>
+                </a:solidFill>
+                <a:uFillTx/>
+                <a:latin typeface="Noto Sans CJK SC"/>
+              </a:rPr>
+              <a:t>工作流，为每个功能模块创建独立的</a:t>
+            </a:r>
+            <a:r>
+              <a:rPr lang="en-US" sz="1400" b="0" u="none" strike="noStrike">
+                <a:solidFill>
+                  <a:srgbClr val="000000"/>
+                </a:solidFill>
+                <a:uFillTx/>
+                <a:latin typeface="Noto Sans CJK SC"/>
+              </a:rPr>
+              <a:t>feature</a:t>
+            </a:r>
+            <a:r>
+              <a:rPr lang="zh-CN" sz="1400" b="0" u="none" strike="noStrike">
+                <a:solidFill>
+                  <a:srgbClr val="000000"/>
+                </a:solidFill>
+                <a:uFillTx/>
+                <a:latin typeface="Noto Sans CJK SC"/>
+              </a:rPr>
+              <a:t>分支，如界面、不同同学的游戏开发等，最后合并到</a:t>
+            </a:r>
+            <a:r>
+              <a:rPr lang="en-US" sz="1400" b="0" u="none" strike="noStrike">
+                <a:solidFill>
+                  <a:srgbClr val="000000"/>
+                </a:solidFill>
+                <a:uFillTx/>
+                <a:latin typeface="Noto Sans CJK SC"/>
+              </a:rPr>
+              <a:t>develop</a:t>
+            </a:r>
+            <a:r>
+              <a:rPr lang="zh-CN" sz="1400" b="0" u="none" strike="noStrike">
+                <a:solidFill>
+                  <a:srgbClr val="000000"/>
+                </a:solidFill>
+                <a:uFillTx/>
+                <a:latin typeface="Noto Sans CJK SC"/>
+              </a:rPr>
+              <a:t>分支进行集成测试，确保了代码管理的规范和高效。</a:t>
             </a:r>
             <a:endParaRPr lang="en-US" sz="1400" b="0" u="none" strike="noStrike">
               <a:solidFill>
@@ -1814,12 +1893,12 @@
       </p:sp>
       <p:sp>
         <p:nvSpPr>
-          <p:cNvPr id="429" name="PlaceHolder 5"/>
+          <p:cNvPr id="435" name="PlaceHolder 5"/>
           <p:cNvSpPr>
             <a:spLocks noGrp="1"/>
           </p:cNvSpPr>
           <p:nvPr>
-            <p:ph type="ftr" idx="38"/>
+            <p:ph type="ftr" idx="41"/>
           </p:nvPr>
         </p:nvSpPr>
         <p:spPr>
@@ -1856,12 +1935,12 @@
       </p:sp>
       <p:sp>
         <p:nvSpPr>
-          <p:cNvPr id="430" name="PlaceHolder 6"/>
+          <p:cNvPr id="436" name="PlaceHolder 6"/>
           <p:cNvSpPr>
             <a:spLocks noGrp="1"/>
           </p:cNvSpPr>
           <p:nvPr>
-            <p:ph type="sldNum" idx="39"/>
+            <p:ph type="sldNum" idx="42"/>
           </p:nvPr>
         </p:nvSpPr>
         <p:spPr>
@@ -1950,435 +2029,6 @@
       </p:grpSpPr>
       <p:sp>
         <p:nvSpPr>
-          <p:cNvPr id="431" name="PlaceHolder 1"/>
-          <p:cNvSpPr>
-            <a:spLocks noGrp="1"/>
-          </p:cNvSpPr>
-          <p:nvPr>
-            <p:ph type="hdr"/>
-          </p:nvPr>
-        </p:nvSpPr>
-        <p:spPr>
-          <a:xfrm>
-            <a:off x="0" y="0"/>
-            <a:ext cx="3962160" cy="342720"/>
-          </a:xfrm>
-          <a:prstGeom prst="rect">
-            <a:avLst/>
-          </a:prstGeom>
-          <a:noFill/>
-          <a:ln w="0">
-            <a:noFill/>
-          </a:ln>
-        </p:spPr>
-        <p:txBody>
-          <a:bodyPr lIns="91440" tIns="45720" rIns="91440" bIns="45720" anchor="t">
-            <a:noAutofit/>
-          </a:bodyPr>
-          <a:lstStyle/>
-          <a:p>
-            <a:pPr indent="0">
-              <a:buNone/>
-            </a:pPr>
-            <a:endParaRPr lang="en-US" sz="1200" b="0" u="none" strike="noStrike">
-              <a:solidFill>
-                <a:srgbClr val="000000"/>
-              </a:solidFill>
-              <a:uFillTx/>
-              <a:latin typeface="Arial"/>
-              <a:ea typeface="Arial"/>
-            </a:endParaRPr>
-          </a:p>
-        </p:txBody>
-      </p:sp>
-      <p:sp>
-        <p:nvSpPr>
-          <p:cNvPr id="432" name="PlaceHolder 2"/>
-          <p:cNvSpPr>
-            <a:spLocks noGrp="1"/>
-          </p:cNvSpPr>
-          <p:nvPr>
-            <p:ph type="dt" idx="40"/>
-          </p:nvPr>
-        </p:nvSpPr>
-        <p:spPr>
-          <a:xfrm>
-            <a:off x="5180040" y="0"/>
-            <a:ext cx="3962160" cy="342720"/>
-          </a:xfrm>
-          <a:prstGeom prst="rect">
-            <a:avLst/>
-          </a:prstGeom>
-          <a:noFill/>
-          <a:ln w="0">
-            <a:noFill/>
-          </a:ln>
-        </p:spPr>
-        <p:txBody>
-          <a:bodyPr lIns="91440" tIns="45720" rIns="91440" bIns="45720" anchor="t">
-            <a:noAutofit/>
-          </a:bodyPr>
-          <a:lstStyle>
-            <a:lvl1pPr indent="0" algn="r">
-              <a:lnSpc>
-                <a:spcPct val="100000"/>
-              </a:lnSpc>
-              <a:buNone/>
-              <a:defRPr lang="cs-CZ" sz="1200" b="0" u="none" strike="noStrike">
-                <a:solidFill>
-                  <a:srgbClr val="000000"/>
-                </a:solidFill>
-                <a:uFillTx/>
-                <a:latin typeface="Noto Sans CJK SC"/>
-              </a:defRPr>
-            </a:lvl1pPr>
-          </a:lstStyle>
-          <a:p>
-            <a:pPr indent="0" algn="r">
-              <a:lnSpc>
-                <a:spcPct val="100000"/>
-              </a:lnSpc>
-              <a:buNone/>
-            </a:pPr>
-            <a:r>
-              <a:rPr lang="cs-CZ" sz="1200" b="0" u="none" strike="noStrike">
-                <a:solidFill>
-                  <a:srgbClr val="000000"/>
-                </a:solidFill>
-                <a:uFillTx/>
-                <a:latin typeface="Noto Sans CJK SC"/>
-              </a:rPr>
-              <a:t>1.7.2013</a:t>
-            </a:r>
-            <a:endParaRPr lang="en-US" sz="1200" b="0" u="none" strike="noStrike">
-              <a:solidFill>
-                <a:srgbClr val="000000"/>
-              </a:solidFill>
-              <a:uFillTx/>
-              <a:latin typeface="Noto Sans CJK SC"/>
-            </a:endParaRPr>
-          </a:p>
-        </p:txBody>
-      </p:sp>
-      <p:sp>
-        <p:nvSpPr>
-          <p:cNvPr id="433" name="PlaceHolder 3"/>
-          <p:cNvSpPr>
-            <a:spLocks noGrp="1" noRot="1" noChangeAspect="1"/>
-          </p:cNvSpPr>
-          <p:nvPr>
-            <p:ph type="sldImg"/>
-          </p:nvPr>
-        </p:nvSpPr>
-        <p:spPr>
-          <a:xfrm>
-            <a:off x="2857680" y="512640"/>
-            <a:ext cx="3428640" cy="2566800"/>
-          </a:xfrm>
-          <a:prstGeom prst="rect">
-            <a:avLst/>
-          </a:prstGeom>
-          <a:ln w="0">
-            <a:noFill/>
-          </a:ln>
-        </p:spPr>
-      </p:sp>
-      <p:sp>
-        <p:nvSpPr>
-          <p:cNvPr id="434" name="PlaceHolder 4"/>
-          <p:cNvSpPr>
-            <a:spLocks noGrp="1"/>
-          </p:cNvSpPr>
-          <p:nvPr>
-            <p:ph type="body"/>
-          </p:nvPr>
-        </p:nvSpPr>
-        <p:spPr>
-          <a:xfrm>
-            <a:off x="914400" y="3251160"/>
-            <a:ext cx="7314840" cy="3080880"/>
-          </a:xfrm>
-          <a:prstGeom prst="rect">
-            <a:avLst/>
-          </a:prstGeom>
-          <a:noFill/>
-          <a:ln w="0">
-            <a:noFill/>
-          </a:ln>
-        </p:spPr>
-        <p:txBody>
-          <a:bodyPr lIns="91440" tIns="45720" rIns="91440" bIns="45720" anchor="ctr">
-            <a:noAutofit/>
-          </a:bodyPr>
-          <a:lstStyle/>
-          <a:p>
-            <a:pPr indent="0">
-              <a:lnSpc>
-                <a:spcPct val="100000"/>
-              </a:lnSpc>
-              <a:buNone/>
-              <a:tabLst>
-                <a:tab pos="0" algn="l"/>
-              </a:tabLst>
-            </a:pPr>
-            <a:r>
-              <a:rPr lang="zh-CN" sz="1400" b="0" u="none" strike="noStrike">
-                <a:solidFill>
-                  <a:srgbClr val="000000"/>
-                </a:solidFill>
-                <a:uFillTx/>
-                <a:latin typeface="Noto Sans CJK SC"/>
-              </a:rPr>
-              <a:t>这是我们项目的代码仓库结构和</a:t>
-            </a:r>
-            <a:r>
-              <a:rPr lang="en-US" sz="1400" b="0" u="none" strike="noStrike">
-                <a:solidFill>
-                  <a:srgbClr val="000000"/>
-                </a:solidFill>
-                <a:uFillTx/>
-                <a:latin typeface="Noto Sans CJK SC"/>
-              </a:rPr>
-              <a:t>Git</a:t>
-            </a:r>
-            <a:r>
-              <a:rPr lang="zh-CN" sz="1400" b="0" u="none" strike="noStrike">
-                <a:solidFill>
-                  <a:srgbClr val="000000"/>
-                </a:solidFill>
-                <a:uFillTx/>
-                <a:latin typeface="Noto Sans CJK SC"/>
-              </a:rPr>
-              <a:t>分支策略。文件结构清晰，每个游戏都是一个独立的</a:t>
-            </a:r>
-            <a:r>
-              <a:rPr lang="en-US" sz="1400" b="0" u="none" strike="noStrike">
-                <a:solidFill>
-                  <a:srgbClr val="000000"/>
-                </a:solidFill>
-                <a:uFillTx/>
-                <a:latin typeface="Noto Sans CJK SC"/>
-              </a:rPr>
-              <a:t>HTML</a:t>
-            </a:r>
-            <a:r>
-              <a:rPr lang="zh-CN" sz="1400" b="0" u="none" strike="noStrike">
-                <a:solidFill>
-                  <a:srgbClr val="000000"/>
-                </a:solidFill>
-                <a:uFillTx/>
-                <a:latin typeface="Noto Sans CJK SC"/>
-              </a:rPr>
-              <a:t>文件，便于维护和扩展。我们采用了</a:t>
-            </a:r>
-            <a:r>
-              <a:rPr lang="en-US" sz="1400" b="0" u="none" strike="noStrike">
-                <a:solidFill>
-                  <a:srgbClr val="000000"/>
-                </a:solidFill>
-                <a:uFillTx/>
-                <a:latin typeface="Noto Sans CJK SC"/>
-              </a:rPr>
-              <a:t>Git Flow</a:t>
-            </a:r>
-            <a:r>
-              <a:rPr lang="zh-CN" sz="1400" b="0" u="none" strike="noStrike">
-                <a:solidFill>
-                  <a:srgbClr val="000000"/>
-                </a:solidFill>
-                <a:uFillTx/>
-                <a:latin typeface="Noto Sans CJK SC"/>
-              </a:rPr>
-              <a:t>工作流，为每个功能模块创建独立的</a:t>
-            </a:r>
-            <a:r>
-              <a:rPr lang="en-US" sz="1400" b="0" u="none" strike="noStrike">
-                <a:solidFill>
-                  <a:srgbClr val="000000"/>
-                </a:solidFill>
-                <a:uFillTx/>
-                <a:latin typeface="Noto Sans CJK SC"/>
-              </a:rPr>
-              <a:t>feature</a:t>
-            </a:r>
-            <a:r>
-              <a:rPr lang="zh-CN" sz="1400" b="0" u="none" strike="noStrike">
-                <a:solidFill>
-                  <a:srgbClr val="000000"/>
-                </a:solidFill>
-                <a:uFillTx/>
-                <a:latin typeface="Noto Sans CJK SC"/>
-              </a:rPr>
-              <a:t>分支，如界面、不同同学的游戏开发等，最后合并到</a:t>
-            </a:r>
-            <a:r>
-              <a:rPr lang="en-US" sz="1400" b="0" u="none" strike="noStrike">
-                <a:solidFill>
-                  <a:srgbClr val="000000"/>
-                </a:solidFill>
-                <a:uFillTx/>
-                <a:latin typeface="Noto Sans CJK SC"/>
-              </a:rPr>
-              <a:t>develop</a:t>
-            </a:r>
-            <a:r>
-              <a:rPr lang="zh-CN" sz="1400" b="0" u="none" strike="noStrike">
-                <a:solidFill>
-                  <a:srgbClr val="000000"/>
-                </a:solidFill>
-                <a:uFillTx/>
-                <a:latin typeface="Noto Sans CJK SC"/>
-              </a:rPr>
-              <a:t>分支进行集成测试，确保了代码管理的规范和高效。</a:t>
-            </a:r>
-            <a:endParaRPr lang="en-US" sz="1400" b="0" u="none" strike="noStrike">
-              <a:solidFill>
-                <a:srgbClr val="000000"/>
-              </a:solidFill>
-              <a:uFillTx/>
-              <a:latin typeface="Noto Sans CJK SC"/>
-            </a:endParaRPr>
-          </a:p>
-        </p:txBody>
-      </p:sp>
-      <p:sp>
-        <p:nvSpPr>
-          <p:cNvPr id="435" name="PlaceHolder 5"/>
-          <p:cNvSpPr>
-            <a:spLocks noGrp="1"/>
-          </p:cNvSpPr>
-          <p:nvPr>
-            <p:ph type="ftr" idx="41"/>
-          </p:nvPr>
-        </p:nvSpPr>
-        <p:spPr>
-          <a:xfrm>
-            <a:off x="0" y="6502320"/>
-            <a:ext cx="3962160" cy="340920"/>
-          </a:xfrm>
-          <a:prstGeom prst="rect">
-            <a:avLst/>
-          </a:prstGeom>
-          <a:noFill/>
-          <a:ln w="0">
-            <a:noFill/>
-          </a:ln>
-        </p:spPr>
-        <p:txBody>
-          <a:bodyPr lIns="91440" tIns="45720" rIns="91440" bIns="45720" anchor="b">
-            <a:noAutofit/>
-          </a:bodyPr>
-          <a:lstStyle/>
-          <a:p>
-            <a:pPr indent="0">
-              <a:buNone/>
-            </a:pPr>
-            <a:endParaRPr lang="en-US" sz="1200" b="0" u="none" strike="noStrike">
-              <a:solidFill>
-                <a:srgbClr val="000000"/>
-              </a:solidFill>
-              <a:uFillTx/>
-              <a:latin typeface="Noto Sans CJK SC"/>
-            </a:endParaRPr>
-          </a:p>
-        </p:txBody>
-      </p:sp>
-      <p:sp>
-        <p:nvSpPr>
-          <p:cNvPr id="436" name="PlaceHolder 6"/>
-          <p:cNvSpPr>
-            <a:spLocks noGrp="1"/>
-          </p:cNvSpPr>
-          <p:nvPr>
-            <p:ph type="sldNum" idx="42"/>
-          </p:nvPr>
-        </p:nvSpPr>
-        <p:spPr>
-          <a:xfrm>
-            <a:off x="5180040" y="6502320"/>
-            <a:ext cx="3962160" cy="340920"/>
-          </a:xfrm>
-          <a:prstGeom prst="rect">
-            <a:avLst/>
-          </a:prstGeom>
-          <a:noFill/>
-          <a:ln w="0">
-            <a:noFill/>
-          </a:ln>
-        </p:spPr>
-        <p:txBody>
-          <a:bodyPr lIns="91440" tIns="45720" rIns="91440" bIns="45720" anchor="b">
-            <a:noAutofit/>
-          </a:bodyPr>
-          <a:lstStyle>
-            <a:lvl1pPr indent="0" algn="r">
-              <a:lnSpc>
-                <a:spcPct val="100000"/>
-              </a:lnSpc>
-              <a:buNone/>
-              <a:defRPr lang="cs-CZ" sz="1200" b="0" u="none" strike="noStrike">
-                <a:solidFill>
-                  <a:srgbClr val="000000"/>
-                </a:solidFill>
-                <a:uFillTx/>
-                <a:latin typeface="Noto Sans CJK SC"/>
-              </a:defRPr>
-            </a:lvl1pPr>
-          </a:lstStyle>
-          <a:p>
-            <a:pPr indent="0" algn="r">
-              <a:lnSpc>
-                <a:spcPct val="100000"/>
-              </a:lnSpc>
-              <a:buNone/>
-            </a:pPr>
-            <a:r>
-              <a:rPr lang="cs-CZ" sz="1200" b="0" u="none" strike="noStrike">
-                <a:solidFill>
-                  <a:srgbClr val="000000"/>
-                </a:solidFill>
-                <a:uFillTx/>
-                <a:latin typeface="Noto Sans CJK SC"/>
-              </a:rPr>
-              <a:t>‹#›</a:t>
-            </a:r>
-            <a:endParaRPr lang="en-US" sz="1200" b="0" u="none" strike="noStrike">
-              <a:solidFill>
-                <a:srgbClr val="000000"/>
-              </a:solidFill>
-              <a:uFillTx/>
-              <a:latin typeface="Noto Sans CJK SC"/>
-            </a:endParaRPr>
-          </a:p>
-        </p:txBody>
-      </p:sp>
-    </p:spTree>
-  </p:cSld>
-  <p:clrMapOvr>
-    <a:masterClrMapping/>
-  </p:clrMapOvr>
-</p:notes>
-</file>
-
-<file path=ppt/notesSlides/notesSlide14.xml><?xml version="1.0" encoding="utf-8"?>
-<p:notes xmlns:a="http://schemas.openxmlformats.org/drawingml/2006/main" xmlns:r="http://schemas.openxmlformats.org/officeDocument/2006/relationships" xmlns:p="http://schemas.openxmlformats.org/presentationml/2006/main">
-  <p:cSld>
-    <p:spTree>
-      <p:nvGrpSpPr>
-        <p:cNvPr id="1" name=""/>
-        <p:cNvGrpSpPr/>
-        <p:nvPr/>
-      </p:nvGrpSpPr>
-      <p:grpSpPr>
-        <a:xfrm>
-          <a:off x="0" y="0"/>
-          <a:ext cx="0" cy="0"/>
-          <a:chOff x="0" y="0"/>
-          <a:chExt cx="0" cy="0"/>
-        </a:xfrm>
-      </p:grpSpPr>
-      <p:sp>
-        <p:nvSpPr>
           <p:cNvPr id="437" name="PlaceHolder 1"/>
           <p:cNvSpPr>
             <a:spLocks noGrp="1"/>
@@ -3628,8 +3278,8 @@
         </p:nvSpPr>
         <p:spPr>
           <a:xfrm>
-            <a:off x="2857680" y="512640"/>
-            <a:ext cx="3428640" cy="2566800"/>
+            <a:off x="2290763" y="512763"/>
+            <a:ext cx="4562475" cy="2566987"/>
           </a:xfrm>
           <a:prstGeom prst="rect">
             <a:avLst/>
@@ -7459,7 +7109,7 @@
               </a:tabLst>
             </a:pPr>
             <a:r>
-              <a:rPr lang="zh-CN" sz="1600" b="1" u="none" strike="noStrike">
+              <a:rPr lang="zh-CN" sz="1600" b="1" u="none" strike="noStrike" dirty="0">
                 <a:solidFill>
                   <a:srgbClr val="FFFFFF"/>
                 </a:solidFill>
@@ -7470,10 +7120,10 @@
               <a:t>汇报与成果展示</a:t>
             </a:r>
             <a:br>
-              <a:rPr sz="1600"/>
+              <a:rPr sz="1600" dirty="0"/>
             </a:br>
             <a:r>
-              <a:rPr lang="zh-CN" sz="1300" b="0" u="none" strike="noStrike">
+              <a:rPr lang="zh-CN" sz="1300" b="0" u="none" strike="noStrike" dirty="0">
                 <a:solidFill>
                   <a:srgbClr val="E6E6E6">
                     <a:alpha val="80000"/>
@@ -7483,10 +7133,10 @@
                 <a:latin typeface="Noto Sans SC"/>
                 <a:ea typeface="Noto Sans SC"/>
               </a:rPr>
-              <a:t>贾耀翔，王一鑫统筹项目全流程</a:t>
-            </a:r>
-            <a:r>
-              <a:rPr lang="en-US" sz="1300" b="0" u="none" strike="noStrike">
+              <a:t>贾耀翔，王一鑫</a:t>
+            </a:r>
+            <a:r>
+              <a:rPr lang="zh-CN" altLang="en-US" sz="1300" b="0" u="none" strike="noStrike" dirty="0">
                 <a:solidFill>
                   <a:srgbClr val="E6E6E6">
                     <a:alpha val="80000"/>
@@ -7496,10 +7146,10 @@
                 <a:latin typeface="Noto Sans SC"/>
                 <a:ea typeface="Noto Sans SC"/>
               </a:rPr>
-              <a:t>PPT</a:t>
-            </a:r>
-            <a:r>
-              <a:rPr lang="zh-CN" sz="1300" b="0" u="none" strike="noStrike">
+              <a:t>，齐胜南</a:t>
+            </a:r>
+            <a:r>
+              <a:rPr lang="zh-CN" sz="1300" b="0" u="none" strike="noStrike" dirty="0">
                 <a:solidFill>
                   <a:srgbClr val="E6E6E6">
                     <a:alpha val="80000"/>
@@ -7509,10 +7159,10 @@
                 <a:latin typeface="Noto Sans SC"/>
                 <a:ea typeface="Noto Sans SC"/>
               </a:rPr>
-              <a:t>制作与视觉包装，于</a:t>
-            </a:r>
-            <a:r>
-              <a:rPr lang="en-US" sz="1300" b="0" u="none" strike="noStrike">
+              <a:t>统筹项目全流程</a:t>
+            </a:r>
+            <a:r>
+              <a:rPr lang="en-US" sz="1300" b="0" u="none" strike="noStrike" dirty="0">
                 <a:solidFill>
                   <a:srgbClr val="E6E6E6">
                     <a:alpha val="80000"/>
@@ -7522,10 +7172,10 @@
                 <a:latin typeface="Noto Sans SC"/>
                 <a:ea typeface="Noto Sans SC"/>
               </a:rPr>
-              <a:t>2026</a:t>
-            </a:r>
-            <a:r>
-              <a:rPr lang="zh-CN" sz="1300" b="0" u="none" strike="noStrike">
+              <a:t>PPT</a:t>
+            </a:r>
+            <a:r>
+              <a:rPr lang="zh-CN" sz="1300" b="0" u="none" strike="noStrike" dirty="0">
                 <a:solidFill>
                   <a:srgbClr val="E6E6E6">
                     <a:alpha val="80000"/>
@@ -7535,10 +7185,10 @@
                 <a:latin typeface="Noto Sans SC"/>
                 <a:ea typeface="Noto Sans SC"/>
               </a:rPr>
-              <a:t>年</a:t>
-            </a:r>
-            <a:r>
-              <a:rPr lang="en-US" sz="1300" b="0" u="none" strike="noStrike">
+              <a:t>制作与视觉包装，于</a:t>
+            </a:r>
+            <a:r>
+              <a:rPr lang="en-US" sz="1300" b="0" u="none" strike="noStrike" dirty="0">
                 <a:solidFill>
                   <a:srgbClr val="E6E6E6">
                     <a:alpha val="80000"/>
@@ -7548,10 +7198,10 @@
                 <a:latin typeface="Noto Sans SC"/>
                 <a:ea typeface="Noto Sans SC"/>
               </a:rPr>
-              <a:t>6</a:t>
-            </a:r>
-            <a:r>
-              <a:rPr lang="zh-CN" sz="1300" b="0" u="none" strike="noStrike">
+              <a:t>2026</a:t>
+            </a:r>
+            <a:r>
+              <a:rPr lang="zh-CN" sz="1300" b="0" u="none" strike="noStrike" dirty="0">
                 <a:solidFill>
                   <a:srgbClr val="E6E6E6">
                     <a:alpha val="80000"/>
@@ -7561,9 +7211,35 @@
                 <a:latin typeface="Noto Sans SC"/>
                 <a:ea typeface="Noto Sans SC"/>
               </a:rPr>
+              <a:t>年</a:t>
+            </a:r>
+            <a:r>
+              <a:rPr lang="en-US" sz="1300" b="0" u="none" strike="noStrike" dirty="0">
+                <a:solidFill>
+                  <a:srgbClr val="E6E6E6">
+                    <a:alpha val="80000"/>
+                  </a:srgbClr>
+                </a:solidFill>
+                <a:uFillTx/>
+                <a:latin typeface="Noto Sans SC"/>
+                <a:ea typeface="Noto Sans SC"/>
+              </a:rPr>
+              <a:t>6</a:t>
+            </a:r>
+            <a:r>
+              <a:rPr lang="zh-CN" sz="1300" b="0" u="none" strike="noStrike" dirty="0">
+                <a:solidFill>
+                  <a:srgbClr val="E6E6E6">
+                    <a:alpha val="80000"/>
+                  </a:srgbClr>
+                </a:solidFill>
+                <a:uFillTx/>
+                <a:latin typeface="Noto Sans SC"/>
+                <a:ea typeface="Noto Sans SC"/>
+              </a:rPr>
               <a:t>月完成最终成果汇报交付。</a:t>
             </a:r>
-            <a:endParaRPr lang="en-US" sz="1300" b="0" u="none" strike="noStrike">
+            <a:endParaRPr lang="en-US" sz="1300" b="0" u="none" strike="noStrike" dirty="0">
               <a:solidFill>
                 <a:srgbClr val="FFFFFF"/>
               </a:solidFill>
@@ -9549,7 +9225,7 @@
       </p:grpSpPr>
       <p:sp>
         <p:nvSpPr>
-          <p:cNvPr id="246" name="AutoShape 2"/>
+          <p:cNvPr id="294" name="AutoShape 2"/>
           <p:cNvSpPr/>
           <p:nvPr/>
         </p:nvSpPr>
@@ -9608,14 +9284,14 @@
       </p:sp>
       <p:sp>
         <p:nvSpPr>
-          <p:cNvPr id="247" name="AutoShape 3"/>
+          <p:cNvPr id="295" name="AutoShape 3"/>
           <p:cNvSpPr/>
           <p:nvPr/>
         </p:nvSpPr>
         <p:spPr>
           <a:xfrm>
             <a:off x="762120" y="507960"/>
-            <a:ext cx="10667520" cy="571320"/>
+            <a:ext cx="10667520" cy="634680"/>
           </a:xfrm>
           <a:prstGeom prst="rect">
             <a:avLst/>
@@ -9660,7 +9336,7 @@
                 <a:latin typeface="Noto Sans SC"/>
                 <a:ea typeface="Noto Sans SC"/>
               </a:rPr>
-              <a:t>开发进度与里程碑</a:t>
+              <a:t>项目亮点与难点</a:t>
             </a:r>
             <a:endParaRPr lang="en-US" sz="3200" b="0" u="none" strike="noStrike">
               <a:solidFill>
@@ -9672,212 +9348,16 @@
           </a:p>
         </p:txBody>
       </p:sp>
-      <p:cxnSp>
-        <p:nvCxnSpPr>
-          <p:cNvPr id="248" name="Connector 4"/>
-          <p:cNvCxnSpPr/>
-          <p:nvPr/>
-        </p:nvCxnSpPr>
-        <p:spPr>
-          <a:xfrm>
-            <a:off x="6095880" y="1650960"/>
-            <a:ext cx="360" cy="4445280"/>
-          </a:xfrm>
-          <a:prstGeom prst="straightConnector1">
-            <a:avLst/>
-          </a:prstGeom>
-          <a:ln w="12700">
-            <a:solidFill>
-              <a:srgbClr val="FFFFFF">
-                <a:alpha val="20000"/>
-              </a:srgbClr>
-            </a:solidFill>
-            <a:prstDash val="dash"/>
-            <a:round/>
-          </a:ln>
-        </p:spPr>
-      </p:cxnSp>
-      <p:sp>
-        <p:nvSpPr>
-          <p:cNvPr id="249" name="AutoShape 5"/>
+      <p:sp>
+        <p:nvSpPr>
+          <p:cNvPr id="296" name="AutoShape 4"/>
           <p:cNvSpPr/>
           <p:nvPr/>
         </p:nvSpPr>
         <p:spPr>
           <a:xfrm>
             <a:off x="762120" y="1650960"/>
-            <a:ext cx="5079600" cy="380520"/>
-          </a:xfrm>
-          <a:prstGeom prst="rect">
-            <a:avLst/>
-          </a:prstGeom>
-          <a:noFill/>
-          <a:ln w="12700">
-            <a:noFill/>
-          </a:ln>
-        </p:spPr>
-        <p:style>
-          <a:lnRef idx="0">
-            <a:scrgbClr r="0" g="0" b="0"/>
-          </a:lnRef>
-          <a:fillRef idx="0">
-            <a:scrgbClr r="0" g="0" b="0"/>
-          </a:fillRef>
-          <a:effectRef idx="0">
-            <a:scrgbClr r="0" g="0" b="0"/>
-          </a:effectRef>
-          <a:fontRef idx="minor"/>
-        </p:style>
-        <p:txBody>
-          <a:bodyPr lIns="0" tIns="0" rIns="0" bIns="0" anchor="ctr">
-            <a:noAutofit/>
-          </a:bodyPr>
-          <a:lstStyle/>
-          <a:p>
-            <a:pPr>
-              <a:lnSpc>
-                <a:spcPct val="125000"/>
-              </a:lnSpc>
-              <a:tabLst>
-                <a:tab pos="0" algn="l"/>
-              </a:tabLst>
-            </a:pPr>
-            <a:r>
-              <a:rPr lang="en-US" sz="2000" b="1" u="none" strike="noStrike">
-                <a:solidFill>
-                  <a:srgbClr val="2BD1FC"/>
-                </a:solidFill>
-                <a:uFillTx/>
-                <a:latin typeface="Noto Sans SC"/>
-                <a:ea typeface="Noto Sans SC"/>
-              </a:rPr>
-              <a:t>▍ </a:t>
-            </a:r>
-            <a:r>
-              <a:rPr lang="zh-CN" sz="2000" b="1" u="none" strike="noStrike">
-                <a:solidFill>
-                  <a:srgbClr val="2BD1FC"/>
-                </a:solidFill>
-                <a:uFillTx/>
-                <a:latin typeface="Noto Sans SC"/>
-                <a:ea typeface="Noto Sans SC"/>
-              </a:rPr>
-              <a:t>当前开发进度概览</a:t>
-            </a:r>
-            <a:endParaRPr lang="en-US" sz="2000" b="0" u="none" strike="noStrike">
-              <a:solidFill>
-                <a:srgbClr val="FFFFFF"/>
-              </a:solidFill>
-              <a:uFillTx/>
-              <a:latin typeface="Noto Sans CJK SC"/>
-            </a:endParaRPr>
-          </a:p>
-        </p:txBody>
-      </p:sp>
-      <p:sp>
-        <p:nvSpPr>
-          <p:cNvPr id="250" name="AutoShape 6"/>
-          <p:cNvSpPr/>
-          <p:nvPr/>
-        </p:nvSpPr>
-        <p:spPr>
-          <a:xfrm>
-            <a:off x="762120" y="2413080"/>
-            <a:ext cx="2412720" cy="304560"/>
-          </a:xfrm>
-          <a:prstGeom prst="rect">
-            <a:avLst/>
-          </a:prstGeom>
-          <a:noFill/>
-          <a:ln w="12700">
-            <a:noFill/>
-          </a:ln>
-        </p:spPr>
-        <p:style>
-          <a:lnRef idx="0">
-            <a:scrgbClr r="0" g="0" b="0"/>
-          </a:lnRef>
-          <a:fillRef idx="0">
-            <a:scrgbClr r="0" g="0" b="0"/>
-          </a:fillRef>
-          <a:effectRef idx="0">
-            <a:scrgbClr r="0" g="0" b="0"/>
-          </a:effectRef>
-          <a:fontRef idx="minor"/>
-        </p:style>
-        <p:txBody>
-          <a:bodyPr lIns="0" tIns="0" rIns="0" bIns="0" anchor="ctr">
-            <a:noAutofit/>
-          </a:bodyPr>
-          <a:lstStyle/>
-          <a:p>
-            <a:pPr>
-              <a:lnSpc>
-                <a:spcPct val="125000"/>
-              </a:lnSpc>
-              <a:tabLst>
-                <a:tab pos="0" algn="l"/>
-              </a:tabLst>
-            </a:pPr>
-            <a:r>
-              <a:rPr lang="zh-CN" sz="1400" b="0" u="none" strike="noStrike">
-                <a:solidFill>
-                  <a:srgbClr val="FFFFFF">
-                    <a:alpha val="90000"/>
-                  </a:srgbClr>
-                </a:solidFill>
-                <a:uFillTx/>
-                <a:latin typeface="Noto Sans SC"/>
-                <a:ea typeface="Noto Sans SC"/>
-              </a:rPr>
-              <a:t>需求分析 </a:t>
-            </a:r>
-            <a:r>
-              <a:rPr lang="en-US" sz="1400" b="0" u="none" strike="noStrike">
-                <a:solidFill>
-                  <a:srgbClr val="FFFFFF">
-                    <a:alpha val="90000"/>
-                  </a:srgbClr>
-                </a:solidFill>
-                <a:uFillTx/>
-                <a:latin typeface="Noto Sans SC"/>
-                <a:ea typeface="Noto Sans SC"/>
-              </a:rPr>
-              <a:t>&amp; </a:t>
-            </a:r>
-            <a:r>
-              <a:rPr lang="zh-CN" sz="1400" b="0" u="none" strike="noStrike">
-                <a:solidFill>
-                  <a:srgbClr val="FFFFFF">
-                    <a:alpha val="90000"/>
-                  </a:srgbClr>
-                </a:solidFill>
-                <a:uFillTx/>
-                <a:latin typeface="Noto Sans SC"/>
-                <a:ea typeface="Noto Sans SC"/>
-              </a:rPr>
-              <a:t>技术选型</a:t>
-            </a:r>
-            <a:endParaRPr lang="en-US" sz="1400" b="0" u="none" strike="noStrike">
-              <a:solidFill>
-                <a:srgbClr val="FFFFFF"/>
-              </a:solidFill>
-              <a:uFillTx/>
-              <a:latin typeface="Noto Sans CJK SC"/>
-            </a:endParaRPr>
-          </a:p>
-        </p:txBody>
-      </p:sp>
-      <p:sp>
-        <p:nvSpPr>
-          <p:cNvPr id="251" name="AutoShape 7"/>
-          <p:cNvSpPr/>
-          <p:nvPr/>
-        </p:nvSpPr>
-        <p:spPr>
-          <a:xfrm>
-            <a:off x="762120" y="2793960"/>
-            <a:ext cx="2412720" cy="75960"/>
+            <a:ext cx="5206680" cy="1460160"/>
           </a:xfrm>
           <a:prstGeom prst="roundRect">
             <a:avLst>
@@ -9885,1151 +9365,14 @@
             </a:avLst>
           </a:prstGeom>
           <a:solidFill>
-            <a:srgbClr val="FFFFFF">
-              <a:alpha val="15000"/>
-            </a:srgbClr>
-          </a:solidFill>
-          <a:ln w="25400">
-            <a:noFill/>
-          </a:ln>
-        </p:spPr>
-        <p:style>
-          <a:lnRef idx="0">
-            <a:scrgbClr r="0" g="0" b="0"/>
-          </a:lnRef>
-          <a:fillRef idx="0">
-            <a:scrgbClr r="0" g="0" b="0"/>
-          </a:fillRef>
-          <a:effectRef idx="0">
-            <a:scrgbClr r="0" g="0" b="0"/>
-          </a:effectRef>
-          <a:fontRef idx="minor"/>
-        </p:style>
-        <p:txBody>
-          <a:bodyPr lIns="63360" tIns="38160" rIns="63360" bIns="38160" anchor="ctr">
-            <a:noAutofit/>
-          </a:bodyPr>
-          <a:lstStyle/>
-          <a:p>
-            <a:pPr algn="ctr">
-              <a:lnSpc>
-                <a:spcPct val="100000"/>
-              </a:lnSpc>
-            </a:pPr>
-            <a:endParaRPr lang="en-US" sz="1400" b="0" u="none" strike="noStrike">
-              <a:solidFill>
-                <a:srgbClr val="000000"/>
-              </a:solidFill>
-              <a:uFillTx/>
-              <a:latin typeface="Arial"/>
-              <a:ea typeface="Arial"/>
-            </a:endParaRPr>
-          </a:p>
-        </p:txBody>
-      </p:sp>
-      <p:sp>
-        <p:nvSpPr>
-          <p:cNvPr id="252" name="AutoShape 8"/>
-          <p:cNvSpPr/>
-          <p:nvPr/>
-        </p:nvSpPr>
-        <p:spPr>
-          <a:xfrm>
-            <a:off x="762120" y="2793960"/>
-            <a:ext cx="2412720" cy="75960"/>
-          </a:xfrm>
-          <a:prstGeom prst="roundRect">
-            <a:avLst>
-              <a:gd name="adj" fmla="val 0"/>
-            </a:avLst>
-          </a:prstGeom>
-          <a:solidFill>
-            <a:srgbClr val="2BD1FC"/>
-          </a:solidFill>
-          <a:ln w="25400">
-            <a:noFill/>
-          </a:ln>
-        </p:spPr>
-        <p:style>
-          <a:lnRef idx="0">
-            <a:scrgbClr r="0" g="0" b="0"/>
-          </a:lnRef>
-          <a:fillRef idx="0">
-            <a:scrgbClr r="0" g="0" b="0"/>
-          </a:fillRef>
-          <a:effectRef idx="0">
-            <a:scrgbClr r="0" g="0" b="0"/>
-          </a:effectRef>
-          <a:fontRef idx="minor"/>
-        </p:style>
-        <p:txBody>
-          <a:bodyPr lIns="63360" tIns="38160" rIns="63360" bIns="38160" anchor="ctr">
-            <a:noAutofit/>
-          </a:bodyPr>
-          <a:lstStyle/>
-          <a:p>
-            <a:pPr algn="ctr">
-              <a:lnSpc>
-                <a:spcPct val="100000"/>
-              </a:lnSpc>
-            </a:pPr>
-            <a:endParaRPr lang="en-US" sz="1400" b="0" u="none" strike="noStrike">
-              <a:solidFill>
-                <a:srgbClr val="000000"/>
-              </a:solidFill>
-              <a:uFillTx/>
-              <a:latin typeface="Arial"/>
-              <a:ea typeface="Arial"/>
-            </a:endParaRPr>
-          </a:p>
-        </p:txBody>
-      </p:sp>
-      <p:sp>
-        <p:nvSpPr>
-          <p:cNvPr id="253" name="AutoShape 9"/>
-          <p:cNvSpPr/>
-          <p:nvPr/>
-        </p:nvSpPr>
-        <p:spPr>
-          <a:xfrm>
-            <a:off x="762120" y="2984400"/>
-            <a:ext cx="2412720" cy="253800"/>
-          </a:xfrm>
-          <a:prstGeom prst="rect">
-            <a:avLst/>
-          </a:prstGeom>
-          <a:noFill/>
-          <a:ln w="12700">
-            <a:noFill/>
-          </a:ln>
-        </p:spPr>
-        <p:style>
-          <a:lnRef idx="0">
-            <a:scrgbClr r="0" g="0" b="0"/>
-          </a:lnRef>
-          <a:fillRef idx="0">
-            <a:scrgbClr r="0" g="0" b="0"/>
-          </a:fillRef>
-          <a:effectRef idx="0">
-            <a:scrgbClr r="0" g="0" b="0"/>
-          </a:effectRef>
-          <a:fontRef idx="minor"/>
-        </p:style>
-        <p:txBody>
-          <a:bodyPr lIns="0" tIns="0" rIns="0" bIns="0" anchor="ctr">
-            <a:noAutofit/>
-          </a:bodyPr>
-          <a:lstStyle/>
-          <a:p>
-            <a:pPr>
-              <a:lnSpc>
-                <a:spcPct val="125000"/>
-              </a:lnSpc>
-              <a:tabLst>
-                <a:tab pos="0" algn="l"/>
-              </a:tabLst>
-            </a:pPr>
-            <a:r>
-              <a:rPr lang="zh-CN" sz="1200" b="0" u="none" strike="noStrike">
-                <a:solidFill>
-                  <a:srgbClr val="FFFFFF">
-                    <a:alpha val="60000"/>
-                  </a:srgbClr>
-                </a:solidFill>
-                <a:uFillTx/>
-                <a:latin typeface="Noto Sans SC"/>
-                <a:ea typeface="Noto Sans SC"/>
-              </a:rPr>
-              <a:t>基础架构已完善，技术栈选型完成 </a:t>
-            </a:r>
-            <a:r>
-              <a:rPr lang="en-US" sz="1200" b="0" u="none" strike="noStrike">
-                <a:solidFill>
-                  <a:srgbClr val="FFFFFF">
-                    <a:alpha val="60000"/>
-                  </a:srgbClr>
-                </a:solidFill>
-                <a:uFillTx/>
-                <a:latin typeface="Noto Sans SC"/>
-                <a:ea typeface="Noto Sans SC"/>
-              </a:rPr>
-              <a:t>(100%)</a:t>
-            </a:r>
-            <a:endParaRPr lang="en-US" sz="1200" b="0" u="none" strike="noStrike">
-              <a:solidFill>
-                <a:srgbClr val="FFFFFF"/>
-              </a:solidFill>
-              <a:uFillTx/>
-              <a:latin typeface="Noto Sans CJK SC"/>
-            </a:endParaRPr>
-          </a:p>
-        </p:txBody>
-      </p:sp>
-      <p:sp>
-        <p:nvSpPr>
-          <p:cNvPr id="254" name="AutoShape 10"/>
-          <p:cNvSpPr/>
-          <p:nvPr/>
-        </p:nvSpPr>
-        <p:spPr>
-          <a:xfrm>
-            <a:off x="762120" y="3809880"/>
-            <a:ext cx="2412720" cy="304560"/>
-          </a:xfrm>
-          <a:prstGeom prst="rect">
-            <a:avLst/>
-          </a:prstGeom>
-          <a:noFill/>
-          <a:ln w="12700">
-            <a:noFill/>
-          </a:ln>
-        </p:spPr>
-        <p:style>
-          <a:lnRef idx="0">
-            <a:scrgbClr r="0" g="0" b="0"/>
-          </a:lnRef>
-          <a:fillRef idx="0">
-            <a:scrgbClr r="0" g="0" b="0"/>
-          </a:fillRef>
-          <a:effectRef idx="0">
-            <a:scrgbClr r="0" g="0" b="0"/>
-          </a:effectRef>
-          <a:fontRef idx="minor"/>
-        </p:style>
-        <p:txBody>
-          <a:bodyPr lIns="0" tIns="0" rIns="0" bIns="0" anchor="ctr">
-            <a:noAutofit/>
-          </a:bodyPr>
-          <a:lstStyle/>
-          <a:p>
-            <a:pPr>
-              <a:lnSpc>
-                <a:spcPct val="125000"/>
-              </a:lnSpc>
-              <a:tabLst>
-                <a:tab pos="0" algn="l"/>
-              </a:tabLst>
-            </a:pPr>
-            <a:r>
-              <a:rPr lang="zh-CN" sz="1400" b="0" u="none" strike="noStrike">
-                <a:solidFill>
-                  <a:srgbClr val="FFFFFF">
-                    <a:alpha val="90000"/>
-                  </a:srgbClr>
-                </a:solidFill>
-                <a:uFillTx/>
-                <a:latin typeface="Noto Sans SC"/>
-                <a:ea typeface="Noto Sans SC"/>
-              </a:rPr>
-              <a:t>分工确认 </a:t>
-            </a:r>
-            <a:r>
-              <a:rPr lang="en-US" sz="1400" b="0" u="none" strike="noStrike">
-                <a:solidFill>
-                  <a:srgbClr val="FFFFFF">
-                    <a:alpha val="90000"/>
-                  </a:srgbClr>
-                </a:solidFill>
-                <a:uFillTx/>
-                <a:latin typeface="Noto Sans SC"/>
-                <a:ea typeface="Noto Sans SC"/>
-              </a:rPr>
-              <a:t>&amp; </a:t>
-            </a:r>
-            <a:r>
-              <a:rPr lang="zh-CN" sz="1400" b="0" u="none" strike="noStrike">
-                <a:solidFill>
-                  <a:srgbClr val="FFFFFF">
-                    <a:alpha val="90000"/>
-                  </a:srgbClr>
-                </a:solidFill>
-                <a:uFillTx/>
-                <a:latin typeface="Noto Sans SC"/>
-                <a:ea typeface="Noto Sans SC"/>
-              </a:rPr>
-              <a:t>界面开发</a:t>
-            </a:r>
-            <a:endParaRPr lang="en-US" sz="1400" b="0" u="none" strike="noStrike">
-              <a:solidFill>
-                <a:srgbClr val="FFFFFF"/>
-              </a:solidFill>
-              <a:uFillTx/>
-              <a:latin typeface="Noto Sans CJK SC"/>
-            </a:endParaRPr>
-          </a:p>
-        </p:txBody>
-      </p:sp>
-      <p:sp>
-        <p:nvSpPr>
-          <p:cNvPr id="255" name="AutoShape 11"/>
-          <p:cNvSpPr/>
-          <p:nvPr/>
-        </p:nvSpPr>
-        <p:spPr>
-          <a:xfrm>
-            <a:off x="762120" y="4191120"/>
-            <a:ext cx="2412720" cy="75960"/>
-          </a:xfrm>
-          <a:prstGeom prst="roundRect">
-            <a:avLst>
-              <a:gd name="adj" fmla="val 0"/>
-            </a:avLst>
-          </a:prstGeom>
-          <a:solidFill>
-            <a:srgbClr val="FFFFFF">
-              <a:alpha val="15000"/>
-            </a:srgbClr>
-          </a:solidFill>
-          <a:ln w="25400">
-            <a:noFill/>
-          </a:ln>
-        </p:spPr>
-        <p:style>
-          <a:lnRef idx="0">
-            <a:scrgbClr r="0" g="0" b="0"/>
-          </a:lnRef>
-          <a:fillRef idx="0">
-            <a:scrgbClr r="0" g="0" b="0"/>
-          </a:fillRef>
-          <a:effectRef idx="0">
-            <a:scrgbClr r="0" g="0" b="0"/>
-          </a:effectRef>
-          <a:fontRef idx="minor"/>
-        </p:style>
-        <p:txBody>
-          <a:bodyPr lIns="63360" tIns="38160" rIns="63360" bIns="38160" anchor="ctr">
-            <a:noAutofit/>
-          </a:bodyPr>
-          <a:lstStyle/>
-          <a:p>
-            <a:pPr algn="ctr">
-              <a:lnSpc>
-                <a:spcPct val="100000"/>
-              </a:lnSpc>
-            </a:pPr>
-            <a:endParaRPr lang="en-US" sz="1400" b="0" u="none" strike="noStrike">
-              <a:solidFill>
-                <a:srgbClr val="000000"/>
-              </a:solidFill>
-              <a:uFillTx/>
-              <a:latin typeface="Arial"/>
-              <a:ea typeface="Arial"/>
-            </a:endParaRPr>
-          </a:p>
-        </p:txBody>
-      </p:sp>
-      <p:sp>
-        <p:nvSpPr>
-          <p:cNvPr id="256" name="AutoShape 12"/>
-          <p:cNvSpPr/>
-          <p:nvPr/>
-        </p:nvSpPr>
-        <p:spPr>
-          <a:xfrm>
-            <a:off x="762120" y="4191120"/>
-            <a:ext cx="2412720" cy="75960"/>
-          </a:xfrm>
-          <a:prstGeom prst="roundRect">
-            <a:avLst>
-              <a:gd name="adj" fmla="val 0"/>
-            </a:avLst>
-          </a:prstGeom>
-          <a:solidFill>
-            <a:srgbClr val="2BD1FC"/>
-          </a:solidFill>
-          <a:ln w="25400">
-            <a:noFill/>
-          </a:ln>
-        </p:spPr>
-        <p:style>
-          <a:lnRef idx="0">
-            <a:scrgbClr r="0" g="0" b="0"/>
-          </a:lnRef>
-          <a:fillRef idx="0">
-            <a:scrgbClr r="0" g="0" b="0"/>
-          </a:fillRef>
-          <a:effectRef idx="0">
-            <a:scrgbClr r="0" g="0" b="0"/>
-          </a:effectRef>
-          <a:fontRef idx="minor"/>
-        </p:style>
-        <p:txBody>
-          <a:bodyPr lIns="63360" tIns="38160" rIns="63360" bIns="38160" anchor="ctr">
-            <a:noAutofit/>
-          </a:bodyPr>
-          <a:lstStyle/>
-          <a:p>
-            <a:pPr algn="ctr">
-              <a:lnSpc>
-                <a:spcPct val="100000"/>
-              </a:lnSpc>
-            </a:pPr>
-            <a:endParaRPr lang="en-US" sz="1400" b="0" u="none" strike="noStrike">
-              <a:solidFill>
-                <a:srgbClr val="000000"/>
-              </a:solidFill>
-              <a:uFillTx/>
-              <a:latin typeface="Arial"/>
-              <a:ea typeface="Arial"/>
-            </a:endParaRPr>
-          </a:p>
-        </p:txBody>
-      </p:sp>
-      <p:sp>
-        <p:nvSpPr>
-          <p:cNvPr id="257" name="AutoShape 13"/>
-          <p:cNvSpPr/>
-          <p:nvPr/>
-        </p:nvSpPr>
-        <p:spPr>
-          <a:xfrm>
-            <a:off x="762120" y="4381560"/>
-            <a:ext cx="2412720" cy="571320"/>
-          </a:xfrm>
-          <a:prstGeom prst="rect">
-            <a:avLst/>
-          </a:prstGeom>
-          <a:noFill/>
-          <a:ln w="12700">
-            <a:noFill/>
-          </a:ln>
-        </p:spPr>
-        <p:style>
-          <a:lnRef idx="0">
-            <a:scrgbClr r="0" g="0" b="0"/>
-          </a:lnRef>
-          <a:fillRef idx="0">
-            <a:scrgbClr r="0" g="0" b="0"/>
-          </a:fillRef>
-          <a:effectRef idx="0">
-            <a:scrgbClr r="0" g="0" b="0"/>
-          </a:effectRef>
-          <a:fontRef idx="minor"/>
-        </p:style>
-        <p:txBody>
-          <a:bodyPr lIns="0" tIns="0" rIns="0" bIns="0" anchor="ctr">
-            <a:noAutofit/>
-          </a:bodyPr>
-          <a:lstStyle/>
-          <a:p>
-            <a:pPr>
-              <a:lnSpc>
-                <a:spcPct val="100000"/>
-              </a:lnSpc>
-              <a:tabLst>
-                <a:tab pos="0" algn="l"/>
-              </a:tabLst>
-            </a:pPr>
-            <a:r>
-              <a:rPr lang="zh-CN" sz="1200" b="0" u="none" strike="noStrike">
-                <a:solidFill>
-                  <a:srgbClr val="FFFFFF">
-                    <a:alpha val="60000"/>
-                  </a:srgbClr>
-                </a:solidFill>
-                <a:uFillTx/>
-                <a:latin typeface="Noto Sans SC"/>
-                <a:ea typeface="Noto Sans SC"/>
-              </a:rPr>
-              <a:t>界面框架搭建完毕，人员职责明确，由李玥峰主导设计实现 </a:t>
-            </a:r>
-            <a:r>
-              <a:rPr lang="en-US" sz="1200" b="0" u="none" strike="noStrike">
-                <a:solidFill>
-                  <a:srgbClr val="FFFFFF">
-                    <a:alpha val="60000"/>
-                  </a:srgbClr>
-                </a:solidFill>
-                <a:uFillTx/>
-                <a:latin typeface="Noto Sans SC"/>
-                <a:ea typeface="Noto Sans SC"/>
-              </a:rPr>
-              <a:t>(100%)</a:t>
-            </a:r>
-            <a:endParaRPr lang="en-US" sz="1200" b="0" u="none" strike="noStrike">
-              <a:solidFill>
-                <a:srgbClr val="FFFFFF"/>
-              </a:solidFill>
-              <a:uFillTx/>
-              <a:latin typeface="Noto Sans CJK SC"/>
-            </a:endParaRPr>
-          </a:p>
-        </p:txBody>
-      </p:sp>
-      <p:sp>
-        <p:nvSpPr>
-          <p:cNvPr id="258" name="AutoShape 14"/>
-          <p:cNvSpPr/>
-          <p:nvPr/>
-        </p:nvSpPr>
-        <p:spPr>
-          <a:xfrm>
-            <a:off x="3429000" y="2413080"/>
-            <a:ext cx="2412720" cy="304560"/>
-          </a:xfrm>
-          <a:prstGeom prst="rect">
-            <a:avLst/>
-          </a:prstGeom>
-          <a:noFill/>
-          <a:ln w="12700">
-            <a:noFill/>
-          </a:ln>
-        </p:spPr>
-        <p:style>
-          <a:lnRef idx="0">
-            <a:scrgbClr r="0" g="0" b="0"/>
-          </a:lnRef>
-          <a:fillRef idx="0">
-            <a:scrgbClr r="0" g="0" b="0"/>
-          </a:fillRef>
-          <a:effectRef idx="0">
-            <a:scrgbClr r="0" g="0" b="0"/>
-          </a:effectRef>
-          <a:fontRef idx="minor"/>
-        </p:style>
-        <p:txBody>
-          <a:bodyPr lIns="0" tIns="0" rIns="0" bIns="0" anchor="ctr">
-            <a:noAutofit/>
-          </a:bodyPr>
-          <a:lstStyle/>
-          <a:p>
-            <a:pPr>
-              <a:lnSpc>
-                <a:spcPct val="125000"/>
-              </a:lnSpc>
-              <a:tabLst>
-                <a:tab pos="0" algn="l"/>
-              </a:tabLst>
-            </a:pPr>
-            <a:r>
-              <a:rPr lang="zh-CN" sz="1400" b="0" u="none" strike="noStrike">
-                <a:solidFill>
-                  <a:srgbClr val="FFFFFF">
-                    <a:alpha val="90000"/>
-                  </a:srgbClr>
-                </a:solidFill>
-                <a:uFillTx/>
-                <a:latin typeface="Noto Sans SC"/>
-                <a:ea typeface="Noto Sans SC"/>
-              </a:rPr>
-              <a:t>核心游戏开发</a:t>
-            </a:r>
-            <a:endParaRPr lang="en-US" sz="1400" b="0" u="none" strike="noStrike">
-              <a:solidFill>
-                <a:srgbClr val="FFFFFF"/>
-              </a:solidFill>
-              <a:uFillTx/>
-              <a:latin typeface="Noto Sans CJK SC"/>
-            </a:endParaRPr>
-          </a:p>
-        </p:txBody>
-      </p:sp>
-      <p:sp>
-        <p:nvSpPr>
-          <p:cNvPr id="259" name="AutoShape 15"/>
-          <p:cNvSpPr/>
-          <p:nvPr/>
-        </p:nvSpPr>
-        <p:spPr>
-          <a:xfrm>
-            <a:off x="3429000" y="2793960"/>
-            <a:ext cx="2412720" cy="75960"/>
-          </a:xfrm>
-          <a:prstGeom prst="roundRect">
-            <a:avLst>
-              <a:gd name="adj" fmla="val 0"/>
-            </a:avLst>
-          </a:prstGeom>
-          <a:solidFill>
-            <a:srgbClr val="FFFFFF">
-              <a:alpha val="15000"/>
-            </a:srgbClr>
-          </a:solidFill>
-          <a:ln w="25400">
-            <a:noFill/>
-          </a:ln>
-        </p:spPr>
-        <p:style>
-          <a:lnRef idx="0">
-            <a:scrgbClr r="0" g="0" b="0"/>
-          </a:lnRef>
-          <a:fillRef idx="0">
-            <a:scrgbClr r="0" g="0" b="0"/>
-          </a:fillRef>
-          <a:effectRef idx="0">
-            <a:scrgbClr r="0" g="0" b="0"/>
-          </a:effectRef>
-          <a:fontRef idx="minor"/>
-        </p:style>
-        <p:txBody>
-          <a:bodyPr lIns="63360" tIns="38160" rIns="63360" bIns="38160" anchor="ctr">
-            <a:noAutofit/>
-          </a:bodyPr>
-          <a:lstStyle/>
-          <a:p>
-            <a:pPr algn="ctr">
-              <a:lnSpc>
-                <a:spcPct val="100000"/>
-              </a:lnSpc>
-            </a:pPr>
-            <a:endParaRPr lang="en-US" sz="1400" b="0" u="none" strike="noStrike">
-              <a:solidFill>
-                <a:srgbClr val="000000"/>
-              </a:solidFill>
-              <a:uFillTx/>
-              <a:latin typeface="Arial"/>
-              <a:ea typeface="Arial"/>
-            </a:endParaRPr>
-          </a:p>
-        </p:txBody>
-      </p:sp>
-      <p:sp>
-        <p:nvSpPr>
-          <p:cNvPr id="260" name="AutoShape 16"/>
-          <p:cNvSpPr/>
-          <p:nvPr/>
-        </p:nvSpPr>
-        <p:spPr>
-          <a:xfrm>
-            <a:off x="3429000" y="2793960"/>
-            <a:ext cx="2412720" cy="75960"/>
-          </a:xfrm>
-          <a:prstGeom prst="roundRect">
-            <a:avLst>
-              <a:gd name="adj" fmla="val 0"/>
-            </a:avLst>
-          </a:prstGeom>
-          <a:solidFill>
-            <a:srgbClr val="2BD1FC"/>
-          </a:solidFill>
-          <a:ln w="25400">
-            <a:noFill/>
-          </a:ln>
-        </p:spPr>
-        <p:style>
-          <a:lnRef idx="0">
-            <a:scrgbClr r="0" g="0" b="0"/>
-          </a:lnRef>
-          <a:fillRef idx="0">
-            <a:scrgbClr r="0" g="0" b="0"/>
-          </a:fillRef>
-          <a:effectRef idx="0">
-            <a:scrgbClr r="0" g="0" b="0"/>
-          </a:effectRef>
-          <a:fontRef idx="minor"/>
-        </p:style>
-        <p:txBody>
-          <a:bodyPr lIns="63360" tIns="38160" rIns="63360" bIns="38160" anchor="ctr">
-            <a:noAutofit/>
-          </a:bodyPr>
-          <a:lstStyle/>
-          <a:p>
-            <a:pPr algn="ctr">
-              <a:lnSpc>
-                <a:spcPct val="100000"/>
-              </a:lnSpc>
-            </a:pPr>
-            <a:endParaRPr lang="en-US" sz="1400" b="0" u="none" strike="noStrike">
-              <a:solidFill>
-                <a:srgbClr val="000000"/>
-              </a:solidFill>
-              <a:uFillTx/>
-              <a:latin typeface="Arial"/>
-              <a:ea typeface="Arial"/>
-            </a:endParaRPr>
-          </a:p>
-        </p:txBody>
-      </p:sp>
-      <p:sp>
-        <p:nvSpPr>
-          <p:cNvPr id="261" name="AutoShape 17"/>
-          <p:cNvSpPr/>
-          <p:nvPr/>
-        </p:nvSpPr>
-        <p:spPr>
-          <a:xfrm>
-            <a:off x="3429000" y="2984400"/>
-            <a:ext cx="2412720" cy="571320"/>
-          </a:xfrm>
-          <a:prstGeom prst="rect">
-            <a:avLst/>
-          </a:prstGeom>
-          <a:noFill/>
-          <a:ln w="12700">
-            <a:noFill/>
-          </a:ln>
-        </p:spPr>
-        <p:style>
-          <a:lnRef idx="0">
-            <a:scrgbClr r="0" g="0" b="0"/>
-          </a:lnRef>
-          <a:fillRef idx="0">
-            <a:scrgbClr r="0" g="0" b="0"/>
-          </a:fillRef>
-          <a:effectRef idx="0">
-            <a:scrgbClr r="0" g="0" b="0"/>
-          </a:effectRef>
-          <a:fontRef idx="minor"/>
-        </p:style>
-        <p:txBody>
-          <a:bodyPr lIns="0" tIns="0" rIns="0" bIns="0" anchor="ctr">
-            <a:noAutofit/>
-          </a:bodyPr>
-          <a:lstStyle/>
-          <a:p>
-            <a:pPr>
-              <a:lnSpc>
-                <a:spcPct val="100000"/>
-              </a:lnSpc>
-              <a:tabLst>
-                <a:tab pos="0" algn="l"/>
-              </a:tabLst>
-            </a:pPr>
-            <a:r>
-              <a:rPr lang="zh-CN" sz="1200" b="0" u="none" strike="noStrike">
-                <a:solidFill>
-                  <a:srgbClr val="FFFFFF">
-                    <a:alpha val="60000"/>
-                  </a:srgbClr>
-                </a:solidFill>
-                <a:uFillTx/>
-                <a:latin typeface="Noto Sans SC"/>
-                <a:ea typeface="Noto Sans SC"/>
-              </a:rPr>
-              <a:t>李少华</a:t>
-            </a:r>
-            <a:r>
-              <a:rPr lang="en-US" sz="1200" b="0" u="none" strike="noStrike">
-                <a:solidFill>
-                  <a:srgbClr val="FFFFFF">
-                    <a:alpha val="60000"/>
-                  </a:srgbClr>
-                </a:solidFill>
-                <a:uFillTx/>
-                <a:latin typeface="Noto Sans SC"/>
-                <a:ea typeface="Noto Sans SC"/>
-              </a:rPr>
-              <a:t>(5</a:t>
-            </a:r>
-            <a:r>
-              <a:rPr lang="zh-CN" sz="1200" b="0" u="none" strike="noStrike">
-                <a:solidFill>
-                  <a:srgbClr val="FFFFFF">
-                    <a:alpha val="60000"/>
-                  </a:srgbClr>
-                </a:solidFill>
-                <a:uFillTx/>
-                <a:latin typeface="Noto Sans SC"/>
-                <a:ea typeface="Noto Sans SC"/>
-              </a:rPr>
-              <a:t>款</a:t>
-            </a:r>
-            <a:r>
-              <a:rPr lang="en-US" sz="1200" b="0" u="none" strike="noStrike">
-                <a:solidFill>
-                  <a:srgbClr val="FFFFFF">
-                    <a:alpha val="60000"/>
-                  </a:srgbClr>
-                </a:solidFill>
-                <a:uFillTx/>
-                <a:latin typeface="Noto Sans SC"/>
-                <a:ea typeface="Noto Sans SC"/>
-              </a:rPr>
-              <a:t>)+</a:t>
-            </a:r>
-            <a:r>
-              <a:rPr lang="zh-CN" sz="1200" b="0" u="none" strike="noStrike">
-                <a:solidFill>
-                  <a:srgbClr val="FFFFFF">
-                    <a:alpha val="60000"/>
-                  </a:srgbClr>
-                </a:solidFill>
-                <a:uFillTx/>
-                <a:latin typeface="Noto Sans SC"/>
-                <a:ea typeface="Noto Sans SC"/>
-              </a:rPr>
-              <a:t>李振豪</a:t>
-            </a:r>
-            <a:r>
-              <a:rPr lang="en-US" sz="1200" b="0" u="none" strike="noStrike">
-                <a:solidFill>
-                  <a:srgbClr val="FFFFFF">
-                    <a:alpha val="60000"/>
-                  </a:srgbClr>
-                </a:solidFill>
-                <a:uFillTx/>
-                <a:latin typeface="Noto Sans SC"/>
-                <a:ea typeface="Noto Sans SC"/>
-              </a:rPr>
-              <a:t>(2</a:t>
-            </a:r>
-            <a:r>
-              <a:rPr lang="zh-CN" sz="1200" b="0" u="none" strike="noStrike">
-                <a:solidFill>
-                  <a:srgbClr val="FFFFFF">
-                    <a:alpha val="60000"/>
-                  </a:srgbClr>
-                </a:solidFill>
-                <a:uFillTx/>
-                <a:latin typeface="Noto Sans SC"/>
-                <a:ea typeface="Noto Sans SC"/>
-              </a:rPr>
-              <a:t>款</a:t>
-            </a:r>
-            <a:r>
-              <a:rPr lang="en-US" sz="1200" b="0" u="none" strike="noStrike">
-                <a:solidFill>
-                  <a:srgbClr val="FFFFFF">
-                    <a:alpha val="60000"/>
-                  </a:srgbClr>
-                </a:solidFill>
-                <a:uFillTx/>
-                <a:latin typeface="Noto Sans SC"/>
-                <a:ea typeface="Noto Sans SC"/>
-              </a:rPr>
-              <a:t>)</a:t>
-            </a:r>
-            <a:r>
-              <a:rPr lang="zh-CN" sz="1200" b="0" u="none" strike="noStrike">
-                <a:solidFill>
-                  <a:srgbClr val="FFFFFF">
-                    <a:alpha val="60000"/>
-                  </a:srgbClr>
-                </a:solidFill>
-                <a:uFillTx/>
-                <a:latin typeface="Noto Sans SC"/>
-                <a:ea typeface="Noto Sans SC"/>
-              </a:rPr>
-              <a:t>完成全部游戏逻辑编写，功能验收通过 </a:t>
-            </a:r>
-            <a:r>
-              <a:rPr lang="en-US" sz="1200" b="0" u="none" strike="noStrike">
-                <a:solidFill>
-                  <a:srgbClr val="FFFFFF">
-                    <a:alpha val="60000"/>
-                  </a:srgbClr>
-                </a:solidFill>
-                <a:uFillTx/>
-                <a:latin typeface="Noto Sans SC"/>
-                <a:ea typeface="Noto Sans SC"/>
-              </a:rPr>
-              <a:t>(100%)</a:t>
-            </a:r>
-            <a:endParaRPr lang="en-US" sz="1200" b="0" u="none" strike="noStrike">
-              <a:solidFill>
-                <a:srgbClr val="FFFFFF"/>
-              </a:solidFill>
-              <a:uFillTx/>
-              <a:latin typeface="Noto Sans CJK SC"/>
-            </a:endParaRPr>
-          </a:p>
-        </p:txBody>
-      </p:sp>
-      <p:sp>
-        <p:nvSpPr>
-          <p:cNvPr id="262" name="AutoShape 18"/>
-          <p:cNvSpPr/>
-          <p:nvPr/>
-        </p:nvSpPr>
-        <p:spPr>
-          <a:xfrm>
-            <a:off x="3429000" y="3809880"/>
-            <a:ext cx="2412720" cy="304560"/>
-          </a:xfrm>
-          <a:prstGeom prst="rect">
-            <a:avLst/>
-          </a:prstGeom>
-          <a:noFill/>
-          <a:ln w="12700">
-            <a:noFill/>
-          </a:ln>
-        </p:spPr>
-        <p:style>
-          <a:lnRef idx="0">
-            <a:scrgbClr r="0" g="0" b="0"/>
-          </a:lnRef>
-          <a:fillRef idx="0">
-            <a:scrgbClr r="0" g="0" b="0"/>
-          </a:fillRef>
-          <a:effectRef idx="0">
-            <a:scrgbClr r="0" g="0" b="0"/>
-          </a:effectRef>
-          <a:fontRef idx="minor"/>
-        </p:style>
-        <p:txBody>
-          <a:bodyPr lIns="0" tIns="0" rIns="0" bIns="0" anchor="ctr">
-            <a:noAutofit/>
-          </a:bodyPr>
-          <a:lstStyle/>
-          <a:p>
-            <a:pPr>
-              <a:lnSpc>
-                <a:spcPct val="125000"/>
-              </a:lnSpc>
-              <a:tabLst>
-                <a:tab pos="0" algn="l"/>
-              </a:tabLst>
-            </a:pPr>
-            <a:r>
-              <a:rPr lang="zh-CN" sz="1400" b="0" u="none" strike="noStrike">
-                <a:solidFill>
-                  <a:srgbClr val="FFFFFF">
-                    <a:alpha val="90000"/>
-                  </a:srgbClr>
-                </a:solidFill>
-                <a:uFillTx/>
-                <a:latin typeface="Noto Sans SC"/>
-                <a:ea typeface="Noto Sans SC"/>
-              </a:rPr>
-              <a:t>项目代码整合</a:t>
-            </a:r>
-            <a:endParaRPr lang="en-US" sz="1400" b="0" u="none" strike="noStrike">
-              <a:solidFill>
-                <a:srgbClr val="FFFFFF"/>
-              </a:solidFill>
-              <a:uFillTx/>
-              <a:latin typeface="Noto Sans CJK SC"/>
-            </a:endParaRPr>
-          </a:p>
-        </p:txBody>
-      </p:sp>
-      <p:sp>
-        <p:nvSpPr>
-          <p:cNvPr id="263" name="AutoShape 19"/>
-          <p:cNvSpPr/>
-          <p:nvPr/>
-        </p:nvSpPr>
-        <p:spPr>
-          <a:xfrm>
-            <a:off x="3429000" y="4191120"/>
-            <a:ext cx="2412720" cy="75960"/>
-          </a:xfrm>
-          <a:prstGeom prst="roundRect">
-            <a:avLst>
-              <a:gd name="adj" fmla="val 0"/>
-            </a:avLst>
-          </a:prstGeom>
-          <a:solidFill>
-            <a:srgbClr val="FFFFFF">
-              <a:alpha val="15000"/>
-            </a:srgbClr>
-          </a:solidFill>
-          <a:ln w="25400">
-            <a:noFill/>
-          </a:ln>
-        </p:spPr>
-        <p:style>
-          <a:lnRef idx="0">
-            <a:scrgbClr r="0" g="0" b="0"/>
-          </a:lnRef>
-          <a:fillRef idx="0">
-            <a:scrgbClr r="0" g="0" b="0"/>
-          </a:fillRef>
-          <a:effectRef idx="0">
-            <a:scrgbClr r="0" g="0" b="0"/>
-          </a:effectRef>
-          <a:fontRef idx="minor"/>
-        </p:style>
-        <p:txBody>
-          <a:bodyPr lIns="63360" tIns="38160" rIns="63360" bIns="38160" anchor="ctr">
-            <a:noAutofit/>
-          </a:bodyPr>
-          <a:lstStyle/>
-          <a:p>
-            <a:pPr algn="ctr">
-              <a:lnSpc>
-                <a:spcPct val="100000"/>
-              </a:lnSpc>
-            </a:pPr>
-            <a:endParaRPr lang="en-US" sz="1400" b="0" u="none" strike="noStrike">
-              <a:solidFill>
-                <a:srgbClr val="000000"/>
-              </a:solidFill>
-              <a:uFillTx/>
-              <a:latin typeface="Arial"/>
-              <a:ea typeface="Arial"/>
-            </a:endParaRPr>
-          </a:p>
-        </p:txBody>
-      </p:sp>
-      <p:sp>
-        <p:nvSpPr>
-          <p:cNvPr id="264" name="AutoShape 20"/>
-          <p:cNvSpPr/>
-          <p:nvPr/>
-        </p:nvSpPr>
-        <p:spPr>
-          <a:xfrm>
-            <a:off x="3429000" y="4191120"/>
-            <a:ext cx="1929960" cy="75960"/>
-          </a:xfrm>
-          <a:prstGeom prst="roundRect">
-            <a:avLst>
-              <a:gd name="adj" fmla="val 0"/>
-            </a:avLst>
-          </a:prstGeom>
-          <a:solidFill>
             <a:srgbClr val="2BD1FC">
-              <a:alpha val="80000"/>
-            </a:srgbClr>
-          </a:solidFill>
-          <a:ln w="25400">
-            <a:noFill/>
-          </a:ln>
-        </p:spPr>
-        <p:style>
-          <a:lnRef idx="0">
-            <a:scrgbClr r="0" g="0" b="0"/>
-          </a:lnRef>
-          <a:fillRef idx="0">
-            <a:scrgbClr r="0" g="0" b="0"/>
-          </a:fillRef>
-          <a:effectRef idx="0">
-            <a:scrgbClr r="0" g="0" b="0"/>
-          </a:effectRef>
-          <a:fontRef idx="minor"/>
-        </p:style>
-        <p:txBody>
-          <a:bodyPr lIns="63360" tIns="38160" rIns="63360" bIns="38160" anchor="ctr">
-            <a:noAutofit/>
-          </a:bodyPr>
-          <a:lstStyle/>
-          <a:p>
-            <a:pPr algn="ctr">
-              <a:lnSpc>
-                <a:spcPct val="100000"/>
-              </a:lnSpc>
-            </a:pPr>
-            <a:endParaRPr lang="en-US" sz="1400" b="0" u="none" strike="noStrike">
-              <a:solidFill>
-                <a:srgbClr val="000000"/>
-              </a:solidFill>
-              <a:uFillTx/>
-              <a:latin typeface="Arial"/>
-              <a:ea typeface="Arial"/>
-            </a:endParaRPr>
-          </a:p>
-        </p:txBody>
-      </p:sp>
-      <p:sp>
-        <p:nvSpPr>
-          <p:cNvPr id="265" name="AutoShape 21"/>
-          <p:cNvSpPr/>
-          <p:nvPr/>
-        </p:nvSpPr>
-        <p:spPr>
-          <a:xfrm>
-            <a:off x="3429000" y="4381560"/>
-            <a:ext cx="2412720" cy="571320"/>
-          </a:xfrm>
-          <a:prstGeom prst="rect">
-            <a:avLst/>
-          </a:prstGeom>
-          <a:noFill/>
-          <a:ln w="12700">
-            <a:noFill/>
-          </a:ln>
-        </p:spPr>
-        <p:style>
-          <a:lnRef idx="0">
-            <a:scrgbClr r="0" g="0" b="0"/>
-          </a:lnRef>
-          <a:fillRef idx="0">
-            <a:scrgbClr r="0" g="0" b="0"/>
-          </a:fillRef>
-          <a:effectRef idx="0">
-            <a:scrgbClr r="0" g="0" b="0"/>
-          </a:effectRef>
-          <a:fontRef idx="minor"/>
-        </p:style>
-        <p:txBody>
-          <a:bodyPr lIns="0" tIns="0" rIns="0" bIns="0" anchor="ctr">
-            <a:noAutofit/>
-          </a:bodyPr>
-          <a:lstStyle/>
-          <a:p>
-            <a:pPr>
-              <a:lnSpc>
-                <a:spcPct val="100000"/>
-              </a:lnSpc>
-              <a:tabLst>
-                <a:tab pos="0" algn="l"/>
-              </a:tabLst>
-            </a:pPr>
-            <a:r>
-              <a:rPr lang="zh-CN" sz="1200" b="0" u="none" strike="noStrike">
-                <a:solidFill>
-                  <a:srgbClr val="FFFFFF">
-                    <a:alpha val="60000"/>
-                  </a:srgbClr>
-                </a:solidFill>
-                <a:uFillTx/>
-                <a:latin typeface="Noto Sans SC"/>
-                <a:ea typeface="Noto Sans SC"/>
-              </a:rPr>
-              <a:t>李想负责模块对接与仓库管理，联调阶段进行中，整体进度已达</a:t>
-            </a:r>
-            <a:r>
-              <a:rPr lang="en-US" sz="1200" b="0" u="none" strike="noStrike">
-                <a:solidFill>
-                  <a:srgbClr val="FFFFFF">
-                    <a:alpha val="60000"/>
-                  </a:srgbClr>
-                </a:solidFill>
-                <a:uFillTx/>
-                <a:latin typeface="Noto Sans SC"/>
-                <a:ea typeface="Noto Sans SC"/>
-              </a:rPr>
-              <a:t>80%</a:t>
-            </a:r>
-            <a:r>
-              <a:rPr lang="zh-CN" sz="1200" b="0" u="none" strike="noStrike">
-                <a:solidFill>
-                  <a:srgbClr val="FFFFFF">
-                    <a:alpha val="60000"/>
-                  </a:srgbClr>
-                </a:solidFill>
-                <a:uFillTx/>
-                <a:latin typeface="Noto Sans SC"/>
-                <a:ea typeface="Noto Sans SC"/>
-              </a:rPr>
-              <a:t>。</a:t>
-            </a:r>
-            <a:endParaRPr lang="en-US" sz="1200" b="0" u="none" strike="noStrike">
-              <a:solidFill>
-                <a:srgbClr val="FFFFFF"/>
-              </a:solidFill>
-              <a:uFillTx/>
-              <a:latin typeface="Noto Sans CJK SC"/>
-            </a:endParaRPr>
-          </a:p>
-        </p:txBody>
-      </p:sp>
-      <p:sp>
-        <p:nvSpPr>
-          <p:cNvPr id="266" name="AutoShape 22"/>
-          <p:cNvSpPr/>
-          <p:nvPr/>
-        </p:nvSpPr>
-        <p:spPr>
-          <a:xfrm>
-            <a:off x="762120" y="5460840"/>
-            <a:ext cx="5079600" cy="761760"/>
-          </a:xfrm>
-          <a:prstGeom prst="roundRect">
-            <a:avLst>
-              <a:gd name="adj" fmla="val 0"/>
-            </a:avLst>
-          </a:prstGeom>
-          <a:solidFill>
-            <a:srgbClr val="2BD1FC">
-              <a:alpha val="10000"/>
+              <a:alpha val="12000"/>
             </a:srgbClr>
           </a:solidFill>
           <a:ln w="12700">
             <a:solidFill>
               <a:srgbClr val="2BD1FC">
-                <a:alpha val="30000"/>
+                <a:alpha val="50000"/>
               </a:srgbClr>
             </a:solidFill>
             <a:round/>
@@ -11069,339 +9412,9 @@
           </a:p>
         </p:txBody>
       </p:sp>
-      <p:sp>
-        <p:nvSpPr>
-          <p:cNvPr id="267" name="AutoShape 23"/>
-          <p:cNvSpPr/>
-          <p:nvPr/>
-        </p:nvSpPr>
-        <p:spPr>
-          <a:xfrm>
-            <a:off x="888840" y="5562720"/>
-            <a:ext cx="4825800" cy="558360"/>
-          </a:xfrm>
-          <a:prstGeom prst="rect">
-            <a:avLst/>
-          </a:prstGeom>
-          <a:noFill/>
-          <a:ln w="12700">
-            <a:noFill/>
-          </a:ln>
-        </p:spPr>
-        <p:style>
-          <a:lnRef idx="0">
-            <a:scrgbClr r="0" g="0" b="0"/>
-          </a:lnRef>
-          <a:fillRef idx="0">
-            <a:scrgbClr r="0" g="0" b="0"/>
-          </a:fillRef>
-          <a:effectRef idx="0">
-            <a:scrgbClr r="0" g="0" b="0"/>
-          </a:effectRef>
-          <a:fontRef idx="minor"/>
-        </p:style>
-        <p:txBody>
-          <a:bodyPr lIns="0" tIns="0" rIns="0" bIns="0" anchor="ctr">
-            <a:noAutofit/>
-          </a:bodyPr>
-          <a:lstStyle/>
-          <a:p>
-            <a:pPr>
-              <a:lnSpc>
-                <a:spcPct val="108000"/>
-              </a:lnSpc>
-              <a:tabLst>
-                <a:tab pos="0" algn="l"/>
-              </a:tabLst>
-            </a:pPr>
-            <a:r>
-              <a:rPr lang="zh-CN" sz="1300" b="1" u="none" strike="noStrike">
-                <a:solidFill>
-                  <a:srgbClr val="FFFFFF"/>
-                </a:solidFill>
-                <a:uFillTx/>
-                <a:latin typeface="Noto Sans SC"/>
-                <a:ea typeface="Noto Sans SC"/>
-              </a:rPr>
-              <a:t>待启动任务：文档与</a:t>
-            </a:r>
-            <a:r>
-              <a:rPr lang="en-US" sz="1300" b="1" u="none" strike="noStrike">
-                <a:solidFill>
-                  <a:srgbClr val="FFFFFF"/>
-                </a:solidFill>
-                <a:uFillTx/>
-                <a:latin typeface="Noto Sans SC"/>
-                <a:ea typeface="Noto Sans SC"/>
-              </a:rPr>
-              <a:t>PPT</a:t>
-            </a:r>
-            <a:r>
-              <a:rPr lang="zh-CN" sz="1300" b="1" u="none" strike="noStrike">
-                <a:solidFill>
-                  <a:srgbClr val="FFFFFF"/>
-                </a:solidFill>
-                <a:uFillTx/>
-                <a:latin typeface="Noto Sans SC"/>
-                <a:ea typeface="Noto Sans SC"/>
-              </a:rPr>
-              <a:t>制作 </a:t>
-            </a:r>
-            <a:r>
-              <a:rPr lang="en-US" sz="1300" b="1" u="none" strike="noStrike">
-                <a:solidFill>
-                  <a:srgbClr val="FFFFFF"/>
-                </a:solidFill>
-                <a:uFillTx/>
-                <a:latin typeface="Noto Sans SC"/>
-                <a:ea typeface="Noto Sans SC"/>
-              </a:rPr>
-              <a:t>(</a:t>
-            </a:r>
-            <a:r>
-              <a:rPr lang="zh-CN" sz="1300" b="1" u="none" strike="noStrike">
-                <a:solidFill>
-                  <a:srgbClr val="FFFFFF"/>
-                </a:solidFill>
-                <a:uFillTx/>
-                <a:latin typeface="Noto Sans SC"/>
-                <a:ea typeface="Noto Sans SC"/>
-              </a:rPr>
-              <a:t>负责人：贾耀翔、王一鑫</a:t>
-            </a:r>
-            <a:r>
-              <a:rPr lang="en-US" sz="1300" b="1" u="none" strike="noStrike">
-                <a:solidFill>
-                  <a:srgbClr val="FFFFFF"/>
-                </a:solidFill>
-                <a:uFillTx/>
-                <a:latin typeface="Noto Sans SC"/>
-                <a:ea typeface="Noto Sans SC"/>
-              </a:rPr>
-              <a:t>)</a:t>
-            </a:r>
-            <a:br>
-              <a:rPr sz="1600"/>
-            </a:br>
-            <a:r>
-              <a:rPr lang="zh-CN" sz="1200" b="0" u="none" strike="noStrike">
-                <a:solidFill>
-                  <a:srgbClr val="FFFFFF">
-                    <a:alpha val="70000"/>
-                  </a:srgbClr>
-                </a:solidFill>
-                <a:uFillTx/>
-                <a:latin typeface="Noto Sans SC"/>
-                <a:ea typeface="Noto Sans SC"/>
-              </a:rPr>
-              <a:t>当前进度 </a:t>
-            </a:r>
-            <a:r>
-              <a:rPr lang="en-US" sz="1200" b="0" u="none" strike="noStrike">
-                <a:solidFill>
-                  <a:srgbClr val="FFFFFF">
-                    <a:alpha val="70000"/>
-                  </a:srgbClr>
-                </a:solidFill>
-                <a:uFillTx/>
-                <a:latin typeface="Noto Sans SC"/>
-                <a:ea typeface="Noto Sans SC"/>
-              </a:rPr>
-              <a:t>0%</a:t>
-            </a:r>
-            <a:r>
-              <a:rPr lang="zh-CN" sz="1200" b="0" u="none" strike="noStrike">
-                <a:solidFill>
-                  <a:srgbClr val="FFFFFF">
-                    <a:alpha val="70000"/>
-                  </a:srgbClr>
-                </a:solidFill>
-                <a:uFillTx/>
-                <a:latin typeface="Noto Sans SC"/>
-                <a:ea typeface="Noto Sans SC"/>
-              </a:rPr>
-              <a:t>，计划代码整合完毕后启动，需输出需求文档、项目说明</a:t>
-            </a:r>
-            <a:r>
-              <a:rPr lang="en-US" sz="1200" b="0" u="none" strike="noStrike">
-                <a:solidFill>
-                  <a:srgbClr val="FFFFFF">
-                    <a:alpha val="70000"/>
-                  </a:srgbClr>
-                </a:solidFill>
-                <a:uFillTx/>
-                <a:latin typeface="Noto Sans SC"/>
-                <a:ea typeface="Noto Sans SC"/>
-              </a:rPr>
-              <a:t>PPT</a:t>
-            </a:r>
-            <a:r>
-              <a:rPr lang="zh-CN" sz="1200" b="0" u="none" strike="noStrike">
-                <a:solidFill>
-                  <a:srgbClr val="FFFFFF">
-                    <a:alpha val="70000"/>
-                  </a:srgbClr>
-                </a:solidFill>
-                <a:uFillTx/>
-                <a:latin typeface="Noto Sans SC"/>
-                <a:ea typeface="Noto Sans SC"/>
-              </a:rPr>
-              <a:t>及演示素材。</a:t>
-            </a:r>
-            <a:endParaRPr lang="en-US" sz="1200" b="0" u="none" strike="noStrike">
-              <a:solidFill>
-                <a:srgbClr val="FFFFFF"/>
-              </a:solidFill>
-              <a:uFillTx/>
-              <a:latin typeface="Noto Sans CJK SC"/>
-            </a:endParaRPr>
-          </a:p>
-        </p:txBody>
-      </p:sp>
-      <p:sp>
-        <p:nvSpPr>
-          <p:cNvPr id="268" name="AutoShape 24"/>
-          <p:cNvSpPr/>
-          <p:nvPr/>
-        </p:nvSpPr>
-        <p:spPr>
-          <a:xfrm>
-            <a:off x="6477120" y="1650960"/>
-            <a:ext cx="5079600" cy="380520"/>
-          </a:xfrm>
-          <a:prstGeom prst="rect">
-            <a:avLst/>
-          </a:prstGeom>
-          <a:noFill/>
-          <a:ln w="12700">
-            <a:noFill/>
-          </a:ln>
-        </p:spPr>
-        <p:style>
-          <a:lnRef idx="0">
-            <a:scrgbClr r="0" g="0" b="0"/>
-          </a:lnRef>
-          <a:fillRef idx="0">
-            <a:scrgbClr r="0" g="0" b="0"/>
-          </a:fillRef>
-          <a:effectRef idx="0">
-            <a:scrgbClr r="0" g="0" b="0"/>
-          </a:effectRef>
-          <a:fontRef idx="minor"/>
-        </p:style>
-        <p:txBody>
-          <a:bodyPr lIns="0" tIns="0" rIns="0" bIns="0" anchor="ctr">
-            <a:noAutofit/>
-          </a:bodyPr>
-          <a:lstStyle/>
-          <a:p>
-            <a:pPr>
-              <a:lnSpc>
-                <a:spcPct val="125000"/>
-              </a:lnSpc>
-              <a:tabLst>
-                <a:tab pos="0" algn="l"/>
-              </a:tabLst>
-            </a:pPr>
-            <a:r>
-              <a:rPr lang="en-US" sz="2000" b="1" u="none" strike="noStrike">
-                <a:solidFill>
-                  <a:srgbClr val="2BD1FC"/>
-                </a:solidFill>
-                <a:uFillTx/>
-                <a:latin typeface="Noto Sans SC"/>
-                <a:ea typeface="Noto Sans SC"/>
-              </a:rPr>
-              <a:t>▍ </a:t>
-            </a:r>
-            <a:r>
-              <a:rPr lang="zh-CN" sz="2000" b="1" u="none" strike="noStrike">
-                <a:solidFill>
-                  <a:srgbClr val="2BD1FC"/>
-                </a:solidFill>
-                <a:uFillTx/>
-                <a:latin typeface="Noto Sans SC"/>
-                <a:ea typeface="Noto Sans SC"/>
-              </a:rPr>
-              <a:t>关键里程碑推进计划</a:t>
-            </a:r>
-            <a:endParaRPr lang="en-US" sz="2000" b="0" u="none" strike="noStrike">
-              <a:solidFill>
-                <a:srgbClr val="FFFFFF"/>
-              </a:solidFill>
-              <a:uFillTx/>
-              <a:latin typeface="Noto Sans CJK SC"/>
-            </a:endParaRPr>
-          </a:p>
-        </p:txBody>
-      </p:sp>
-      <p:sp>
-        <p:nvSpPr>
-          <p:cNvPr id="269" name="AutoShape 25"/>
-          <p:cNvSpPr/>
-          <p:nvPr/>
-        </p:nvSpPr>
-        <p:spPr>
-          <a:xfrm>
-            <a:off x="6477120" y="2413080"/>
-            <a:ext cx="1714320" cy="1714320"/>
-          </a:xfrm>
-          <a:prstGeom prst="roundRect">
-            <a:avLst>
-              <a:gd name="adj" fmla="val 0"/>
-            </a:avLst>
-          </a:prstGeom>
-          <a:solidFill>
-            <a:srgbClr val="FFFFFF">
-              <a:alpha val="8000"/>
-            </a:srgbClr>
-          </a:solidFill>
-          <a:ln w="12700">
-            <a:solidFill>
-              <a:srgbClr val="2BD1FC">
-                <a:alpha val="40000"/>
-              </a:srgbClr>
-            </a:solidFill>
-            <a:round/>
-          </a:ln>
-        </p:spPr>
-        <p:style>
-          <a:lnRef idx="0">
-            <a:scrgbClr r="0" g="0" b="0"/>
-          </a:lnRef>
-          <a:fillRef idx="0">
-            <a:scrgbClr r="0" g="0" b="0"/>
-          </a:fillRef>
-          <a:effectRef idx="0">
-            <a:scrgbClr r="0" g="0" b="0"/>
-          </a:effectRef>
-          <a:fontRef idx="minor"/>
-        </p:style>
-        <p:txBody>
-          <a:bodyPr lIns="63360" tIns="63360" rIns="63360" bIns="63360" anchor="ctr">
-            <a:noAutofit/>
-          </a:bodyPr>
-          <a:lstStyle/>
-          <a:p>
-            <a:pPr algn="ctr">
-              <a:lnSpc>
-                <a:spcPct val="100000"/>
-              </a:lnSpc>
-            </a:pPr>
-            <a:endParaRPr lang="en-US" sz="1400" b="0" u="none" strike="noStrike">
-              <a:solidFill>
-                <a:srgbClr val="000000"/>
-              </a:solidFill>
-              <a:uFillTx/>
-              <a:latin typeface="Arial"/>
-              <a:ea typeface="Arial"/>
-            </a:endParaRPr>
-          </a:p>
-        </p:txBody>
-      </p:sp>
       <p:pic>
         <p:nvPicPr>
-          <p:cNvPr id="270" name="Picture 26"/>
+          <p:cNvPr id="297" name="Picture 5"/>
           <p:cNvPicPr/>
           <p:nvPr/>
         </p:nvPicPr>
@@ -11417,8 +9430,8 @@
         </p:blipFill>
         <p:spPr>
           <a:xfrm>
-            <a:off x="6603840" y="2540160"/>
-            <a:ext cx="304560" cy="304560"/>
+            <a:off x="952560" y="1841400"/>
+            <a:ext cx="456840" cy="456840"/>
           </a:xfrm>
           <a:prstGeom prst="rect">
             <a:avLst/>
@@ -11431,14 +9444,14 @@
       </p:pic>
       <p:sp>
         <p:nvSpPr>
-          <p:cNvPr id="271" name="AutoShape 27"/>
+          <p:cNvPr id="298" name="AutoShape 6"/>
           <p:cNvSpPr/>
           <p:nvPr/>
         </p:nvSpPr>
         <p:spPr>
           <a:xfrm>
-            <a:off x="6985080" y="2540160"/>
-            <a:ext cx="1142640" cy="304560"/>
+            <a:off x="1650960" y="1778040"/>
+            <a:ext cx="4063680" cy="380520"/>
           </a:xfrm>
           <a:prstGeom prst="rect">
             <a:avLst/>
@@ -11475,61 +9488,17 @@
               </a:tabLst>
             </a:pPr>
             <a:r>
-              <a:rPr lang="zh-CN" sz="1400" b="1" u="none" strike="noStrike">
-                <a:solidFill>
-                  <a:srgbClr val="FFFFFF"/>
-                </a:solidFill>
-                <a:uFillTx/>
-                <a:latin typeface="Noto Sans SC"/>
-                <a:ea typeface="Noto Sans SC"/>
-              </a:rPr>
-              <a:t>第</a:t>
-            </a:r>
-            <a:r>
-              <a:rPr lang="en-US" sz="1400" b="1" u="none" strike="noStrike">
-                <a:solidFill>
-                  <a:srgbClr val="FFFFFF"/>
-                </a:solidFill>
-                <a:uFillTx/>
-                <a:latin typeface="Noto Sans SC"/>
-                <a:ea typeface="Noto Sans SC"/>
-              </a:rPr>
-              <a:t>1</a:t>
-            </a:r>
-            <a:r>
-              <a:rPr lang="zh-CN" sz="1400" b="1" u="none" strike="noStrike">
-                <a:solidFill>
-                  <a:srgbClr val="FFFFFF"/>
-                </a:solidFill>
-                <a:uFillTx/>
-                <a:latin typeface="Noto Sans SC"/>
-                <a:ea typeface="Noto Sans SC"/>
-              </a:rPr>
-              <a:t>周 </a:t>
-            </a:r>
-            <a:r>
-              <a:rPr lang="en-US" sz="1400" b="1" u="none" strike="noStrike">
-                <a:solidFill>
-                  <a:srgbClr val="FFFFFF"/>
-                </a:solidFill>
-                <a:uFillTx/>
-                <a:latin typeface="Noto Sans SC"/>
-                <a:ea typeface="Noto Sans SC"/>
-              </a:rPr>
-              <a:t>· </a:t>
-            </a:r>
-            <a:r>
-              <a:rPr lang="zh-CN" sz="1400" b="1" u="none" strike="noStrike">
-                <a:solidFill>
-                  <a:srgbClr val="FFFFFF"/>
-                </a:solidFill>
-                <a:uFillTx/>
-                <a:latin typeface="Noto Sans SC"/>
-                <a:ea typeface="Noto Sans SC"/>
-              </a:rPr>
-              <a:t>界面</a:t>
-            </a:r>
-            <a:endParaRPr lang="en-US" sz="1400" b="0" u="none" strike="noStrike">
+              <a:rPr lang="zh-CN" sz="1800" b="1" u="none" strike="noStrike">
+                <a:solidFill>
+                  <a:srgbClr val="2BD1FC"/>
+                </a:solidFill>
+                <a:uFillTx/>
+                <a:latin typeface="Noto Sans SC"/>
+                <a:ea typeface="Noto Sans SC"/>
+              </a:rPr>
+              <a:t>多游戏架构统一封装</a:t>
+            </a:r>
+            <a:endParaRPr lang="en-US" sz="1800" b="0" u="none" strike="noStrike">
               <a:solidFill>
                 <a:srgbClr val="FFFFFF"/>
               </a:solidFill>
@@ -11541,14 +9510,14 @@
       </p:sp>
       <p:cxnSp>
         <p:nvCxnSpPr>
-          <p:cNvPr id="272" name="Connector 28"/>
+          <p:cNvPr id="299" name="Connector 7"/>
           <p:cNvCxnSpPr/>
           <p:nvPr/>
         </p:nvCxnSpPr>
         <p:spPr>
           <a:xfrm>
-            <a:off x="6603840" y="3047760"/>
-            <a:ext cx="1460880" cy="360"/>
+            <a:off x="952200" y="2412720"/>
+            <a:ext cx="4826520" cy="360"/>
           </a:xfrm>
           <a:prstGeom prst="straightConnector1">
             <a:avLst/>
@@ -11556,23 +9525,24 @@
           <a:ln w="12700">
             <a:solidFill>
               <a:srgbClr val="FFFFFF">
-                <a:alpha val="15000"/>
+                <a:alpha val="20000"/>
               </a:srgbClr>
             </a:solidFill>
+            <a:prstDash val="dash"/>
             <a:round/>
           </a:ln>
         </p:spPr>
       </p:cxnSp>
       <p:sp>
         <p:nvSpPr>
-          <p:cNvPr id="273" name="AutoShape 29"/>
+          <p:cNvPr id="300" name="AutoShape 8"/>
           <p:cNvSpPr/>
           <p:nvPr/>
         </p:nvSpPr>
         <p:spPr>
           <a:xfrm>
-            <a:off x="6603840" y="3174840"/>
-            <a:ext cx="1460160" cy="825120"/>
+            <a:off x="952560" y="2540160"/>
+            <a:ext cx="4825800" cy="507600"/>
           </a:xfrm>
           <a:prstGeom prst="rect">
             <a:avLst/>
@@ -11609,87 +9579,45 @@
               </a:tabLst>
             </a:pPr>
             <a:r>
-              <a:rPr lang="zh-CN" sz="1100" b="0" u="none" strike="noStrike">
+              <a:rPr lang="zh-CN" sz="1300" b="0" u="none" strike="noStrike">
                 <a:solidFill>
                   <a:srgbClr val="FFFFFF">
-                    <a:alpha val="70000"/>
+                    <a:alpha val="90000"/>
                   </a:srgbClr>
                 </a:solidFill>
                 <a:uFillTx/>
                 <a:latin typeface="Noto Sans SC"/>
                 <a:ea typeface="Noto Sans SC"/>
               </a:rPr>
-              <a:t>负责人：李玥峰</a:t>
-            </a:r>
-            <a:br>
-              <a:rPr sz="1100"/>
-            </a:br>
-            <a:r>
-              <a:rPr lang="zh-CN" sz="1100" b="0" u="none" strike="noStrike">
+              <a:t>将各游戏模块独立封装，通过统一入口整合调度；利用</a:t>
+            </a:r>
+            <a:r>
+              <a:rPr lang="en-US" sz="1300" b="0" u="none" strike="noStrike">
                 <a:solidFill>
                   <a:srgbClr val="FFFFFF">
-                    <a:alpha val="70000"/>
+                    <a:alpha val="90000"/>
                   </a:srgbClr>
                 </a:solidFill>
                 <a:uFillTx/>
                 <a:latin typeface="Noto Sans SC"/>
                 <a:ea typeface="Noto Sans SC"/>
               </a:rPr>
-              <a:t>完成游戏回廊界面与</a:t>
-            </a:r>
-            <a:r>
-              <a:rPr lang="en-US" sz="1100" b="0" u="none" strike="noStrike">
+              <a:t>LocalStorage</a:t>
+            </a:r>
+            <a:r>
+              <a:rPr lang="zh-CN" sz="1300" b="0" u="none" strike="noStrike">
                 <a:solidFill>
                   <a:srgbClr val="FFFFFF">
-                    <a:alpha val="70000"/>
+                    <a:alpha val="90000"/>
                   </a:srgbClr>
                 </a:solidFill>
                 <a:uFillTx/>
                 <a:latin typeface="Noto Sans SC"/>
                 <a:ea typeface="Noto Sans SC"/>
               </a:rPr>
-              <a:t>7</a:t>
-            </a:r>
-            <a:r>
-              <a:rPr lang="zh-CN" sz="1100" b="0" u="none" strike="noStrike">
-                <a:solidFill>
-                  <a:srgbClr val="FFFFFF">
-                    <a:alpha val="70000"/>
-                  </a:srgbClr>
-                </a:solidFill>
-                <a:uFillTx/>
-                <a:latin typeface="Noto Sans SC"/>
-                <a:ea typeface="Noto Sans SC"/>
-              </a:rPr>
-              <a:t>个游戏基础框架，确定最终</a:t>
-            </a:r>
-            <a:r>
-              <a:rPr lang="en-US" sz="1100" b="0" u="none" strike="noStrike">
-                <a:solidFill>
-                  <a:srgbClr val="FFFFFF">
-                    <a:alpha val="70000"/>
-                  </a:srgbClr>
-                </a:solidFill>
-                <a:uFillTx/>
-                <a:latin typeface="Noto Sans SC"/>
-                <a:ea typeface="Noto Sans SC"/>
-              </a:rPr>
-              <a:t>UI</a:t>
-            </a:r>
-            <a:r>
-              <a:rPr lang="zh-CN" sz="1100" b="0" u="none" strike="noStrike">
-                <a:solidFill>
-                  <a:srgbClr val="FFFFFF">
-                    <a:alpha val="70000"/>
-                  </a:srgbClr>
-                </a:solidFill>
-                <a:uFillTx/>
-                <a:latin typeface="Noto Sans SC"/>
-                <a:ea typeface="Noto Sans SC"/>
-              </a:rPr>
-              <a:t>视觉风格。</a:t>
-            </a:r>
-            <a:endParaRPr lang="en-US" sz="1100" b="0" u="none" strike="noStrike">
+              <a:t>实现用户最高分数据的持久化存储，确保数据不丢失。</a:t>
+            </a:r>
+            <a:endParaRPr lang="en-US" sz="1300" b="0" u="none" strike="noStrike">
               <a:solidFill>
                 <a:srgbClr val="FFFFFF"/>
               </a:solidFill>
@@ -11701,14 +9629,14 @@
       </p:sp>
       <p:sp>
         <p:nvSpPr>
-          <p:cNvPr id="274" name="AutoShape 30"/>
+          <p:cNvPr id="301" name="AutoShape 9"/>
           <p:cNvSpPr/>
           <p:nvPr/>
         </p:nvSpPr>
         <p:spPr>
           <a:xfrm>
-            <a:off x="8318520" y="2413080"/>
-            <a:ext cx="1714320" cy="1714320"/>
+            <a:off x="762120" y="3365640"/>
+            <a:ext cx="5206680" cy="1460160"/>
           </a:xfrm>
           <a:prstGeom prst="roundRect">
             <a:avLst>
@@ -11716,14 +9644,14 @@
             </a:avLst>
           </a:prstGeom>
           <a:solidFill>
-            <a:srgbClr val="FFFFFF">
-              <a:alpha val="8000"/>
+            <a:srgbClr val="2BD1FC">
+              <a:alpha val="12000"/>
             </a:srgbClr>
           </a:solidFill>
           <a:ln w="12700">
             <a:solidFill>
               <a:srgbClr val="2BD1FC">
-                <a:alpha val="40000"/>
+                <a:alpha val="50000"/>
               </a:srgbClr>
             </a:solidFill>
             <a:round/>
@@ -11765,7 +9693,7 @@
       </p:sp>
       <p:pic>
         <p:nvPicPr>
-          <p:cNvPr id="275" name="Picture 31"/>
+          <p:cNvPr id="302" name="Picture 10"/>
           <p:cNvPicPr/>
           <p:nvPr/>
         </p:nvPicPr>
@@ -11781,8 +9709,8 @@
         </p:blipFill>
         <p:spPr>
           <a:xfrm>
-            <a:off x="8445600" y="2540160"/>
-            <a:ext cx="304560" cy="304560"/>
+            <a:off x="952560" y="3556080"/>
+            <a:ext cx="456840" cy="456840"/>
           </a:xfrm>
           <a:prstGeom prst="rect">
             <a:avLst/>
@@ -11795,14 +9723,14 @@
       </p:pic>
       <p:sp>
         <p:nvSpPr>
-          <p:cNvPr id="276" name="AutoShape 32"/>
+          <p:cNvPr id="303" name="AutoShape 11"/>
           <p:cNvSpPr/>
           <p:nvPr/>
         </p:nvSpPr>
         <p:spPr>
           <a:xfrm>
-            <a:off x="8826480" y="2540160"/>
-            <a:ext cx="1142640" cy="304560"/>
+            <a:off x="1650960" y="3492360"/>
+            <a:ext cx="4063680" cy="380520"/>
           </a:xfrm>
           <a:prstGeom prst="rect">
             <a:avLst/>
@@ -11839,61 +9767,39 @@
               </a:tabLst>
             </a:pPr>
             <a:r>
-              <a:rPr lang="zh-CN" sz="1400" b="1" u="none" strike="noStrike">
-                <a:solidFill>
-                  <a:srgbClr val="FFFFFF"/>
-                </a:solidFill>
-                <a:uFillTx/>
-                <a:latin typeface="Noto Sans SC"/>
-                <a:ea typeface="Noto Sans SC"/>
-              </a:rPr>
-              <a:t>第</a:t>
-            </a:r>
-            <a:r>
-              <a:rPr lang="en-US" sz="1400" b="1" u="none" strike="noStrike">
-                <a:solidFill>
-                  <a:srgbClr val="FFFFFF"/>
-                </a:solidFill>
-                <a:uFillTx/>
-                <a:latin typeface="Noto Sans SC"/>
-                <a:ea typeface="Noto Sans SC"/>
-              </a:rPr>
-              <a:t>2</a:t>
-            </a:r>
-            <a:r>
-              <a:rPr lang="zh-CN" sz="1400" b="1" u="none" strike="noStrike">
-                <a:solidFill>
-                  <a:srgbClr val="FFFFFF"/>
-                </a:solidFill>
-                <a:uFillTx/>
-                <a:latin typeface="Noto Sans SC"/>
-                <a:ea typeface="Noto Sans SC"/>
-              </a:rPr>
-              <a:t>周 </a:t>
-            </a:r>
-            <a:r>
-              <a:rPr lang="en-US" sz="1400" b="1" u="none" strike="noStrike">
-                <a:solidFill>
-                  <a:srgbClr val="FFFFFF"/>
-                </a:solidFill>
-                <a:uFillTx/>
-                <a:latin typeface="Noto Sans SC"/>
-                <a:ea typeface="Noto Sans SC"/>
-              </a:rPr>
-              <a:t>· </a:t>
-            </a:r>
-            <a:r>
-              <a:rPr lang="zh-CN" sz="1400" b="1" u="none" strike="noStrike">
-                <a:solidFill>
-                  <a:srgbClr val="FFFFFF"/>
-                </a:solidFill>
-                <a:uFillTx/>
-                <a:latin typeface="Noto Sans SC"/>
-                <a:ea typeface="Noto Sans SC"/>
-              </a:rPr>
-              <a:t>核心</a:t>
-            </a:r>
-            <a:endParaRPr lang="en-US" sz="1400" b="0" u="none" strike="noStrike">
+              <a:rPr lang="zh-CN" sz="1800" b="1" u="none" strike="noStrike">
+                <a:solidFill>
+                  <a:srgbClr val="2BD1FC"/>
+                </a:solidFill>
+                <a:uFillTx/>
+                <a:latin typeface="Noto Sans SC"/>
+                <a:ea typeface="Noto Sans SC"/>
+              </a:rPr>
+              <a:t>高性能 </a:t>
+            </a:r>
+            <a:r>
+              <a:rPr lang="en-US" sz="1800" b="1" u="none" strike="noStrike">
+                <a:solidFill>
+                  <a:srgbClr val="2BD1FC"/>
+                </a:solidFill>
+                <a:uFillTx/>
+                <a:latin typeface="Noto Sans SC"/>
+                <a:ea typeface="Noto Sans SC"/>
+              </a:rPr>
+              <a:t>Canvas </a:t>
+            </a:r>
+            <a:r>
+              <a:rPr lang="zh-CN" sz="1800" b="1" u="none" strike="noStrike">
+                <a:solidFill>
+                  <a:srgbClr val="2BD1FC"/>
+                </a:solidFill>
+                <a:uFillTx/>
+                <a:latin typeface="Noto Sans SC"/>
+                <a:ea typeface="Noto Sans SC"/>
+              </a:rPr>
+              <a:t>流畅渲染</a:t>
+            </a:r>
+            <a:endParaRPr lang="en-US" sz="1800" b="0" u="none" strike="noStrike">
               <a:solidFill>
                 <a:srgbClr val="FFFFFF"/>
               </a:solidFill>
@@ -11905,14 +9811,14 @@
       </p:sp>
       <p:cxnSp>
         <p:nvCxnSpPr>
-          <p:cNvPr id="277" name="Connector 33"/>
+          <p:cNvPr id="304" name="Connector 12"/>
           <p:cNvCxnSpPr/>
           <p:nvPr/>
         </p:nvCxnSpPr>
         <p:spPr>
           <a:xfrm>
-            <a:off x="8445240" y="3047760"/>
-            <a:ext cx="1460880" cy="360"/>
+            <a:off x="952200" y="4127400"/>
+            <a:ext cx="4826520" cy="360"/>
           </a:xfrm>
           <a:prstGeom prst="straightConnector1">
             <a:avLst/>
@@ -11920,23 +9826,24 @@
           <a:ln w="12700">
             <a:solidFill>
               <a:srgbClr val="FFFFFF">
-                <a:alpha val="15000"/>
+                <a:alpha val="20000"/>
               </a:srgbClr>
             </a:solidFill>
+            <a:prstDash val="dash"/>
             <a:round/>
           </a:ln>
         </p:spPr>
       </p:cxnSp>
       <p:sp>
         <p:nvSpPr>
-          <p:cNvPr id="278" name="AutoShape 34"/>
+          <p:cNvPr id="305" name="AutoShape 13"/>
           <p:cNvSpPr/>
           <p:nvPr/>
         </p:nvSpPr>
         <p:spPr>
           <a:xfrm>
-            <a:off x="8445600" y="3174840"/>
-            <a:ext cx="1460160" cy="825120"/>
+            <a:off x="952560" y="4254480"/>
+            <a:ext cx="4825800" cy="507600"/>
           </a:xfrm>
           <a:prstGeom prst="rect">
             <a:avLst/>
@@ -11973,61 +9880,97 @@
               </a:tabLst>
             </a:pPr>
             <a:r>
-              <a:rPr lang="zh-CN" sz="1100" b="0" u="none" strike="noStrike">
+              <a:rPr lang="zh-CN" sz="1300" b="0" u="none" strike="noStrike">
                 <a:solidFill>
                   <a:srgbClr val="FFFFFF">
-                    <a:alpha val="70000"/>
+                    <a:alpha val="90000"/>
                   </a:srgbClr>
                 </a:solidFill>
                 <a:uFillTx/>
                 <a:latin typeface="Noto Sans SC"/>
                 <a:ea typeface="Noto Sans SC"/>
               </a:rPr>
-              <a:t>负责人：李少华、李振豪</a:t>
-            </a:r>
-            <a:br>
-              <a:rPr sz="1100"/>
-            </a:br>
-            <a:r>
-              <a:rPr lang="zh-CN" sz="1100" b="0" u="none" strike="noStrike">
+              <a:t>采用 </a:t>
+            </a:r>
+            <a:r>
+              <a:rPr lang="en-US" sz="1300" b="0" u="none" strike="noStrike">
                 <a:solidFill>
                   <a:srgbClr val="FFFFFF">
-                    <a:alpha val="70000"/>
+                    <a:alpha val="90000"/>
                   </a:srgbClr>
                 </a:solidFill>
                 <a:uFillTx/>
                 <a:latin typeface="Noto Sans SC"/>
                 <a:ea typeface="Noto Sans SC"/>
               </a:rPr>
-              <a:t>完成</a:t>
-            </a:r>
-            <a:r>
-              <a:rPr lang="en-US" sz="1100" b="0" u="none" strike="noStrike">
+              <a:t>requestAnimationFrame </a:t>
+            </a:r>
+            <a:r>
+              <a:rPr lang="zh-CN" sz="1300" b="0" u="none" strike="noStrike">
                 <a:solidFill>
                   <a:srgbClr val="FFFFFF">
-                    <a:alpha val="70000"/>
+                    <a:alpha val="90000"/>
                   </a:srgbClr>
                 </a:solidFill>
                 <a:uFillTx/>
                 <a:latin typeface="Noto Sans SC"/>
                 <a:ea typeface="Noto Sans SC"/>
               </a:rPr>
-              <a:t>7</a:t>
-            </a:r>
-            <a:r>
-              <a:rPr lang="zh-CN" sz="1100" b="0" u="none" strike="noStrike">
+              <a:t>实现</a:t>
+            </a:r>
+            <a:r>
+              <a:rPr lang="en-US" sz="1300" b="0" u="none" strike="noStrike">
                 <a:solidFill>
                   <a:srgbClr val="FFFFFF">
-                    <a:alpha val="70000"/>
+                    <a:alpha val="90000"/>
                   </a:srgbClr>
                 </a:solidFill>
                 <a:uFillTx/>
                 <a:latin typeface="Noto Sans SC"/>
                 <a:ea typeface="Noto Sans SC"/>
               </a:rPr>
-              <a:t>款游戏完整功能代码编写，实现核心玩法与交互逻辑闭环。</a:t>
-            </a:r>
-            <a:endParaRPr lang="en-US" sz="1100" b="0" u="none" strike="noStrike">
+              <a:t>60</a:t>
+            </a:r>
+            <a:r>
+              <a:rPr lang="zh-CN" sz="1300" b="0" u="none" strike="noStrike">
+                <a:solidFill>
+                  <a:srgbClr val="FFFFFF">
+                    <a:alpha val="90000"/>
+                  </a:srgbClr>
+                </a:solidFill>
+                <a:uFillTx/>
+                <a:latin typeface="Noto Sans SC"/>
+                <a:ea typeface="Noto Sans SC"/>
+              </a:rPr>
+              <a:t>帧流畅动画；引入对象池模式管理子弹与粒子特效，显著减少内存开销与</a:t>
+            </a:r>
+            <a:r>
+              <a:rPr lang="en-US" sz="1300" b="0" u="none" strike="noStrike">
+                <a:solidFill>
+                  <a:srgbClr val="FFFFFF">
+                    <a:alpha val="90000"/>
+                  </a:srgbClr>
+                </a:solidFill>
+                <a:uFillTx/>
+                <a:latin typeface="Noto Sans SC"/>
+                <a:ea typeface="Noto Sans SC"/>
+              </a:rPr>
+              <a:t>GC</a:t>
+            </a:r>
+            <a:r>
+              <a:rPr lang="zh-CN" sz="1300" b="0" u="none" strike="noStrike">
+                <a:solidFill>
+                  <a:srgbClr val="FFFFFF">
+                    <a:alpha val="90000"/>
+                  </a:srgbClr>
+                </a:solidFill>
+                <a:uFillTx/>
+                <a:latin typeface="Noto Sans SC"/>
+                <a:ea typeface="Noto Sans SC"/>
+              </a:rPr>
+              <a:t>频率。</a:t>
+            </a:r>
+            <a:endParaRPr lang="en-US" sz="1300" b="0" u="none" strike="noStrike">
               <a:solidFill>
                 <a:srgbClr val="FFFFFF"/>
               </a:solidFill>
@@ -12039,14 +9982,14 @@
       </p:sp>
       <p:sp>
         <p:nvSpPr>
-          <p:cNvPr id="279" name="AutoShape 35"/>
+          <p:cNvPr id="306" name="AutoShape 14"/>
           <p:cNvSpPr/>
           <p:nvPr/>
         </p:nvSpPr>
         <p:spPr>
           <a:xfrm>
-            <a:off x="10032840" y="2413080"/>
-            <a:ext cx="1714320" cy="1714320"/>
+            <a:off x="762120" y="5079960"/>
+            <a:ext cx="5206680" cy="1460160"/>
           </a:xfrm>
           <a:prstGeom prst="roundRect">
             <a:avLst>
@@ -12054,14 +9997,14 @@
             </a:avLst>
           </a:prstGeom>
           <a:solidFill>
-            <a:srgbClr val="FFFFFF">
-              <a:alpha val="8000"/>
+            <a:srgbClr val="2BD1FC">
+              <a:alpha val="12000"/>
             </a:srgbClr>
           </a:solidFill>
           <a:ln w="12700">
             <a:solidFill>
               <a:srgbClr val="2BD1FC">
-                <a:alpha val="40000"/>
+                <a:alpha val="50000"/>
               </a:srgbClr>
             </a:solidFill>
             <a:round/>
@@ -12103,7 +10046,7 @@
       </p:sp>
       <p:pic>
         <p:nvPicPr>
-          <p:cNvPr id="280" name="Picture 36"/>
+          <p:cNvPr id="307" name="Picture 15"/>
           <p:cNvPicPr/>
           <p:nvPr/>
         </p:nvPicPr>
@@ -12119,8 +10062,8 @@
         </p:blipFill>
         <p:spPr>
           <a:xfrm>
-            <a:off x="10159920" y="2540160"/>
-            <a:ext cx="304560" cy="304560"/>
+            <a:off x="952560" y="5270400"/>
+            <a:ext cx="456840" cy="456840"/>
           </a:xfrm>
           <a:prstGeom prst="rect">
             <a:avLst/>
@@ -12133,14 +10076,14 @@
       </p:pic>
       <p:sp>
         <p:nvSpPr>
-          <p:cNvPr id="281" name="AutoShape 37"/>
+          <p:cNvPr id="308" name="AutoShape 16"/>
           <p:cNvSpPr/>
           <p:nvPr/>
         </p:nvSpPr>
         <p:spPr>
           <a:xfrm>
-            <a:off x="10541160" y="2540160"/>
-            <a:ext cx="1142640" cy="304560"/>
+            <a:off x="1650960" y="5207040"/>
+            <a:ext cx="4063680" cy="380520"/>
           </a:xfrm>
           <a:prstGeom prst="rect">
             <a:avLst/>
@@ -12177,61 +10120,17 @@
               </a:tabLst>
             </a:pPr>
             <a:r>
-              <a:rPr lang="zh-CN" sz="1400" b="1" u="none" strike="noStrike">
-                <a:solidFill>
-                  <a:srgbClr val="FFFFFF"/>
-                </a:solidFill>
-                <a:uFillTx/>
-                <a:latin typeface="Noto Sans SC"/>
-                <a:ea typeface="Noto Sans SC"/>
-              </a:rPr>
-              <a:t>第</a:t>
-            </a:r>
-            <a:r>
-              <a:rPr lang="en-US" sz="1400" b="1" u="none" strike="noStrike">
-                <a:solidFill>
-                  <a:srgbClr val="FFFFFF"/>
-                </a:solidFill>
-                <a:uFillTx/>
-                <a:latin typeface="Noto Sans SC"/>
-                <a:ea typeface="Noto Sans SC"/>
-              </a:rPr>
-              <a:t>3</a:t>
-            </a:r>
-            <a:r>
-              <a:rPr lang="zh-CN" sz="1400" b="1" u="none" strike="noStrike">
-                <a:solidFill>
-                  <a:srgbClr val="FFFFFF"/>
-                </a:solidFill>
-                <a:uFillTx/>
-                <a:latin typeface="Noto Sans SC"/>
-                <a:ea typeface="Noto Sans SC"/>
-              </a:rPr>
-              <a:t>周初 </a:t>
-            </a:r>
-            <a:r>
-              <a:rPr lang="en-US" sz="1400" b="1" u="none" strike="noStrike">
-                <a:solidFill>
-                  <a:srgbClr val="FFFFFF"/>
-                </a:solidFill>
-                <a:uFillTx/>
-                <a:latin typeface="Noto Sans SC"/>
-                <a:ea typeface="Noto Sans SC"/>
-              </a:rPr>
-              <a:t>· </a:t>
-            </a:r>
-            <a:r>
-              <a:rPr lang="zh-CN" sz="1400" b="1" u="none" strike="noStrike">
-                <a:solidFill>
-                  <a:srgbClr val="FFFFFF"/>
-                </a:solidFill>
-                <a:uFillTx/>
-                <a:latin typeface="Noto Sans SC"/>
-                <a:ea typeface="Noto Sans SC"/>
-              </a:rPr>
-              <a:t>整合</a:t>
-            </a:r>
-            <a:endParaRPr lang="en-US" sz="1400" b="0" u="none" strike="noStrike">
+              <a:rPr lang="zh-CN" sz="1800" b="1" u="none" strike="noStrike">
+                <a:solidFill>
+                  <a:srgbClr val="2BD1FC"/>
+                </a:solidFill>
+                <a:uFillTx/>
+                <a:latin typeface="Noto Sans SC"/>
+                <a:ea typeface="Noto Sans SC"/>
+              </a:rPr>
+              <a:t>全端输入事件适配方案</a:t>
+            </a:r>
+            <a:endParaRPr lang="en-US" sz="1800" b="0" u="none" strike="noStrike">
               <a:solidFill>
                 <a:srgbClr val="FFFFFF"/>
               </a:solidFill>
@@ -12243,14 +10142,107 @@
       </p:sp>
       <p:cxnSp>
         <p:nvCxnSpPr>
-          <p:cNvPr id="282" name="Connector 38"/>
+          <p:cNvPr id="309" name="Connector 17"/>
           <p:cNvCxnSpPr/>
           <p:nvPr/>
         </p:nvCxnSpPr>
         <p:spPr>
           <a:xfrm>
-            <a:off x="10159920" y="3047760"/>
-            <a:ext cx="1460880" cy="360"/>
+            <a:off x="952200" y="5841720"/>
+            <a:ext cx="4826520" cy="360"/>
+          </a:xfrm>
+          <a:prstGeom prst="straightConnector1">
+            <a:avLst/>
+          </a:prstGeom>
+          <a:ln w="12700">
+            <a:solidFill>
+              <a:srgbClr val="FFFFFF">
+                <a:alpha val="20000"/>
+              </a:srgbClr>
+            </a:solidFill>
+            <a:prstDash val="dash"/>
+            <a:round/>
+          </a:ln>
+        </p:spPr>
+      </p:cxnSp>
+      <p:sp>
+        <p:nvSpPr>
+          <p:cNvPr id="310" name="AutoShape 18"/>
+          <p:cNvSpPr/>
+          <p:nvPr/>
+        </p:nvSpPr>
+        <p:spPr>
+          <a:xfrm>
+            <a:off x="952560" y="5905440"/>
+            <a:ext cx="4825800" cy="571320"/>
+          </a:xfrm>
+          <a:prstGeom prst="rect">
+            <a:avLst/>
+          </a:prstGeom>
+          <a:noFill/>
+          <a:ln w="12700">
+            <a:noFill/>
+          </a:ln>
+        </p:spPr>
+        <p:style>
+          <a:lnRef idx="0">
+            <a:scrgbClr r="0" g="0" b="0"/>
+          </a:lnRef>
+          <a:fillRef idx="0">
+            <a:scrgbClr r="0" g="0" b="0"/>
+          </a:fillRef>
+          <a:effectRef idx="0">
+            <a:scrgbClr r="0" g="0" b="0"/>
+          </a:effectRef>
+          <a:fontRef idx="minor"/>
+        </p:style>
+        <p:txBody>
+          <a:bodyPr lIns="0" tIns="0" rIns="0" bIns="0" anchor="ctr">
+            <a:noAutofit/>
+          </a:bodyPr>
+          <a:lstStyle/>
+          <a:p>
+            <a:pPr>
+              <a:lnSpc>
+                <a:spcPct val="108000"/>
+              </a:lnSpc>
+              <a:tabLst>
+                <a:tab pos="0" algn="l"/>
+              </a:tabLst>
+            </a:pPr>
+            <a:r>
+              <a:rPr lang="zh-CN" sz="1300" b="0" u="none" strike="noStrike">
+                <a:solidFill>
+                  <a:srgbClr val="FFFFFF">
+                    <a:alpha val="90000"/>
+                  </a:srgbClr>
+                </a:solidFill>
+                <a:uFillTx/>
+                <a:latin typeface="Noto Sans SC"/>
+                <a:ea typeface="Noto Sans SC"/>
+              </a:rPr>
+              <a:t>完美兼容键盘、鼠标与移动端触摸事件；针对移动端浏览器做防误触滚动处理，保障操作精准度与体验一致性。</a:t>
+            </a:r>
+            <a:endParaRPr lang="en-US" sz="1300" b="0" u="none" strike="noStrike">
+              <a:solidFill>
+                <a:srgbClr val="FFFFFF"/>
+              </a:solidFill>
+              <a:uFillTx/>
+              <a:latin typeface="Noto Sans CJK SC"/>
+            </a:endParaRPr>
+          </a:p>
+        </p:txBody>
+      </p:sp>
+      <p:cxnSp>
+        <p:nvCxnSpPr>
+          <p:cNvPr id="311" name="Connector 19"/>
+          <p:cNvCxnSpPr/>
+          <p:nvPr/>
+        </p:nvCxnSpPr>
+        <p:spPr>
+          <a:xfrm>
+            <a:off x="6349680" y="1650960"/>
+            <a:ext cx="360" cy="4889880"/>
           </a:xfrm>
           <a:prstGeom prst="straightConnector1">
             <a:avLst/>
@@ -12267,14 +10259,14 @@
       </p:cxnSp>
       <p:sp>
         <p:nvSpPr>
-          <p:cNvPr id="283" name="AutoShape 39"/>
+          <p:cNvPr id="312" name="AutoShape 20"/>
           <p:cNvSpPr/>
           <p:nvPr/>
         </p:nvSpPr>
         <p:spPr>
           <a:xfrm>
-            <a:off x="10159920" y="3174840"/>
-            <a:ext cx="1460160" cy="825120"/>
+            <a:off x="6603840" y="1650960"/>
+            <a:ext cx="4952520" cy="380520"/>
           </a:xfrm>
           <a:prstGeom prst="rect">
             <a:avLst/>
@@ -12304,68 +10296,24 @@
           <a:p>
             <a:pPr>
               <a:lnSpc>
-                <a:spcPct val="108000"/>
+                <a:spcPct val="125000"/>
               </a:lnSpc>
               <a:tabLst>
                 <a:tab pos="0" algn="l"/>
               </a:tabLst>
             </a:pPr>
             <a:r>
-              <a:rPr lang="zh-CN" sz="1100" b="0" u="none" strike="noStrike">
-                <a:solidFill>
-                  <a:srgbClr val="FFFFFF">
-                    <a:alpha val="70000"/>
-                  </a:srgbClr>
-                </a:solidFill>
-                <a:uFillTx/>
-                <a:latin typeface="Noto Sans SC"/>
-                <a:ea typeface="Noto Sans SC"/>
-              </a:rPr>
-              <a:t>负责人：李想</a:t>
-            </a:r>
-            <a:br>
-              <a:rPr sz="1100"/>
-            </a:br>
-            <a:r>
-              <a:rPr lang="zh-CN" sz="1100" b="0" u="none" strike="noStrike">
-                <a:solidFill>
-                  <a:srgbClr val="FFFFFF">
-                    <a:alpha val="70000"/>
-                  </a:srgbClr>
-                </a:solidFill>
-                <a:uFillTx/>
-                <a:latin typeface="Noto Sans SC"/>
-                <a:ea typeface="Noto Sans SC"/>
-              </a:rPr>
-              <a:t>模块接入主项目，建立</a:t>
-            </a:r>
-            <a:r>
-              <a:rPr lang="en-US" sz="1100" b="0" u="none" strike="noStrike">
-                <a:solidFill>
-                  <a:srgbClr val="FFFFFF">
-                    <a:alpha val="70000"/>
-                  </a:srgbClr>
-                </a:solidFill>
-                <a:uFillTx/>
-                <a:latin typeface="Noto Sans SC"/>
-                <a:ea typeface="Noto Sans SC"/>
-              </a:rPr>
-              <a:t>Git</a:t>
-            </a:r>
-            <a:r>
-              <a:rPr lang="zh-CN" sz="1100" b="0" u="none" strike="noStrike">
-                <a:solidFill>
-                  <a:srgbClr val="FFFFFF">
-                    <a:alpha val="70000"/>
-                  </a:srgbClr>
-                </a:solidFill>
-                <a:uFillTx/>
-                <a:latin typeface="Noto Sans SC"/>
-                <a:ea typeface="Noto Sans SC"/>
-              </a:rPr>
-              <a:t>版本库，输出可运行的完整整合包。</a:t>
-            </a:r>
-            <a:endParaRPr lang="en-US" sz="1100" b="0" u="none" strike="noStrike">
+              <a:rPr lang="zh-CN" sz="2000" b="1" u="none" strike="noStrike">
+                <a:solidFill>
+                  <a:srgbClr val="FFFFFF"/>
+                </a:solidFill>
+                <a:uFillTx/>
+                <a:latin typeface="Noto Sans SC"/>
+                <a:ea typeface="Noto Sans SC"/>
+              </a:rPr>
+              <a:t>核心难点攻坚与突破</a:t>
+            </a:r>
+            <a:endParaRPr lang="en-US" sz="2000" b="0" u="none" strike="noStrike">
               <a:solidFill>
                 <a:srgbClr val="FFFFFF"/>
               </a:solidFill>
@@ -12377,14 +10325,14 @@
       </p:sp>
       <p:sp>
         <p:nvSpPr>
-          <p:cNvPr id="284" name="AutoShape 40"/>
+          <p:cNvPr id="313" name="AutoShape 21"/>
           <p:cNvSpPr/>
           <p:nvPr/>
         </p:nvSpPr>
         <p:spPr>
           <a:xfrm>
-            <a:off x="6477120" y="4444920"/>
-            <a:ext cx="2539800" cy="1714320"/>
+            <a:off x="6603840" y="2286000"/>
+            <a:ext cx="4952520" cy="952200"/>
           </a:xfrm>
           <a:prstGeom prst="roundRect">
             <a:avLst>
@@ -12393,16 +10341,11 @@
           </a:prstGeom>
           <a:solidFill>
             <a:srgbClr val="FFFFFF">
-              <a:alpha val="8000"/>
+              <a:alpha val="5000"/>
             </a:srgbClr>
           </a:solidFill>
-          <a:ln w="12700">
-            <a:solidFill>
-              <a:srgbClr val="2BD1FC">
-                <a:alpha val="40000"/>
-              </a:srgbClr>
-            </a:solidFill>
-            <a:round/>
+          <a:ln w="25400">
+            <a:noFill/>
           </a:ln>
         </p:spPr>
         <p:style>
@@ -12439,300 +10382,16 @@
           </a:p>
         </p:txBody>
       </p:sp>
-      <p:pic>
-        <p:nvPicPr>
-          <p:cNvPr id="285" name="Picture 41"/>
-          <p:cNvPicPr/>
-          <p:nvPr/>
-        </p:nvPicPr>
-        <p:blipFill>
-          <a:blip r:embed="rId10">
-            <a:extLst>
-              <a:ext uri="{96DAC541-7B7A-43D3-8B79-37D633B846F1}">
-                <asvg:svgBlip xmlns:asvg="http://schemas.microsoft.com/office/drawing/2016/SVG/main" r:embed="rId11"/>
-              </a:ext>
-            </a:extLst>
-          </a:blip>
-          <a:stretch/>
-        </p:blipFill>
-        <p:spPr>
-          <a:xfrm>
-            <a:off x="6603840" y="4572000"/>
-            <a:ext cx="304560" cy="304560"/>
-          </a:xfrm>
-          <a:prstGeom prst="rect">
-            <a:avLst/>
-          </a:prstGeom>
-          <a:noFill/>
-          <a:ln w="0">
-            <a:noFill/>
-          </a:ln>
-        </p:spPr>
-      </p:pic>
-      <p:sp>
-        <p:nvSpPr>
-          <p:cNvPr id="286" name="AutoShape 42"/>
+      <p:sp>
+        <p:nvSpPr>
+          <p:cNvPr id="314" name="AutoShape 22"/>
           <p:cNvSpPr/>
           <p:nvPr/>
         </p:nvSpPr>
         <p:spPr>
           <a:xfrm>
-            <a:off x="6985080" y="4572000"/>
-            <a:ext cx="1904760" cy="304560"/>
-          </a:xfrm>
-          <a:prstGeom prst="rect">
-            <a:avLst/>
-          </a:prstGeom>
-          <a:noFill/>
-          <a:ln w="12700">
-            <a:noFill/>
-          </a:ln>
-        </p:spPr>
-        <p:style>
-          <a:lnRef idx="0">
-            <a:scrgbClr r="0" g="0" b="0"/>
-          </a:lnRef>
-          <a:fillRef idx="0">
-            <a:scrgbClr r="0" g="0" b="0"/>
-          </a:fillRef>
-          <a:effectRef idx="0">
-            <a:scrgbClr r="0" g="0" b="0"/>
-          </a:effectRef>
-          <a:fontRef idx="minor"/>
-        </p:style>
-        <p:txBody>
-          <a:bodyPr lIns="0" tIns="0" rIns="0" bIns="0" anchor="ctr">
-            <a:noAutofit/>
-          </a:bodyPr>
-          <a:lstStyle/>
-          <a:p>
-            <a:pPr>
-              <a:lnSpc>
-                <a:spcPct val="125000"/>
-              </a:lnSpc>
-              <a:tabLst>
-                <a:tab pos="0" algn="l"/>
-              </a:tabLst>
-            </a:pPr>
-            <a:r>
-              <a:rPr lang="zh-CN" sz="1400" b="1" u="none" strike="noStrike">
-                <a:solidFill>
-                  <a:srgbClr val="FFFFFF"/>
-                </a:solidFill>
-                <a:uFillTx/>
-                <a:latin typeface="Noto Sans SC"/>
-                <a:ea typeface="Noto Sans SC"/>
-              </a:rPr>
-              <a:t>第</a:t>
-            </a:r>
-            <a:r>
-              <a:rPr lang="en-US" sz="1400" b="1" u="none" strike="noStrike">
-                <a:solidFill>
-                  <a:srgbClr val="FFFFFF"/>
-                </a:solidFill>
-                <a:uFillTx/>
-                <a:latin typeface="Noto Sans SC"/>
-                <a:ea typeface="Noto Sans SC"/>
-              </a:rPr>
-              <a:t>3</a:t>
-            </a:r>
-            <a:r>
-              <a:rPr lang="zh-CN" sz="1400" b="1" u="none" strike="noStrike">
-                <a:solidFill>
-                  <a:srgbClr val="FFFFFF"/>
-                </a:solidFill>
-                <a:uFillTx/>
-                <a:latin typeface="Noto Sans SC"/>
-                <a:ea typeface="Noto Sans SC"/>
-              </a:rPr>
-              <a:t>周中 </a:t>
-            </a:r>
-            <a:r>
-              <a:rPr lang="en-US" sz="1400" b="1" u="none" strike="noStrike">
-                <a:solidFill>
-                  <a:srgbClr val="FFFFFF"/>
-                </a:solidFill>
-                <a:uFillTx/>
-                <a:latin typeface="Noto Sans SC"/>
-                <a:ea typeface="Noto Sans SC"/>
-              </a:rPr>
-              <a:t>· </a:t>
-            </a:r>
-            <a:r>
-              <a:rPr lang="zh-CN" sz="1400" b="1" u="none" strike="noStrike">
-                <a:solidFill>
-                  <a:srgbClr val="FFFFFF"/>
-                </a:solidFill>
-                <a:uFillTx/>
-                <a:latin typeface="Noto Sans SC"/>
-                <a:ea typeface="Noto Sans SC"/>
-              </a:rPr>
-              <a:t>测试修复</a:t>
-            </a:r>
-            <a:endParaRPr lang="en-US" sz="1400" b="0" u="none" strike="noStrike">
-              <a:solidFill>
-                <a:srgbClr val="FFFFFF"/>
-              </a:solidFill>
-              <a:uFillTx/>
-              <a:latin typeface="Noto Sans CJK SC"/>
-            </a:endParaRPr>
-          </a:p>
-        </p:txBody>
-      </p:sp>
-      <p:cxnSp>
-        <p:nvCxnSpPr>
-          <p:cNvPr id="287" name="Connector 43"/>
-          <p:cNvCxnSpPr/>
-          <p:nvPr/>
-        </p:nvCxnSpPr>
-        <p:spPr>
-          <a:xfrm>
-            <a:off x="6603840" y="5079960"/>
-            <a:ext cx="2286360" cy="360"/>
-          </a:xfrm>
-          <a:prstGeom prst="straightConnector1">
-            <a:avLst/>
-          </a:prstGeom>
-          <a:ln w="12700">
-            <a:solidFill>
-              <a:srgbClr val="FFFFFF">
-                <a:alpha val="15000"/>
-              </a:srgbClr>
-            </a:solidFill>
-            <a:round/>
-          </a:ln>
-        </p:spPr>
-      </p:cxnSp>
-      <p:sp>
-        <p:nvSpPr>
-          <p:cNvPr id="288" name="AutoShape 44"/>
-          <p:cNvSpPr/>
-          <p:nvPr/>
-        </p:nvSpPr>
-        <p:spPr>
-          <a:xfrm>
-            <a:off x="6603840" y="5207040"/>
-            <a:ext cx="2285640" cy="825120"/>
-          </a:xfrm>
-          <a:prstGeom prst="rect">
-            <a:avLst/>
-          </a:prstGeom>
-          <a:noFill/>
-          <a:ln w="12700">
-            <a:noFill/>
-          </a:ln>
-        </p:spPr>
-        <p:style>
-          <a:lnRef idx="0">
-            <a:scrgbClr r="0" g="0" b="0"/>
-          </a:lnRef>
-          <a:fillRef idx="0">
-            <a:scrgbClr r="0" g="0" b="0"/>
-          </a:fillRef>
-          <a:effectRef idx="0">
-            <a:scrgbClr r="0" g="0" b="0"/>
-          </a:effectRef>
-          <a:fontRef idx="minor"/>
-        </p:style>
-        <p:txBody>
-          <a:bodyPr lIns="0" tIns="0" rIns="0" bIns="0" anchor="ctr">
-            <a:noAutofit/>
-          </a:bodyPr>
-          <a:lstStyle/>
-          <a:p>
-            <a:pPr>
-              <a:lnSpc>
-                <a:spcPct val="108000"/>
-              </a:lnSpc>
-              <a:tabLst>
-                <a:tab pos="0" algn="l"/>
-              </a:tabLst>
-            </a:pPr>
-            <a:r>
-              <a:rPr lang="zh-CN" sz="1100" b="0" u="none" strike="noStrike">
-                <a:solidFill>
-                  <a:srgbClr val="FFFFFF">
-                    <a:alpha val="70000"/>
-                  </a:srgbClr>
-                </a:solidFill>
-                <a:uFillTx/>
-                <a:latin typeface="Noto Sans SC"/>
-                <a:ea typeface="Noto Sans SC"/>
-              </a:rPr>
-              <a:t>全员参与联调与</a:t>
-            </a:r>
-            <a:r>
-              <a:rPr lang="en-US" sz="1100" b="0" u="none" strike="noStrike">
-                <a:solidFill>
-                  <a:srgbClr val="FFFFFF">
-                    <a:alpha val="70000"/>
-                  </a:srgbClr>
-                </a:solidFill>
-                <a:uFillTx/>
-                <a:latin typeface="Noto Sans SC"/>
-                <a:ea typeface="Noto Sans SC"/>
-              </a:rPr>
-              <a:t>Bug</a:t>
-            </a:r>
-            <a:r>
-              <a:rPr lang="zh-CN" sz="1100" b="0" u="none" strike="noStrike">
-                <a:solidFill>
-                  <a:srgbClr val="FFFFFF">
-                    <a:alpha val="70000"/>
-                  </a:srgbClr>
-                </a:solidFill>
-                <a:uFillTx/>
-                <a:latin typeface="Noto Sans SC"/>
-                <a:ea typeface="Noto Sans SC"/>
-              </a:rPr>
-              <a:t>排查，重点修复跨模块兼容性问题，输出详细的</a:t>
-            </a:r>
-            <a:r>
-              <a:rPr lang="en-US" sz="1100" b="0" u="none" strike="noStrike">
-                <a:solidFill>
-                  <a:srgbClr val="FFFFFF">
-                    <a:alpha val="70000"/>
-                  </a:srgbClr>
-                </a:solidFill>
-                <a:uFillTx/>
-                <a:latin typeface="Noto Sans SC"/>
-                <a:ea typeface="Noto Sans SC"/>
-              </a:rPr>
-              <a:t>Bug</a:t>
-            </a:r>
-            <a:r>
-              <a:rPr lang="zh-CN" sz="1100" b="0" u="none" strike="noStrike">
-                <a:solidFill>
-                  <a:srgbClr val="FFFFFF">
-                    <a:alpha val="70000"/>
-                  </a:srgbClr>
-                </a:solidFill>
-                <a:uFillTx/>
-                <a:latin typeface="Noto Sans SC"/>
-                <a:ea typeface="Noto Sans SC"/>
-              </a:rPr>
-              <a:t>修复报告与测试日志，确保项目稳定性。</a:t>
-            </a:r>
-            <a:endParaRPr lang="en-US" sz="1100" b="0" u="none" strike="noStrike">
-              <a:solidFill>
-                <a:srgbClr val="FFFFFF"/>
-              </a:solidFill>
-              <a:uFillTx/>
-              <a:latin typeface="Noto Sans CJK SC"/>
-            </a:endParaRPr>
-          </a:p>
-        </p:txBody>
-      </p:sp>
-      <p:sp>
-        <p:nvSpPr>
-          <p:cNvPr id="289" name="AutoShape 45"/>
-          <p:cNvSpPr/>
-          <p:nvPr/>
-        </p:nvSpPr>
-        <p:spPr>
-          <a:xfrm>
-            <a:off x="9144000" y="4444920"/>
-            <a:ext cx="2603160" cy="1714320"/>
+            <a:off x="6603840" y="2286000"/>
+            <a:ext cx="50400" cy="952200"/>
           </a:xfrm>
           <a:prstGeom prst="roundRect">
             <a:avLst>
@@ -12740,17 +10399,10 @@
             </a:avLst>
           </a:prstGeom>
           <a:solidFill>
-            <a:srgbClr val="FFFFFF">
-              <a:alpha val="8000"/>
-            </a:srgbClr>
+            <a:srgbClr val="EC4899"/>
           </a:solidFill>
-          <a:ln w="12700">
-            <a:solidFill>
-              <a:srgbClr val="2BD1FC">
-                <a:alpha val="40000"/>
-              </a:srgbClr>
-            </a:solidFill>
-            <a:round/>
+          <a:ln w="25400">
+            <a:noFill/>
           </a:ln>
         </p:spPr>
         <p:style>
@@ -12766,7 +10418,7 @@
           <a:fontRef idx="minor"/>
         </p:style>
         <p:txBody>
-          <a:bodyPr lIns="63360" tIns="63360" rIns="63360" bIns="63360" anchor="ctr">
+          <a:bodyPr lIns="25200" tIns="63360" rIns="25200" bIns="63360" anchor="ctr">
             <a:noAutofit/>
           </a:bodyPr>
           <a:lstStyle/>
@@ -12787,46 +10439,16 @@
           </a:p>
         </p:txBody>
       </p:sp>
-      <p:pic>
-        <p:nvPicPr>
-          <p:cNvPr id="290" name="Picture 46"/>
-          <p:cNvPicPr/>
-          <p:nvPr/>
-        </p:nvPicPr>
-        <p:blipFill>
-          <a:blip r:embed="rId12">
-            <a:extLst>
-              <a:ext uri="{96DAC541-7B7A-43D3-8B79-37D633B846F1}">
-                <asvg:svgBlip xmlns:asvg="http://schemas.microsoft.com/office/drawing/2016/SVG/main" r:embed="rId13"/>
-              </a:ext>
-            </a:extLst>
-          </a:blip>
-          <a:stretch/>
-        </p:blipFill>
-        <p:spPr>
-          <a:xfrm>
-            <a:off x="9271080" y="4572000"/>
-            <a:ext cx="304560" cy="304560"/>
-          </a:xfrm>
-          <a:prstGeom prst="rect">
-            <a:avLst/>
-          </a:prstGeom>
-          <a:noFill/>
-          <a:ln w="0">
-            <a:noFill/>
-          </a:ln>
-        </p:spPr>
-      </p:pic>
-      <p:sp>
-        <p:nvSpPr>
-          <p:cNvPr id="291" name="AutoShape 47"/>
+      <p:sp>
+        <p:nvSpPr>
+          <p:cNvPr id="315" name="AutoShape 23"/>
           <p:cNvSpPr/>
           <p:nvPr/>
         </p:nvSpPr>
         <p:spPr>
           <a:xfrm>
-            <a:off x="9651960" y="4572000"/>
-            <a:ext cx="1968120" cy="304560"/>
+            <a:off x="6794640" y="2349360"/>
+            <a:ext cx="4635000" cy="825120"/>
           </a:xfrm>
           <a:prstGeom prst="rect">
             <a:avLst/>
@@ -12863,7 +10485,7 @@
               </a:tabLst>
             </a:pPr>
             <a:r>
-              <a:rPr lang="zh-CN" sz="1400" b="1" u="none" strike="noStrike">
+              <a:rPr lang="zh-CN" sz="1500" b="1" u="none" strike="noStrike">
                 <a:solidFill>
                   <a:srgbClr val="FFFFFF"/>
                 </a:solidFill>
@@ -12871,53 +10493,35 @@
                 <a:latin typeface="Noto Sans SC"/>
                 <a:ea typeface="Noto Sans SC"/>
               </a:rPr>
-              <a:t>第</a:t>
-            </a:r>
-            <a:r>
-              <a:rPr lang="en-US" sz="1400" b="1" u="none" strike="noStrike">
-                <a:solidFill>
-                  <a:srgbClr val="FFFFFF"/>
-                </a:solidFill>
-                <a:uFillTx/>
-                <a:latin typeface="Noto Sans SC"/>
-                <a:ea typeface="Noto Sans SC"/>
-              </a:rPr>
-              <a:t>3</a:t>
-            </a:r>
-            <a:r>
-              <a:rPr lang="zh-CN" sz="1400" b="1" u="none" strike="noStrike">
-                <a:solidFill>
-                  <a:srgbClr val="FFFFFF"/>
-                </a:solidFill>
-                <a:uFillTx/>
-                <a:latin typeface="Noto Sans SC"/>
-                <a:ea typeface="Noto Sans SC"/>
-              </a:rPr>
-              <a:t>周末 </a:t>
-            </a:r>
-            <a:r>
-              <a:rPr lang="en-US" sz="1400" b="1" u="none" strike="noStrike">
-                <a:solidFill>
-                  <a:srgbClr val="FFFFFF"/>
-                </a:solidFill>
-                <a:uFillTx/>
-                <a:latin typeface="Noto Sans SC"/>
-                <a:ea typeface="Noto Sans SC"/>
-              </a:rPr>
-              <a:t>· </a:t>
-            </a:r>
-            <a:r>
-              <a:rPr lang="zh-CN" sz="1400" b="1" u="none" strike="noStrike">
-                <a:solidFill>
-                  <a:srgbClr val="FFFFFF"/>
-                </a:solidFill>
-                <a:uFillTx/>
-                <a:latin typeface="Noto Sans SC"/>
-                <a:ea typeface="Noto Sans SC"/>
-              </a:rPr>
-              <a:t>文档交付</a:t>
-            </a:r>
-            <a:endParaRPr lang="en-US" sz="1400" b="0" u="none" strike="noStrike">
+              <a:t>碰撞检测精度优化</a:t>
+            </a:r>
+            <a:r>
+              <a:rPr lang="en-US" sz="1300" b="0" u="none" strike="noStrike">
+                <a:solidFill>
+                  <a:srgbClr val="FFFFFF">
+                    <a:alpha val="60000"/>
+                  </a:srgbClr>
+                </a:solidFill>
+                <a:uFillTx/>
+                <a:latin typeface="Noto Sans SC"/>
+                <a:ea typeface="Noto Sans SC"/>
+              </a:rPr>
+              <a:t>| </a:t>
+            </a:r>
+            <a:r>
+              <a:rPr lang="zh-CN" sz="1300" b="0" u="none" strike="noStrike">
+                <a:solidFill>
+                  <a:srgbClr val="FFFFFF">
+                    <a:alpha val="60000"/>
+                  </a:srgbClr>
+                </a:solidFill>
+                <a:uFillTx/>
+                <a:latin typeface="Noto Sans SC"/>
+                <a:ea typeface="Noto Sans SC"/>
+              </a:rPr>
+              <a:t>负责人：李少华</a:t>
+            </a:r>
+            <a:endParaRPr lang="en-US" sz="1300" b="0" u="none" strike="noStrike">
               <a:solidFill>
                 <a:srgbClr val="FFFFFF"/>
               </a:solidFill>
@@ -12925,48 +10529,86 @@
               <a:latin typeface="Noto Sans CJK SC"/>
             </a:endParaRPr>
           </a:p>
-        </p:txBody>
-      </p:sp>
-      <p:cxnSp>
-        <p:nvCxnSpPr>
-          <p:cNvPr id="292" name="Connector 48"/>
-          <p:cNvCxnSpPr/>
-          <p:nvPr/>
-        </p:nvCxnSpPr>
-        <p:spPr>
-          <a:xfrm>
-            <a:off x="9270720" y="5079960"/>
-            <a:ext cx="2350080" cy="360"/>
-          </a:xfrm>
-          <a:prstGeom prst="straightConnector1">
-            <a:avLst/>
-          </a:prstGeom>
-          <a:ln w="12700">
-            <a:solidFill>
-              <a:srgbClr val="FFFFFF">
-                <a:alpha val="15000"/>
-              </a:srgbClr>
-            </a:solidFill>
-            <a:round/>
-          </a:ln>
-        </p:spPr>
-      </p:cxnSp>
-      <p:sp>
-        <p:nvSpPr>
-          <p:cNvPr id="293" name="AutoShape 49"/>
+          <a:p>
+            <a:pPr>
+              <a:lnSpc>
+                <a:spcPct val="117000"/>
+              </a:lnSpc>
+              <a:tabLst>
+                <a:tab pos="0" algn="l"/>
+              </a:tabLst>
+            </a:pPr>
+            <a:r>
+              <a:rPr lang="zh-CN" sz="1200" b="0" u="none" strike="noStrike">
+                <a:solidFill>
+                  <a:srgbClr val="FFFFFF">
+                    <a:alpha val="80000"/>
+                  </a:srgbClr>
+                </a:solidFill>
+                <a:uFillTx/>
+                <a:latin typeface="Noto Sans SC"/>
+                <a:ea typeface="Noto Sans SC"/>
+              </a:rPr>
+              <a:t>采用</a:t>
+            </a:r>
+            <a:r>
+              <a:rPr lang="en-US" sz="1200" b="0" u="none" strike="noStrike">
+                <a:solidFill>
+                  <a:srgbClr val="FFFFFF">
+                    <a:alpha val="80000"/>
+                  </a:srgbClr>
+                </a:solidFill>
+                <a:uFillTx/>
+                <a:latin typeface="Noto Sans SC"/>
+                <a:ea typeface="Noto Sans SC"/>
+              </a:rPr>
+              <a:t>AABB</a:t>
+            </a:r>
+            <a:r>
+              <a:rPr lang="zh-CN" sz="1200" b="0" u="none" strike="noStrike">
+                <a:solidFill>
+                  <a:srgbClr val="FFFFFF">
+                    <a:alpha val="80000"/>
+                  </a:srgbClr>
+                </a:solidFill>
+                <a:uFillTx/>
+                <a:latin typeface="Noto Sans SC"/>
+                <a:ea typeface="Noto Sans SC"/>
+              </a:rPr>
+              <a:t>轴对齐包围盒算法，配合边界补偿机制，解决复杂场景下的误判与穿透问题，提升物理交互的真实感。</a:t>
+            </a:r>
+            <a:endParaRPr lang="en-US" sz="1200" b="0" u="none" strike="noStrike">
+              <a:solidFill>
+                <a:srgbClr val="FFFFFF"/>
+              </a:solidFill>
+              <a:uFillTx/>
+              <a:latin typeface="Noto Sans CJK SC"/>
+            </a:endParaRPr>
+          </a:p>
+        </p:txBody>
+      </p:sp>
+      <p:sp>
+        <p:nvSpPr>
+          <p:cNvPr id="316" name="AutoShape 24"/>
           <p:cNvSpPr/>
           <p:nvPr/>
         </p:nvSpPr>
         <p:spPr>
           <a:xfrm>
-            <a:off x="9271080" y="5207040"/>
-            <a:ext cx="2349000" cy="825120"/>
-          </a:xfrm>
-          <a:prstGeom prst="rect">
-            <a:avLst/>
-          </a:prstGeom>
-          <a:noFill/>
-          <a:ln w="12700">
+            <a:off x="6603840" y="3429000"/>
+            <a:ext cx="4952520" cy="952200"/>
+          </a:xfrm>
+          <a:prstGeom prst="roundRect">
+            <a:avLst>
+              <a:gd name="adj" fmla="val 0"/>
+            </a:avLst>
+          </a:prstGeom>
+          <a:solidFill>
+            <a:srgbClr val="FFFFFF">
+              <a:alpha val="5000"/>
+            </a:srgbClr>
+          </a:solidFill>
+          <a:ln w="25400">
             <a:noFill/>
           </a:ln>
         </p:spPr>
@@ -12983,6 +10625,116 @@
           <a:fontRef idx="minor"/>
         </p:style>
         <p:txBody>
+          <a:bodyPr lIns="63360" tIns="63360" rIns="63360" bIns="63360" anchor="ctr">
+            <a:noAutofit/>
+          </a:bodyPr>
+          <a:lstStyle/>
+          <a:p>
+            <a:pPr algn="ctr">
+              <a:lnSpc>
+                <a:spcPct val="100000"/>
+              </a:lnSpc>
+            </a:pPr>
+            <a:endParaRPr lang="en-US" sz="1400" b="0" u="none" strike="noStrike">
+              <a:solidFill>
+                <a:srgbClr val="000000"/>
+              </a:solidFill>
+              <a:uFillTx/>
+              <a:latin typeface="Arial"/>
+              <a:ea typeface="Arial"/>
+            </a:endParaRPr>
+          </a:p>
+        </p:txBody>
+      </p:sp>
+      <p:sp>
+        <p:nvSpPr>
+          <p:cNvPr id="317" name="AutoShape 25"/>
+          <p:cNvSpPr/>
+          <p:nvPr/>
+        </p:nvSpPr>
+        <p:spPr>
+          <a:xfrm>
+            <a:off x="6603840" y="3429000"/>
+            <a:ext cx="50400" cy="952200"/>
+          </a:xfrm>
+          <a:prstGeom prst="roundRect">
+            <a:avLst>
+              <a:gd name="adj" fmla="val 0"/>
+            </a:avLst>
+          </a:prstGeom>
+          <a:solidFill>
+            <a:srgbClr val="A855F7"/>
+          </a:solidFill>
+          <a:ln w="25400">
+            <a:noFill/>
+          </a:ln>
+        </p:spPr>
+        <p:style>
+          <a:lnRef idx="0">
+            <a:scrgbClr r="0" g="0" b="0"/>
+          </a:lnRef>
+          <a:fillRef idx="0">
+            <a:scrgbClr r="0" g="0" b="0"/>
+          </a:fillRef>
+          <a:effectRef idx="0">
+            <a:scrgbClr r="0" g="0" b="0"/>
+          </a:effectRef>
+          <a:fontRef idx="minor"/>
+        </p:style>
+        <p:txBody>
+          <a:bodyPr lIns="25200" tIns="63360" rIns="25200" bIns="63360" anchor="ctr">
+            <a:noAutofit/>
+          </a:bodyPr>
+          <a:lstStyle/>
+          <a:p>
+            <a:pPr algn="ctr">
+              <a:lnSpc>
+                <a:spcPct val="100000"/>
+              </a:lnSpc>
+            </a:pPr>
+            <a:endParaRPr lang="en-US" sz="1400" b="0" u="none" strike="noStrike">
+              <a:solidFill>
+                <a:srgbClr val="000000"/>
+              </a:solidFill>
+              <a:uFillTx/>
+              <a:latin typeface="Arial"/>
+              <a:ea typeface="Arial"/>
+            </a:endParaRPr>
+          </a:p>
+        </p:txBody>
+      </p:sp>
+      <p:sp>
+        <p:nvSpPr>
+          <p:cNvPr id="318" name="AutoShape 26"/>
+          <p:cNvSpPr/>
+          <p:nvPr/>
+        </p:nvSpPr>
+        <p:spPr>
+          <a:xfrm>
+            <a:off x="6794640" y="3492360"/>
+            <a:ext cx="4635000" cy="825120"/>
+          </a:xfrm>
+          <a:prstGeom prst="rect">
+            <a:avLst/>
+          </a:prstGeom>
+          <a:noFill/>
+          <a:ln w="12700">
+            <a:noFill/>
+          </a:ln>
+        </p:spPr>
+        <p:style>
+          <a:lnRef idx="0">
+            <a:scrgbClr r="0" g="0" b="0"/>
+          </a:lnRef>
+          <a:fillRef idx="0">
+            <a:scrgbClr r="0" g="0" b="0"/>
+          </a:fillRef>
+          <a:effectRef idx="0">
+            <a:scrgbClr r="0" g="0" b="0"/>
+          </a:effectRef>
+          <a:fontRef idx="minor"/>
+        </p:style>
+        <p:txBody>
           <a:bodyPr lIns="0" tIns="0" rIns="0" bIns="0" anchor="ctr">
             <a:noAutofit/>
           </a:bodyPr>
@@ -12990,52 +10742,438 @@
           <a:p>
             <a:pPr>
               <a:lnSpc>
-                <a:spcPct val="108000"/>
+                <a:spcPct val="125000"/>
               </a:lnSpc>
               <a:tabLst>
                 <a:tab pos="0" algn="l"/>
               </a:tabLst>
             </a:pPr>
             <a:r>
-              <a:rPr lang="zh-CN" sz="1100" b="0" u="none" strike="noStrike">
+              <a:rPr lang="zh-CN" sz="1500" b="1" u="none" strike="noStrike">
+                <a:solidFill>
+                  <a:srgbClr val="FFFFFF"/>
+                </a:solidFill>
+                <a:uFillTx/>
+                <a:latin typeface="Noto Sans SC"/>
+                <a:ea typeface="Noto Sans SC"/>
+              </a:rPr>
+              <a:t>复杂形变与状态管理</a:t>
+            </a:r>
+            <a:r>
+              <a:rPr lang="en-US" sz="1300" b="0" u="none" strike="noStrike">
                 <a:solidFill>
                   <a:srgbClr val="FFFFFF">
-                    <a:alpha val="70000"/>
+                    <a:alpha val="60000"/>
                   </a:srgbClr>
                 </a:solidFill>
                 <a:uFillTx/>
                 <a:latin typeface="Noto Sans SC"/>
                 <a:ea typeface="Noto Sans SC"/>
               </a:rPr>
-              <a:t>贾耀翔整理最终需求文档、项目说明</a:t>
-            </a:r>
-            <a:r>
-              <a:rPr lang="en-US" sz="1100" b="0" u="none" strike="noStrike">
+              <a:t>| </a:t>
+            </a:r>
+            <a:r>
+              <a:rPr lang="zh-CN" sz="1300" b="0" u="none" strike="noStrike">
                 <a:solidFill>
                   <a:srgbClr val="FFFFFF">
-                    <a:alpha val="70000"/>
+                    <a:alpha val="60000"/>
                   </a:srgbClr>
                 </a:solidFill>
                 <a:uFillTx/>
                 <a:latin typeface="Noto Sans SC"/>
                 <a:ea typeface="Noto Sans SC"/>
               </a:rPr>
-              <a:t>PPT</a:t>
-            </a:r>
-            <a:r>
-              <a:rPr lang="zh-CN" sz="1100" b="0" u="none" strike="noStrike">
+              <a:t>负责人：李振豪</a:t>
+            </a:r>
+            <a:endParaRPr lang="en-US" sz="1300" b="0" u="none" strike="noStrike">
+              <a:solidFill>
+                <a:srgbClr val="FFFFFF"/>
+              </a:solidFill>
+              <a:uFillTx/>
+              <a:latin typeface="Noto Sans CJK SC"/>
+            </a:endParaRPr>
+          </a:p>
+          <a:p>
+            <a:pPr>
+              <a:lnSpc>
+                <a:spcPct val="117000"/>
+              </a:lnSpc>
+              <a:tabLst>
+                <a:tab pos="0" algn="l"/>
+              </a:tabLst>
+            </a:pPr>
+            <a:r>
+              <a:rPr lang="zh-CN" sz="1200" b="0" u="none" strike="noStrike">
                 <a:solidFill>
                   <a:srgbClr val="FFFFFF">
-                    <a:alpha val="70000"/>
+                    <a:alpha val="80000"/>
                   </a:srgbClr>
                 </a:solidFill>
                 <a:uFillTx/>
                 <a:latin typeface="Noto Sans SC"/>
                 <a:ea typeface="Noto Sans SC"/>
               </a:rPr>
-              <a:t>及演示素材，完成所有交付物归档，准备项目最终验收与成果展示汇报。</a:t>
-            </a:r>
-            <a:endParaRPr lang="en-US" sz="1100" b="0" u="none" strike="noStrike">
+              <a:t>俄罗斯方块通过矩阵旋转</a:t>
+            </a:r>
+            <a:r>
+              <a:rPr lang="en-US" sz="1200" b="0" u="none" strike="noStrike">
+                <a:solidFill>
+                  <a:srgbClr val="FFFFFF">
+                    <a:alpha val="80000"/>
+                  </a:srgbClr>
+                </a:solidFill>
+                <a:uFillTx/>
+                <a:latin typeface="Noto Sans SC"/>
+                <a:ea typeface="Noto Sans SC"/>
+              </a:rPr>
+              <a:t>+</a:t>
+            </a:r>
+            <a:r>
+              <a:rPr lang="zh-CN" sz="1200" b="0" u="none" strike="noStrike">
+                <a:solidFill>
+                  <a:srgbClr val="FFFFFF">
+                    <a:alpha val="80000"/>
+                  </a:srgbClr>
+                </a:solidFill>
+                <a:uFillTx/>
+                <a:latin typeface="Noto Sans SC"/>
+                <a:ea typeface="Noto Sans SC"/>
+              </a:rPr>
+              <a:t>踢墙检测处理边界；五子棋利用四方向向量遍历算法实现</a:t>
+            </a:r>
+            <a:r>
+              <a:rPr lang="en-US" sz="1200" b="0" u="none" strike="noStrike">
+                <a:solidFill>
+                  <a:srgbClr val="FFFFFF">
+                    <a:alpha val="80000"/>
+                  </a:srgbClr>
+                </a:solidFill>
+                <a:uFillTx/>
+                <a:latin typeface="Noto Sans SC"/>
+                <a:ea typeface="Noto Sans SC"/>
+              </a:rPr>
+              <a:t>O(1)</a:t>
+            </a:r>
+            <a:r>
+              <a:rPr lang="zh-CN" sz="1200" b="0" u="none" strike="noStrike">
+                <a:solidFill>
+                  <a:srgbClr val="FFFFFF">
+                    <a:alpha val="80000"/>
+                  </a:srgbClr>
+                </a:solidFill>
+                <a:uFillTx/>
+                <a:latin typeface="Noto Sans SC"/>
+                <a:ea typeface="Noto Sans SC"/>
+              </a:rPr>
+              <a:t>时间复杂度的胜利判定逻辑。</a:t>
+            </a:r>
+            <a:endParaRPr lang="en-US" sz="1200" b="0" u="none" strike="noStrike">
+              <a:solidFill>
+                <a:srgbClr val="FFFFFF"/>
+              </a:solidFill>
+              <a:uFillTx/>
+              <a:latin typeface="Noto Sans CJK SC"/>
+            </a:endParaRPr>
+          </a:p>
+        </p:txBody>
+      </p:sp>
+      <p:sp>
+        <p:nvSpPr>
+          <p:cNvPr id="319" name="AutoShape 27"/>
+          <p:cNvSpPr/>
+          <p:nvPr/>
+        </p:nvSpPr>
+        <p:spPr>
+          <a:xfrm>
+            <a:off x="6603840" y="4572000"/>
+            <a:ext cx="4952520" cy="952200"/>
+          </a:xfrm>
+          <a:prstGeom prst="roundRect">
+            <a:avLst>
+              <a:gd name="adj" fmla="val 0"/>
+            </a:avLst>
+          </a:prstGeom>
+          <a:solidFill>
+            <a:srgbClr val="FFFFFF">
+              <a:alpha val="5000"/>
+            </a:srgbClr>
+          </a:solidFill>
+          <a:ln w="25400">
+            <a:noFill/>
+          </a:ln>
+        </p:spPr>
+        <p:style>
+          <a:lnRef idx="0">
+            <a:scrgbClr r="0" g="0" b="0"/>
+          </a:lnRef>
+          <a:fillRef idx="0">
+            <a:scrgbClr r="0" g="0" b="0"/>
+          </a:fillRef>
+          <a:effectRef idx="0">
+            <a:scrgbClr r="0" g="0" b="0"/>
+          </a:effectRef>
+          <a:fontRef idx="minor"/>
+        </p:style>
+        <p:txBody>
+          <a:bodyPr lIns="63360" tIns="63360" rIns="63360" bIns="63360" anchor="ctr">
+            <a:noAutofit/>
+          </a:bodyPr>
+          <a:lstStyle/>
+          <a:p>
+            <a:pPr algn="ctr">
+              <a:lnSpc>
+                <a:spcPct val="100000"/>
+              </a:lnSpc>
+            </a:pPr>
+            <a:endParaRPr lang="en-US" sz="1400" b="0" u="none" strike="noStrike">
+              <a:solidFill>
+                <a:srgbClr val="000000"/>
+              </a:solidFill>
+              <a:uFillTx/>
+              <a:latin typeface="Arial"/>
+              <a:ea typeface="Arial"/>
+            </a:endParaRPr>
+          </a:p>
+        </p:txBody>
+      </p:sp>
+      <p:sp>
+        <p:nvSpPr>
+          <p:cNvPr id="320" name="AutoShape 28"/>
+          <p:cNvSpPr/>
+          <p:nvPr/>
+        </p:nvSpPr>
+        <p:spPr>
+          <a:xfrm>
+            <a:off x="6603840" y="4572000"/>
+            <a:ext cx="50400" cy="952200"/>
+          </a:xfrm>
+          <a:prstGeom prst="roundRect">
+            <a:avLst>
+              <a:gd name="adj" fmla="val 0"/>
+            </a:avLst>
+          </a:prstGeom>
+          <a:solidFill>
+            <a:srgbClr val="EAB308"/>
+          </a:solidFill>
+          <a:ln w="25400">
+            <a:noFill/>
+          </a:ln>
+        </p:spPr>
+        <p:style>
+          <a:lnRef idx="0">
+            <a:scrgbClr r="0" g="0" b="0"/>
+          </a:lnRef>
+          <a:fillRef idx="0">
+            <a:scrgbClr r="0" g="0" b="0"/>
+          </a:fillRef>
+          <a:effectRef idx="0">
+            <a:scrgbClr r="0" g="0" b="0"/>
+          </a:effectRef>
+          <a:fontRef idx="minor"/>
+        </p:style>
+        <p:txBody>
+          <a:bodyPr lIns="25200" tIns="63360" rIns="25200" bIns="63360" anchor="ctr">
+            <a:noAutofit/>
+          </a:bodyPr>
+          <a:lstStyle/>
+          <a:p>
+            <a:pPr algn="ctr">
+              <a:lnSpc>
+                <a:spcPct val="100000"/>
+              </a:lnSpc>
+            </a:pPr>
+            <a:endParaRPr lang="en-US" sz="1400" b="0" u="none" strike="noStrike">
+              <a:solidFill>
+                <a:srgbClr val="000000"/>
+              </a:solidFill>
+              <a:uFillTx/>
+              <a:latin typeface="Arial"/>
+              <a:ea typeface="Arial"/>
+            </a:endParaRPr>
+          </a:p>
+        </p:txBody>
+      </p:sp>
+      <p:sp>
+        <p:nvSpPr>
+          <p:cNvPr id="321" name="AutoShape 29"/>
+          <p:cNvSpPr/>
+          <p:nvPr/>
+        </p:nvSpPr>
+        <p:spPr>
+          <a:xfrm>
+            <a:off x="6794640" y="4635360"/>
+            <a:ext cx="4635000" cy="825120"/>
+          </a:xfrm>
+          <a:prstGeom prst="rect">
+            <a:avLst/>
+          </a:prstGeom>
+          <a:noFill/>
+          <a:ln w="12700">
+            <a:noFill/>
+          </a:ln>
+        </p:spPr>
+        <p:style>
+          <a:lnRef idx="0">
+            <a:scrgbClr r="0" g="0" b="0"/>
+          </a:lnRef>
+          <a:fillRef idx="0">
+            <a:scrgbClr r="0" g="0" b="0"/>
+          </a:fillRef>
+          <a:effectRef idx="0">
+            <a:scrgbClr r="0" g="0" b="0"/>
+          </a:effectRef>
+          <a:fontRef idx="minor"/>
+        </p:style>
+        <p:txBody>
+          <a:bodyPr lIns="0" tIns="0" rIns="0" bIns="0" anchor="ctr">
+            <a:noAutofit/>
+          </a:bodyPr>
+          <a:lstStyle/>
+          <a:p>
+            <a:pPr>
+              <a:lnSpc>
+                <a:spcPct val="125000"/>
+              </a:lnSpc>
+              <a:tabLst>
+                <a:tab pos="0" algn="l"/>
+              </a:tabLst>
+            </a:pPr>
+            <a:r>
+              <a:rPr lang="zh-CN" sz="1500" b="1" u="none" strike="noStrike">
+                <a:solidFill>
+                  <a:srgbClr val="FFFFFF"/>
+                </a:solidFill>
+                <a:uFillTx/>
+                <a:latin typeface="Noto Sans SC"/>
+                <a:ea typeface="Noto Sans SC"/>
+              </a:rPr>
+              <a:t>数据解耦与系统整合</a:t>
+            </a:r>
+            <a:r>
+              <a:rPr lang="en-US" sz="1300" b="0" u="none" strike="noStrike">
+                <a:solidFill>
+                  <a:srgbClr val="FFFFFF">
+                    <a:alpha val="60000"/>
+                  </a:srgbClr>
+                </a:solidFill>
+                <a:uFillTx/>
+                <a:latin typeface="Noto Sans SC"/>
+                <a:ea typeface="Noto Sans SC"/>
+              </a:rPr>
+              <a:t>| </a:t>
+            </a:r>
+            <a:r>
+              <a:rPr lang="zh-CN" sz="1300" b="0" u="none" strike="noStrike">
+                <a:solidFill>
+                  <a:srgbClr val="FFFFFF">
+                    <a:alpha val="60000"/>
+                  </a:srgbClr>
+                </a:solidFill>
+                <a:uFillTx/>
+                <a:latin typeface="Noto Sans SC"/>
+                <a:ea typeface="Noto Sans SC"/>
+              </a:rPr>
+              <a:t>负责人：李想、李少华</a:t>
+            </a:r>
+            <a:endParaRPr lang="en-US" sz="1300" b="0" u="none" strike="noStrike">
+              <a:solidFill>
+                <a:srgbClr val="FFFFFF"/>
+              </a:solidFill>
+              <a:uFillTx/>
+              <a:latin typeface="Noto Sans CJK SC"/>
+            </a:endParaRPr>
+          </a:p>
+          <a:p>
+            <a:pPr>
+              <a:lnSpc>
+                <a:spcPct val="117000"/>
+              </a:lnSpc>
+              <a:tabLst>
+                <a:tab pos="0" algn="l"/>
+              </a:tabLst>
+            </a:pPr>
+            <a:r>
+              <a:rPr lang="zh-CN" sz="1200" b="0" u="none" strike="noStrike">
+                <a:solidFill>
+                  <a:srgbClr val="FFFFFF">
+                    <a:alpha val="80000"/>
+                  </a:srgbClr>
+                </a:solidFill>
+                <a:uFillTx/>
+                <a:latin typeface="Noto Sans SC"/>
+                <a:ea typeface="Noto Sans SC"/>
+              </a:rPr>
+              <a:t>推箱子关卡采用二维数组深拷贝管理状态回溯；制定统一接口规范，实现多游戏模块的插拔式加载与状态隔离。</a:t>
+            </a:r>
+            <a:endParaRPr lang="en-US" sz="1200" b="0" u="none" strike="noStrike">
+              <a:solidFill>
+                <a:srgbClr val="FFFFFF"/>
+              </a:solidFill>
+              <a:uFillTx/>
+              <a:latin typeface="Noto Sans CJK SC"/>
+            </a:endParaRPr>
+          </a:p>
+        </p:txBody>
+      </p:sp>
+      <p:sp>
+        <p:nvSpPr>
+          <p:cNvPr id="322" name="AutoShape 30"/>
+          <p:cNvSpPr/>
+          <p:nvPr/>
+        </p:nvSpPr>
+        <p:spPr>
+          <a:xfrm>
+            <a:off x="6603840" y="5778360"/>
+            <a:ext cx="4952520" cy="761760"/>
+          </a:xfrm>
+          <a:prstGeom prst="rect">
+            <a:avLst/>
+          </a:prstGeom>
+          <a:noFill/>
+          <a:ln w="12700">
+            <a:noFill/>
+          </a:ln>
+        </p:spPr>
+        <p:style>
+          <a:lnRef idx="0">
+            <a:scrgbClr r="0" g="0" b="0"/>
+          </a:lnRef>
+          <a:fillRef idx="0">
+            <a:scrgbClr r="0" g="0" b="0"/>
+          </a:fillRef>
+          <a:effectRef idx="0">
+            <a:scrgbClr r="0" g="0" b="0"/>
+          </a:effectRef>
+          <a:fontRef idx="minor"/>
+        </p:style>
+        <p:txBody>
+          <a:bodyPr lIns="0" tIns="0" rIns="0" bIns="0" anchor="ctr">
+            <a:noAutofit/>
+          </a:bodyPr>
+          <a:lstStyle/>
+          <a:p>
+            <a:pPr>
+              <a:lnSpc>
+                <a:spcPct val="117000"/>
+              </a:lnSpc>
+              <a:tabLst>
+                <a:tab pos="0" algn="l"/>
+              </a:tabLst>
+            </a:pPr>
+            <a:r>
+              <a:rPr lang="zh-CN" sz="1200" b="0" u="none" strike="noStrike">
+                <a:solidFill>
+                  <a:srgbClr val="FFFFFF">
+                    <a:alpha val="60000"/>
+                  </a:srgbClr>
+                </a:solidFill>
+                <a:uFillTx/>
+                <a:latin typeface="Noto Sans SC"/>
+                <a:ea typeface="Noto Sans SC"/>
+              </a:rPr>
+              <a:t>通过标准化接口与算法选型，团队攻克了底层技术难题，不仅保证了游戏运行的稳定性，也为后续功能扩展奠定了坚实基础。</a:t>
+            </a:r>
+            <a:endParaRPr lang="en-US" sz="1200" b="0" u="none" strike="noStrike">
               <a:solidFill>
                 <a:srgbClr val="FFFFFF"/>
               </a:solidFill>
@@ -13083,7 +11221,7 @@
       </p:grpSpPr>
       <p:sp>
         <p:nvSpPr>
-          <p:cNvPr id="294" name="AutoShape 2"/>
+          <p:cNvPr id="323" name="AutoShape 2"/>
           <p:cNvSpPr/>
           <p:nvPr/>
         </p:nvSpPr>
@@ -13098,8 +11236,8 @@
             </a:avLst>
           </a:prstGeom>
           <a:solidFill>
-            <a:srgbClr val="000000">
-              <a:alpha val="50000"/>
+            <a:srgbClr val="0F172A">
+              <a:alpha val="60000"/>
             </a:srgbClr>
           </a:solidFill>
           <a:ln w="25400">
@@ -13142,7 +11280,7 @@
       </p:sp>
       <p:sp>
         <p:nvSpPr>
-          <p:cNvPr id="295" name="AutoShape 3"/>
+          <p:cNvPr id="324" name="AutoShape 3"/>
           <p:cNvSpPr/>
           <p:nvPr/>
         </p:nvSpPr>
@@ -13194,7 +11332,7 @@
                 <a:latin typeface="Noto Sans SC"/>
                 <a:ea typeface="Noto Sans SC"/>
               </a:rPr>
-              <a:t>项目亮点与难点</a:t>
+              <a:t>代码仓库结构</a:t>
             </a:r>
             <a:endParaRPr lang="en-US" sz="3200" b="0" u="none" strike="noStrike">
               <a:solidFill>
@@ -13208,14 +11346,14 @@
       </p:sp>
       <p:sp>
         <p:nvSpPr>
-          <p:cNvPr id="296" name="AutoShape 4"/>
+          <p:cNvPr id="325" name="AutoShape 4"/>
           <p:cNvSpPr/>
           <p:nvPr/>
         </p:nvSpPr>
         <p:spPr>
           <a:xfrm>
-            <a:off x="762120" y="1650960"/>
-            <a:ext cx="5206680" cy="1460160"/>
+            <a:off x="762120" y="1778040"/>
+            <a:ext cx="5270040" cy="3682800"/>
           </a:xfrm>
           <a:prstGeom prst="roundRect">
             <a:avLst>
@@ -13223,14 +11361,14 @@
             </a:avLst>
           </a:prstGeom>
           <a:solidFill>
-            <a:srgbClr val="2BD1FC">
-              <a:alpha val="12000"/>
+            <a:srgbClr val="FFFFFF">
+              <a:alpha val="8000"/>
             </a:srgbClr>
           </a:solidFill>
           <a:ln w="12700">
             <a:solidFill>
               <a:srgbClr val="2BD1FC">
-                <a:alpha val="50000"/>
+                <a:alpha val="40000"/>
               </a:srgbClr>
             </a:solidFill>
             <a:round/>
@@ -13272,7 +11410,7 @@
       </p:sp>
       <p:pic>
         <p:nvPicPr>
-          <p:cNvPr id="297" name="Picture 5"/>
+          <p:cNvPr id="326" name="Picture 5"/>
           <p:cNvPicPr/>
           <p:nvPr/>
         </p:nvPicPr>
@@ -13288,8 +11426,8 @@
         </p:blipFill>
         <p:spPr>
           <a:xfrm>
-            <a:off x="952560" y="1841400"/>
-            <a:ext cx="456840" cy="456840"/>
+            <a:off x="1015920" y="1968480"/>
+            <a:ext cx="304560" cy="304560"/>
           </a:xfrm>
           <a:prstGeom prst="rect">
             <a:avLst/>
@@ -13302,14 +11440,14 @@
       </p:pic>
       <p:sp>
         <p:nvSpPr>
-          <p:cNvPr id="298" name="AutoShape 6"/>
+          <p:cNvPr id="327" name="AutoShape 6"/>
           <p:cNvSpPr/>
           <p:nvPr/>
         </p:nvSpPr>
         <p:spPr>
           <a:xfrm>
-            <a:off x="1650960" y="1778040"/>
-            <a:ext cx="4063680" cy="380520"/>
+            <a:off x="1460520" y="1930320"/>
+            <a:ext cx="4317480" cy="380520"/>
           </a:xfrm>
           <a:prstGeom prst="rect">
             <a:avLst/>
@@ -13354,7 +11492,7 @@
                 <a:latin typeface="Noto Sans SC"/>
                 <a:ea typeface="Noto Sans SC"/>
               </a:rPr>
-              <a:t>多游戏架构统一封装</a:t>
+              <a:t>模块化文件组织</a:t>
             </a:r>
             <a:endParaRPr lang="en-US" sz="1800" b="0" u="none" strike="noStrike">
               <a:solidFill>
@@ -13368,14 +11506,14 @@
       </p:sp>
       <p:cxnSp>
         <p:nvCxnSpPr>
-          <p:cNvPr id="299" name="Connector 7"/>
+          <p:cNvPr id="328" name="Connector 7"/>
           <p:cNvCxnSpPr/>
           <p:nvPr/>
         </p:nvCxnSpPr>
         <p:spPr>
           <a:xfrm>
-            <a:off x="952200" y="2412720"/>
-            <a:ext cx="4826520" cy="360"/>
+            <a:off x="1015920" y="2539800"/>
+            <a:ext cx="4762800" cy="360"/>
           </a:xfrm>
           <a:prstGeom prst="straightConnector1">
             <a:avLst/>
@@ -13383,7 +11521,7 @@
           <a:ln w="12700">
             <a:solidFill>
               <a:srgbClr val="FFFFFF">
-                <a:alpha val="20000"/>
+                <a:alpha val="15000"/>
               </a:srgbClr>
             </a:solidFill>
             <a:prstDash val="dash"/>
@@ -13393,14 +11531,14 @@
       </p:cxnSp>
       <p:sp>
         <p:nvSpPr>
-          <p:cNvPr id="300" name="AutoShape 8"/>
+          <p:cNvPr id="329" name="AutoShape 8"/>
           <p:cNvSpPr/>
           <p:nvPr/>
         </p:nvSpPr>
         <p:spPr>
           <a:xfrm>
-            <a:off x="952560" y="2540160"/>
-            <a:ext cx="4825800" cy="507600"/>
+            <a:off x="1015920" y="2793960"/>
+            <a:ext cx="4762080" cy="2412720"/>
           </a:xfrm>
           <a:prstGeom prst="rect">
             <a:avLst/>
@@ -13430,50 +11568,188 @@
           <a:p>
             <a:pPr>
               <a:lnSpc>
-                <a:spcPct val="108000"/>
+                <a:spcPct val="125000"/>
               </a:lnSpc>
               <a:tabLst>
                 <a:tab pos="0" algn="l"/>
               </a:tabLst>
             </a:pPr>
             <a:r>
+              <a:rPr lang="zh-CN" sz="1400" b="0" u="none" strike="noStrike">
+                <a:solidFill>
+                  <a:srgbClr val="E2E8F0"/>
+                </a:solidFill>
+                <a:uFillTx/>
+                <a:latin typeface="Noto Sans SC"/>
+                <a:ea typeface="Noto Sans SC"/>
+              </a:rPr>
+              <a:t>以</a:t>
+            </a:r>
+            <a:r>
+              <a:rPr lang="en-US" sz="1400" b="1" u="none" strike="noStrike">
+                <a:solidFill>
+                  <a:srgbClr val="E2E8F0"/>
+                </a:solidFill>
+                <a:uFillTx/>
+                <a:latin typeface="Noto Sans SC"/>
+                <a:ea typeface="Noto Sans SC"/>
+              </a:rPr>
+              <a:t>game-hub/</a:t>
+            </a:r>
+            <a:r>
+              <a:rPr lang="zh-CN" sz="1400" b="0" u="none" strike="noStrike">
+                <a:solidFill>
+                  <a:srgbClr val="E2E8F0"/>
+                </a:solidFill>
+                <a:uFillTx/>
+                <a:latin typeface="Noto Sans SC"/>
+                <a:ea typeface="Noto Sans SC"/>
+              </a:rPr>
+              <a:t>为根目录，入口文件</a:t>
+            </a:r>
+            <a:r>
+              <a:rPr lang="en-US" sz="1400" b="1" u="none" strike="noStrike">
+                <a:solidFill>
+                  <a:srgbClr val="E2E8F0"/>
+                </a:solidFill>
+                <a:uFillTx/>
+                <a:latin typeface="Noto Sans SC"/>
+                <a:ea typeface="Noto Sans SC"/>
+              </a:rPr>
+              <a:t>index.html</a:t>
+            </a:r>
+            <a:r>
+              <a:rPr lang="zh-CN" sz="1400" b="0" u="none" strike="noStrike">
+                <a:solidFill>
+                  <a:srgbClr val="E2E8F0"/>
+                </a:solidFill>
+                <a:uFillTx/>
+                <a:latin typeface="Noto Sans SC"/>
+                <a:ea typeface="Noto Sans SC"/>
+              </a:rPr>
+              <a:t>作为游戏回廊，统一调度所有游戏模块。每个游戏均为独立 </a:t>
+            </a:r>
+            <a:r>
+              <a:rPr lang="en-US" sz="1400" b="0" u="none" strike="noStrike">
+                <a:solidFill>
+                  <a:srgbClr val="E2E8F0"/>
+                </a:solidFill>
+                <a:uFillTx/>
+                <a:latin typeface="Noto Sans SC"/>
+                <a:ea typeface="Noto Sans SC"/>
+              </a:rPr>
+              <a:t>HTML </a:t>
+            </a:r>
+            <a:r>
+              <a:rPr lang="zh-CN" sz="1400" b="0" u="none" strike="noStrike">
+                <a:solidFill>
+                  <a:srgbClr val="E2E8F0"/>
+                </a:solidFill>
+                <a:uFillTx/>
+                <a:latin typeface="Noto Sans SC"/>
+                <a:ea typeface="Noto Sans SC"/>
+              </a:rPr>
+              <a:t>文件，按开发者职责划分，结构清晰易维护。资源集中存放于</a:t>
+            </a:r>
+            <a:r>
+              <a:rPr lang="en-US" sz="1400" b="1" u="none" strike="noStrike">
+                <a:solidFill>
+                  <a:srgbClr val="E2E8F0"/>
+                </a:solidFill>
+                <a:uFillTx/>
+                <a:latin typeface="Noto Sans SC"/>
+                <a:ea typeface="Noto Sans SC"/>
+              </a:rPr>
+              <a:t>assets/</a:t>
+            </a:r>
+            <a:r>
+              <a:rPr lang="zh-CN" sz="1400" b="0" u="none" strike="noStrike">
+                <a:solidFill>
+                  <a:srgbClr val="E2E8F0"/>
+                </a:solidFill>
+                <a:uFillTx/>
+                <a:latin typeface="Noto Sans SC"/>
+                <a:ea typeface="Noto Sans SC"/>
+              </a:rPr>
+              <a:t>，文档归档于</a:t>
+            </a:r>
+            <a:r>
+              <a:rPr lang="en-US" sz="1400" b="1" u="none" strike="noStrike">
+                <a:solidFill>
+                  <a:srgbClr val="E2E8F0"/>
+                </a:solidFill>
+                <a:uFillTx/>
+                <a:latin typeface="Noto Sans SC"/>
+                <a:ea typeface="Noto Sans SC"/>
+              </a:rPr>
+              <a:t>docs/</a:t>
+            </a:r>
+            <a:r>
+              <a:rPr lang="zh-CN" sz="1400" b="0" u="none" strike="noStrike">
+                <a:solidFill>
+                  <a:srgbClr val="E2E8F0"/>
+                </a:solidFill>
+                <a:uFillTx/>
+                <a:latin typeface="Noto Sans SC"/>
+                <a:ea typeface="Noto Sans SC"/>
+              </a:rPr>
+              <a:t>，确保项目工程化规范。</a:t>
+            </a:r>
+            <a:endParaRPr lang="en-US" sz="1400" b="0" u="none" strike="noStrike">
+              <a:solidFill>
+                <a:srgbClr val="FFFFFF"/>
+              </a:solidFill>
+              <a:uFillTx/>
+              <a:latin typeface="Noto Sans CJK SC"/>
+            </a:endParaRPr>
+          </a:p>
+          <a:p>
+            <a:pPr>
+              <a:lnSpc>
+                <a:spcPct val="125000"/>
+              </a:lnSpc>
+              <a:tabLst>
+                <a:tab pos="0" algn="l"/>
+              </a:tabLst>
+            </a:pPr>
+            <a:r>
               <a:rPr lang="zh-CN" sz="1300" b="0" u="none" strike="noStrike">
                 <a:solidFill>
                   <a:srgbClr val="FFFFFF">
-                    <a:alpha val="90000"/>
+                    <a:alpha val="60000"/>
                   </a:srgbClr>
                 </a:solidFill>
                 <a:uFillTx/>
                 <a:latin typeface="Noto Sans SC"/>
                 <a:ea typeface="Noto Sans SC"/>
               </a:rPr>
-              <a:t>将各游戏模块独立封装，通过统一入口整合调度；利用</a:t>
+              <a:t>分工：李玥峰（入口页）、李少华（</a:t>
             </a:r>
             <a:r>
               <a:rPr lang="en-US" sz="1300" b="0" u="none" strike="noStrike">
                 <a:solidFill>
                   <a:srgbClr val="FFFFFF">
-                    <a:alpha val="90000"/>
+                    <a:alpha val="60000"/>
                   </a:srgbClr>
                 </a:solidFill>
                 <a:uFillTx/>
                 <a:latin typeface="Noto Sans SC"/>
                 <a:ea typeface="Noto Sans SC"/>
               </a:rPr>
-              <a:t>LocalStorage</a:t>
+              <a:t>5</a:t>
             </a:r>
             <a:r>
               <a:rPr lang="zh-CN" sz="1300" b="0" u="none" strike="noStrike">
                 <a:solidFill>
                   <a:srgbClr val="FFFFFF">
-                    <a:alpha val="90000"/>
+                    <a:alpha val="60000"/>
                   </a:srgbClr>
                 </a:solidFill>
                 <a:uFillTx/>
                 <a:latin typeface="Noto Sans SC"/>
                 <a:ea typeface="Noto Sans SC"/>
               </a:rPr>
-              <a:t>实现用户最高分数据的持久化存储，确保数据不丢失。</a:t>
+              <a:t>款基础游戏）、李振豪（策略类游戏）。</a:t>
             </a:r>
             <a:endParaRPr lang="en-US" sz="1300" b="0" u="none" strike="noStrike">
               <a:solidFill>
@@ -13487,14 +11763,14 @@
       </p:sp>
       <p:sp>
         <p:nvSpPr>
-          <p:cNvPr id="301" name="AutoShape 9"/>
+          <p:cNvPr id="330" name="AutoShape 9"/>
           <p:cNvSpPr/>
           <p:nvPr/>
         </p:nvSpPr>
         <p:spPr>
           <a:xfrm>
-            <a:off x="762120" y="3365640"/>
-            <a:ext cx="5206680" cy="1460160"/>
+            <a:off x="6159600" y="1778040"/>
+            <a:ext cx="5270040" cy="3682800"/>
           </a:xfrm>
           <a:prstGeom prst="roundRect">
             <a:avLst>
@@ -13502,14 +11778,14 @@
             </a:avLst>
           </a:prstGeom>
           <a:solidFill>
-            <a:srgbClr val="2BD1FC">
-              <a:alpha val="12000"/>
+            <a:srgbClr val="FFFFFF">
+              <a:alpha val="8000"/>
             </a:srgbClr>
           </a:solidFill>
           <a:ln w="12700">
             <a:solidFill>
               <a:srgbClr val="2BD1FC">
-                <a:alpha val="50000"/>
+                <a:alpha val="40000"/>
               </a:srgbClr>
             </a:solidFill>
             <a:round/>
@@ -13551,7 +11827,7 @@
       </p:sp>
       <p:pic>
         <p:nvPicPr>
-          <p:cNvPr id="302" name="Picture 10"/>
+          <p:cNvPr id="331" name="Picture 10"/>
           <p:cNvPicPr/>
           <p:nvPr/>
         </p:nvPicPr>
@@ -13567,8 +11843,8 @@
         </p:blipFill>
         <p:spPr>
           <a:xfrm>
-            <a:off x="952560" y="3556080"/>
-            <a:ext cx="456840" cy="456840"/>
+            <a:off x="6413400" y="1968480"/>
+            <a:ext cx="304560" cy="304560"/>
           </a:xfrm>
           <a:prstGeom prst="rect">
             <a:avLst/>
@@ -13581,14 +11857,14 @@
       </p:pic>
       <p:sp>
         <p:nvSpPr>
-          <p:cNvPr id="303" name="AutoShape 11"/>
+          <p:cNvPr id="332" name="AutoShape 11"/>
           <p:cNvSpPr/>
           <p:nvPr/>
         </p:nvSpPr>
         <p:spPr>
           <a:xfrm>
-            <a:off x="1650960" y="3492360"/>
-            <a:ext cx="4063680" cy="380520"/>
+            <a:off x="6858000" y="1930320"/>
+            <a:ext cx="4317480" cy="380520"/>
           </a:xfrm>
           <a:prstGeom prst="rect">
             <a:avLst/>
@@ -13625,6 +11901,17 @@
               </a:tabLst>
             </a:pPr>
             <a:r>
+              <a:rPr lang="en-US" sz="1800" b="1" u="none" strike="noStrike">
+                <a:solidFill>
+                  <a:srgbClr val="2BD1FC"/>
+                </a:solidFill>
+                <a:uFillTx/>
+                <a:latin typeface="Noto Sans SC"/>
+                <a:ea typeface="Noto Sans SC"/>
+              </a:rPr>
+              <a:t>Git Flow </a:t>
+            </a:r>
+            <a:r>
               <a:rPr lang="zh-CN" sz="1800" b="1" u="none" strike="noStrike">
                 <a:solidFill>
                   <a:srgbClr val="2BD1FC"/>
@@ -13633,29 +11920,7 @@
                 <a:latin typeface="Noto Sans SC"/>
                 <a:ea typeface="Noto Sans SC"/>
               </a:rPr>
-              <a:t>高性能 </a:t>
-            </a:r>
-            <a:r>
-              <a:rPr lang="en-US" sz="1800" b="1" u="none" strike="noStrike">
-                <a:solidFill>
-                  <a:srgbClr val="2BD1FC"/>
-                </a:solidFill>
-                <a:uFillTx/>
-                <a:latin typeface="Noto Sans SC"/>
-                <a:ea typeface="Noto Sans SC"/>
-              </a:rPr>
-              <a:t>Canvas </a:t>
-            </a:r>
-            <a:r>
-              <a:rPr lang="zh-CN" sz="1800" b="1" u="none" strike="noStrike">
-                <a:solidFill>
-                  <a:srgbClr val="2BD1FC"/>
-                </a:solidFill>
-                <a:uFillTx/>
-                <a:latin typeface="Noto Sans SC"/>
-                <a:ea typeface="Noto Sans SC"/>
-              </a:rPr>
-              <a:t>流畅渲染</a:t>
+              <a:t>分支协作策略</a:t>
             </a:r>
             <a:endParaRPr lang="en-US" sz="1800" b="0" u="none" strike="noStrike">
               <a:solidFill>
@@ -13669,14 +11934,14 @@
       </p:sp>
       <p:cxnSp>
         <p:nvCxnSpPr>
-          <p:cNvPr id="304" name="Connector 12"/>
+          <p:cNvPr id="333" name="Connector 12"/>
           <p:cNvCxnSpPr/>
           <p:nvPr/>
         </p:nvCxnSpPr>
         <p:spPr>
           <a:xfrm>
-            <a:off x="952200" y="4127400"/>
-            <a:ext cx="4826520" cy="360"/>
+            <a:off x="6413400" y="2539800"/>
+            <a:ext cx="4762800" cy="360"/>
           </a:xfrm>
           <a:prstGeom prst="straightConnector1">
             <a:avLst/>
@@ -13684,7 +11949,7 @@
           <a:ln w="12700">
             <a:solidFill>
               <a:srgbClr val="FFFFFF">
-                <a:alpha val="20000"/>
+                <a:alpha val="15000"/>
               </a:srgbClr>
             </a:solidFill>
             <a:prstDash val="dash"/>
@@ -13694,14 +11959,14 @@
       </p:cxnSp>
       <p:sp>
         <p:nvSpPr>
-          <p:cNvPr id="305" name="AutoShape 13"/>
+          <p:cNvPr id="334" name="AutoShape 13"/>
           <p:cNvSpPr/>
           <p:nvPr/>
         </p:nvSpPr>
         <p:spPr>
           <a:xfrm>
-            <a:off x="952560" y="4254480"/>
-            <a:ext cx="4825800" cy="507600"/>
+            <a:off x="6413400" y="2793960"/>
+            <a:ext cx="4762080" cy="2412720"/>
           </a:xfrm>
           <a:prstGeom prst="rect">
             <a:avLst/>
@@ -13731,102 +11996,140 @@
           <a:p>
             <a:pPr>
               <a:lnSpc>
-                <a:spcPct val="108000"/>
+                <a:spcPct val="125000"/>
               </a:lnSpc>
               <a:tabLst>
                 <a:tab pos="0" algn="l"/>
               </a:tabLst>
             </a:pPr>
             <a:r>
+              <a:rPr lang="zh-CN" sz="1400" b="0" u="none" strike="noStrike">
+                <a:solidFill>
+                  <a:srgbClr val="E2E8F0"/>
+                </a:solidFill>
+                <a:uFillTx/>
+                <a:latin typeface="Noto Sans SC"/>
+                <a:ea typeface="Noto Sans SC"/>
+              </a:rPr>
+              <a:t>采用标准的 </a:t>
+            </a:r>
+            <a:r>
+              <a:rPr lang="en-US" sz="1400" b="0" u="none" strike="noStrike">
+                <a:solidFill>
+                  <a:srgbClr val="E2E8F0"/>
+                </a:solidFill>
+                <a:uFillTx/>
+                <a:latin typeface="Noto Sans SC"/>
+                <a:ea typeface="Noto Sans SC"/>
+              </a:rPr>
+              <a:t>Git Flow </a:t>
+            </a:r>
+            <a:r>
+              <a:rPr lang="zh-CN" sz="1400" b="0" u="none" strike="noStrike">
+                <a:solidFill>
+                  <a:srgbClr val="E2E8F0"/>
+                </a:solidFill>
+                <a:uFillTx/>
+                <a:latin typeface="Noto Sans SC"/>
+                <a:ea typeface="Noto Sans SC"/>
+              </a:rPr>
+              <a:t>工作流：</a:t>
+            </a:r>
+            <a:r>
+              <a:rPr lang="en-US" sz="1400" b="1" u="none" strike="noStrike">
+                <a:solidFill>
+                  <a:srgbClr val="E2E8F0"/>
+                </a:solidFill>
+                <a:uFillTx/>
+                <a:latin typeface="Noto Sans SC"/>
+                <a:ea typeface="Noto Sans SC"/>
+              </a:rPr>
+              <a:t>main</a:t>
+            </a:r>
+            <a:r>
+              <a:rPr lang="zh-CN" sz="1400" b="0" u="none" strike="noStrike">
+                <a:solidFill>
+                  <a:srgbClr val="E2E8F0"/>
+                </a:solidFill>
+                <a:uFillTx/>
+                <a:latin typeface="Noto Sans SC"/>
+                <a:ea typeface="Noto Sans SC"/>
+              </a:rPr>
+              <a:t>为生产分支，</a:t>
+            </a:r>
+            <a:r>
+              <a:rPr lang="en-US" sz="1400" b="1" u="none" strike="noStrike">
+                <a:solidFill>
+                  <a:srgbClr val="E2E8F0"/>
+                </a:solidFill>
+                <a:uFillTx/>
+                <a:latin typeface="Noto Sans SC"/>
+                <a:ea typeface="Noto Sans SC"/>
+              </a:rPr>
+              <a:t>develop</a:t>
+            </a:r>
+            <a:r>
+              <a:rPr lang="zh-CN" sz="1400" b="0" u="none" strike="noStrike">
+                <a:solidFill>
+                  <a:srgbClr val="E2E8F0"/>
+                </a:solidFill>
+                <a:uFillTx/>
+                <a:latin typeface="Noto Sans SC"/>
+                <a:ea typeface="Noto Sans SC"/>
+              </a:rPr>
+              <a:t>为集成分支。基于功能切分</a:t>
+            </a:r>
+            <a:r>
+              <a:rPr lang="en-US" sz="1400" b="1" u="none" strike="noStrike">
+                <a:solidFill>
+                  <a:srgbClr val="E2E8F0"/>
+                </a:solidFill>
+                <a:uFillTx/>
+                <a:latin typeface="Noto Sans SC"/>
+                <a:ea typeface="Noto Sans SC"/>
+              </a:rPr>
+              <a:t>feature</a:t>
+            </a:r>
+            <a:r>
+              <a:rPr lang="zh-CN" sz="1400" b="0" u="none" strike="noStrike">
+                <a:solidFill>
+                  <a:srgbClr val="E2E8F0"/>
+                </a:solidFill>
+                <a:uFillTx/>
+                <a:latin typeface="Noto Sans SC"/>
+                <a:ea typeface="Noto Sans SC"/>
+              </a:rPr>
+              <a:t>分支，实现界面、不同游戏模块、集成测试的并行开发，互不干扰。</a:t>
+            </a:r>
+            <a:endParaRPr lang="en-US" sz="1400" b="0" u="none" strike="noStrike">
+              <a:solidFill>
+                <a:srgbClr val="FFFFFF"/>
+              </a:solidFill>
+              <a:uFillTx/>
+              <a:latin typeface="Noto Sans CJK SC"/>
+            </a:endParaRPr>
+          </a:p>
+          <a:p>
+            <a:pPr>
+              <a:lnSpc>
+                <a:spcPct val="125000"/>
+              </a:lnSpc>
+              <a:tabLst>
+                <a:tab pos="0" algn="l"/>
+              </a:tabLst>
+            </a:pPr>
+            <a:r>
               <a:rPr lang="zh-CN" sz="1300" b="0" u="none" strike="noStrike">
                 <a:solidFill>
                   <a:srgbClr val="FFFFFF">
-                    <a:alpha val="90000"/>
+                    <a:alpha val="60000"/>
                   </a:srgbClr>
                 </a:solidFill>
                 <a:uFillTx/>
                 <a:latin typeface="Noto Sans SC"/>
                 <a:ea typeface="Noto Sans SC"/>
               </a:rPr>
-              <a:t>采用 </a:t>
-            </a:r>
-            <a:r>
-              <a:rPr lang="en-US" sz="1300" b="0" u="none" strike="noStrike">
-                <a:solidFill>
-                  <a:srgbClr val="FFFFFF">
-                    <a:alpha val="90000"/>
-                  </a:srgbClr>
-                </a:solidFill>
-                <a:uFillTx/>
-                <a:latin typeface="Noto Sans SC"/>
-                <a:ea typeface="Noto Sans SC"/>
-              </a:rPr>
-              <a:t>requestAnimationFrame </a:t>
-            </a:r>
-            <a:r>
-              <a:rPr lang="zh-CN" sz="1300" b="0" u="none" strike="noStrike">
-                <a:solidFill>
-                  <a:srgbClr val="FFFFFF">
-                    <a:alpha val="90000"/>
-                  </a:srgbClr>
-                </a:solidFill>
-                <a:uFillTx/>
-                <a:latin typeface="Noto Sans SC"/>
-                <a:ea typeface="Noto Sans SC"/>
-              </a:rPr>
-              <a:t>实现</a:t>
-            </a:r>
-            <a:r>
-              <a:rPr lang="en-US" sz="1300" b="0" u="none" strike="noStrike">
-                <a:solidFill>
-                  <a:srgbClr val="FFFFFF">
-                    <a:alpha val="90000"/>
-                  </a:srgbClr>
-                </a:solidFill>
-                <a:uFillTx/>
-                <a:latin typeface="Noto Sans SC"/>
-                <a:ea typeface="Noto Sans SC"/>
-              </a:rPr>
-              <a:t>60</a:t>
-            </a:r>
-            <a:r>
-              <a:rPr lang="zh-CN" sz="1300" b="0" u="none" strike="noStrike">
-                <a:solidFill>
-                  <a:srgbClr val="FFFFFF">
-                    <a:alpha val="90000"/>
-                  </a:srgbClr>
-                </a:solidFill>
-                <a:uFillTx/>
-                <a:latin typeface="Noto Sans SC"/>
-                <a:ea typeface="Noto Sans SC"/>
-              </a:rPr>
-              <a:t>帧流畅动画；引入对象池模式管理子弹与粒子特效，显著减少内存开销与</a:t>
-            </a:r>
-            <a:r>
-              <a:rPr lang="en-US" sz="1300" b="0" u="none" strike="noStrike">
-                <a:solidFill>
-                  <a:srgbClr val="FFFFFF">
-                    <a:alpha val="90000"/>
-                  </a:srgbClr>
-                </a:solidFill>
-                <a:uFillTx/>
-                <a:latin typeface="Noto Sans SC"/>
-                <a:ea typeface="Noto Sans SC"/>
-              </a:rPr>
-              <a:t>GC</a:t>
-            </a:r>
-            <a:r>
-              <a:rPr lang="zh-CN" sz="1300" b="0" u="none" strike="noStrike">
-                <a:solidFill>
-                  <a:srgbClr val="FFFFFF">
-                    <a:alpha val="90000"/>
-                  </a:srgbClr>
-                </a:solidFill>
-                <a:uFillTx/>
-                <a:latin typeface="Noto Sans SC"/>
-                <a:ea typeface="Noto Sans SC"/>
-              </a:rPr>
-              <a:t>频率。</a:t>
+              <a:t>优势：代码版本可控，功能迭代独立，便于代码审查与合并，保障主干分支的稳定性。</a:t>
             </a:r>
             <a:endParaRPr lang="en-US" sz="1300" b="0" u="none" strike="noStrike">
               <a:solidFill>
@@ -13840,14 +12143,14 @@
       </p:sp>
       <p:sp>
         <p:nvSpPr>
-          <p:cNvPr id="306" name="AutoShape 14"/>
+          <p:cNvPr id="335" name="AutoShape 14"/>
           <p:cNvSpPr/>
           <p:nvPr/>
         </p:nvSpPr>
         <p:spPr>
           <a:xfrm>
-            <a:off x="762120" y="5079960"/>
-            <a:ext cx="5206680" cy="1460160"/>
+            <a:off x="762120" y="5715000"/>
+            <a:ext cx="5270040" cy="888480"/>
           </a:xfrm>
           <a:prstGeom prst="roundRect">
             <a:avLst>
@@ -13856,13 +12159,13 @@
           </a:prstGeom>
           <a:solidFill>
             <a:srgbClr val="2BD1FC">
-              <a:alpha val="12000"/>
+              <a:alpha val="10000"/>
             </a:srgbClr>
           </a:solidFill>
           <a:ln w="12700">
             <a:solidFill>
               <a:srgbClr val="2BD1FC">
-                <a:alpha val="50000"/>
+                <a:alpha val="20000"/>
               </a:srgbClr>
             </a:solidFill>
             <a:round/>
@@ -13904,7 +12207,7 @@
       </p:sp>
       <p:pic>
         <p:nvPicPr>
-          <p:cNvPr id="307" name="Picture 15"/>
+          <p:cNvPr id="336" name="Picture 15"/>
           <p:cNvPicPr/>
           <p:nvPr/>
         </p:nvPicPr>
@@ -13920,8 +12223,8 @@
         </p:blipFill>
         <p:spPr>
           <a:xfrm>
-            <a:off x="952560" y="5270400"/>
-            <a:ext cx="456840" cy="456840"/>
+            <a:off x="952560" y="5880240"/>
+            <a:ext cx="355320" cy="355320"/>
           </a:xfrm>
           <a:prstGeom prst="rect">
             <a:avLst/>
@@ -13934,14 +12237,14 @@
       </p:pic>
       <p:sp>
         <p:nvSpPr>
-          <p:cNvPr id="308" name="AutoShape 16"/>
+          <p:cNvPr id="337" name="AutoShape 16"/>
           <p:cNvSpPr/>
           <p:nvPr/>
         </p:nvSpPr>
         <p:spPr>
           <a:xfrm>
-            <a:off x="1650960" y="5207040"/>
-            <a:ext cx="4063680" cy="380520"/>
+            <a:off x="1460520" y="5816520"/>
+            <a:ext cx="4444560" cy="685440"/>
           </a:xfrm>
           <a:prstGeom prst="rect">
             <a:avLst/>
@@ -13971,24 +12274,40 @@
           <a:p>
             <a:pPr>
               <a:lnSpc>
-                <a:spcPct val="125000"/>
+                <a:spcPct val="108000"/>
               </a:lnSpc>
               <a:tabLst>
                 <a:tab pos="0" algn="l"/>
               </a:tabLst>
             </a:pPr>
             <a:r>
-              <a:rPr lang="zh-CN" sz="1800" b="1" u="none" strike="noStrike">
-                <a:solidFill>
-                  <a:srgbClr val="2BD1FC"/>
-                </a:solidFill>
-                <a:uFillTx/>
-                <a:latin typeface="Noto Sans SC"/>
-                <a:ea typeface="Noto Sans SC"/>
-              </a:rPr>
-              <a:t>全端输入事件适配方案</a:t>
-            </a:r>
-            <a:endParaRPr lang="en-US" sz="1800" b="0" u="none" strike="noStrike">
+              <a:rPr lang="zh-CN" sz="1400" b="1" u="none" strike="noStrike">
+                <a:solidFill>
+                  <a:srgbClr val="FFFFFF"/>
+                </a:solidFill>
+                <a:uFillTx/>
+                <a:latin typeface="Noto Sans SC"/>
+                <a:ea typeface="Noto Sans SC"/>
+              </a:rPr>
+              <a:t>职责清晰，资源归一</a:t>
+            </a:r>
+            <a:br>
+              <a:rPr sz="1600"/>
+            </a:br>
+            <a:r>
+              <a:rPr lang="zh-CN" sz="1200" b="0" u="none" strike="noStrike">
+                <a:solidFill>
+                  <a:srgbClr val="FFFFFF">
+                    <a:alpha val="70000"/>
+                  </a:srgbClr>
+                </a:solidFill>
+                <a:uFillTx/>
+                <a:latin typeface="Noto Sans SC"/>
+                <a:ea typeface="Noto Sans SC"/>
+              </a:rPr>
+              <a:t>每个游戏模块独立封装，静态资源与文档分类管理，降低耦合度，提升维护效率。</a:t>
+            </a:r>
+            <a:endParaRPr lang="en-US" sz="1200" b="0" u="none" strike="noStrike">
               <a:solidFill>
                 <a:srgbClr val="FFFFFF"/>
               </a:solidFill>
@@ -13998,199 +12317,16 @@
           </a:p>
         </p:txBody>
       </p:sp>
-      <p:cxnSp>
-        <p:nvCxnSpPr>
-          <p:cNvPr id="309" name="Connector 17"/>
-          <p:cNvCxnSpPr/>
-          <p:nvPr/>
-        </p:nvCxnSpPr>
-        <p:spPr>
-          <a:xfrm>
-            <a:off x="952200" y="5841720"/>
-            <a:ext cx="4826520" cy="360"/>
-          </a:xfrm>
-          <a:prstGeom prst="straightConnector1">
-            <a:avLst/>
-          </a:prstGeom>
-          <a:ln w="12700">
-            <a:solidFill>
-              <a:srgbClr val="FFFFFF">
-                <a:alpha val="20000"/>
-              </a:srgbClr>
-            </a:solidFill>
-            <a:prstDash val="dash"/>
-            <a:round/>
-          </a:ln>
-        </p:spPr>
-      </p:cxnSp>
-      <p:sp>
-        <p:nvSpPr>
-          <p:cNvPr id="310" name="AutoShape 18"/>
+      <p:sp>
+        <p:nvSpPr>
+          <p:cNvPr id="338" name="AutoShape 17"/>
           <p:cNvSpPr/>
           <p:nvPr/>
         </p:nvSpPr>
         <p:spPr>
           <a:xfrm>
-            <a:off x="952560" y="5905440"/>
-            <a:ext cx="4825800" cy="571320"/>
-          </a:xfrm>
-          <a:prstGeom prst="rect">
-            <a:avLst/>
-          </a:prstGeom>
-          <a:noFill/>
-          <a:ln w="12700">
-            <a:noFill/>
-          </a:ln>
-        </p:spPr>
-        <p:style>
-          <a:lnRef idx="0">
-            <a:scrgbClr r="0" g="0" b="0"/>
-          </a:lnRef>
-          <a:fillRef idx="0">
-            <a:scrgbClr r="0" g="0" b="0"/>
-          </a:fillRef>
-          <a:effectRef idx="0">
-            <a:scrgbClr r="0" g="0" b="0"/>
-          </a:effectRef>
-          <a:fontRef idx="minor"/>
-        </p:style>
-        <p:txBody>
-          <a:bodyPr lIns="0" tIns="0" rIns="0" bIns="0" anchor="ctr">
-            <a:noAutofit/>
-          </a:bodyPr>
-          <a:lstStyle/>
-          <a:p>
-            <a:pPr>
-              <a:lnSpc>
-                <a:spcPct val="108000"/>
-              </a:lnSpc>
-              <a:tabLst>
-                <a:tab pos="0" algn="l"/>
-              </a:tabLst>
-            </a:pPr>
-            <a:r>
-              <a:rPr lang="zh-CN" sz="1300" b="0" u="none" strike="noStrike">
-                <a:solidFill>
-                  <a:srgbClr val="FFFFFF">
-                    <a:alpha val="90000"/>
-                  </a:srgbClr>
-                </a:solidFill>
-                <a:uFillTx/>
-                <a:latin typeface="Noto Sans SC"/>
-                <a:ea typeface="Noto Sans SC"/>
-              </a:rPr>
-              <a:t>完美兼容键盘、鼠标与移动端触摸事件；针对移动端浏览器做防误触滚动处理，保障操作精准度与体验一致性。</a:t>
-            </a:r>
-            <a:endParaRPr lang="en-US" sz="1300" b="0" u="none" strike="noStrike">
-              <a:solidFill>
-                <a:srgbClr val="FFFFFF"/>
-              </a:solidFill>
-              <a:uFillTx/>
-              <a:latin typeface="Noto Sans CJK SC"/>
-            </a:endParaRPr>
-          </a:p>
-        </p:txBody>
-      </p:sp>
-      <p:cxnSp>
-        <p:nvCxnSpPr>
-          <p:cNvPr id="311" name="Connector 19"/>
-          <p:cNvCxnSpPr/>
-          <p:nvPr/>
-        </p:nvCxnSpPr>
-        <p:spPr>
-          <a:xfrm>
-            <a:off x="6349680" y="1650960"/>
-            <a:ext cx="360" cy="4889880"/>
-          </a:xfrm>
-          <a:prstGeom prst="straightConnector1">
-            <a:avLst/>
-          </a:prstGeom>
-          <a:ln w="12700">
-            <a:solidFill>
-              <a:srgbClr val="FFFFFF">
-                <a:alpha val="15000"/>
-              </a:srgbClr>
-            </a:solidFill>
-            <a:round/>
-          </a:ln>
-        </p:spPr>
-      </p:cxnSp>
-      <p:sp>
-        <p:nvSpPr>
-          <p:cNvPr id="312" name="AutoShape 20"/>
-          <p:cNvSpPr/>
-          <p:nvPr/>
-        </p:nvSpPr>
-        <p:spPr>
-          <a:xfrm>
-            <a:off x="6603840" y="1650960"/>
-            <a:ext cx="4952520" cy="380520"/>
-          </a:xfrm>
-          <a:prstGeom prst="rect">
-            <a:avLst/>
-          </a:prstGeom>
-          <a:noFill/>
-          <a:ln w="12700">
-            <a:noFill/>
-          </a:ln>
-        </p:spPr>
-        <p:style>
-          <a:lnRef idx="0">
-            <a:scrgbClr r="0" g="0" b="0"/>
-          </a:lnRef>
-          <a:fillRef idx="0">
-            <a:scrgbClr r="0" g="0" b="0"/>
-          </a:fillRef>
-          <a:effectRef idx="0">
-            <a:scrgbClr r="0" g="0" b="0"/>
-          </a:effectRef>
-          <a:fontRef idx="minor"/>
-        </p:style>
-        <p:txBody>
-          <a:bodyPr lIns="0" tIns="0" rIns="0" bIns="0" anchor="ctr">
-            <a:noAutofit/>
-          </a:bodyPr>
-          <a:lstStyle/>
-          <a:p>
-            <a:pPr>
-              <a:lnSpc>
-                <a:spcPct val="125000"/>
-              </a:lnSpc>
-              <a:tabLst>
-                <a:tab pos="0" algn="l"/>
-              </a:tabLst>
-            </a:pPr>
-            <a:r>
-              <a:rPr lang="zh-CN" sz="2000" b="1" u="none" strike="noStrike">
-                <a:solidFill>
-                  <a:srgbClr val="FFFFFF"/>
-                </a:solidFill>
-                <a:uFillTx/>
-                <a:latin typeface="Noto Sans SC"/>
-                <a:ea typeface="Noto Sans SC"/>
-              </a:rPr>
-              <a:t>核心难点攻坚与突破</a:t>
-            </a:r>
-            <a:endParaRPr lang="en-US" sz="2000" b="0" u="none" strike="noStrike">
-              <a:solidFill>
-                <a:srgbClr val="FFFFFF"/>
-              </a:solidFill>
-              <a:uFillTx/>
-              <a:latin typeface="Noto Sans CJK SC"/>
-            </a:endParaRPr>
-          </a:p>
-        </p:txBody>
-      </p:sp>
-      <p:sp>
-        <p:nvSpPr>
-          <p:cNvPr id="313" name="AutoShape 21"/>
-          <p:cNvSpPr/>
-          <p:nvPr/>
-        </p:nvSpPr>
-        <p:spPr>
-          <a:xfrm>
-            <a:off x="6603840" y="2286000"/>
-            <a:ext cx="4952520" cy="952200"/>
+            <a:off x="6159600" y="5715000"/>
+            <a:ext cx="5270040" cy="888480"/>
           </a:xfrm>
           <a:prstGeom prst="roundRect">
             <a:avLst>
@@ -14198,12 +12334,17 @@
             </a:avLst>
           </a:prstGeom>
           <a:solidFill>
-            <a:srgbClr val="FFFFFF">
-              <a:alpha val="5000"/>
+            <a:srgbClr val="2BD1FC">
+              <a:alpha val="10000"/>
             </a:srgbClr>
           </a:solidFill>
-          <a:ln w="25400">
-            <a:noFill/>
+          <a:ln w="12700">
+            <a:solidFill>
+              <a:srgbClr val="2BD1FC">
+                <a:alpha val="20000"/>
+              </a:srgbClr>
+            </a:solidFill>
+            <a:round/>
           </a:ln>
         </p:spPr>
         <p:style>
@@ -14240,26 +12381,52 @@
           </a:p>
         </p:txBody>
       </p:sp>
-      <p:sp>
-        <p:nvSpPr>
-          <p:cNvPr id="314" name="AutoShape 22"/>
+      <p:pic>
+        <p:nvPicPr>
+          <p:cNvPr id="339" name="Picture 18"/>
+          <p:cNvPicPr/>
+          <p:nvPr/>
+        </p:nvPicPr>
+        <p:blipFill>
+          <a:blip r:embed="rId10">
+            <a:extLst>
+              <a:ext uri="{96DAC541-7B7A-43D3-8B79-37D633B846F1}">
+                <asvg:svgBlip xmlns:asvg="http://schemas.microsoft.com/office/drawing/2016/SVG/main" r:embed="rId11"/>
+              </a:ext>
+            </a:extLst>
+          </a:blip>
+          <a:stretch/>
+        </p:blipFill>
+        <p:spPr>
+          <a:xfrm>
+            <a:off x="6350040" y="5880240"/>
+            <a:ext cx="355320" cy="355320"/>
+          </a:xfrm>
+          <a:prstGeom prst="rect">
+            <a:avLst/>
+          </a:prstGeom>
+          <a:noFill/>
+          <a:ln w="0">
+            <a:noFill/>
+          </a:ln>
+        </p:spPr>
+      </p:pic>
+      <p:sp>
+        <p:nvSpPr>
+          <p:cNvPr id="340" name="AutoShape 19"/>
           <p:cNvSpPr/>
           <p:nvPr/>
         </p:nvSpPr>
         <p:spPr>
           <a:xfrm>
-            <a:off x="6603840" y="2286000"/>
-            <a:ext cx="50400" cy="952200"/>
-          </a:xfrm>
-          <a:prstGeom prst="roundRect">
-            <a:avLst>
-              <a:gd name="adj" fmla="val 0"/>
-            </a:avLst>
-          </a:prstGeom>
-          <a:solidFill>
-            <a:srgbClr val="EC4899"/>
-          </a:solidFill>
-          <a:ln w="25400">
+            <a:off x="6858000" y="5816520"/>
+            <a:ext cx="4444560" cy="685440"/>
+          </a:xfrm>
+          <a:prstGeom prst="rect">
+            <a:avLst/>
+          </a:prstGeom>
+          <a:noFill/>
+          <a:ln w="12700">
             <a:noFill/>
           </a:ln>
         </p:spPr>
@@ -14276,74 +12443,21 @@
           <a:fontRef idx="minor"/>
         </p:style>
         <p:txBody>
-          <a:bodyPr lIns="25200" tIns="63360" rIns="25200" bIns="63360" anchor="ctr">
+          <a:bodyPr lIns="0" tIns="0" rIns="0" bIns="0" anchor="ctr">
             <a:noAutofit/>
           </a:bodyPr>
           <a:lstStyle/>
           <a:p>
-            <a:pPr algn="ctr">
-              <a:lnSpc>
-                <a:spcPct val="100000"/>
-              </a:lnSpc>
-            </a:pPr>
-            <a:endParaRPr lang="en-US" sz="1400" b="0" u="none" strike="noStrike">
-              <a:solidFill>
-                <a:srgbClr val="000000"/>
-              </a:solidFill>
-              <a:uFillTx/>
-              <a:latin typeface="Arial"/>
-              <a:ea typeface="Arial"/>
-            </a:endParaRPr>
-          </a:p>
-        </p:txBody>
-      </p:sp>
-      <p:sp>
-        <p:nvSpPr>
-          <p:cNvPr id="315" name="AutoShape 23"/>
-          <p:cNvSpPr/>
-          <p:nvPr/>
-        </p:nvSpPr>
-        <p:spPr>
-          <a:xfrm>
-            <a:off x="6794640" y="2349360"/>
-            <a:ext cx="4635000" cy="825120"/>
-          </a:xfrm>
-          <a:prstGeom prst="rect">
-            <a:avLst/>
-          </a:prstGeom>
-          <a:noFill/>
-          <a:ln w="12700">
-            <a:noFill/>
-          </a:ln>
-        </p:spPr>
-        <p:style>
-          <a:lnRef idx="0">
-            <a:scrgbClr r="0" g="0" b="0"/>
-          </a:lnRef>
-          <a:fillRef idx="0">
-            <a:scrgbClr r="0" g="0" b="0"/>
-          </a:fillRef>
-          <a:effectRef idx="0">
-            <a:scrgbClr r="0" g="0" b="0"/>
-          </a:effectRef>
-          <a:fontRef idx="minor"/>
-        </p:style>
-        <p:txBody>
-          <a:bodyPr lIns="0" tIns="0" rIns="0" bIns="0" anchor="ctr">
-            <a:noAutofit/>
-          </a:bodyPr>
-          <a:lstStyle/>
-          <a:p>
             <a:pPr>
               <a:lnSpc>
-                <a:spcPct val="125000"/>
+                <a:spcPct val="108000"/>
               </a:lnSpc>
               <a:tabLst>
                 <a:tab pos="0" algn="l"/>
               </a:tabLst>
             </a:pPr>
             <a:r>
-              <a:rPr lang="zh-CN" sz="1500" b="1" u="none" strike="noStrike">
+              <a:rPr lang="zh-CN" sz="1400" b="1" u="none" strike="noStrike">
                 <a:solidFill>
                   <a:srgbClr val="FFFFFF"/>
                 </a:solidFill>
@@ -14351,685 +12465,36 @@
                 <a:latin typeface="Noto Sans SC"/>
                 <a:ea typeface="Noto Sans SC"/>
               </a:rPr>
-              <a:t>碰撞检测精度优化</a:t>
-            </a:r>
-            <a:r>
-              <a:rPr lang="en-US" sz="1300" b="0" u="none" strike="noStrike">
+              <a:t>分支隔离，高效并行</a:t>
+            </a:r>
+            <a:br>
+              <a:rPr sz="1600"/>
+            </a:br>
+            <a:r>
+              <a:rPr lang="en-US" sz="1200" b="0" u="none" strike="noStrike">
                 <a:solidFill>
                   <a:srgbClr val="FFFFFF">
-                    <a:alpha val="60000"/>
+                    <a:alpha val="70000"/>
                   </a:srgbClr>
                 </a:solidFill>
                 <a:uFillTx/>
                 <a:latin typeface="Noto Sans SC"/>
                 <a:ea typeface="Noto Sans SC"/>
               </a:rPr>
-              <a:t>| </a:t>
-            </a:r>
-            <a:r>
-              <a:rPr lang="zh-CN" sz="1300" b="0" u="none" strike="noStrike">
+              <a:t>Feature</a:t>
+            </a:r>
+            <a:r>
+              <a:rPr lang="zh-CN" sz="1200" b="0" u="none" strike="noStrike">
                 <a:solidFill>
                   <a:srgbClr val="FFFFFF">
-                    <a:alpha val="60000"/>
+                    <a:alpha val="70000"/>
                   </a:srgbClr>
                 </a:solidFill>
                 <a:uFillTx/>
                 <a:latin typeface="Noto Sans SC"/>
                 <a:ea typeface="Noto Sans SC"/>
               </a:rPr>
-              <a:t>负责人：李少华</a:t>
-            </a:r>
-            <a:endParaRPr lang="en-US" sz="1300" b="0" u="none" strike="noStrike">
-              <a:solidFill>
-                <a:srgbClr val="FFFFFF"/>
-              </a:solidFill>
-              <a:uFillTx/>
-              <a:latin typeface="Noto Sans CJK SC"/>
-            </a:endParaRPr>
-          </a:p>
-          <a:p>
-            <a:pPr>
-              <a:lnSpc>
-                <a:spcPct val="117000"/>
-              </a:lnSpc>
-              <a:tabLst>
-                <a:tab pos="0" algn="l"/>
-              </a:tabLst>
-            </a:pPr>
-            <a:r>
-              <a:rPr lang="zh-CN" sz="1200" b="0" u="none" strike="noStrike">
-                <a:solidFill>
-                  <a:srgbClr val="FFFFFF">
-                    <a:alpha val="80000"/>
-                  </a:srgbClr>
-                </a:solidFill>
-                <a:uFillTx/>
-                <a:latin typeface="Noto Sans SC"/>
-                <a:ea typeface="Noto Sans SC"/>
-              </a:rPr>
-              <a:t>采用</a:t>
-            </a:r>
-            <a:r>
-              <a:rPr lang="en-US" sz="1200" b="0" u="none" strike="noStrike">
-                <a:solidFill>
-                  <a:srgbClr val="FFFFFF">
-                    <a:alpha val="80000"/>
-                  </a:srgbClr>
-                </a:solidFill>
-                <a:uFillTx/>
-                <a:latin typeface="Noto Sans SC"/>
-                <a:ea typeface="Noto Sans SC"/>
-              </a:rPr>
-              <a:t>AABB</a:t>
-            </a:r>
-            <a:r>
-              <a:rPr lang="zh-CN" sz="1200" b="0" u="none" strike="noStrike">
-                <a:solidFill>
-                  <a:srgbClr val="FFFFFF">
-                    <a:alpha val="80000"/>
-                  </a:srgbClr>
-                </a:solidFill>
-                <a:uFillTx/>
-                <a:latin typeface="Noto Sans SC"/>
-                <a:ea typeface="Noto Sans SC"/>
-              </a:rPr>
-              <a:t>轴对齐包围盒算法，配合边界补偿机制，解决复杂场景下的误判与穿透问题，提升物理交互的真实感。</a:t>
-            </a:r>
-            <a:endParaRPr lang="en-US" sz="1200" b="0" u="none" strike="noStrike">
-              <a:solidFill>
-                <a:srgbClr val="FFFFFF"/>
-              </a:solidFill>
-              <a:uFillTx/>
-              <a:latin typeface="Noto Sans CJK SC"/>
-            </a:endParaRPr>
-          </a:p>
-        </p:txBody>
-      </p:sp>
-      <p:sp>
-        <p:nvSpPr>
-          <p:cNvPr id="316" name="AutoShape 24"/>
-          <p:cNvSpPr/>
-          <p:nvPr/>
-        </p:nvSpPr>
-        <p:spPr>
-          <a:xfrm>
-            <a:off x="6603840" y="3429000"/>
-            <a:ext cx="4952520" cy="952200"/>
-          </a:xfrm>
-          <a:prstGeom prst="roundRect">
-            <a:avLst>
-              <a:gd name="adj" fmla="val 0"/>
-            </a:avLst>
-          </a:prstGeom>
-          <a:solidFill>
-            <a:srgbClr val="FFFFFF">
-              <a:alpha val="5000"/>
-            </a:srgbClr>
-          </a:solidFill>
-          <a:ln w="25400">
-            <a:noFill/>
-          </a:ln>
-        </p:spPr>
-        <p:style>
-          <a:lnRef idx="0">
-            <a:scrgbClr r="0" g="0" b="0"/>
-          </a:lnRef>
-          <a:fillRef idx="0">
-            <a:scrgbClr r="0" g="0" b="0"/>
-          </a:fillRef>
-          <a:effectRef idx="0">
-            <a:scrgbClr r="0" g="0" b="0"/>
-          </a:effectRef>
-          <a:fontRef idx="minor"/>
-        </p:style>
-        <p:txBody>
-          <a:bodyPr lIns="63360" tIns="63360" rIns="63360" bIns="63360" anchor="ctr">
-            <a:noAutofit/>
-          </a:bodyPr>
-          <a:lstStyle/>
-          <a:p>
-            <a:pPr algn="ctr">
-              <a:lnSpc>
-                <a:spcPct val="100000"/>
-              </a:lnSpc>
-            </a:pPr>
-            <a:endParaRPr lang="en-US" sz="1400" b="0" u="none" strike="noStrike">
-              <a:solidFill>
-                <a:srgbClr val="000000"/>
-              </a:solidFill>
-              <a:uFillTx/>
-              <a:latin typeface="Arial"/>
-              <a:ea typeface="Arial"/>
-            </a:endParaRPr>
-          </a:p>
-        </p:txBody>
-      </p:sp>
-      <p:sp>
-        <p:nvSpPr>
-          <p:cNvPr id="317" name="AutoShape 25"/>
-          <p:cNvSpPr/>
-          <p:nvPr/>
-        </p:nvSpPr>
-        <p:spPr>
-          <a:xfrm>
-            <a:off x="6603840" y="3429000"/>
-            <a:ext cx="50400" cy="952200"/>
-          </a:xfrm>
-          <a:prstGeom prst="roundRect">
-            <a:avLst>
-              <a:gd name="adj" fmla="val 0"/>
-            </a:avLst>
-          </a:prstGeom>
-          <a:solidFill>
-            <a:srgbClr val="A855F7"/>
-          </a:solidFill>
-          <a:ln w="25400">
-            <a:noFill/>
-          </a:ln>
-        </p:spPr>
-        <p:style>
-          <a:lnRef idx="0">
-            <a:scrgbClr r="0" g="0" b="0"/>
-          </a:lnRef>
-          <a:fillRef idx="0">
-            <a:scrgbClr r="0" g="0" b="0"/>
-          </a:fillRef>
-          <a:effectRef idx="0">
-            <a:scrgbClr r="0" g="0" b="0"/>
-          </a:effectRef>
-          <a:fontRef idx="minor"/>
-        </p:style>
-        <p:txBody>
-          <a:bodyPr lIns="25200" tIns="63360" rIns="25200" bIns="63360" anchor="ctr">
-            <a:noAutofit/>
-          </a:bodyPr>
-          <a:lstStyle/>
-          <a:p>
-            <a:pPr algn="ctr">
-              <a:lnSpc>
-                <a:spcPct val="100000"/>
-              </a:lnSpc>
-            </a:pPr>
-            <a:endParaRPr lang="en-US" sz="1400" b="0" u="none" strike="noStrike">
-              <a:solidFill>
-                <a:srgbClr val="000000"/>
-              </a:solidFill>
-              <a:uFillTx/>
-              <a:latin typeface="Arial"/>
-              <a:ea typeface="Arial"/>
-            </a:endParaRPr>
-          </a:p>
-        </p:txBody>
-      </p:sp>
-      <p:sp>
-        <p:nvSpPr>
-          <p:cNvPr id="318" name="AutoShape 26"/>
-          <p:cNvSpPr/>
-          <p:nvPr/>
-        </p:nvSpPr>
-        <p:spPr>
-          <a:xfrm>
-            <a:off x="6794640" y="3492360"/>
-            <a:ext cx="4635000" cy="825120"/>
-          </a:xfrm>
-          <a:prstGeom prst="rect">
-            <a:avLst/>
-          </a:prstGeom>
-          <a:noFill/>
-          <a:ln w="12700">
-            <a:noFill/>
-          </a:ln>
-        </p:spPr>
-        <p:style>
-          <a:lnRef idx="0">
-            <a:scrgbClr r="0" g="0" b="0"/>
-          </a:lnRef>
-          <a:fillRef idx="0">
-            <a:scrgbClr r="0" g="0" b="0"/>
-          </a:fillRef>
-          <a:effectRef idx="0">
-            <a:scrgbClr r="0" g="0" b="0"/>
-          </a:effectRef>
-          <a:fontRef idx="minor"/>
-        </p:style>
-        <p:txBody>
-          <a:bodyPr lIns="0" tIns="0" rIns="0" bIns="0" anchor="ctr">
-            <a:noAutofit/>
-          </a:bodyPr>
-          <a:lstStyle/>
-          <a:p>
-            <a:pPr>
-              <a:lnSpc>
-                <a:spcPct val="125000"/>
-              </a:lnSpc>
-              <a:tabLst>
-                <a:tab pos="0" algn="l"/>
-              </a:tabLst>
-            </a:pPr>
-            <a:r>
-              <a:rPr lang="zh-CN" sz="1500" b="1" u="none" strike="noStrike">
-                <a:solidFill>
-                  <a:srgbClr val="FFFFFF"/>
-                </a:solidFill>
-                <a:uFillTx/>
-                <a:latin typeface="Noto Sans SC"/>
-                <a:ea typeface="Noto Sans SC"/>
-              </a:rPr>
-              <a:t>复杂形变与状态管理</a:t>
-            </a:r>
-            <a:r>
-              <a:rPr lang="en-US" sz="1300" b="0" u="none" strike="noStrike">
-                <a:solidFill>
-                  <a:srgbClr val="FFFFFF">
-                    <a:alpha val="60000"/>
-                  </a:srgbClr>
-                </a:solidFill>
-                <a:uFillTx/>
-                <a:latin typeface="Noto Sans SC"/>
-                <a:ea typeface="Noto Sans SC"/>
-              </a:rPr>
-              <a:t>| </a:t>
-            </a:r>
-            <a:r>
-              <a:rPr lang="zh-CN" sz="1300" b="0" u="none" strike="noStrike">
-                <a:solidFill>
-                  <a:srgbClr val="FFFFFF">
-                    <a:alpha val="60000"/>
-                  </a:srgbClr>
-                </a:solidFill>
-                <a:uFillTx/>
-                <a:latin typeface="Noto Sans SC"/>
-                <a:ea typeface="Noto Sans SC"/>
-              </a:rPr>
-              <a:t>负责人：李振豪</a:t>
-            </a:r>
-            <a:endParaRPr lang="en-US" sz="1300" b="0" u="none" strike="noStrike">
-              <a:solidFill>
-                <a:srgbClr val="FFFFFF"/>
-              </a:solidFill>
-              <a:uFillTx/>
-              <a:latin typeface="Noto Sans CJK SC"/>
-            </a:endParaRPr>
-          </a:p>
-          <a:p>
-            <a:pPr>
-              <a:lnSpc>
-                <a:spcPct val="117000"/>
-              </a:lnSpc>
-              <a:tabLst>
-                <a:tab pos="0" algn="l"/>
-              </a:tabLst>
-            </a:pPr>
-            <a:r>
-              <a:rPr lang="zh-CN" sz="1200" b="0" u="none" strike="noStrike">
-                <a:solidFill>
-                  <a:srgbClr val="FFFFFF">
-                    <a:alpha val="80000"/>
-                  </a:srgbClr>
-                </a:solidFill>
-                <a:uFillTx/>
-                <a:latin typeface="Noto Sans SC"/>
-                <a:ea typeface="Noto Sans SC"/>
-              </a:rPr>
-              <a:t>俄罗斯方块通过矩阵旋转</a:t>
-            </a:r>
-            <a:r>
-              <a:rPr lang="en-US" sz="1200" b="0" u="none" strike="noStrike">
-                <a:solidFill>
-                  <a:srgbClr val="FFFFFF">
-                    <a:alpha val="80000"/>
-                  </a:srgbClr>
-                </a:solidFill>
-                <a:uFillTx/>
-                <a:latin typeface="Noto Sans SC"/>
-                <a:ea typeface="Noto Sans SC"/>
-              </a:rPr>
-              <a:t>+</a:t>
-            </a:r>
-            <a:r>
-              <a:rPr lang="zh-CN" sz="1200" b="0" u="none" strike="noStrike">
-                <a:solidFill>
-                  <a:srgbClr val="FFFFFF">
-                    <a:alpha val="80000"/>
-                  </a:srgbClr>
-                </a:solidFill>
-                <a:uFillTx/>
-                <a:latin typeface="Noto Sans SC"/>
-                <a:ea typeface="Noto Sans SC"/>
-              </a:rPr>
-              <a:t>踢墙检测处理边界；五子棋利用四方向向量遍历算法实现</a:t>
-            </a:r>
-            <a:r>
-              <a:rPr lang="en-US" sz="1200" b="0" u="none" strike="noStrike">
-                <a:solidFill>
-                  <a:srgbClr val="FFFFFF">
-                    <a:alpha val="80000"/>
-                  </a:srgbClr>
-                </a:solidFill>
-                <a:uFillTx/>
-                <a:latin typeface="Noto Sans SC"/>
-                <a:ea typeface="Noto Sans SC"/>
-              </a:rPr>
-              <a:t>O(1)</a:t>
-            </a:r>
-            <a:r>
-              <a:rPr lang="zh-CN" sz="1200" b="0" u="none" strike="noStrike">
-                <a:solidFill>
-                  <a:srgbClr val="FFFFFF">
-                    <a:alpha val="80000"/>
-                  </a:srgbClr>
-                </a:solidFill>
-                <a:uFillTx/>
-                <a:latin typeface="Noto Sans SC"/>
-                <a:ea typeface="Noto Sans SC"/>
-              </a:rPr>
-              <a:t>时间复杂度的胜利判定逻辑。</a:t>
-            </a:r>
-            <a:endParaRPr lang="en-US" sz="1200" b="0" u="none" strike="noStrike">
-              <a:solidFill>
-                <a:srgbClr val="FFFFFF"/>
-              </a:solidFill>
-              <a:uFillTx/>
-              <a:latin typeface="Noto Sans CJK SC"/>
-            </a:endParaRPr>
-          </a:p>
-        </p:txBody>
-      </p:sp>
-      <p:sp>
-        <p:nvSpPr>
-          <p:cNvPr id="319" name="AutoShape 27"/>
-          <p:cNvSpPr/>
-          <p:nvPr/>
-        </p:nvSpPr>
-        <p:spPr>
-          <a:xfrm>
-            <a:off x="6603840" y="4572000"/>
-            <a:ext cx="4952520" cy="952200"/>
-          </a:xfrm>
-          <a:prstGeom prst="roundRect">
-            <a:avLst>
-              <a:gd name="adj" fmla="val 0"/>
-            </a:avLst>
-          </a:prstGeom>
-          <a:solidFill>
-            <a:srgbClr val="FFFFFF">
-              <a:alpha val="5000"/>
-            </a:srgbClr>
-          </a:solidFill>
-          <a:ln w="25400">
-            <a:noFill/>
-          </a:ln>
-        </p:spPr>
-        <p:style>
-          <a:lnRef idx="0">
-            <a:scrgbClr r="0" g="0" b="0"/>
-          </a:lnRef>
-          <a:fillRef idx="0">
-            <a:scrgbClr r="0" g="0" b="0"/>
-          </a:fillRef>
-          <a:effectRef idx="0">
-            <a:scrgbClr r="0" g="0" b="0"/>
-          </a:effectRef>
-          <a:fontRef idx="minor"/>
-        </p:style>
-        <p:txBody>
-          <a:bodyPr lIns="63360" tIns="63360" rIns="63360" bIns="63360" anchor="ctr">
-            <a:noAutofit/>
-          </a:bodyPr>
-          <a:lstStyle/>
-          <a:p>
-            <a:pPr algn="ctr">
-              <a:lnSpc>
-                <a:spcPct val="100000"/>
-              </a:lnSpc>
-            </a:pPr>
-            <a:endParaRPr lang="en-US" sz="1400" b="0" u="none" strike="noStrike">
-              <a:solidFill>
-                <a:srgbClr val="000000"/>
-              </a:solidFill>
-              <a:uFillTx/>
-              <a:latin typeface="Arial"/>
-              <a:ea typeface="Arial"/>
-            </a:endParaRPr>
-          </a:p>
-        </p:txBody>
-      </p:sp>
-      <p:sp>
-        <p:nvSpPr>
-          <p:cNvPr id="320" name="AutoShape 28"/>
-          <p:cNvSpPr/>
-          <p:nvPr/>
-        </p:nvSpPr>
-        <p:spPr>
-          <a:xfrm>
-            <a:off x="6603840" y="4572000"/>
-            <a:ext cx="50400" cy="952200"/>
-          </a:xfrm>
-          <a:prstGeom prst="roundRect">
-            <a:avLst>
-              <a:gd name="adj" fmla="val 0"/>
-            </a:avLst>
-          </a:prstGeom>
-          <a:solidFill>
-            <a:srgbClr val="EAB308"/>
-          </a:solidFill>
-          <a:ln w="25400">
-            <a:noFill/>
-          </a:ln>
-        </p:spPr>
-        <p:style>
-          <a:lnRef idx="0">
-            <a:scrgbClr r="0" g="0" b="0"/>
-          </a:lnRef>
-          <a:fillRef idx="0">
-            <a:scrgbClr r="0" g="0" b="0"/>
-          </a:fillRef>
-          <a:effectRef idx="0">
-            <a:scrgbClr r="0" g="0" b="0"/>
-          </a:effectRef>
-          <a:fontRef idx="minor"/>
-        </p:style>
-        <p:txBody>
-          <a:bodyPr lIns="25200" tIns="63360" rIns="25200" bIns="63360" anchor="ctr">
-            <a:noAutofit/>
-          </a:bodyPr>
-          <a:lstStyle/>
-          <a:p>
-            <a:pPr algn="ctr">
-              <a:lnSpc>
-                <a:spcPct val="100000"/>
-              </a:lnSpc>
-            </a:pPr>
-            <a:endParaRPr lang="en-US" sz="1400" b="0" u="none" strike="noStrike">
-              <a:solidFill>
-                <a:srgbClr val="000000"/>
-              </a:solidFill>
-              <a:uFillTx/>
-              <a:latin typeface="Arial"/>
-              <a:ea typeface="Arial"/>
-            </a:endParaRPr>
-          </a:p>
-        </p:txBody>
-      </p:sp>
-      <p:sp>
-        <p:nvSpPr>
-          <p:cNvPr id="321" name="AutoShape 29"/>
-          <p:cNvSpPr/>
-          <p:nvPr/>
-        </p:nvSpPr>
-        <p:spPr>
-          <a:xfrm>
-            <a:off x="6794640" y="4635360"/>
-            <a:ext cx="4635000" cy="825120"/>
-          </a:xfrm>
-          <a:prstGeom prst="rect">
-            <a:avLst/>
-          </a:prstGeom>
-          <a:noFill/>
-          <a:ln w="12700">
-            <a:noFill/>
-          </a:ln>
-        </p:spPr>
-        <p:style>
-          <a:lnRef idx="0">
-            <a:scrgbClr r="0" g="0" b="0"/>
-          </a:lnRef>
-          <a:fillRef idx="0">
-            <a:scrgbClr r="0" g="0" b="0"/>
-          </a:fillRef>
-          <a:effectRef idx="0">
-            <a:scrgbClr r="0" g="0" b="0"/>
-          </a:effectRef>
-          <a:fontRef idx="minor"/>
-        </p:style>
-        <p:txBody>
-          <a:bodyPr lIns="0" tIns="0" rIns="0" bIns="0" anchor="ctr">
-            <a:noAutofit/>
-          </a:bodyPr>
-          <a:lstStyle/>
-          <a:p>
-            <a:pPr>
-              <a:lnSpc>
-                <a:spcPct val="125000"/>
-              </a:lnSpc>
-              <a:tabLst>
-                <a:tab pos="0" algn="l"/>
-              </a:tabLst>
-            </a:pPr>
-            <a:r>
-              <a:rPr lang="zh-CN" sz="1500" b="1" u="none" strike="noStrike">
-                <a:solidFill>
-                  <a:srgbClr val="FFFFFF"/>
-                </a:solidFill>
-                <a:uFillTx/>
-                <a:latin typeface="Noto Sans SC"/>
-                <a:ea typeface="Noto Sans SC"/>
-              </a:rPr>
-              <a:t>数据解耦与系统整合</a:t>
-            </a:r>
-            <a:r>
-              <a:rPr lang="en-US" sz="1300" b="0" u="none" strike="noStrike">
-                <a:solidFill>
-                  <a:srgbClr val="FFFFFF">
-                    <a:alpha val="60000"/>
-                  </a:srgbClr>
-                </a:solidFill>
-                <a:uFillTx/>
-                <a:latin typeface="Noto Sans SC"/>
-                <a:ea typeface="Noto Sans SC"/>
-              </a:rPr>
-              <a:t>| </a:t>
-            </a:r>
-            <a:r>
-              <a:rPr lang="zh-CN" sz="1300" b="0" u="none" strike="noStrike">
-                <a:solidFill>
-                  <a:srgbClr val="FFFFFF">
-                    <a:alpha val="60000"/>
-                  </a:srgbClr>
-                </a:solidFill>
-                <a:uFillTx/>
-                <a:latin typeface="Noto Sans SC"/>
-                <a:ea typeface="Noto Sans SC"/>
-              </a:rPr>
-              <a:t>负责人：李想、李少华</a:t>
-            </a:r>
-            <a:endParaRPr lang="en-US" sz="1300" b="0" u="none" strike="noStrike">
-              <a:solidFill>
-                <a:srgbClr val="FFFFFF"/>
-              </a:solidFill>
-              <a:uFillTx/>
-              <a:latin typeface="Noto Sans CJK SC"/>
-            </a:endParaRPr>
-          </a:p>
-          <a:p>
-            <a:pPr>
-              <a:lnSpc>
-                <a:spcPct val="117000"/>
-              </a:lnSpc>
-              <a:tabLst>
-                <a:tab pos="0" algn="l"/>
-              </a:tabLst>
-            </a:pPr>
-            <a:r>
-              <a:rPr lang="zh-CN" sz="1200" b="0" u="none" strike="noStrike">
-                <a:solidFill>
-                  <a:srgbClr val="FFFFFF">
-                    <a:alpha val="80000"/>
-                  </a:srgbClr>
-                </a:solidFill>
-                <a:uFillTx/>
-                <a:latin typeface="Noto Sans SC"/>
-                <a:ea typeface="Noto Sans SC"/>
-              </a:rPr>
-              <a:t>推箱子关卡采用二维数组深拷贝管理状态回溯；制定统一接口规范，实现多游戏模块的插拔式加载与状态隔离。</a:t>
-            </a:r>
-            <a:endParaRPr lang="en-US" sz="1200" b="0" u="none" strike="noStrike">
-              <a:solidFill>
-                <a:srgbClr val="FFFFFF"/>
-              </a:solidFill>
-              <a:uFillTx/>
-              <a:latin typeface="Noto Sans CJK SC"/>
-            </a:endParaRPr>
-          </a:p>
-        </p:txBody>
-      </p:sp>
-      <p:sp>
-        <p:nvSpPr>
-          <p:cNvPr id="322" name="AutoShape 30"/>
-          <p:cNvSpPr/>
-          <p:nvPr/>
-        </p:nvSpPr>
-        <p:spPr>
-          <a:xfrm>
-            <a:off x="6603840" y="5778360"/>
-            <a:ext cx="4952520" cy="761760"/>
-          </a:xfrm>
-          <a:prstGeom prst="rect">
-            <a:avLst/>
-          </a:prstGeom>
-          <a:noFill/>
-          <a:ln w="12700">
-            <a:noFill/>
-          </a:ln>
-        </p:spPr>
-        <p:style>
-          <a:lnRef idx="0">
-            <a:scrgbClr r="0" g="0" b="0"/>
-          </a:lnRef>
-          <a:fillRef idx="0">
-            <a:scrgbClr r="0" g="0" b="0"/>
-          </a:fillRef>
-          <a:effectRef idx="0">
-            <a:scrgbClr r="0" g="0" b="0"/>
-          </a:effectRef>
-          <a:fontRef idx="minor"/>
-        </p:style>
-        <p:txBody>
-          <a:bodyPr lIns="0" tIns="0" rIns="0" bIns="0" anchor="ctr">
-            <a:noAutofit/>
-          </a:bodyPr>
-          <a:lstStyle/>
-          <a:p>
-            <a:pPr>
-              <a:lnSpc>
-                <a:spcPct val="117000"/>
-              </a:lnSpc>
-              <a:tabLst>
-                <a:tab pos="0" algn="l"/>
-              </a:tabLst>
-            </a:pPr>
-            <a:r>
-              <a:rPr lang="zh-CN" sz="1200" b="0" u="none" strike="noStrike">
-                <a:solidFill>
-                  <a:srgbClr val="FFFFFF">
-                    <a:alpha val="60000"/>
-                  </a:srgbClr>
-                </a:solidFill>
-                <a:uFillTx/>
-                <a:latin typeface="Noto Sans SC"/>
-                <a:ea typeface="Noto Sans SC"/>
-              </a:rPr>
-              <a:t>通过标准化接口与算法选型，团队攻克了底层技术难题，不仅保证了游戏运行的稳定性，也为后续功能扩展奠定了坚实基础。</a:t>
+              <a:t>分支模式让多位开发者同时推进不同任务，代码合并有序，规避版本冲突风险。</a:t>
             </a:r>
             <a:endParaRPr lang="en-US" sz="1200" b="0" u="none" strike="noStrike">
               <a:solidFill>
@@ -15079,1329 +12544,6 @@
       </p:grpSpPr>
       <p:sp>
         <p:nvSpPr>
-          <p:cNvPr id="323" name="AutoShape 2"/>
-          <p:cNvSpPr/>
-          <p:nvPr/>
-        </p:nvSpPr>
-        <p:spPr>
-          <a:xfrm>
-            <a:off x="0" y="0"/>
-            <a:ext cx="12191760" cy="6857640"/>
-          </a:xfrm>
-          <a:prstGeom prst="roundRect">
-            <a:avLst>
-              <a:gd name="adj" fmla="val 0"/>
-            </a:avLst>
-          </a:prstGeom>
-          <a:solidFill>
-            <a:srgbClr val="0F172A">
-              <a:alpha val="60000"/>
-            </a:srgbClr>
-          </a:solidFill>
-          <a:ln w="25400">
-            <a:noFill/>
-          </a:ln>
-        </p:spPr>
-        <p:style>
-          <a:lnRef idx="0">
-            <a:scrgbClr r="0" g="0" b="0"/>
-          </a:lnRef>
-          <a:fillRef idx="0">
-            <a:scrgbClr r="0" g="0" b="0"/>
-          </a:fillRef>
-          <a:effectRef idx="0">
-            <a:scrgbClr r="0" g="0" b="0"/>
-          </a:effectRef>
-          <a:fontRef idx="minor"/>
-        </p:style>
-        <p:txBody>
-          <a:bodyPr lIns="63360" tIns="63360" rIns="63360" bIns="63360" anchor="ctr">
-            <a:noAutofit/>
-          </a:bodyPr>
-          <a:lstStyle/>
-          <a:p>
-            <a:pPr algn="ctr">
-              <a:lnSpc>
-                <a:spcPct val="100000"/>
-              </a:lnSpc>
-            </a:pPr>
-            <a:endParaRPr lang="en-US" sz="1400" b="0" u="none" strike="noStrike">
-              <a:solidFill>
-                <a:srgbClr val="000000"/>
-              </a:solidFill>
-              <a:uFillTx/>
-              <a:latin typeface="Arial"/>
-              <a:ea typeface="Arial"/>
-            </a:endParaRPr>
-          </a:p>
-        </p:txBody>
-      </p:sp>
-      <p:sp>
-        <p:nvSpPr>
-          <p:cNvPr id="324" name="AutoShape 3"/>
-          <p:cNvSpPr/>
-          <p:nvPr/>
-        </p:nvSpPr>
-        <p:spPr>
-          <a:xfrm>
-            <a:off x="762120" y="507960"/>
-            <a:ext cx="10667520" cy="634680"/>
-          </a:xfrm>
-          <a:prstGeom prst="rect">
-            <a:avLst/>
-          </a:prstGeom>
-          <a:noFill/>
-          <a:ln w="12700">
-            <a:noFill/>
-          </a:ln>
-        </p:spPr>
-        <p:style>
-          <a:lnRef idx="0">
-            <a:scrgbClr r="0" g="0" b="0"/>
-          </a:lnRef>
-          <a:fillRef idx="0">
-            <a:scrgbClr r="0" g="0" b="0"/>
-          </a:fillRef>
-          <a:effectRef idx="0">
-            <a:scrgbClr r="0" g="0" b="0"/>
-          </a:effectRef>
-          <a:fontRef idx="minor"/>
-        </p:style>
-        <p:txBody>
-          <a:bodyPr lIns="0" tIns="0" rIns="0" bIns="0" anchor="ctr">
-            <a:noAutofit/>
-          </a:bodyPr>
-          <a:lstStyle/>
-          <a:p>
-            <a:pPr>
-              <a:lnSpc>
-                <a:spcPct val="125000"/>
-              </a:lnSpc>
-              <a:tabLst>
-                <a:tab pos="0" algn="l"/>
-              </a:tabLst>
-            </a:pPr>
-            <a:r>
-              <a:rPr lang="zh-CN" sz="3200" b="1" u="none" strike="noStrike">
-                <a:solidFill>
-                  <a:srgbClr val="FFFFFF"/>
-                </a:solidFill>
-                <a:uFillTx/>
-                <a:latin typeface="Noto Sans SC"/>
-                <a:ea typeface="Noto Sans SC"/>
-              </a:rPr>
-              <a:t>代码仓库结构</a:t>
-            </a:r>
-            <a:endParaRPr lang="en-US" sz="3200" b="0" u="none" strike="noStrike">
-              <a:solidFill>
-                <a:srgbClr val="FFFFFF"/>
-              </a:solidFill>
-              <a:uFillTx/>
-              <a:latin typeface="Noto Sans CJK SC"/>
-            </a:endParaRPr>
-          </a:p>
-        </p:txBody>
-      </p:sp>
-      <p:sp>
-        <p:nvSpPr>
-          <p:cNvPr id="325" name="AutoShape 4"/>
-          <p:cNvSpPr/>
-          <p:nvPr/>
-        </p:nvSpPr>
-        <p:spPr>
-          <a:xfrm>
-            <a:off x="762120" y="1778040"/>
-            <a:ext cx="5270040" cy="3682800"/>
-          </a:xfrm>
-          <a:prstGeom prst="roundRect">
-            <a:avLst>
-              <a:gd name="adj" fmla="val 0"/>
-            </a:avLst>
-          </a:prstGeom>
-          <a:solidFill>
-            <a:srgbClr val="FFFFFF">
-              <a:alpha val="8000"/>
-            </a:srgbClr>
-          </a:solidFill>
-          <a:ln w="12700">
-            <a:solidFill>
-              <a:srgbClr val="2BD1FC">
-                <a:alpha val="40000"/>
-              </a:srgbClr>
-            </a:solidFill>
-            <a:round/>
-          </a:ln>
-        </p:spPr>
-        <p:style>
-          <a:lnRef idx="0">
-            <a:scrgbClr r="0" g="0" b="0"/>
-          </a:lnRef>
-          <a:fillRef idx="0">
-            <a:scrgbClr r="0" g="0" b="0"/>
-          </a:fillRef>
-          <a:effectRef idx="0">
-            <a:scrgbClr r="0" g="0" b="0"/>
-          </a:effectRef>
-          <a:fontRef idx="minor"/>
-        </p:style>
-        <p:txBody>
-          <a:bodyPr lIns="63360" tIns="63360" rIns="63360" bIns="63360" anchor="ctr">
-            <a:noAutofit/>
-          </a:bodyPr>
-          <a:lstStyle/>
-          <a:p>
-            <a:pPr algn="ctr">
-              <a:lnSpc>
-                <a:spcPct val="100000"/>
-              </a:lnSpc>
-            </a:pPr>
-            <a:endParaRPr lang="en-US" sz="1400" b="0" u="none" strike="noStrike">
-              <a:solidFill>
-                <a:srgbClr val="000000"/>
-              </a:solidFill>
-              <a:uFillTx/>
-              <a:latin typeface="Arial"/>
-              <a:ea typeface="Arial"/>
-            </a:endParaRPr>
-          </a:p>
-        </p:txBody>
-      </p:sp>
-      <p:pic>
-        <p:nvPicPr>
-          <p:cNvPr id="326" name="Picture 5"/>
-          <p:cNvPicPr/>
-          <p:nvPr/>
-        </p:nvPicPr>
-        <p:blipFill>
-          <a:blip r:embed="rId4">
-            <a:extLst>
-              <a:ext uri="{96DAC541-7B7A-43D3-8B79-37D633B846F1}">
-                <asvg:svgBlip xmlns:asvg="http://schemas.microsoft.com/office/drawing/2016/SVG/main" r:embed="rId5"/>
-              </a:ext>
-            </a:extLst>
-          </a:blip>
-          <a:stretch/>
-        </p:blipFill>
-        <p:spPr>
-          <a:xfrm>
-            <a:off x="1015920" y="1968480"/>
-            <a:ext cx="304560" cy="304560"/>
-          </a:xfrm>
-          <a:prstGeom prst="rect">
-            <a:avLst/>
-          </a:prstGeom>
-          <a:noFill/>
-          <a:ln w="0">
-            <a:noFill/>
-          </a:ln>
-        </p:spPr>
-      </p:pic>
-      <p:sp>
-        <p:nvSpPr>
-          <p:cNvPr id="327" name="AutoShape 6"/>
-          <p:cNvSpPr/>
-          <p:nvPr/>
-        </p:nvSpPr>
-        <p:spPr>
-          <a:xfrm>
-            <a:off x="1460520" y="1930320"/>
-            <a:ext cx="4317480" cy="380520"/>
-          </a:xfrm>
-          <a:prstGeom prst="rect">
-            <a:avLst/>
-          </a:prstGeom>
-          <a:noFill/>
-          <a:ln w="12700">
-            <a:noFill/>
-          </a:ln>
-        </p:spPr>
-        <p:style>
-          <a:lnRef idx="0">
-            <a:scrgbClr r="0" g="0" b="0"/>
-          </a:lnRef>
-          <a:fillRef idx="0">
-            <a:scrgbClr r="0" g="0" b="0"/>
-          </a:fillRef>
-          <a:effectRef idx="0">
-            <a:scrgbClr r="0" g="0" b="0"/>
-          </a:effectRef>
-          <a:fontRef idx="minor"/>
-        </p:style>
-        <p:txBody>
-          <a:bodyPr lIns="0" tIns="0" rIns="0" bIns="0" anchor="ctr">
-            <a:noAutofit/>
-          </a:bodyPr>
-          <a:lstStyle/>
-          <a:p>
-            <a:pPr>
-              <a:lnSpc>
-                <a:spcPct val="125000"/>
-              </a:lnSpc>
-              <a:tabLst>
-                <a:tab pos="0" algn="l"/>
-              </a:tabLst>
-            </a:pPr>
-            <a:r>
-              <a:rPr lang="zh-CN" sz="1800" b="1" u="none" strike="noStrike">
-                <a:solidFill>
-                  <a:srgbClr val="2BD1FC"/>
-                </a:solidFill>
-                <a:uFillTx/>
-                <a:latin typeface="Noto Sans SC"/>
-                <a:ea typeface="Noto Sans SC"/>
-              </a:rPr>
-              <a:t>模块化文件组织</a:t>
-            </a:r>
-            <a:endParaRPr lang="en-US" sz="1800" b="0" u="none" strike="noStrike">
-              <a:solidFill>
-                <a:srgbClr val="FFFFFF"/>
-              </a:solidFill>
-              <a:uFillTx/>
-              <a:latin typeface="Noto Sans CJK SC"/>
-            </a:endParaRPr>
-          </a:p>
-        </p:txBody>
-      </p:sp>
-      <p:cxnSp>
-        <p:nvCxnSpPr>
-          <p:cNvPr id="328" name="Connector 7"/>
-          <p:cNvCxnSpPr/>
-          <p:nvPr/>
-        </p:nvCxnSpPr>
-        <p:spPr>
-          <a:xfrm>
-            <a:off x="1015920" y="2539800"/>
-            <a:ext cx="4762800" cy="360"/>
-          </a:xfrm>
-          <a:prstGeom prst="straightConnector1">
-            <a:avLst/>
-          </a:prstGeom>
-          <a:ln w="12700">
-            <a:solidFill>
-              <a:srgbClr val="FFFFFF">
-                <a:alpha val="15000"/>
-              </a:srgbClr>
-            </a:solidFill>
-            <a:prstDash val="dash"/>
-            <a:round/>
-          </a:ln>
-        </p:spPr>
-      </p:cxnSp>
-      <p:sp>
-        <p:nvSpPr>
-          <p:cNvPr id="329" name="AutoShape 8"/>
-          <p:cNvSpPr/>
-          <p:nvPr/>
-        </p:nvSpPr>
-        <p:spPr>
-          <a:xfrm>
-            <a:off x="1015920" y="2793960"/>
-            <a:ext cx="4762080" cy="2412720"/>
-          </a:xfrm>
-          <a:prstGeom prst="rect">
-            <a:avLst/>
-          </a:prstGeom>
-          <a:noFill/>
-          <a:ln w="12700">
-            <a:noFill/>
-          </a:ln>
-        </p:spPr>
-        <p:style>
-          <a:lnRef idx="0">
-            <a:scrgbClr r="0" g="0" b="0"/>
-          </a:lnRef>
-          <a:fillRef idx="0">
-            <a:scrgbClr r="0" g="0" b="0"/>
-          </a:fillRef>
-          <a:effectRef idx="0">
-            <a:scrgbClr r="0" g="0" b="0"/>
-          </a:effectRef>
-          <a:fontRef idx="minor"/>
-        </p:style>
-        <p:txBody>
-          <a:bodyPr lIns="0" tIns="0" rIns="0" bIns="0" anchor="ctr">
-            <a:noAutofit/>
-          </a:bodyPr>
-          <a:lstStyle/>
-          <a:p>
-            <a:pPr>
-              <a:lnSpc>
-                <a:spcPct val="125000"/>
-              </a:lnSpc>
-              <a:tabLst>
-                <a:tab pos="0" algn="l"/>
-              </a:tabLst>
-            </a:pPr>
-            <a:r>
-              <a:rPr lang="zh-CN" sz="1400" b="0" u="none" strike="noStrike">
-                <a:solidFill>
-                  <a:srgbClr val="E2E8F0"/>
-                </a:solidFill>
-                <a:uFillTx/>
-                <a:latin typeface="Noto Sans SC"/>
-                <a:ea typeface="Noto Sans SC"/>
-              </a:rPr>
-              <a:t>以</a:t>
-            </a:r>
-            <a:r>
-              <a:rPr lang="en-US" sz="1400" b="1" u="none" strike="noStrike">
-                <a:solidFill>
-                  <a:srgbClr val="E2E8F0"/>
-                </a:solidFill>
-                <a:uFillTx/>
-                <a:latin typeface="Noto Sans SC"/>
-                <a:ea typeface="Noto Sans SC"/>
-              </a:rPr>
-              <a:t>game-hub/</a:t>
-            </a:r>
-            <a:r>
-              <a:rPr lang="zh-CN" sz="1400" b="0" u="none" strike="noStrike">
-                <a:solidFill>
-                  <a:srgbClr val="E2E8F0"/>
-                </a:solidFill>
-                <a:uFillTx/>
-                <a:latin typeface="Noto Sans SC"/>
-                <a:ea typeface="Noto Sans SC"/>
-              </a:rPr>
-              <a:t>为根目录，入口文件</a:t>
-            </a:r>
-            <a:r>
-              <a:rPr lang="en-US" sz="1400" b="1" u="none" strike="noStrike">
-                <a:solidFill>
-                  <a:srgbClr val="E2E8F0"/>
-                </a:solidFill>
-                <a:uFillTx/>
-                <a:latin typeface="Noto Sans SC"/>
-                <a:ea typeface="Noto Sans SC"/>
-              </a:rPr>
-              <a:t>index.html</a:t>
-            </a:r>
-            <a:r>
-              <a:rPr lang="zh-CN" sz="1400" b="0" u="none" strike="noStrike">
-                <a:solidFill>
-                  <a:srgbClr val="E2E8F0"/>
-                </a:solidFill>
-                <a:uFillTx/>
-                <a:latin typeface="Noto Sans SC"/>
-                <a:ea typeface="Noto Sans SC"/>
-              </a:rPr>
-              <a:t>作为游戏回廊，统一调度所有游戏模块。每个游戏均为独立 </a:t>
-            </a:r>
-            <a:r>
-              <a:rPr lang="en-US" sz="1400" b="0" u="none" strike="noStrike">
-                <a:solidFill>
-                  <a:srgbClr val="E2E8F0"/>
-                </a:solidFill>
-                <a:uFillTx/>
-                <a:latin typeface="Noto Sans SC"/>
-                <a:ea typeface="Noto Sans SC"/>
-              </a:rPr>
-              <a:t>HTML </a:t>
-            </a:r>
-            <a:r>
-              <a:rPr lang="zh-CN" sz="1400" b="0" u="none" strike="noStrike">
-                <a:solidFill>
-                  <a:srgbClr val="E2E8F0"/>
-                </a:solidFill>
-                <a:uFillTx/>
-                <a:latin typeface="Noto Sans SC"/>
-                <a:ea typeface="Noto Sans SC"/>
-              </a:rPr>
-              <a:t>文件，按开发者职责划分，结构清晰易维护。资源集中存放于</a:t>
-            </a:r>
-            <a:r>
-              <a:rPr lang="en-US" sz="1400" b="1" u="none" strike="noStrike">
-                <a:solidFill>
-                  <a:srgbClr val="E2E8F0"/>
-                </a:solidFill>
-                <a:uFillTx/>
-                <a:latin typeface="Noto Sans SC"/>
-                <a:ea typeface="Noto Sans SC"/>
-              </a:rPr>
-              <a:t>assets/</a:t>
-            </a:r>
-            <a:r>
-              <a:rPr lang="zh-CN" sz="1400" b="0" u="none" strike="noStrike">
-                <a:solidFill>
-                  <a:srgbClr val="E2E8F0"/>
-                </a:solidFill>
-                <a:uFillTx/>
-                <a:latin typeface="Noto Sans SC"/>
-                <a:ea typeface="Noto Sans SC"/>
-              </a:rPr>
-              <a:t>，文档归档于</a:t>
-            </a:r>
-            <a:r>
-              <a:rPr lang="en-US" sz="1400" b="1" u="none" strike="noStrike">
-                <a:solidFill>
-                  <a:srgbClr val="E2E8F0"/>
-                </a:solidFill>
-                <a:uFillTx/>
-                <a:latin typeface="Noto Sans SC"/>
-                <a:ea typeface="Noto Sans SC"/>
-              </a:rPr>
-              <a:t>docs/</a:t>
-            </a:r>
-            <a:r>
-              <a:rPr lang="zh-CN" sz="1400" b="0" u="none" strike="noStrike">
-                <a:solidFill>
-                  <a:srgbClr val="E2E8F0"/>
-                </a:solidFill>
-                <a:uFillTx/>
-                <a:latin typeface="Noto Sans SC"/>
-                <a:ea typeface="Noto Sans SC"/>
-              </a:rPr>
-              <a:t>，确保项目工程化规范。</a:t>
-            </a:r>
-            <a:endParaRPr lang="en-US" sz="1400" b="0" u="none" strike="noStrike">
-              <a:solidFill>
-                <a:srgbClr val="FFFFFF"/>
-              </a:solidFill>
-              <a:uFillTx/>
-              <a:latin typeface="Noto Sans CJK SC"/>
-            </a:endParaRPr>
-          </a:p>
-          <a:p>
-            <a:pPr>
-              <a:lnSpc>
-                <a:spcPct val="125000"/>
-              </a:lnSpc>
-              <a:tabLst>
-                <a:tab pos="0" algn="l"/>
-              </a:tabLst>
-            </a:pPr>
-            <a:r>
-              <a:rPr lang="zh-CN" sz="1300" b="0" u="none" strike="noStrike">
-                <a:solidFill>
-                  <a:srgbClr val="FFFFFF">
-                    <a:alpha val="60000"/>
-                  </a:srgbClr>
-                </a:solidFill>
-                <a:uFillTx/>
-                <a:latin typeface="Noto Sans SC"/>
-                <a:ea typeface="Noto Sans SC"/>
-              </a:rPr>
-              <a:t>分工：李玥峰（入口页）、李少华（</a:t>
-            </a:r>
-            <a:r>
-              <a:rPr lang="en-US" sz="1300" b="0" u="none" strike="noStrike">
-                <a:solidFill>
-                  <a:srgbClr val="FFFFFF">
-                    <a:alpha val="60000"/>
-                  </a:srgbClr>
-                </a:solidFill>
-                <a:uFillTx/>
-                <a:latin typeface="Noto Sans SC"/>
-                <a:ea typeface="Noto Sans SC"/>
-              </a:rPr>
-              <a:t>5</a:t>
-            </a:r>
-            <a:r>
-              <a:rPr lang="zh-CN" sz="1300" b="0" u="none" strike="noStrike">
-                <a:solidFill>
-                  <a:srgbClr val="FFFFFF">
-                    <a:alpha val="60000"/>
-                  </a:srgbClr>
-                </a:solidFill>
-                <a:uFillTx/>
-                <a:latin typeface="Noto Sans SC"/>
-                <a:ea typeface="Noto Sans SC"/>
-              </a:rPr>
-              <a:t>款基础游戏）、李振豪（策略类游戏）。</a:t>
-            </a:r>
-            <a:endParaRPr lang="en-US" sz="1300" b="0" u="none" strike="noStrike">
-              <a:solidFill>
-                <a:srgbClr val="FFFFFF"/>
-              </a:solidFill>
-              <a:uFillTx/>
-              <a:latin typeface="Noto Sans CJK SC"/>
-            </a:endParaRPr>
-          </a:p>
-        </p:txBody>
-      </p:sp>
-      <p:sp>
-        <p:nvSpPr>
-          <p:cNvPr id="330" name="AutoShape 9"/>
-          <p:cNvSpPr/>
-          <p:nvPr/>
-        </p:nvSpPr>
-        <p:spPr>
-          <a:xfrm>
-            <a:off x="6159600" y="1778040"/>
-            <a:ext cx="5270040" cy="3682800"/>
-          </a:xfrm>
-          <a:prstGeom prst="roundRect">
-            <a:avLst>
-              <a:gd name="adj" fmla="val 0"/>
-            </a:avLst>
-          </a:prstGeom>
-          <a:solidFill>
-            <a:srgbClr val="FFFFFF">
-              <a:alpha val="8000"/>
-            </a:srgbClr>
-          </a:solidFill>
-          <a:ln w="12700">
-            <a:solidFill>
-              <a:srgbClr val="2BD1FC">
-                <a:alpha val="40000"/>
-              </a:srgbClr>
-            </a:solidFill>
-            <a:round/>
-          </a:ln>
-        </p:spPr>
-        <p:style>
-          <a:lnRef idx="0">
-            <a:scrgbClr r="0" g="0" b="0"/>
-          </a:lnRef>
-          <a:fillRef idx="0">
-            <a:scrgbClr r="0" g="0" b="0"/>
-          </a:fillRef>
-          <a:effectRef idx="0">
-            <a:scrgbClr r="0" g="0" b="0"/>
-          </a:effectRef>
-          <a:fontRef idx="minor"/>
-        </p:style>
-        <p:txBody>
-          <a:bodyPr lIns="63360" tIns="63360" rIns="63360" bIns="63360" anchor="ctr">
-            <a:noAutofit/>
-          </a:bodyPr>
-          <a:lstStyle/>
-          <a:p>
-            <a:pPr algn="ctr">
-              <a:lnSpc>
-                <a:spcPct val="100000"/>
-              </a:lnSpc>
-            </a:pPr>
-            <a:endParaRPr lang="en-US" sz="1400" b="0" u="none" strike="noStrike">
-              <a:solidFill>
-                <a:srgbClr val="000000"/>
-              </a:solidFill>
-              <a:uFillTx/>
-              <a:latin typeface="Arial"/>
-              <a:ea typeface="Arial"/>
-            </a:endParaRPr>
-          </a:p>
-        </p:txBody>
-      </p:sp>
-      <p:pic>
-        <p:nvPicPr>
-          <p:cNvPr id="331" name="Picture 10"/>
-          <p:cNvPicPr/>
-          <p:nvPr/>
-        </p:nvPicPr>
-        <p:blipFill>
-          <a:blip r:embed="rId6">
-            <a:extLst>
-              <a:ext uri="{96DAC541-7B7A-43D3-8B79-37D633B846F1}">
-                <asvg:svgBlip xmlns:asvg="http://schemas.microsoft.com/office/drawing/2016/SVG/main" r:embed="rId7"/>
-              </a:ext>
-            </a:extLst>
-          </a:blip>
-          <a:stretch/>
-        </p:blipFill>
-        <p:spPr>
-          <a:xfrm>
-            <a:off x="6413400" y="1968480"/>
-            <a:ext cx="304560" cy="304560"/>
-          </a:xfrm>
-          <a:prstGeom prst="rect">
-            <a:avLst/>
-          </a:prstGeom>
-          <a:noFill/>
-          <a:ln w="0">
-            <a:noFill/>
-          </a:ln>
-        </p:spPr>
-      </p:pic>
-      <p:sp>
-        <p:nvSpPr>
-          <p:cNvPr id="332" name="AutoShape 11"/>
-          <p:cNvSpPr/>
-          <p:nvPr/>
-        </p:nvSpPr>
-        <p:spPr>
-          <a:xfrm>
-            <a:off x="6858000" y="1930320"/>
-            <a:ext cx="4317480" cy="380520"/>
-          </a:xfrm>
-          <a:prstGeom prst="rect">
-            <a:avLst/>
-          </a:prstGeom>
-          <a:noFill/>
-          <a:ln w="12700">
-            <a:noFill/>
-          </a:ln>
-        </p:spPr>
-        <p:style>
-          <a:lnRef idx="0">
-            <a:scrgbClr r="0" g="0" b="0"/>
-          </a:lnRef>
-          <a:fillRef idx="0">
-            <a:scrgbClr r="0" g="0" b="0"/>
-          </a:fillRef>
-          <a:effectRef idx="0">
-            <a:scrgbClr r="0" g="0" b="0"/>
-          </a:effectRef>
-          <a:fontRef idx="minor"/>
-        </p:style>
-        <p:txBody>
-          <a:bodyPr lIns="0" tIns="0" rIns="0" bIns="0" anchor="ctr">
-            <a:noAutofit/>
-          </a:bodyPr>
-          <a:lstStyle/>
-          <a:p>
-            <a:pPr>
-              <a:lnSpc>
-                <a:spcPct val="125000"/>
-              </a:lnSpc>
-              <a:tabLst>
-                <a:tab pos="0" algn="l"/>
-              </a:tabLst>
-            </a:pPr>
-            <a:r>
-              <a:rPr lang="en-US" sz="1800" b="1" u="none" strike="noStrike">
-                <a:solidFill>
-                  <a:srgbClr val="2BD1FC"/>
-                </a:solidFill>
-                <a:uFillTx/>
-                <a:latin typeface="Noto Sans SC"/>
-                <a:ea typeface="Noto Sans SC"/>
-              </a:rPr>
-              <a:t>Git Flow </a:t>
-            </a:r>
-            <a:r>
-              <a:rPr lang="zh-CN" sz="1800" b="1" u="none" strike="noStrike">
-                <a:solidFill>
-                  <a:srgbClr val="2BD1FC"/>
-                </a:solidFill>
-                <a:uFillTx/>
-                <a:latin typeface="Noto Sans SC"/>
-                <a:ea typeface="Noto Sans SC"/>
-              </a:rPr>
-              <a:t>分支协作策略</a:t>
-            </a:r>
-            <a:endParaRPr lang="en-US" sz="1800" b="0" u="none" strike="noStrike">
-              <a:solidFill>
-                <a:srgbClr val="FFFFFF"/>
-              </a:solidFill>
-              <a:uFillTx/>
-              <a:latin typeface="Noto Sans CJK SC"/>
-            </a:endParaRPr>
-          </a:p>
-        </p:txBody>
-      </p:sp>
-      <p:cxnSp>
-        <p:nvCxnSpPr>
-          <p:cNvPr id="333" name="Connector 12"/>
-          <p:cNvCxnSpPr/>
-          <p:nvPr/>
-        </p:nvCxnSpPr>
-        <p:spPr>
-          <a:xfrm>
-            <a:off x="6413400" y="2539800"/>
-            <a:ext cx="4762800" cy="360"/>
-          </a:xfrm>
-          <a:prstGeom prst="straightConnector1">
-            <a:avLst/>
-          </a:prstGeom>
-          <a:ln w="12700">
-            <a:solidFill>
-              <a:srgbClr val="FFFFFF">
-                <a:alpha val="15000"/>
-              </a:srgbClr>
-            </a:solidFill>
-            <a:prstDash val="dash"/>
-            <a:round/>
-          </a:ln>
-        </p:spPr>
-      </p:cxnSp>
-      <p:sp>
-        <p:nvSpPr>
-          <p:cNvPr id="334" name="AutoShape 13"/>
-          <p:cNvSpPr/>
-          <p:nvPr/>
-        </p:nvSpPr>
-        <p:spPr>
-          <a:xfrm>
-            <a:off x="6413400" y="2793960"/>
-            <a:ext cx="4762080" cy="2412720"/>
-          </a:xfrm>
-          <a:prstGeom prst="rect">
-            <a:avLst/>
-          </a:prstGeom>
-          <a:noFill/>
-          <a:ln w="12700">
-            <a:noFill/>
-          </a:ln>
-        </p:spPr>
-        <p:style>
-          <a:lnRef idx="0">
-            <a:scrgbClr r="0" g="0" b="0"/>
-          </a:lnRef>
-          <a:fillRef idx="0">
-            <a:scrgbClr r="0" g="0" b="0"/>
-          </a:fillRef>
-          <a:effectRef idx="0">
-            <a:scrgbClr r="0" g="0" b="0"/>
-          </a:effectRef>
-          <a:fontRef idx="minor"/>
-        </p:style>
-        <p:txBody>
-          <a:bodyPr lIns="0" tIns="0" rIns="0" bIns="0" anchor="ctr">
-            <a:noAutofit/>
-          </a:bodyPr>
-          <a:lstStyle/>
-          <a:p>
-            <a:pPr>
-              <a:lnSpc>
-                <a:spcPct val="125000"/>
-              </a:lnSpc>
-              <a:tabLst>
-                <a:tab pos="0" algn="l"/>
-              </a:tabLst>
-            </a:pPr>
-            <a:r>
-              <a:rPr lang="zh-CN" sz="1400" b="0" u="none" strike="noStrike">
-                <a:solidFill>
-                  <a:srgbClr val="E2E8F0"/>
-                </a:solidFill>
-                <a:uFillTx/>
-                <a:latin typeface="Noto Sans SC"/>
-                <a:ea typeface="Noto Sans SC"/>
-              </a:rPr>
-              <a:t>采用标准的 </a:t>
-            </a:r>
-            <a:r>
-              <a:rPr lang="en-US" sz="1400" b="0" u="none" strike="noStrike">
-                <a:solidFill>
-                  <a:srgbClr val="E2E8F0"/>
-                </a:solidFill>
-                <a:uFillTx/>
-                <a:latin typeface="Noto Sans SC"/>
-                <a:ea typeface="Noto Sans SC"/>
-              </a:rPr>
-              <a:t>Git Flow </a:t>
-            </a:r>
-            <a:r>
-              <a:rPr lang="zh-CN" sz="1400" b="0" u="none" strike="noStrike">
-                <a:solidFill>
-                  <a:srgbClr val="E2E8F0"/>
-                </a:solidFill>
-                <a:uFillTx/>
-                <a:latin typeface="Noto Sans SC"/>
-                <a:ea typeface="Noto Sans SC"/>
-              </a:rPr>
-              <a:t>工作流：</a:t>
-            </a:r>
-            <a:r>
-              <a:rPr lang="en-US" sz="1400" b="1" u="none" strike="noStrike">
-                <a:solidFill>
-                  <a:srgbClr val="E2E8F0"/>
-                </a:solidFill>
-                <a:uFillTx/>
-                <a:latin typeface="Noto Sans SC"/>
-                <a:ea typeface="Noto Sans SC"/>
-              </a:rPr>
-              <a:t>main</a:t>
-            </a:r>
-            <a:r>
-              <a:rPr lang="zh-CN" sz="1400" b="0" u="none" strike="noStrike">
-                <a:solidFill>
-                  <a:srgbClr val="E2E8F0"/>
-                </a:solidFill>
-                <a:uFillTx/>
-                <a:latin typeface="Noto Sans SC"/>
-                <a:ea typeface="Noto Sans SC"/>
-              </a:rPr>
-              <a:t>为生产分支，</a:t>
-            </a:r>
-            <a:r>
-              <a:rPr lang="en-US" sz="1400" b="1" u="none" strike="noStrike">
-                <a:solidFill>
-                  <a:srgbClr val="E2E8F0"/>
-                </a:solidFill>
-                <a:uFillTx/>
-                <a:latin typeface="Noto Sans SC"/>
-                <a:ea typeface="Noto Sans SC"/>
-              </a:rPr>
-              <a:t>develop</a:t>
-            </a:r>
-            <a:r>
-              <a:rPr lang="zh-CN" sz="1400" b="0" u="none" strike="noStrike">
-                <a:solidFill>
-                  <a:srgbClr val="E2E8F0"/>
-                </a:solidFill>
-                <a:uFillTx/>
-                <a:latin typeface="Noto Sans SC"/>
-                <a:ea typeface="Noto Sans SC"/>
-              </a:rPr>
-              <a:t>为集成分支。基于功能切分</a:t>
-            </a:r>
-            <a:r>
-              <a:rPr lang="en-US" sz="1400" b="1" u="none" strike="noStrike">
-                <a:solidFill>
-                  <a:srgbClr val="E2E8F0"/>
-                </a:solidFill>
-                <a:uFillTx/>
-                <a:latin typeface="Noto Sans SC"/>
-                <a:ea typeface="Noto Sans SC"/>
-              </a:rPr>
-              <a:t>feature</a:t>
-            </a:r>
-            <a:r>
-              <a:rPr lang="zh-CN" sz="1400" b="0" u="none" strike="noStrike">
-                <a:solidFill>
-                  <a:srgbClr val="E2E8F0"/>
-                </a:solidFill>
-                <a:uFillTx/>
-                <a:latin typeface="Noto Sans SC"/>
-                <a:ea typeface="Noto Sans SC"/>
-              </a:rPr>
-              <a:t>分支，实现界面、不同游戏模块、集成测试的并行开发，互不干扰。</a:t>
-            </a:r>
-            <a:endParaRPr lang="en-US" sz="1400" b="0" u="none" strike="noStrike">
-              <a:solidFill>
-                <a:srgbClr val="FFFFFF"/>
-              </a:solidFill>
-              <a:uFillTx/>
-              <a:latin typeface="Noto Sans CJK SC"/>
-            </a:endParaRPr>
-          </a:p>
-          <a:p>
-            <a:pPr>
-              <a:lnSpc>
-                <a:spcPct val="125000"/>
-              </a:lnSpc>
-              <a:tabLst>
-                <a:tab pos="0" algn="l"/>
-              </a:tabLst>
-            </a:pPr>
-            <a:r>
-              <a:rPr lang="zh-CN" sz="1300" b="0" u="none" strike="noStrike">
-                <a:solidFill>
-                  <a:srgbClr val="FFFFFF">
-                    <a:alpha val="60000"/>
-                  </a:srgbClr>
-                </a:solidFill>
-                <a:uFillTx/>
-                <a:latin typeface="Noto Sans SC"/>
-                <a:ea typeface="Noto Sans SC"/>
-              </a:rPr>
-              <a:t>优势：代码版本可控，功能迭代独立，便于代码审查与合并，保障主干分支的稳定性。</a:t>
-            </a:r>
-            <a:endParaRPr lang="en-US" sz="1300" b="0" u="none" strike="noStrike">
-              <a:solidFill>
-                <a:srgbClr val="FFFFFF"/>
-              </a:solidFill>
-              <a:uFillTx/>
-              <a:latin typeface="Noto Sans CJK SC"/>
-            </a:endParaRPr>
-          </a:p>
-        </p:txBody>
-      </p:sp>
-      <p:sp>
-        <p:nvSpPr>
-          <p:cNvPr id="335" name="AutoShape 14"/>
-          <p:cNvSpPr/>
-          <p:nvPr/>
-        </p:nvSpPr>
-        <p:spPr>
-          <a:xfrm>
-            <a:off x="762120" y="5715000"/>
-            <a:ext cx="5270040" cy="888480"/>
-          </a:xfrm>
-          <a:prstGeom prst="roundRect">
-            <a:avLst>
-              <a:gd name="adj" fmla="val 0"/>
-            </a:avLst>
-          </a:prstGeom>
-          <a:solidFill>
-            <a:srgbClr val="2BD1FC">
-              <a:alpha val="10000"/>
-            </a:srgbClr>
-          </a:solidFill>
-          <a:ln w="12700">
-            <a:solidFill>
-              <a:srgbClr val="2BD1FC">
-                <a:alpha val="20000"/>
-              </a:srgbClr>
-            </a:solidFill>
-            <a:round/>
-          </a:ln>
-        </p:spPr>
-        <p:style>
-          <a:lnRef idx="0">
-            <a:scrgbClr r="0" g="0" b="0"/>
-          </a:lnRef>
-          <a:fillRef idx="0">
-            <a:scrgbClr r="0" g="0" b="0"/>
-          </a:fillRef>
-          <a:effectRef idx="0">
-            <a:scrgbClr r="0" g="0" b="0"/>
-          </a:effectRef>
-          <a:fontRef idx="minor"/>
-        </p:style>
-        <p:txBody>
-          <a:bodyPr lIns="63360" tIns="63360" rIns="63360" bIns="63360" anchor="ctr">
-            <a:noAutofit/>
-          </a:bodyPr>
-          <a:lstStyle/>
-          <a:p>
-            <a:pPr algn="ctr">
-              <a:lnSpc>
-                <a:spcPct val="100000"/>
-              </a:lnSpc>
-            </a:pPr>
-            <a:endParaRPr lang="en-US" sz="1400" b="0" u="none" strike="noStrike">
-              <a:solidFill>
-                <a:srgbClr val="000000"/>
-              </a:solidFill>
-              <a:uFillTx/>
-              <a:latin typeface="Arial"/>
-              <a:ea typeface="Arial"/>
-            </a:endParaRPr>
-          </a:p>
-        </p:txBody>
-      </p:sp>
-      <p:pic>
-        <p:nvPicPr>
-          <p:cNvPr id="336" name="Picture 15"/>
-          <p:cNvPicPr/>
-          <p:nvPr/>
-        </p:nvPicPr>
-        <p:blipFill>
-          <a:blip r:embed="rId8">
-            <a:extLst>
-              <a:ext uri="{96DAC541-7B7A-43D3-8B79-37D633B846F1}">
-                <asvg:svgBlip xmlns:asvg="http://schemas.microsoft.com/office/drawing/2016/SVG/main" r:embed="rId9"/>
-              </a:ext>
-            </a:extLst>
-          </a:blip>
-          <a:stretch/>
-        </p:blipFill>
-        <p:spPr>
-          <a:xfrm>
-            <a:off x="952560" y="5880240"/>
-            <a:ext cx="355320" cy="355320"/>
-          </a:xfrm>
-          <a:prstGeom prst="rect">
-            <a:avLst/>
-          </a:prstGeom>
-          <a:noFill/>
-          <a:ln w="0">
-            <a:noFill/>
-          </a:ln>
-        </p:spPr>
-      </p:pic>
-      <p:sp>
-        <p:nvSpPr>
-          <p:cNvPr id="337" name="AutoShape 16"/>
-          <p:cNvSpPr/>
-          <p:nvPr/>
-        </p:nvSpPr>
-        <p:spPr>
-          <a:xfrm>
-            <a:off x="1460520" y="5816520"/>
-            <a:ext cx="4444560" cy="685440"/>
-          </a:xfrm>
-          <a:prstGeom prst="rect">
-            <a:avLst/>
-          </a:prstGeom>
-          <a:noFill/>
-          <a:ln w="12700">
-            <a:noFill/>
-          </a:ln>
-        </p:spPr>
-        <p:style>
-          <a:lnRef idx="0">
-            <a:scrgbClr r="0" g="0" b="0"/>
-          </a:lnRef>
-          <a:fillRef idx="0">
-            <a:scrgbClr r="0" g="0" b="0"/>
-          </a:fillRef>
-          <a:effectRef idx="0">
-            <a:scrgbClr r="0" g="0" b="0"/>
-          </a:effectRef>
-          <a:fontRef idx="minor"/>
-        </p:style>
-        <p:txBody>
-          <a:bodyPr lIns="0" tIns="0" rIns="0" bIns="0" anchor="ctr">
-            <a:noAutofit/>
-          </a:bodyPr>
-          <a:lstStyle/>
-          <a:p>
-            <a:pPr>
-              <a:lnSpc>
-                <a:spcPct val="108000"/>
-              </a:lnSpc>
-              <a:tabLst>
-                <a:tab pos="0" algn="l"/>
-              </a:tabLst>
-            </a:pPr>
-            <a:r>
-              <a:rPr lang="zh-CN" sz="1400" b="1" u="none" strike="noStrike">
-                <a:solidFill>
-                  <a:srgbClr val="FFFFFF"/>
-                </a:solidFill>
-                <a:uFillTx/>
-                <a:latin typeface="Noto Sans SC"/>
-                <a:ea typeface="Noto Sans SC"/>
-              </a:rPr>
-              <a:t>职责清晰，资源归一</a:t>
-            </a:r>
-            <a:br>
-              <a:rPr sz="1600"/>
-            </a:br>
-            <a:r>
-              <a:rPr lang="zh-CN" sz="1200" b="0" u="none" strike="noStrike">
-                <a:solidFill>
-                  <a:srgbClr val="FFFFFF">
-                    <a:alpha val="70000"/>
-                  </a:srgbClr>
-                </a:solidFill>
-                <a:uFillTx/>
-                <a:latin typeface="Noto Sans SC"/>
-                <a:ea typeface="Noto Sans SC"/>
-              </a:rPr>
-              <a:t>每个游戏模块独立封装，静态资源与文档分类管理，降低耦合度，提升维护效率。</a:t>
-            </a:r>
-            <a:endParaRPr lang="en-US" sz="1200" b="0" u="none" strike="noStrike">
-              <a:solidFill>
-                <a:srgbClr val="FFFFFF"/>
-              </a:solidFill>
-              <a:uFillTx/>
-              <a:latin typeface="Noto Sans CJK SC"/>
-            </a:endParaRPr>
-          </a:p>
-        </p:txBody>
-      </p:sp>
-      <p:sp>
-        <p:nvSpPr>
-          <p:cNvPr id="338" name="AutoShape 17"/>
-          <p:cNvSpPr/>
-          <p:nvPr/>
-        </p:nvSpPr>
-        <p:spPr>
-          <a:xfrm>
-            <a:off x="6159600" y="5715000"/>
-            <a:ext cx="5270040" cy="888480"/>
-          </a:xfrm>
-          <a:prstGeom prst="roundRect">
-            <a:avLst>
-              <a:gd name="adj" fmla="val 0"/>
-            </a:avLst>
-          </a:prstGeom>
-          <a:solidFill>
-            <a:srgbClr val="2BD1FC">
-              <a:alpha val="10000"/>
-            </a:srgbClr>
-          </a:solidFill>
-          <a:ln w="12700">
-            <a:solidFill>
-              <a:srgbClr val="2BD1FC">
-                <a:alpha val="20000"/>
-              </a:srgbClr>
-            </a:solidFill>
-            <a:round/>
-          </a:ln>
-        </p:spPr>
-        <p:style>
-          <a:lnRef idx="0">
-            <a:scrgbClr r="0" g="0" b="0"/>
-          </a:lnRef>
-          <a:fillRef idx="0">
-            <a:scrgbClr r="0" g="0" b="0"/>
-          </a:fillRef>
-          <a:effectRef idx="0">
-            <a:scrgbClr r="0" g="0" b="0"/>
-          </a:effectRef>
-          <a:fontRef idx="minor"/>
-        </p:style>
-        <p:txBody>
-          <a:bodyPr lIns="63360" tIns="63360" rIns="63360" bIns="63360" anchor="ctr">
-            <a:noAutofit/>
-          </a:bodyPr>
-          <a:lstStyle/>
-          <a:p>
-            <a:pPr algn="ctr">
-              <a:lnSpc>
-                <a:spcPct val="100000"/>
-              </a:lnSpc>
-            </a:pPr>
-            <a:endParaRPr lang="en-US" sz="1400" b="0" u="none" strike="noStrike">
-              <a:solidFill>
-                <a:srgbClr val="000000"/>
-              </a:solidFill>
-              <a:uFillTx/>
-              <a:latin typeface="Arial"/>
-              <a:ea typeface="Arial"/>
-            </a:endParaRPr>
-          </a:p>
-        </p:txBody>
-      </p:sp>
-      <p:pic>
-        <p:nvPicPr>
-          <p:cNvPr id="339" name="Picture 18"/>
-          <p:cNvPicPr/>
-          <p:nvPr/>
-        </p:nvPicPr>
-        <p:blipFill>
-          <a:blip r:embed="rId10">
-            <a:extLst>
-              <a:ext uri="{96DAC541-7B7A-43D3-8B79-37D633B846F1}">
-                <asvg:svgBlip xmlns:asvg="http://schemas.microsoft.com/office/drawing/2016/SVG/main" r:embed="rId11"/>
-              </a:ext>
-            </a:extLst>
-          </a:blip>
-          <a:stretch/>
-        </p:blipFill>
-        <p:spPr>
-          <a:xfrm>
-            <a:off x="6350040" y="5880240"/>
-            <a:ext cx="355320" cy="355320"/>
-          </a:xfrm>
-          <a:prstGeom prst="rect">
-            <a:avLst/>
-          </a:prstGeom>
-          <a:noFill/>
-          <a:ln w="0">
-            <a:noFill/>
-          </a:ln>
-        </p:spPr>
-      </p:pic>
-      <p:sp>
-        <p:nvSpPr>
-          <p:cNvPr id="340" name="AutoShape 19"/>
-          <p:cNvSpPr/>
-          <p:nvPr/>
-        </p:nvSpPr>
-        <p:spPr>
-          <a:xfrm>
-            <a:off x="6858000" y="5816520"/>
-            <a:ext cx="4444560" cy="685440"/>
-          </a:xfrm>
-          <a:prstGeom prst="rect">
-            <a:avLst/>
-          </a:prstGeom>
-          <a:noFill/>
-          <a:ln w="12700">
-            <a:noFill/>
-          </a:ln>
-        </p:spPr>
-        <p:style>
-          <a:lnRef idx="0">
-            <a:scrgbClr r="0" g="0" b="0"/>
-          </a:lnRef>
-          <a:fillRef idx="0">
-            <a:scrgbClr r="0" g="0" b="0"/>
-          </a:fillRef>
-          <a:effectRef idx="0">
-            <a:scrgbClr r="0" g="0" b="0"/>
-          </a:effectRef>
-          <a:fontRef idx="minor"/>
-        </p:style>
-        <p:txBody>
-          <a:bodyPr lIns="0" tIns="0" rIns="0" bIns="0" anchor="ctr">
-            <a:noAutofit/>
-          </a:bodyPr>
-          <a:lstStyle/>
-          <a:p>
-            <a:pPr>
-              <a:lnSpc>
-                <a:spcPct val="108000"/>
-              </a:lnSpc>
-              <a:tabLst>
-                <a:tab pos="0" algn="l"/>
-              </a:tabLst>
-            </a:pPr>
-            <a:r>
-              <a:rPr lang="zh-CN" sz="1400" b="1" u="none" strike="noStrike">
-                <a:solidFill>
-                  <a:srgbClr val="FFFFFF"/>
-                </a:solidFill>
-                <a:uFillTx/>
-                <a:latin typeface="Noto Sans SC"/>
-                <a:ea typeface="Noto Sans SC"/>
-              </a:rPr>
-              <a:t>分支隔离，高效并行</a:t>
-            </a:r>
-            <a:br>
-              <a:rPr sz="1600"/>
-            </a:br>
-            <a:r>
-              <a:rPr lang="en-US" sz="1200" b="0" u="none" strike="noStrike">
-                <a:solidFill>
-                  <a:srgbClr val="FFFFFF">
-                    <a:alpha val="70000"/>
-                  </a:srgbClr>
-                </a:solidFill>
-                <a:uFillTx/>
-                <a:latin typeface="Noto Sans SC"/>
-                <a:ea typeface="Noto Sans SC"/>
-              </a:rPr>
-              <a:t>Feature</a:t>
-            </a:r>
-            <a:r>
-              <a:rPr lang="zh-CN" sz="1200" b="0" u="none" strike="noStrike">
-                <a:solidFill>
-                  <a:srgbClr val="FFFFFF">
-                    <a:alpha val="70000"/>
-                  </a:srgbClr>
-                </a:solidFill>
-                <a:uFillTx/>
-                <a:latin typeface="Noto Sans SC"/>
-                <a:ea typeface="Noto Sans SC"/>
-              </a:rPr>
-              <a:t>分支模式让多位开发者同时推进不同任务，代码合并有序，规避版本冲突风险。</a:t>
-            </a:r>
-            <a:endParaRPr lang="en-US" sz="1200" b="0" u="none" strike="noStrike">
-              <a:solidFill>
-                <a:srgbClr val="FFFFFF"/>
-              </a:solidFill>
-              <a:uFillTx/>
-              <a:latin typeface="Noto Sans CJK SC"/>
-            </a:endParaRPr>
-          </a:p>
-        </p:txBody>
-      </p:sp>
-    </p:spTree>
-  </p:cSld>
-  <p:clrMapOvr>
-    <a:masterClrMapping/>
-  </p:clrMapOvr>
-</p:sld>
-</file>
-
-<file path=ppt/slides/slide14.xml><?xml version="1.0" encoding="utf-8"?>
-<p:sld xmlns:a="http://schemas.openxmlformats.org/drawingml/2006/main" xmlns:r="http://schemas.openxmlformats.org/officeDocument/2006/relationships" xmlns:p="http://schemas.openxmlformats.org/presentationml/2006/main">
-  <p:cSld>
-    <p:bg>
-      <p:bgPr>
-        <a:blipFill rotWithShape="0">
-          <a:blip r:embed="rId3"/>
-          <a:stretch>
-            <a:fillRect/>
-          </a:stretch>
-        </a:blipFill>
-        <a:effectLst/>
-      </p:bgPr>
-    </p:bg>
-    <p:spTree>
-      <p:nvGrpSpPr>
-        <p:cNvPr id="1" name=""/>
-        <p:cNvGrpSpPr/>
-        <p:nvPr/>
-      </p:nvGrpSpPr>
-      <p:grpSpPr>
-        <a:xfrm>
-          <a:off x="0" y="0"/>
-          <a:ext cx="0" cy="0"/>
-          <a:chOff x="0" y="0"/>
-          <a:chExt cx="0" cy="0"/>
-        </a:xfrm>
-      </p:grpSpPr>
-      <p:sp>
-        <p:nvSpPr>
           <p:cNvPr id="341" name="AutoShape 2"/>
           <p:cNvSpPr/>
           <p:nvPr/>
@@ -21966,7 +18108,7 @@
         <p:spPr>
           <a:xfrm>
             <a:off x="762120" y="1778040"/>
-            <a:ext cx="5270040" cy="1968120"/>
+            <a:ext cx="10492978" cy="1968120"/>
           </a:xfrm>
           <a:prstGeom prst="roundRect">
             <a:avLst>
@@ -22120,13 +18262,15 @@
       <p:cxnSp>
         <p:nvCxnSpPr>
           <p:cNvPr id="102" name="Connector 7"/>
-          <p:cNvCxnSpPr/>
+          <p:cNvCxnSpPr>
+            <a:cxnSpLocks/>
+          </p:cNvCxnSpPr>
           <p:nvPr/>
         </p:nvCxnSpPr>
         <p:spPr>
           <a:xfrm>
             <a:off x="1015920" y="2539800"/>
-            <a:ext cx="4762800" cy="360"/>
+            <a:ext cx="9791183" cy="0"/>
           </a:xfrm>
           <a:prstGeom prst="straightConnector1">
             <a:avLst/>
@@ -22151,7 +18295,7 @@
         <p:spPr>
           <a:xfrm>
             <a:off x="1015920" y="2666880"/>
-            <a:ext cx="4762080" cy="952200"/>
+            <a:ext cx="10091892" cy="825836"/>
           </a:xfrm>
           <a:prstGeom prst="rect">
             <a:avLst/>
@@ -22188,7 +18332,7 @@
               </a:tabLst>
             </a:pPr>
             <a:r>
-              <a:rPr lang="zh-CN" sz="1400" b="0" u="none" strike="noStrike">
+              <a:rPr lang="zh-CN" sz="1400" b="0" u="none" strike="noStrike" dirty="0">
                 <a:solidFill>
                   <a:srgbClr val="FFFFFF">
                     <a:alpha val="90000"/>
@@ -22201,7 +18345,7 @@
               <a:t>基于 </a:t>
             </a:r>
             <a:r>
-              <a:rPr lang="en-US" sz="1400" b="0" u="none" strike="noStrike">
+              <a:rPr lang="en-US" sz="1400" b="0" u="none" strike="noStrike" dirty="0">
                 <a:solidFill>
                   <a:srgbClr val="FFFFFF">
                     <a:alpha val="90000"/>
@@ -22214,7 +18358,7 @@
               <a:t>HTML5 </a:t>
             </a:r>
             <a:r>
-              <a:rPr lang="zh-CN" sz="1400" b="0" u="none" strike="noStrike">
+              <a:rPr lang="zh-CN" sz="1400" b="0" u="none" strike="noStrike" dirty="0">
                 <a:solidFill>
                   <a:srgbClr val="FFFFFF">
                     <a:alpha val="90000"/>
@@ -22227,7 +18371,7 @@
               <a:t>构建语义化页面结构，结合 </a:t>
             </a:r>
             <a:r>
-              <a:rPr lang="en-US" sz="1400" b="0" u="none" strike="noStrike">
+              <a:rPr lang="en-US" sz="1400" b="0" u="none" strike="noStrike" dirty="0">
                 <a:solidFill>
                   <a:srgbClr val="FFFFFF">
                     <a:alpha val="90000"/>
@@ -22240,7 +18384,7 @@
               <a:t>CSS3 </a:t>
             </a:r>
             <a:r>
-              <a:rPr lang="zh-CN" sz="1400" b="0" u="none" strike="noStrike">
+              <a:rPr lang="zh-CN" altLang="en-US" sz="1400" b="0" u="none" strike="noStrike" dirty="0">
                 <a:solidFill>
                   <a:srgbClr val="FFFFFF">
                     <a:alpha val="90000"/>
@@ -22250,9 +18394,35 @@
                 <a:latin typeface="Noto Sans SC"/>
                 <a:ea typeface="Noto Sans SC"/>
               </a:rPr>
+              <a:t>以及</a:t>
+            </a:r>
+            <a:r>
+              <a:rPr lang="en-US" altLang="zh-CN" sz="1400" b="0" u="none" strike="noStrike" dirty="0">
+                <a:solidFill>
+                  <a:srgbClr val="FFFFFF">
+                    <a:alpha val="90000"/>
+                  </a:srgbClr>
+                </a:solidFill>
+                <a:uFillTx/>
+                <a:latin typeface="Noto Sans SC"/>
+                <a:ea typeface="Noto Sans SC"/>
+              </a:rPr>
+              <a:t>JavaScript</a:t>
+            </a:r>
+            <a:r>
+              <a:rPr lang="zh-CN" sz="1400" b="0" u="none" strike="noStrike" dirty="0">
+                <a:solidFill>
+                  <a:srgbClr val="FFFFFF">
+                    <a:alpha val="90000"/>
+                  </a:srgbClr>
+                </a:solidFill>
+                <a:uFillTx/>
+                <a:latin typeface="Noto Sans SC"/>
+                <a:ea typeface="Noto Sans SC"/>
+              </a:rPr>
               <a:t>实现渐变背景、毛玻璃质感与全端响应式布局，打造沉浸式的游戏视觉容器，适配多尺寸屏幕设备。</a:t>
             </a:r>
-            <a:endParaRPr lang="en-US" sz="1400" b="0" u="none" strike="noStrike">
+            <a:endParaRPr lang="en-US" sz="1400" b="0" u="none" strike="noStrike" dirty="0">
               <a:solidFill>
                 <a:srgbClr val="FFFFFF"/>
               </a:solidFill>
@@ -22264,14 +18434,14 @@
       </p:sp>
       <p:sp>
         <p:nvSpPr>
-          <p:cNvPr id="104" name="AutoShape 9"/>
+          <p:cNvPr id="114" name="AutoShape 19"/>
           <p:cNvSpPr/>
           <p:nvPr/>
         </p:nvSpPr>
         <p:spPr>
           <a:xfrm>
-            <a:off x="6350040" y="1778040"/>
-            <a:ext cx="5270040" cy="1968120"/>
+            <a:off x="762120" y="4191120"/>
+            <a:ext cx="10857960" cy="1968120"/>
           </a:xfrm>
           <a:prstGeom prst="roundRect">
             <a:avLst>
@@ -22328,7 +18498,7 @@
       </p:sp>
       <p:pic>
         <p:nvPicPr>
-          <p:cNvPr id="105" name="Picture 10"/>
+          <p:cNvPr id="115" name="Picture 20"/>
           <p:cNvPicPr/>
           <p:nvPr/>
         </p:nvPicPr>
@@ -22344,7 +18514,7 @@
         </p:blipFill>
         <p:spPr>
           <a:xfrm>
-            <a:off x="6603840" y="1968480"/>
+            <a:off x="1015920" y="4476892"/>
             <a:ext cx="406080" cy="406080"/>
           </a:xfrm>
           <a:prstGeom prst="rect">
@@ -22358,13 +18528,13 @@
       </p:pic>
       <p:sp>
         <p:nvSpPr>
-          <p:cNvPr id="106" name="AutoShape 11"/>
+          <p:cNvPr id="116" name="AutoShape 21"/>
           <p:cNvSpPr/>
           <p:nvPr/>
         </p:nvSpPr>
         <p:spPr>
           <a:xfrm>
-            <a:off x="7238880" y="1930320"/>
+            <a:off x="1650960" y="4438732"/>
             <a:ext cx="4063680" cy="444240"/>
           </a:xfrm>
           <a:prstGeom prst="rect">
@@ -22402,7 +18572,7 @@
               </a:tabLst>
             </a:pPr>
             <a:r>
-              <a:rPr lang="zh-CN" sz="2000" b="1" u="none" strike="noStrike">
+              <a:rPr lang="zh-CN" sz="2000" b="1" u="none" strike="noStrike" dirty="0">
                 <a:solidFill>
                   <a:srgbClr val="2BD1FC"/>
                 </a:solidFill>
@@ -22410,9 +18580,9 @@
                 <a:latin typeface="Noto Sans SC"/>
                 <a:ea typeface="Noto Sans SC"/>
               </a:rPr>
-              <a:t>游戏层：核心渲染与逻辑</a:t>
-            </a:r>
-            <a:endParaRPr lang="en-US" sz="2000" b="0" u="none" strike="noStrike">
+              <a:t>工具链：工程化与交互控制</a:t>
+            </a:r>
+            <a:endParaRPr lang="en-US" sz="2000" b="0" u="none" strike="noStrike" dirty="0">
               <a:solidFill>
                 <a:srgbClr val="FFFFFF"/>
               </a:solidFill>
@@ -22424,14 +18594,16 @@
       </p:sp>
       <p:cxnSp>
         <p:nvCxnSpPr>
-          <p:cNvPr id="107" name="Connector 12"/>
-          <p:cNvCxnSpPr/>
+          <p:cNvPr id="117" name="Connector 22"/>
+          <p:cNvCxnSpPr>
+            <a:cxnSpLocks/>
+          </p:cNvCxnSpPr>
           <p:nvPr/>
         </p:nvCxnSpPr>
         <p:spPr>
           <a:xfrm>
-            <a:off x="6603840" y="2539800"/>
-            <a:ext cx="4762800" cy="360"/>
+            <a:off x="1015920" y="4952880"/>
+            <a:ext cx="10350720" cy="360"/>
           </a:xfrm>
           <a:prstGeom prst="straightConnector1">
             <a:avLst/>
@@ -22449,14 +18621,14 @@
       </p:cxnSp>
       <p:sp>
         <p:nvSpPr>
-          <p:cNvPr id="108" name="AutoShape 13"/>
+          <p:cNvPr id="118" name="AutoShape 23"/>
           <p:cNvSpPr/>
           <p:nvPr/>
         </p:nvSpPr>
         <p:spPr>
           <a:xfrm>
-            <a:off x="6603840" y="2666880"/>
-            <a:ext cx="4762080" cy="952200"/>
+            <a:off x="1015200" y="5079960"/>
+            <a:ext cx="10350720" cy="952200"/>
           </a:xfrm>
           <a:prstGeom prst="rect">
             <a:avLst/>
@@ -22493,7 +18665,7 @@
               </a:tabLst>
             </a:pPr>
             <a:r>
-              <a:rPr lang="zh-CN" sz="1400" b="0" u="none" strike="noStrike">
+              <a:rPr lang="zh-CN" sz="1400" b="0" u="none" strike="noStrike" dirty="0">
                 <a:solidFill>
                   <a:srgbClr val="FFFFFF">
                     <a:alpha val="90000"/>
@@ -22503,10 +18675,10 @@
                 <a:latin typeface="Noto Sans SC"/>
                 <a:ea typeface="Noto Sans SC"/>
               </a:rPr>
-              <a:t>利用 </a:t>
-            </a:r>
-            <a:r>
-              <a:rPr lang="en-US" sz="1400" b="0" u="none" strike="noStrike">
+              <a:t>通过 </a:t>
+            </a:r>
+            <a:r>
+              <a:rPr lang="en-US" sz="1400" b="0" u="none" strike="noStrike" dirty="0">
                 <a:solidFill>
                   <a:srgbClr val="FFFFFF">
                     <a:alpha val="90000"/>
@@ -22516,10 +18688,10 @@
                 <a:latin typeface="Noto Sans SC"/>
                 <a:ea typeface="Noto Sans SC"/>
               </a:rPr>
-              <a:t>Canvas API </a:t>
-            </a:r>
-            <a:r>
-              <a:rPr lang="zh-CN" sz="1400" b="0" u="none" strike="noStrike">
+              <a:t>Git </a:t>
+            </a:r>
+            <a:r>
+              <a:rPr lang="zh-CN" sz="1400" b="0" u="none" strike="noStrike" dirty="0">
                 <a:solidFill>
                   <a:srgbClr val="FFFFFF">
                     <a:alpha val="90000"/>
@@ -22529,593 +18701,9 @@
                 <a:latin typeface="Noto Sans SC"/>
                 <a:ea typeface="Noto Sans SC"/>
               </a:rPr>
-              <a:t>进行高性能图形绘制与帧动画管理，通过原生 </a:t>
-            </a:r>
-            <a:r>
-              <a:rPr lang="en-US" sz="1400" b="0" u="none" strike="noStrike">
-                <a:solidFill>
-                  <a:srgbClr val="FFFFFF">
-                    <a:alpha val="90000"/>
-                  </a:srgbClr>
-                </a:solidFill>
-                <a:uFillTx/>
-                <a:latin typeface="Noto Sans SC"/>
-                <a:ea typeface="Noto Sans SC"/>
-              </a:rPr>
-              <a:t>ES6+ </a:t>
-            </a:r>
-            <a:r>
-              <a:rPr lang="zh-CN" sz="1400" b="0" u="none" strike="noStrike">
-                <a:solidFill>
-                  <a:srgbClr val="FFFFFF">
-                    <a:alpha val="90000"/>
-                  </a:srgbClr>
-                </a:solidFill>
-                <a:uFillTx/>
-                <a:latin typeface="Noto Sans SC"/>
-                <a:ea typeface="Noto Sans SC"/>
-              </a:rPr>
-              <a:t>实现碰撞检测、物理运动与计分系统，保障游戏运行的流畅与稳定。</a:t>
-            </a:r>
-            <a:endParaRPr lang="en-US" sz="1400" b="0" u="none" strike="noStrike">
-              <a:solidFill>
-                <a:srgbClr val="FFFFFF"/>
-              </a:solidFill>
-              <a:uFillTx/>
-              <a:latin typeface="Noto Sans CJK SC"/>
-            </a:endParaRPr>
-          </a:p>
-        </p:txBody>
-      </p:sp>
-      <p:sp>
-        <p:nvSpPr>
-          <p:cNvPr id="109" name="AutoShape 14"/>
-          <p:cNvSpPr/>
-          <p:nvPr/>
-        </p:nvSpPr>
-        <p:spPr>
-          <a:xfrm>
-            <a:off x="762120" y="4191120"/>
-            <a:ext cx="5270040" cy="1968120"/>
-          </a:xfrm>
-          <a:prstGeom prst="roundRect">
-            <a:avLst>
-              <a:gd name="adj" fmla="val 0"/>
-            </a:avLst>
-          </a:prstGeom>
-          <a:solidFill>
-            <a:srgbClr val="FFFFFF">
-              <a:alpha val="8000"/>
-            </a:srgbClr>
-          </a:solidFill>
-          <a:ln w="12700">
-            <a:solidFill>
-              <a:srgbClr val="2BD1FC">
-                <a:alpha val="30000"/>
-              </a:srgbClr>
-            </a:solidFill>
-            <a:round/>
-          </a:ln>
-        </p:spPr>
-        <p:style>
-          <a:lnRef idx="0">
-            <a:scrgbClr r="0" g="0" b="0"/>
-          </a:lnRef>
-          <a:fillRef idx="0">
-            <a:scrgbClr r="0" g="0" b="0"/>
-          </a:fillRef>
-          <a:effectRef idx="0">
-            <a:scrgbClr r="0" g="0" b="0"/>
-          </a:effectRef>
-          <a:fontRef idx="minor"/>
-        </p:style>
-        <p:txBody>
-          <a:bodyPr lIns="63360" tIns="63360" rIns="63360" bIns="63360" anchor="ctr">
-            <a:noAutofit/>
-          </a:bodyPr>
-          <a:lstStyle/>
-          <a:p>
-            <a:pPr algn="ctr">
-              <a:lnSpc>
-                <a:spcPct val="100000"/>
-              </a:lnSpc>
-            </a:pPr>
-            <a:endParaRPr lang="en-US" sz="1400" b="0" u="none" strike="noStrike">
-              <a:solidFill>
-                <a:srgbClr val="000000"/>
-              </a:solidFill>
-              <a:uFillTx/>
-              <a:latin typeface="Arial"/>
-              <a:ea typeface="Arial"/>
-            </a:endParaRPr>
-          </a:p>
-        </p:txBody>
-      </p:sp>
-      <p:pic>
-        <p:nvPicPr>
-          <p:cNvPr id="110" name="Picture 15"/>
-          <p:cNvPicPr/>
-          <p:nvPr/>
-        </p:nvPicPr>
-        <p:blipFill>
-          <a:blip r:embed="rId8">
-            <a:extLst>
-              <a:ext uri="{96DAC541-7B7A-43D3-8B79-37D633B846F1}">
-                <asvg:svgBlip xmlns:asvg="http://schemas.microsoft.com/office/drawing/2016/SVG/main" r:embed="rId9"/>
-              </a:ext>
-            </a:extLst>
-          </a:blip>
-          <a:stretch/>
-        </p:blipFill>
-        <p:spPr>
-          <a:xfrm>
-            <a:off x="1015920" y="4381560"/>
-            <a:ext cx="406080" cy="406080"/>
-          </a:xfrm>
-          <a:prstGeom prst="rect">
-            <a:avLst/>
-          </a:prstGeom>
-          <a:noFill/>
-          <a:ln w="0">
-            <a:noFill/>
-          </a:ln>
-        </p:spPr>
-      </p:pic>
-      <p:sp>
-        <p:nvSpPr>
-          <p:cNvPr id="111" name="AutoShape 16"/>
-          <p:cNvSpPr/>
-          <p:nvPr/>
-        </p:nvSpPr>
-        <p:spPr>
-          <a:xfrm>
-            <a:off x="1650960" y="4343400"/>
-            <a:ext cx="4063680" cy="444240"/>
-          </a:xfrm>
-          <a:prstGeom prst="rect">
-            <a:avLst/>
-          </a:prstGeom>
-          <a:noFill/>
-          <a:ln w="12700">
-            <a:noFill/>
-          </a:ln>
-        </p:spPr>
-        <p:style>
-          <a:lnRef idx="0">
-            <a:scrgbClr r="0" g="0" b="0"/>
-          </a:lnRef>
-          <a:fillRef idx="0">
-            <a:scrgbClr r="0" g="0" b="0"/>
-          </a:fillRef>
-          <a:effectRef idx="0">
-            <a:scrgbClr r="0" g="0" b="0"/>
-          </a:effectRef>
-          <a:fontRef idx="minor"/>
-        </p:style>
-        <p:txBody>
-          <a:bodyPr lIns="0" tIns="0" rIns="0" bIns="0" anchor="ctr">
-            <a:noAutofit/>
-          </a:bodyPr>
-          <a:lstStyle/>
-          <a:p>
-            <a:pPr>
-              <a:lnSpc>
-                <a:spcPct val="125000"/>
-              </a:lnSpc>
-              <a:tabLst>
-                <a:tab pos="0" algn="l"/>
-              </a:tabLst>
-            </a:pPr>
-            <a:r>
-              <a:rPr lang="zh-CN" sz="2000" b="1" u="none" strike="noStrike">
-                <a:solidFill>
-                  <a:srgbClr val="2BD1FC"/>
-                </a:solidFill>
-                <a:uFillTx/>
-                <a:latin typeface="Noto Sans SC"/>
-                <a:ea typeface="Noto Sans SC"/>
-              </a:rPr>
-              <a:t>数据层：状态与持久化存储</a:t>
-            </a:r>
-            <a:endParaRPr lang="en-US" sz="2000" b="0" u="none" strike="noStrike">
-              <a:solidFill>
-                <a:srgbClr val="FFFFFF"/>
-              </a:solidFill>
-              <a:uFillTx/>
-              <a:latin typeface="Noto Sans CJK SC"/>
-            </a:endParaRPr>
-          </a:p>
-        </p:txBody>
-      </p:sp>
-      <p:cxnSp>
-        <p:nvCxnSpPr>
-          <p:cNvPr id="112" name="Connector 17"/>
-          <p:cNvCxnSpPr/>
-          <p:nvPr/>
-        </p:nvCxnSpPr>
-        <p:spPr>
-          <a:xfrm>
-            <a:off x="1015920" y="4952880"/>
-            <a:ext cx="4762800" cy="360"/>
-          </a:xfrm>
-          <a:prstGeom prst="straightConnector1">
-            <a:avLst/>
-          </a:prstGeom>
-          <a:ln w="12700">
-            <a:solidFill>
-              <a:srgbClr val="FFFFFF">
-                <a:alpha val="15000"/>
-              </a:srgbClr>
-            </a:solidFill>
-            <a:prstDash val="dash"/>
-            <a:round/>
-          </a:ln>
-        </p:spPr>
-      </p:cxnSp>
-      <p:sp>
-        <p:nvSpPr>
-          <p:cNvPr id="113" name="AutoShape 18"/>
-          <p:cNvSpPr/>
-          <p:nvPr/>
-        </p:nvSpPr>
-        <p:spPr>
-          <a:xfrm>
-            <a:off x="1015920" y="5079960"/>
-            <a:ext cx="4762080" cy="952200"/>
-          </a:xfrm>
-          <a:prstGeom prst="rect">
-            <a:avLst/>
-          </a:prstGeom>
-          <a:noFill/>
-          <a:ln w="12700">
-            <a:noFill/>
-          </a:ln>
-        </p:spPr>
-        <p:style>
-          <a:lnRef idx="0">
-            <a:scrgbClr r="0" g="0" b="0"/>
-          </a:lnRef>
-          <a:fillRef idx="0">
-            <a:scrgbClr r="0" g="0" b="0"/>
-          </a:fillRef>
-          <a:effectRef idx="0">
-            <a:scrgbClr r="0" g="0" b="0"/>
-          </a:effectRef>
-          <a:fontRef idx="minor"/>
-        </p:style>
-        <p:txBody>
-          <a:bodyPr lIns="0" tIns="0" rIns="0" bIns="0" anchor="ctr">
-            <a:noAutofit/>
-          </a:bodyPr>
-          <a:lstStyle/>
-          <a:p>
-            <a:pPr>
-              <a:lnSpc>
-                <a:spcPct val="108000"/>
-              </a:lnSpc>
-              <a:tabLst>
-                <a:tab pos="0" algn="l"/>
-              </a:tabLst>
-            </a:pPr>
-            <a:r>
-              <a:rPr lang="zh-CN" sz="1400" b="0" u="none" strike="noStrike">
-                <a:solidFill>
-                  <a:srgbClr val="FFFFFF">
-                    <a:alpha val="90000"/>
-                  </a:srgbClr>
-                </a:solidFill>
-                <a:uFillTx/>
-                <a:latin typeface="Noto Sans SC"/>
-                <a:ea typeface="Noto Sans SC"/>
-              </a:rPr>
-              <a:t>采用 </a:t>
-            </a:r>
-            <a:r>
-              <a:rPr lang="en-US" sz="1400" b="0" u="none" strike="noStrike">
-                <a:solidFill>
-                  <a:srgbClr val="FFFFFF">
-                    <a:alpha val="90000"/>
-                  </a:srgbClr>
-                </a:solidFill>
-                <a:uFillTx/>
-                <a:latin typeface="Noto Sans SC"/>
-                <a:ea typeface="Noto Sans SC"/>
-              </a:rPr>
-              <a:t>LocalStorage </a:t>
-            </a:r>
-            <a:r>
-              <a:rPr lang="zh-CN" sz="1400" b="0" u="none" strike="noStrike">
-                <a:solidFill>
-                  <a:srgbClr val="FFFFFF">
-                    <a:alpha val="90000"/>
-                  </a:srgbClr>
-                </a:solidFill>
-                <a:uFillTx/>
-                <a:latin typeface="Noto Sans SC"/>
-                <a:ea typeface="Noto Sans SC"/>
-              </a:rPr>
-              <a:t>实现用户游戏进度与最高分数据的本地持久化存储，轻量高效且无需后端依赖，确保数据在页面刷新后不丢失。</a:t>
-            </a:r>
-            <a:endParaRPr lang="en-US" sz="1400" b="0" u="none" strike="noStrike">
-              <a:solidFill>
-                <a:srgbClr val="FFFFFF"/>
-              </a:solidFill>
-              <a:uFillTx/>
-              <a:latin typeface="Noto Sans CJK SC"/>
-            </a:endParaRPr>
-          </a:p>
-        </p:txBody>
-      </p:sp>
-      <p:sp>
-        <p:nvSpPr>
-          <p:cNvPr id="114" name="AutoShape 19"/>
-          <p:cNvSpPr/>
-          <p:nvPr/>
-        </p:nvSpPr>
-        <p:spPr>
-          <a:xfrm>
-            <a:off x="6350040" y="4191120"/>
-            <a:ext cx="5270040" cy="1968120"/>
-          </a:xfrm>
-          <a:prstGeom prst="roundRect">
-            <a:avLst>
-              <a:gd name="adj" fmla="val 0"/>
-            </a:avLst>
-          </a:prstGeom>
-          <a:solidFill>
-            <a:srgbClr val="FFFFFF">
-              <a:alpha val="8000"/>
-            </a:srgbClr>
-          </a:solidFill>
-          <a:ln w="12700">
-            <a:solidFill>
-              <a:srgbClr val="2BD1FC">
-                <a:alpha val="30000"/>
-              </a:srgbClr>
-            </a:solidFill>
-            <a:round/>
-          </a:ln>
-        </p:spPr>
-        <p:style>
-          <a:lnRef idx="0">
-            <a:scrgbClr r="0" g="0" b="0"/>
-          </a:lnRef>
-          <a:fillRef idx="0">
-            <a:scrgbClr r="0" g="0" b="0"/>
-          </a:fillRef>
-          <a:effectRef idx="0">
-            <a:scrgbClr r="0" g="0" b="0"/>
-          </a:effectRef>
-          <a:fontRef idx="minor"/>
-        </p:style>
-        <p:txBody>
-          <a:bodyPr lIns="63360" tIns="63360" rIns="63360" bIns="63360" anchor="ctr">
-            <a:noAutofit/>
-          </a:bodyPr>
-          <a:lstStyle/>
-          <a:p>
-            <a:pPr algn="ctr">
-              <a:lnSpc>
-                <a:spcPct val="100000"/>
-              </a:lnSpc>
-            </a:pPr>
-            <a:endParaRPr lang="en-US" sz="1400" b="0" u="none" strike="noStrike">
-              <a:solidFill>
-                <a:srgbClr val="000000"/>
-              </a:solidFill>
-              <a:uFillTx/>
-              <a:latin typeface="Arial"/>
-              <a:ea typeface="Arial"/>
-            </a:endParaRPr>
-          </a:p>
-        </p:txBody>
-      </p:sp>
-      <p:pic>
-        <p:nvPicPr>
-          <p:cNvPr id="115" name="Picture 20"/>
-          <p:cNvPicPr/>
-          <p:nvPr/>
-        </p:nvPicPr>
-        <p:blipFill>
-          <a:blip r:embed="rId10">
-            <a:extLst>
-              <a:ext uri="{96DAC541-7B7A-43D3-8B79-37D633B846F1}">
-                <asvg:svgBlip xmlns:asvg="http://schemas.microsoft.com/office/drawing/2016/SVG/main" r:embed="rId11"/>
-              </a:ext>
-            </a:extLst>
-          </a:blip>
-          <a:stretch/>
-        </p:blipFill>
-        <p:spPr>
-          <a:xfrm>
-            <a:off x="6603840" y="4381560"/>
-            <a:ext cx="406080" cy="406080"/>
-          </a:xfrm>
-          <a:prstGeom prst="rect">
-            <a:avLst/>
-          </a:prstGeom>
-          <a:noFill/>
-          <a:ln w="0">
-            <a:noFill/>
-          </a:ln>
-        </p:spPr>
-      </p:pic>
-      <p:sp>
-        <p:nvSpPr>
-          <p:cNvPr id="116" name="AutoShape 21"/>
-          <p:cNvSpPr/>
-          <p:nvPr/>
-        </p:nvSpPr>
-        <p:spPr>
-          <a:xfrm>
-            <a:off x="7238880" y="4343400"/>
-            <a:ext cx="4063680" cy="444240"/>
-          </a:xfrm>
-          <a:prstGeom prst="rect">
-            <a:avLst/>
-          </a:prstGeom>
-          <a:noFill/>
-          <a:ln w="12700">
-            <a:noFill/>
-          </a:ln>
-        </p:spPr>
-        <p:style>
-          <a:lnRef idx="0">
-            <a:scrgbClr r="0" g="0" b="0"/>
-          </a:lnRef>
-          <a:fillRef idx="0">
-            <a:scrgbClr r="0" g="0" b="0"/>
-          </a:fillRef>
-          <a:effectRef idx="0">
-            <a:scrgbClr r="0" g="0" b="0"/>
-          </a:effectRef>
-          <a:fontRef idx="minor"/>
-        </p:style>
-        <p:txBody>
-          <a:bodyPr lIns="0" tIns="0" rIns="0" bIns="0" anchor="ctr">
-            <a:noAutofit/>
-          </a:bodyPr>
-          <a:lstStyle/>
-          <a:p>
-            <a:pPr>
-              <a:lnSpc>
-                <a:spcPct val="125000"/>
-              </a:lnSpc>
-              <a:tabLst>
-                <a:tab pos="0" algn="l"/>
-              </a:tabLst>
-            </a:pPr>
-            <a:r>
-              <a:rPr lang="zh-CN" sz="2000" b="1" u="none" strike="noStrike">
-                <a:solidFill>
-                  <a:srgbClr val="2BD1FC"/>
-                </a:solidFill>
-                <a:uFillTx/>
-                <a:latin typeface="Noto Sans SC"/>
-                <a:ea typeface="Noto Sans SC"/>
-              </a:rPr>
-              <a:t>工具链：工程化与交互控制</a:t>
-            </a:r>
-            <a:endParaRPr lang="en-US" sz="2000" b="0" u="none" strike="noStrike">
-              <a:solidFill>
-                <a:srgbClr val="FFFFFF"/>
-              </a:solidFill>
-              <a:uFillTx/>
-              <a:latin typeface="Noto Sans CJK SC"/>
-            </a:endParaRPr>
-          </a:p>
-        </p:txBody>
-      </p:sp>
-      <p:cxnSp>
-        <p:nvCxnSpPr>
-          <p:cNvPr id="117" name="Connector 22"/>
-          <p:cNvCxnSpPr/>
-          <p:nvPr/>
-        </p:nvCxnSpPr>
-        <p:spPr>
-          <a:xfrm>
-            <a:off x="6603840" y="4952880"/>
-            <a:ext cx="4762800" cy="360"/>
-          </a:xfrm>
-          <a:prstGeom prst="straightConnector1">
-            <a:avLst/>
-          </a:prstGeom>
-          <a:ln w="12700">
-            <a:solidFill>
-              <a:srgbClr val="FFFFFF">
-                <a:alpha val="15000"/>
-              </a:srgbClr>
-            </a:solidFill>
-            <a:prstDash val="dash"/>
-            <a:round/>
-          </a:ln>
-        </p:spPr>
-      </p:cxnSp>
-      <p:sp>
-        <p:nvSpPr>
-          <p:cNvPr id="118" name="AutoShape 23"/>
-          <p:cNvSpPr/>
-          <p:nvPr/>
-        </p:nvSpPr>
-        <p:spPr>
-          <a:xfrm>
-            <a:off x="6603840" y="5079960"/>
-            <a:ext cx="4762080" cy="952200"/>
-          </a:xfrm>
-          <a:prstGeom prst="rect">
-            <a:avLst/>
-          </a:prstGeom>
-          <a:noFill/>
-          <a:ln w="12700">
-            <a:noFill/>
-          </a:ln>
-        </p:spPr>
-        <p:style>
-          <a:lnRef idx="0">
-            <a:scrgbClr r="0" g="0" b="0"/>
-          </a:lnRef>
-          <a:fillRef idx="0">
-            <a:scrgbClr r="0" g="0" b="0"/>
-          </a:fillRef>
-          <a:effectRef idx="0">
-            <a:scrgbClr r="0" g="0" b="0"/>
-          </a:effectRef>
-          <a:fontRef idx="minor"/>
-        </p:style>
-        <p:txBody>
-          <a:bodyPr lIns="0" tIns="0" rIns="0" bIns="0" anchor="ctr">
-            <a:noAutofit/>
-          </a:bodyPr>
-          <a:lstStyle/>
-          <a:p>
-            <a:pPr>
-              <a:lnSpc>
-                <a:spcPct val="108000"/>
-              </a:lnSpc>
-              <a:tabLst>
-                <a:tab pos="0" algn="l"/>
-              </a:tabLst>
-            </a:pPr>
-            <a:r>
-              <a:rPr lang="zh-CN" sz="1400" b="0" u="none" strike="noStrike">
-                <a:solidFill>
-                  <a:srgbClr val="FFFFFF">
-                    <a:alpha val="90000"/>
-                  </a:srgbClr>
-                </a:solidFill>
-                <a:uFillTx/>
-                <a:latin typeface="Noto Sans SC"/>
-                <a:ea typeface="Noto Sans SC"/>
-              </a:rPr>
-              <a:t>通过 </a:t>
-            </a:r>
-            <a:r>
-              <a:rPr lang="en-US" sz="1400" b="0" u="none" strike="noStrike">
-                <a:solidFill>
-                  <a:srgbClr val="FFFFFF">
-                    <a:alpha val="90000"/>
-                  </a:srgbClr>
-                </a:solidFill>
-                <a:uFillTx/>
-                <a:latin typeface="Noto Sans SC"/>
-                <a:ea typeface="Noto Sans SC"/>
-              </a:rPr>
-              <a:t>Git </a:t>
-            </a:r>
-            <a:r>
-              <a:rPr lang="zh-CN" sz="1400" b="0" u="none" strike="noStrike">
-                <a:solidFill>
-                  <a:srgbClr val="FFFFFF">
-                    <a:alpha val="90000"/>
-                  </a:srgbClr>
-                </a:solidFill>
-                <a:uFillTx/>
-                <a:latin typeface="Noto Sans SC"/>
-                <a:ea typeface="Noto Sans SC"/>
-              </a:rPr>
               <a:t>进行版本管理与协作开发，封装统一的事件监听模块，完美兼容键盘、鼠标及移动端触摸交互，配合模块化开发规范提升维护性。</a:t>
             </a:r>
-            <a:endParaRPr lang="en-US" sz="1400" b="0" u="none" strike="noStrike">
+            <a:endParaRPr lang="en-US" sz="1400" b="0" u="none" strike="noStrike" dirty="0">
               <a:solidFill>
                 <a:srgbClr val="FFFFFF"/>
               </a:solidFill>
@@ -23426,7 +19014,7 @@
               </a:tabLst>
             </a:pPr>
             <a:r>
-              <a:rPr lang="zh-CN" sz="1800" b="1" u="none" strike="noStrike">
+              <a:rPr lang="zh-CN" sz="1800" b="1" u="none" strike="noStrike" dirty="0">
                 <a:solidFill>
                   <a:srgbClr val="2BD1FC"/>
                 </a:solidFill>
@@ -23437,7 +19025,7 @@
               <a:t>李想 </a:t>
             </a:r>
             <a:r>
-              <a:rPr lang="en-US" sz="1800" b="1" u="none" strike="noStrike">
+              <a:rPr lang="en-US" sz="1800" b="1" u="none" strike="noStrike" dirty="0">
                 <a:solidFill>
                   <a:srgbClr val="2BD1FC"/>
                 </a:solidFill>
@@ -23448,7 +19036,7 @@
               <a:t>· </a:t>
             </a:r>
             <a:r>
-              <a:rPr lang="zh-CN" sz="1800" b="1" u="none" strike="noStrike">
+              <a:rPr lang="zh-CN" sz="1800" b="1" u="none" strike="noStrike" dirty="0">
                 <a:solidFill>
                   <a:srgbClr val="2BD1FC"/>
                 </a:solidFill>
@@ -23458,7 +19046,7 @@
               </a:rPr>
               <a:t>项目统筹与整合</a:t>
             </a:r>
-            <a:endParaRPr lang="en-US" sz="1800" b="0" u="none" strike="noStrike">
+            <a:endParaRPr lang="en-US" sz="1800" b="0" u="none" strike="noStrike" dirty="0">
               <a:solidFill>
                 <a:srgbClr val="FFFFFF"/>
               </a:solidFill>
@@ -23476,7 +19064,7 @@
               </a:tabLst>
             </a:pPr>
             <a:r>
-              <a:rPr lang="zh-CN" sz="1400" b="0" u="none" strike="noStrike">
+              <a:rPr lang="zh-CN" sz="1400" b="0" u="none" strike="noStrike" dirty="0">
                 <a:solidFill>
                   <a:srgbClr val="FFFFFF">
                     <a:alpha val="80000"/>
@@ -23486,35 +19074,9 @@
                 <a:latin typeface="Noto Sans SC"/>
                 <a:ea typeface="Noto Sans SC"/>
               </a:rPr>
-              <a:t>负责</a:t>
-            </a:r>
-            <a:r>
-              <a:rPr lang="en-US" sz="1400" b="0" u="none" strike="noStrike">
-                <a:solidFill>
-                  <a:srgbClr val="FFFFFF">
-                    <a:alpha val="80000"/>
-                  </a:srgbClr>
-                </a:solidFill>
-                <a:uFillTx/>
-                <a:latin typeface="Noto Sans SC"/>
-                <a:ea typeface="Noto Sans SC"/>
-              </a:rPr>
-              <a:t>Git</a:t>
-            </a:r>
-            <a:r>
-              <a:rPr lang="zh-CN" sz="1400" b="0" u="none" strike="noStrike">
-                <a:solidFill>
-                  <a:srgbClr val="FFFFFF">
-                    <a:alpha val="80000"/>
-                  </a:srgbClr>
-                </a:solidFill>
-                <a:uFillTx/>
-                <a:latin typeface="Noto Sans SC"/>
-                <a:ea typeface="Noto Sans SC"/>
-              </a:rPr>
-              <a:t>仓库统一管理、各模块代码接口对接与最终集成，把控项目整体进度与技术规范，确保各开发环节高效协同。</a:t>
-            </a:r>
-            <a:endParaRPr lang="en-US" sz="1400" b="0" u="none" strike="noStrike">
+              <a:t>负责统一管理、各模块代码接口对接与最终集成，把控项目整体进度与技术规范，确保各开发环节高效协同。</a:t>
+            </a:r>
+            <a:endParaRPr lang="en-US" sz="1400" b="0" u="none" strike="noStrike" dirty="0">
               <a:solidFill>
                 <a:srgbClr val="FFFFFF"/>
               </a:solidFill>
@@ -23965,7 +19527,7 @@
               </a:tabLst>
             </a:pPr>
             <a:r>
-              <a:rPr lang="zh-CN" sz="1600" b="1" u="none" strike="noStrike">
+              <a:rPr lang="zh-CN" sz="1600" b="1" u="none" strike="noStrike" dirty="0">
                 <a:solidFill>
                   <a:srgbClr val="FFFFFF"/>
                 </a:solidFill>
@@ -23976,7 +19538,7 @@
               <a:t>李少华 </a:t>
             </a:r>
             <a:r>
-              <a:rPr lang="en-US" sz="1600" b="1" u="none" strike="noStrike">
+              <a:rPr lang="en-US" sz="1600" b="1" u="none" strike="noStrike" dirty="0">
                 <a:solidFill>
                   <a:srgbClr val="FFFFFF"/>
                 </a:solidFill>
@@ -23987,7 +19549,7 @@
               <a:t>· </a:t>
             </a:r>
             <a:r>
-              <a:rPr lang="zh-CN" sz="1600" b="1" u="none" strike="noStrike">
+              <a:rPr lang="zh-CN" sz="1600" b="1" u="none" strike="noStrike" dirty="0">
                 <a:solidFill>
                   <a:srgbClr val="FFFFFF"/>
                 </a:solidFill>
@@ -23997,7 +19559,7 @@
               </a:rPr>
               <a:t>主力游戏开发</a:t>
             </a:r>
-            <a:endParaRPr lang="en-US" sz="1600" b="0" u="none" strike="noStrike">
+            <a:endParaRPr lang="en-US" sz="1600" b="0" u="none" strike="noStrike" dirty="0">
               <a:solidFill>
                 <a:srgbClr val="FFFFFF"/>
               </a:solidFill>
@@ -24078,7 +19640,7 @@
               </a:tabLst>
             </a:pPr>
             <a:r>
-              <a:rPr lang="zh-CN" sz="1300" b="0" u="none" strike="noStrike">
+              <a:rPr lang="zh-CN" sz="1300" b="0" u="none" strike="noStrike" dirty="0">
                 <a:solidFill>
                   <a:srgbClr val="FFFFFF">
                     <a:alpha val="70000"/>
@@ -24091,7 +19653,7 @@
               <a:t>独立完成</a:t>
             </a:r>
             <a:r>
-              <a:rPr lang="en-US" sz="1300" b="0" u="none" strike="noStrike">
+              <a:rPr lang="en-US" sz="1300" b="0" u="none" strike="noStrike" dirty="0">
                 <a:solidFill>
                   <a:srgbClr val="FFFFFF">
                     <a:alpha val="70000"/>
@@ -24104,7 +19666,7 @@
               <a:t>5</a:t>
             </a:r>
             <a:r>
-              <a:rPr lang="zh-CN" sz="1300" b="0" u="none" strike="noStrike">
+              <a:rPr lang="zh-CN" sz="1300" b="0" u="none" strike="noStrike" dirty="0">
                 <a:solidFill>
                   <a:srgbClr val="FFFFFF">
                     <a:alpha val="70000"/>
@@ -24114,9 +19676,48 @@
                 <a:latin typeface="Noto Sans SC"/>
                 <a:ea typeface="Noto Sans SC"/>
               </a:rPr>
-              <a:t>款核心游戏开发：小恐龙快跑、打地鼠、飞机大战、推箱子、贪吃蛇，是项目中游戏内容的主要产出者。</a:t>
-            </a:r>
-            <a:endParaRPr lang="en-US" sz="1300" b="0" u="none" strike="noStrike">
+              <a:t>款核心游戏开发：小恐龙快跑、打地鼠、飞机大战、推箱子、贪吃蛇，</a:t>
+            </a:r>
+            <a:r>
+              <a:rPr lang="zh-CN" altLang="en-US" sz="1300" b="0" u="none" strike="noStrike" dirty="0">
+                <a:solidFill>
+                  <a:srgbClr val="FFFFFF">
+                    <a:alpha val="70000"/>
+                  </a:srgbClr>
+                </a:solidFill>
+                <a:uFillTx/>
+                <a:latin typeface="Noto Sans SC"/>
+                <a:ea typeface="Noto Sans SC"/>
+              </a:rPr>
+              <a:t>并上传</a:t>
+            </a:r>
+            <a:r>
+              <a:rPr lang="en-US" altLang="zh-CN" sz="1300" b="0" u="none" strike="noStrike" dirty="0">
+                <a:solidFill>
+                  <a:srgbClr val="FFFFFF">
+                    <a:alpha val="70000"/>
+                  </a:srgbClr>
+                </a:solidFill>
+                <a:uFillTx/>
+                <a:latin typeface="Noto Sans SC"/>
+                <a:ea typeface="Noto Sans SC"/>
+              </a:rPr>
+              <a:t>GitHub</a:t>
+            </a:r>
+            <a:r>
+              <a:rPr lang="zh-CN" altLang="en-US" sz="1300" b="0" u="none" strike="noStrike" dirty="0">
+                <a:solidFill>
+                  <a:srgbClr val="FFFFFF">
+                    <a:alpha val="70000"/>
+                  </a:srgbClr>
+                </a:solidFill>
+                <a:uFillTx/>
+                <a:latin typeface="Noto Sans SC"/>
+                <a:ea typeface="Noto Sans SC"/>
+              </a:rPr>
+              <a:t>仓库</a:t>
+            </a:r>
+            <a:endParaRPr lang="en-US" sz="1300" b="0" u="none" strike="noStrike" dirty="0">
               <a:solidFill>
                 <a:srgbClr val="FFFFFF"/>
               </a:solidFill>

--- a/documents/经典游戏回廊 2· 项目汇报.pptx
+++ b/documents/经典游戏回廊 2· 项目汇报.pptx
@@ -5,7 +5,7 @@
     <p:sldMasterId id="2147483648" r:id="rId1"/>
   </p:sldMasterIdLst>
   <p:notesMasterIdLst>
-    <p:notesMasterId r:id="rId16"/>
+    <p:notesMasterId r:id="rId15"/>
   </p:notesMasterIdLst>
   <p:sldIdLst>
     <p:sldId id="256" r:id="rId2"/>
@@ -19,9 +19,8 @@
     <p:sldId id="264" r:id="rId10"/>
     <p:sldId id="265" r:id="rId11"/>
     <p:sldId id="266" r:id="rId12"/>
-    <p:sldId id="267" r:id="rId13"/>
-    <p:sldId id="268" r:id="rId14"/>
-    <p:sldId id="269" r:id="rId15"/>
+    <p:sldId id="268" r:id="rId13"/>
+    <p:sldId id="269" r:id="rId14"/>
   </p:sldIdLst>
   <p:sldSz cx="12192000" cy="6858000"/>
   <p:notesSz cx="6858000" cy="9144000"/>
@@ -696,8 +695,8 @@
         </p:nvSpPr>
         <p:spPr>
           <a:xfrm>
-            <a:off x="2857680" y="512640"/>
-            <a:ext cx="3428640" cy="2566800"/>
+            <a:off x="2290763" y="512763"/>
+            <a:ext cx="4562475" cy="2566987"/>
           </a:xfrm>
           <a:prstGeom prst="rect">
             <a:avLst/>
@@ -1601,7 +1600,7 @@
       </p:grpSpPr>
       <p:sp>
         <p:nvSpPr>
-          <p:cNvPr id="425" name="PlaceHolder 1"/>
+          <p:cNvPr id="431" name="PlaceHolder 1"/>
           <p:cNvSpPr>
             <a:spLocks noGrp="1"/>
           </p:cNvSpPr>
@@ -1644,12 +1643,12 @@
       </p:sp>
       <p:sp>
         <p:nvSpPr>
-          <p:cNvPr id="426" name="PlaceHolder 2"/>
+          <p:cNvPr id="432" name="PlaceHolder 2"/>
           <p:cNvSpPr>
             <a:spLocks noGrp="1"/>
           </p:cNvSpPr>
           <p:nvPr>
-            <p:ph type="dt" idx="37"/>
+            <p:ph type="dt" idx="40"/>
           </p:nvPr>
         </p:nvSpPr>
         <p:spPr>
@@ -1713,7 +1712,7 @@
       </p:sp>
       <p:sp>
         <p:nvSpPr>
-          <p:cNvPr id="427" name="PlaceHolder 3"/>
+          <p:cNvPr id="433" name="PlaceHolder 3"/>
           <p:cNvSpPr>
             <a:spLocks noGrp="1" noRot="1" noChangeAspect="1"/>
           </p:cNvSpPr>
@@ -1736,7 +1735,7 @@
       </p:sp>
       <p:sp>
         <p:nvSpPr>
-          <p:cNvPr id="428" name="PlaceHolder 4"/>
+          <p:cNvPr id="434" name="PlaceHolder 4"/>
           <p:cNvSpPr>
             <a:spLocks noGrp="1"/>
           </p:cNvSpPr>
@@ -1780,7 +1779,7 @@
                 <a:uFillTx/>
                 <a:latin typeface="Noto Sans CJK SC"/>
               </a:rPr>
-              <a:t>在项目开发中，我们遇到了一些挑战，但也收获了不少亮点。技术亮点包括统一的多游戏架构、高性能的</a:t>
+              <a:t>这是我们项目的代码仓库结构和</a:t>
             </a:r>
             <a:r>
               <a:rPr lang="en-US" sz="1400" b="0" u="none" strike="noStrike">
@@ -1790,7 +1789,7 @@
                 <a:uFillTx/>
                 <a:latin typeface="Noto Sans CJK SC"/>
               </a:rPr>
-              <a:t>Canvas</a:t>
+              <a:t>Git</a:t>
             </a:r>
             <a:r>
               <a:rPr lang="zh-CN" sz="1400" b="0" u="none" strike="noStrike">
@@ -1800,7 +1799,87 @@
                 <a:uFillTx/>
                 <a:latin typeface="Noto Sans CJK SC"/>
               </a:rPr>
-              <a:t>渲染以及跨平台的输入适配。针对碰撞检测、俄罗斯方块旋转等技术难点，我们都通过成熟的算法和设计模式找到了有效的解决方案，确保了游戏的可玩性和稳定性。</a:t>
+              <a:t>分支策略。文件结构清晰，每个游戏都是一个独立的</a:t>
+            </a:r>
+            <a:r>
+              <a:rPr lang="en-US" sz="1400" b="0" u="none" strike="noStrike">
+                <a:solidFill>
+                  <a:srgbClr val="000000"/>
+                </a:solidFill>
+                <a:uFillTx/>
+                <a:latin typeface="Noto Sans CJK SC"/>
+              </a:rPr>
+              <a:t>HTML</a:t>
+            </a:r>
+            <a:r>
+              <a:rPr lang="zh-CN" sz="1400" b="0" u="none" strike="noStrike">
+                <a:solidFill>
+                  <a:srgbClr val="000000"/>
+                </a:solidFill>
+                <a:uFillTx/>
+                <a:latin typeface="Noto Sans CJK SC"/>
+              </a:rPr>
+              <a:t>文件，便于维护和扩展。我们采用了</a:t>
+            </a:r>
+            <a:r>
+              <a:rPr lang="en-US" sz="1400" b="0" u="none" strike="noStrike">
+                <a:solidFill>
+                  <a:srgbClr val="000000"/>
+                </a:solidFill>
+                <a:uFillTx/>
+                <a:latin typeface="Noto Sans CJK SC"/>
+              </a:rPr>
+              <a:t>Git Flow</a:t>
+            </a:r>
+            <a:r>
+              <a:rPr lang="zh-CN" sz="1400" b="0" u="none" strike="noStrike">
+                <a:solidFill>
+                  <a:srgbClr val="000000"/>
+                </a:solidFill>
+                <a:uFillTx/>
+                <a:latin typeface="Noto Sans CJK SC"/>
+              </a:rPr>
+              <a:t>工作流，为每个功能模块创建独立的</a:t>
+            </a:r>
+            <a:r>
+              <a:rPr lang="en-US" sz="1400" b="0" u="none" strike="noStrike">
+                <a:solidFill>
+                  <a:srgbClr val="000000"/>
+                </a:solidFill>
+                <a:uFillTx/>
+                <a:latin typeface="Noto Sans CJK SC"/>
+              </a:rPr>
+              <a:t>feature</a:t>
+            </a:r>
+            <a:r>
+              <a:rPr lang="zh-CN" sz="1400" b="0" u="none" strike="noStrike">
+                <a:solidFill>
+                  <a:srgbClr val="000000"/>
+                </a:solidFill>
+                <a:uFillTx/>
+                <a:latin typeface="Noto Sans CJK SC"/>
+              </a:rPr>
+              <a:t>分支，如界面、不同同学的游戏开发等，最后合并到</a:t>
+            </a:r>
+            <a:r>
+              <a:rPr lang="en-US" sz="1400" b="0" u="none" strike="noStrike">
+                <a:solidFill>
+                  <a:srgbClr val="000000"/>
+                </a:solidFill>
+                <a:uFillTx/>
+                <a:latin typeface="Noto Sans CJK SC"/>
+              </a:rPr>
+              <a:t>develop</a:t>
+            </a:r>
+            <a:r>
+              <a:rPr lang="zh-CN" sz="1400" b="0" u="none" strike="noStrike">
+                <a:solidFill>
+                  <a:srgbClr val="000000"/>
+                </a:solidFill>
+                <a:uFillTx/>
+                <a:latin typeface="Noto Sans CJK SC"/>
+              </a:rPr>
+              <a:t>分支进行集成测试，确保了代码管理的规范和高效。</a:t>
             </a:r>
             <a:endParaRPr lang="en-US" sz="1400" b="0" u="none" strike="noStrike">
               <a:solidFill>
@@ -1814,12 +1893,12 @@
       </p:sp>
       <p:sp>
         <p:nvSpPr>
-          <p:cNvPr id="429" name="PlaceHolder 5"/>
+          <p:cNvPr id="435" name="PlaceHolder 5"/>
           <p:cNvSpPr>
             <a:spLocks noGrp="1"/>
           </p:cNvSpPr>
           <p:nvPr>
-            <p:ph type="ftr" idx="38"/>
+            <p:ph type="ftr" idx="41"/>
           </p:nvPr>
         </p:nvSpPr>
         <p:spPr>
@@ -1856,12 +1935,12 @@
       </p:sp>
       <p:sp>
         <p:nvSpPr>
-          <p:cNvPr id="430" name="PlaceHolder 6"/>
+          <p:cNvPr id="436" name="PlaceHolder 6"/>
           <p:cNvSpPr>
             <a:spLocks noGrp="1"/>
           </p:cNvSpPr>
           <p:nvPr>
-            <p:ph type="sldNum" idx="39"/>
+            <p:ph type="sldNum" idx="42"/>
           </p:nvPr>
         </p:nvSpPr>
         <p:spPr>
@@ -1950,435 +2029,6 @@
       </p:grpSpPr>
       <p:sp>
         <p:nvSpPr>
-          <p:cNvPr id="431" name="PlaceHolder 1"/>
-          <p:cNvSpPr>
-            <a:spLocks noGrp="1"/>
-          </p:cNvSpPr>
-          <p:nvPr>
-            <p:ph type="hdr"/>
-          </p:nvPr>
-        </p:nvSpPr>
-        <p:spPr>
-          <a:xfrm>
-            <a:off x="0" y="0"/>
-            <a:ext cx="3962160" cy="342720"/>
-          </a:xfrm>
-          <a:prstGeom prst="rect">
-            <a:avLst/>
-          </a:prstGeom>
-          <a:noFill/>
-          <a:ln w="0">
-            <a:noFill/>
-          </a:ln>
-        </p:spPr>
-        <p:txBody>
-          <a:bodyPr lIns="91440" tIns="45720" rIns="91440" bIns="45720" anchor="t">
-            <a:noAutofit/>
-          </a:bodyPr>
-          <a:lstStyle/>
-          <a:p>
-            <a:pPr indent="0">
-              <a:buNone/>
-            </a:pPr>
-            <a:endParaRPr lang="en-US" sz="1200" b="0" u="none" strike="noStrike">
-              <a:solidFill>
-                <a:srgbClr val="000000"/>
-              </a:solidFill>
-              <a:uFillTx/>
-              <a:latin typeface="Arial"/>
-              <a:ea typeface="Arial"/>
-            </a:endParaRPr>
-          </a:p>
-        </p:txBody>
-      </p:sp>
-      <p:sp>
-        <p:nvSpPr>
-          <p:cNvPr id="432" name="PlaceHolder 2"/>
-          <p:cNvSpPr>
-            <a:spLocks noGrp="1"/>
-          </p:cNvSpPr>
-          <p:nvPr>
-            <p:ph type="dt" idx="40"/>
-          </p:nvPr>
-        </p:nvSpPr>
-        <p:spPr>
-          <a:xfrm>
-            <a:off x="5180040" y="0"/>
-            <a:ext cx="3962160" cy="342720"/>
-          </a:xfrm>
-          <a:prstGeom prst="rect">
-            <a:avLst/>
-          </a:prstGeom>
-          <a:noFill/>
-          <a:ln w="0">
-            <a:noFill/>
-          </a:ln>
-        </p:spPr>
-        <p:txBody>
-          <a:bodyPr lIns="91440" tIns="45720" rIns="91440" bIns="45720" anchor="t">
-            <a:noAutofit/>
-          </a:bodyPr>
-          <a:lstStyle>
-            <a:lvl1pPr indent="0" algn="r">
-              <a:lnSpc>
-                <a:spcPct val="100000"/>
-              </a:lnSpc>
-              <a:buNone/>
-              <a:defRPr lang="cs-CZ" sz="1200" b="0" u="none" strike="noStrike">
-                <a:solidFill>
-                  <a:srgbClr val="000000"/>
-                </a:solidFill>
-                <a:uFillTx/>
-                <a:latin typeface="Noto Sans CJK SC"/>
-              </a:defRPr>
-            </a:lvl1pPr>
-          </a:lstStyle>
-          <a:p>
-            <a:pPr indent="0" algn="r">
-              <a:lnSpc>
-                <a:spcPct val="100000"/>
-              </a:lnSpc>
-              <a:buNone/>
-            </a:pPr>
-            <a:r>
-              <a:rPr lang="cs-CZ" sz="1200" b="0" u="none" strike="noStrike">
-                <a:solidFill>
-                  <a:srgbClr val="000000"/>
-                </a:solidFill>
-                <a:uFillTx/>
-                <a:latin typeface="Noto Sans CJK SC"/>
-              </a:rPr>
-              <a:t>1.7.2013</a:t>
-            </a:r>
-            <a:endParaRPr lang="en-US" sz="1200" b="0" u="none" strike="noStrike">
-              <a:solidFill>
-                <a:srgbClr val="000000"/>
-              </a:solidFill>
-              <a:uFillTx/>
-              <a:latin typeface="Noto Sans CJK SC"/>
-            </a:endParaRPr>
-          </a:p>
-        </p:txBody>
-      </p:sp>
-      <p:sp>
-        <p:nvSpPr>
-          <p:cNvPr id="433" name="PlaceHolder 3"/>
-          <p:cNvSpPr>
-            <a:spLocks noGrp="1" noRot="1" noChangeAspect="1"/>
-          </p:cNvSpPr>
-          <p:nvPr>
-            <p:ph type="sldImg"/>
-          </p:nvPr>
-        </p:nvSpPr>
-        <p:spPr>
-          <a:xfrm>
-            <a:off x="2857680" y="512640"/>
-            <a:ext cx="3428640" cy="2566800"/>
-          </a:xfrm>
-          <a:prstGeom prst="rect">
-            <a:avLst/>
-          </a:prstGeom>
-          <a:ln w="0">
-            <a:noFill/>
-          </a:ln>
-        </p:spPr>
-      </p:sp>
-      <p:sp>
-        <p:nvSpPr>
-          <p:cNvPr id="434" name="PlaceHolder 4"/>
-          <p:cNvSpPr>
-            <a:spLocks noGrp="1"/>
-          </p:cNvSpPr>
-          <p:nvPr>
-            <p:ph type="body"/>
-          </p:nvPr>
-        </p:nvSpPr>
-        <p:spPr>
-          <a:xfrm>
-            <a:off x="914400" y="3251160"/>
-            <a:ext cx="7314840" cy="3080880"/>
-          </a:xfrm>
-          <a:prstGeom prst="rect">
-            <a:avLst/>
-          </a:prstGeom>
-          <a:noFill/>
-          <a:ln w="0">
-            <a:noFill/>
-          </a:ln>
-        </p:spPr>
-        <p:txBody>
-          <a:bodyPr lIns="91440" tIns="45720" rIns="91440" bIns="45720" anchor="ctr">
-            <a:noAutofit/>
-          </a:bodyPr>
-          <a:lstStyle/>
-          <a:p>
-            <a:pPr indent="0">
-              <a:lnSpc>
-                <a:spcPct val="100000"/>
-              </a:lnSpc>
-              <a:buNone/>
-              <a:tabLst>
-                <a:tab pos="0" algn="l"/>
-              </a:tabLst>
-            </a:pPr>
-            <a:r>
-              <a:rPr lang="zh-CN" sz="1400" b="0" u="none" strike="noStrike">
-                <a:solidFill>
-                  <a:srgbClr val="000000"/>
-                </a:solidFill>
-                <a:uFillTx/>
-                <a:latin typeface="Noto Sans CJK SC"/>
-              </a:rPr>
-              <a:t>这是我们项目的代码仓库结构和</a:t>
-            </a:r>
-            <a:r>
-              <a:rPr lang="en-US" sz="1400" b="0" u="none" strike="noStrike">
-                <a:solidFill>
-                  <a:srgbClr val="000000"/>
-                </a:solidFill>
-                <a:uFillTx/>
-                <a:latin typeface="Noto Sans CJK SC"/>
-              </a:rPr>
-              <a:t>Git</a:t>
-            </a:r>
-            <a:r>
-              <a:rPr lang="zh-CN" sz="1400" b="0" u="none" strike="noStrike">
-                <a:solidFill>
-                  <a:srgbClr val="000000"/>
-                </a:solidFill>
-                <a:uFillTx/>
-                <a:latin typeface="Noto Sans CJK SC"/>
-              </a:rPr>
-              <a:t>分支策略。文件结构清晰，每个游戏都是一个独立的</a:t>
-            </a:r>
-            <a:r>
-              <a:rPr lang="en-US" sz="1400" b="0" u="none" strike="noStrike">
-                <a:solidFill>
-                  <a:srgbClr val="000000"/>
-                </a:solidFill>
-                <a:uFillTx/>
-                <a:latin typeface="Noto Sans CJK SC"/>
-              </a:rPr>
-              <a:t>HTML</a:t>
-            </a:r>
-            <a:r>
-              <a:rPr lang="zh-CN" sz="1400" b="0" u="none" strike="noStrike">
-                <a:solidFill>
-                  <a:srgbClr val="000000"/>
-                </a:solidFill>
-                <a:uFillTx/>
-                <a:latin typeface="Noto Sans CJK SC"/>
-              </a:rPr>
-              <a:t>文件，便于维护和扩展。我们采用了</a:t>
-            </a:r>
-            <a:r>
-              <a:rPr lang="en-US" sz="1400" b="0" u="none" strike="noStrike">
-                <a:solidFill>
-                  <a:srgbClr val="000000"/>
-                </a:solidFill>
-                <a:uFillTx/>
-                <a:latin typeface="Noto Sans CJK SC"/>
-              </a:rPr>
-              <a:t>Git Flow</a:t>
-            </a:r>
-            <a:r>
-              <a:rPr lang="zh-CN" sz="1400" b="0" u="none" strike="noStrike">
-                <a:solidFill>
-                  <a:srgbClr val="000000"/>
-                </a:solidFill>
-                <a:uFillTx/>
-                <a:latin typeface="Noto Sans CJK SC"/>
-              </a:rPr>
-              <a:t>工作流，为每个功能模块创建独立的</a:t>
-            </a:r>
-            <a:r>
-              <a:rPr lang="en-US" sz="1400" b="0" u="none" strike="noStrike">
-                <a:solidFill>
-                  <a:srgbClr val="000000"/>
-                </a:solidFill>
-                <a:uFillTx/>
-                <a:latin typeface="Noto Sans CJK SC"/>
-              </a:rPr>
-              <a:t>feature</a:t>
-            </a:r>
-            <a:r>
-              <a:rPr lang="zh-CN" sz="1400" b="0" u="none" strike="noStrike">
-                <a:solidFill>
-                  <a:srgbClr val="000000"/>
-                </a:solidFill>
-                <a:uFillTx/>
-                <a:latin typeface="Noto Sans CJK SC"/>
-              </a:rPr>
-              <a:t>分支，如界面、不同同学的游戏开发等，最后合并到</a:t>
-            </a:r>
-            <a:r>
-              <a:rPr lang="en-US" sz="1400" b="0" u="none" strike="noStrike">
-                <a:solidFill>
-                  <a:srgbClr val="000000"/>
-                </a:solidFill>
-                <a:uFillTx/>
-                <a:latin typeface="Noto Sans CJK SC"/>
-              </a:rPr>
-              <a:t>develop</a:t>
-            </a:r>
-            <a:r>
-              <a:rPr lang="zh-CN" sz="1400" b="0" u="none" strike="noStrike">
-                <a:solidFill>
-                  <a:srgbClr val="000000"/>
-                </a:solidFill>
-                <a:uFillTx/>
-                <a:latin typeface="Noto Sans CJK SC"/>
-              </a:rPr>
-              <a:t>分支进行集成测试，确保了代码管理的规范和高效。</a:t>
-            </a:r>
-            <a:endParaRPr lang="en-US" sz="1400" b="0" u="none" strike="noStrike">
-              <a:solidFill>
-                <a:srgbClr val="000000"/>
-              </a:solidFill>
-              <a:uFillTx/>
-              <a:latin typeface="Noto Sans CJK SC"/>
-            </a:endParaRPr>
-          </a:p>
-        </p:txBody>
-      </p:sp>
-      <p:sp>
-        <p:nvSpPr>
-          <p:cNvPr id="435" name="PlaceHolder 5"/>
-          <p:cNvSpPr>
-            <a:spLocks noGrp="1"/>
-          </p:cNvSpPr>
-          <p:nvPr>
-            <p:ph type="ftr" idx="41"/>
-          </p:nvPr>
-        </p:nvSpPr>
-        <p:spPr>
-          <a:xfrm>
-            <a:off x="0" y="6502320"/>
-            <a:ext cx="3962160" cy="340920"/>
-          </a:xfrm>
-          <a:prstGeom prst="rect">
-            <a:avLst/>
-          </a:prstGeom>
-          <a:noFill/>
-          <a:ln w="0">
-            <a:noFill/>
-          </a:ln>
-        </p:spPr>
-        <p:txBody>
-          <a:bodyPr lIns="91440" tIns="45720" rIns="91440" bIns="45720" anchor="b">
-            <a:noAutofit/>
-          </a:bodyPr>
-          <a:lstStyle/>
-          <a:p>
-            <a:pPr indent="0">
-              <a:buNone/>
-            </a:pPr>
-            <a:endParaRPr lang="en-US" sz="1200" b="0" u="none" strike="noStrike">
-              <a:solidFill>
-                <a:srgbClr val="000000"/>
-              </a:solidFill>
-              <a:uFillTx/>
-              <a:latin typeface="Noto Sans CJK SC"/>
-            </a:endParaRPr>
-          </a:p>
-        </p:txBody>
-      </p:sp>
-      <p:sp>
-        <p:nvSpPr>
-          <p:cNvPr id="436" name="PlaceHolder 6"/>
-          <p:cNvSpPr>
-            <a:spLocks noGrp="1"/>
-          </p:cNvSpPr>
-          <p:nvPr>
-            <p:ph type="sldNum" idx="42"/>
-          </p:nvPr>
-        </p:nvSpPr>
-        <p:spPr>
-          <a:xfrm>
-            <a:off x="5180040" y="6502320"/>
-            <a:ext cx="3962160" cy="340920"/>
-          </a:xfrm>
-          <a:prstGeom prst="rect">
-            <a:avLst/>
-          </a:prstGeom>
-          <a:noFill/>
-          <a:ln w="0">
-            <a:noFill/>
-          </a:ln>
-        </p:spPr>
-        <p:txBody>
-          <a:bodyPr lIns="91440" tIns="45720" rIns="91440" bIns="45720" anchor="b">
-            <a:noAutofit/>
-          </a:bodyPr>
-          <a:lstStyle>
-            <a:lvl1pPr indent="0" algn="r">
-              <a:lnSpc>
-                <a:spcPct val="100000"/>
-              </a:lnSpc>
-              <a:buNone/>
-              <a:defRPr lang="cs-CZ" sz="1200" b="0" u="none" strike="noStrike">
-                <a:solidFill>
-                  <a:srgbClr val="000000"/>
-                </a:solidFill>
-                <a:uFillTx/>
-                <a:latin typeface="Noto Sans CJK SC"/>
-              </a:defRPr>
-            </a:lvl1pPr>
-          </a:lstStyle>
-          <a:p>
-            <a:pPr indent="0" algn="r">
-              <a:lnSpc>
-                <a:spcPct val="100000"/>
-              </a:lnSpc>
-              <a:buNone/>
-            </a:pPr>
-            <a:r>
-              <a:rPr lang="cs-CZ" sz="1200" b="0" u="none" strike="noStrike">
-                <a:solidFill>
-                  <a:srgbClr val="000000"/>
-                </a:solidFill>
-                <a:uFillTx/>
-                <a:latin typeface="Noto Sans CJK SC"/>
-              </a:rPr>
-              <a:t>‹#›</a:t>
-            </a:r>
-            <a:endParaRPr lang="en-US" sz="1200" b="0" u="none" strike="noStrike">
-              <a:solidFill>
-                <a:srgbClr val="000000"/>
-              </a:solidFill>
-              <a:uFillTx/>
-              <a:latin typeface="Noto Sans CJK SC"/>
-            </a:endParaRPr>
-          </a:p>
-        </p:txBody>
-      </p:sp>
-    </p:spTree>
-  </p:cSld>
-  <p:clrMapOvr>
-    <a:masterClrMapping/>
-  </p:clrMapOvr>
-</p:notes>
-</file>
-
-<file path=ppt/notesSlides/notesSlide14.xml><?xml version="1.0" encoding="utf-8"?>
-<p:notes xmlns:a="http://schemas.openxmlformats.org/drawingml/2006/main" xmlns:r="http://schemas.openxmlformats.org/officeDocument/2006/relationships" xmlns:p="http://schemas.openxmlformats.org/presentationml/2006/main">
-  <p:cSld>
-    <p:spTree>
-      <p:nvGrpSpPr>
-        <p:cNvPr id="1" name=""/>
-        <p:cNvGrpSpPr/>
-        <p:nvPr/>
-      </p:nvGrpSpPr>
-      <p:grpSpPr>
-        <a:xfrm>
-          <a:off x="0" y="0"/>
-          <a:ext cx="0" cy="0"/>
-          <a:chOff x="0" y="0"/>
-          <a:chExt cx="0" cy="0"/>
-        </a:xfrm>
-      </p:grpSpPr>
-      <p:sp>
-        <p:nvSpPr>
           <p:cNvPr id="437" name="PlaceHolder 1"/>
           <p:cNvSpPr>
             <a:spLocks noGrp="1"/>
@@ -2850,8 +2500,8 @@
         </p:nvSpPr>
         <p:spPr>
           <a:xfrm>
-            <a:off x="2857680" y="512640"/>
-            <a:ext cx="3428640" cy="2566800"/>
+            <a:off x="2290763" y="512763"/>
+            <a:ext cx="4562475" cy="2566987"/>
           </a:xfrm>
           <a:prstGeom prst="rect">
             <a:avLst/>
@@ -3628,8 +3278,8 @@
         </p:nvSpPr>
         <p:spPr>
           <a:xfrm>
-            <a:off x="2857680" y="512640"/>
-            <a:ext cx="3428640" cy="2566800"/>
+            <a:off x="2290763" y="512763"/>
+            <a:ext cx="4562475" cy="2566987"/>
           </a:xfrm>
           <a:prstGeom prst="rect">
             <a:avLst/>
@@ -7459,7 +7109,7 @@
               </a:tabLst>
             </a:pPr>
             <a:r>
-              <a:rPr lang="zh-CN" sz="1600" b="1" u="none" strike="noStrike">
+              <a:rPr lang="zh-CN" sz="1600" b="1" u="none" strike="noStrike" dirty="0">
                 <a:solidFill>
                   <a:srgbClr val="FFFFFF"/>
                 </a:solidFill>
@@ -7470,10 +7120,10 @@
               <a:t>汇报与成果展示</a:t>
             </a:r>
             <a:br>
-              <a:rPr sz="1600"/>
+              <a:rPr sz="1600" dirty="0"/>
             </a:br>
             <a:r>
-              <a:rPr lang="zh-CN" sz="1300" b="0" u="none" strike="noStrike">
+              <a:rPr lang="zh-CN" sz="1300" b="0" u="none" strike="noStrike" dirty="0">
                 <a:solidFill>
                   <a:srgbClr val="E6E6E6">
                     <a:alpha val="80000"/>
@@ -7483,10 +7133,10 @@
                 <a:latin typeface="Noto Sans SC"/>
                 <a:ea typeface="Noto Sans SC"/>
               </a:rPr>
-              <a:t>贾耀翔，王一鑫统筹项目全流程</a:t>
-            </a:r>
-            <a:r>
-              <a:rPr lang="en-US" sz="1300" b="0" u="none" strike="noStrike">
+              <a:t>贾耀翔，王一鑫</a:t>
+            </a:r>
+            <a:r>
+              <a:rPr lang="zh-CN" altLang="en-US" sz="1300" b="0" u="none" strike="noStrike" dirty="0">
                 <a:solidFill>
                   <a:srgbClr val="E6E6E6">
                     <a:alpha val="80000"/>
@@ -7496,10 +7146,10 @@
                 <a:latin typeface="Noto Sans SC"/>
                 <a:ea typeface="Noto Sans SC"/>
               </a:rPr>
-              <a:t>PPT</a:t>
-            </a:r>
-            <a:r>
-              <a:rPr lang="zh-CN" sz="1300" b="0" u="none" strike="noStrike">
+              <a:t>，齐胜南</a:t>
+            </a:r>
+            <a:r>
+              <a:rPr lang="zh-CN" sz="1300" b="0" u="none" strike="noStrike" dirty="0">
                 <a:solidFill>
                   <a:srgbClr val="E6E6E6">
                     <a:alpha val="80000"/>
@@ -7509,10 +7159,10 @@
                 <a:latin typeface="Noto Sans SC"/>
                 <a:ea typeface="Noto Sans SC"/>
               </a:rPr>
-              <a:t>制作与视觉包装，于</a:t>
-            </a:r>
-            <a:r>
-              <a:rPr lang="en-US" sz="1300" b="0" u="none" strike="noStrike">
+              <a:t>统筹项目全流程</a:t>
+            </a:r>
+            <a:r>
+              <a:rPr lang="en-US" sz="1300" b="0" u="none" strike="noStrike" dirty="0">
                 <a:solidFill>
                   <a:srgbClr val="E6E6E6">
                     <a:alpha val="80000"/>
@@ -7522,10 +7172,10 @@
                 <a:latin typeface="Noto Sans SC"/>
                 <a:ea typeface="Noto Sans SC"/>
               </a:rPr>
-              <a:t>2026</a:t>
-            </a:r>
-            <a:r>
-              <a:rPr lang="zh-CN" sz="1300" b="0" u="none" strike="noStrike">
+              <a:t>PPT</a:t>
+            </a:r>
+            <a:r>
+              <a:rPr lang="zh-CN" sz="1300" b="0" u="none" strike="noStrike" dirty="0">
                 <a:solidFill>
                   <a:srgbClr val="E6E6E6">
                     <a:alpha val="80000"/>
@@ -7535,10 +7185,10 @@
                 <a:latin typeface="Noto Sans SC"/>
                 <a:ea typeface="Noto Sans SC"/>
               </a:rPr>
-              <a:t>年</a:t>
-            </a:r>
-            <a:r>
-              <a:rPr lang="en-US" sz="1300" b="0" u="none" strike="noStrike">
+              <a:t>制作与视觉包装，于</a:t>
+            </a:r>
+            <a:r>
+              <a:rPr lang="en-US" sz="1300" b="0" u="none" strike="noStrike" dirty="0">
                 <a:solidFill>
                   <a:srgbClr val="E6E6E6">
                     <a:alpha val="80000"/>
@@ -7548,10 +7198,10 @@
                 <a:latin typeface="Noto Sans SC"/>
                 <a:ea typeface="Noto Sans SC"/>
               </a:rPr>
-              <a:t>6</a:t>
-            </a:r>
-            <a:r>
-              <a:rPr lang="zh-CN" sz="1300" b="0" u="none" strike="noStrike">
+              <a:t>2026</a:t>
+            </a:r>
+            <a:r>
+              <a:rPr lang="zh-CN" sz="1300" b="0" u="none" strike="noStrike" dirty="0">
                 <a:solidFill>
                   <a:srgbClr val="E6E6E6">
                     <a:alpha val="80000"/>
@@ -7561,9 +7211,35 @@
                 <a:latin typeface="Noto Sans SC"/>
                 <a:ea typeface="Noto Sans SC"/>
               </a:rPr>
+              <a:t>年</a:t>
+            </a:r>
+            <a:r>
+              <a:rPr lang="en-US" sz="1300" b="0" u="none" strike="noStrike" dirty="0">
+                <a:solidFill>
+                  <a:srgbClr val="E6E6E6">
+                    <a:alpha val="80000"/>
+                  </a:srgbClr>
+                </a:solidFill>
+                <a:uFillTx/>
+                <a:latin typeface="Noto Sans SC"/>
+                <a:ea typeface="Noto Sans SC"/>
+              </a:rPr>
+              <a:t>6</a:t>
+            </a:r>
+            <a:r>
+              <a:rPr lang="zh-CN" sz="1300" b="0" u="none" strike="noStrike" dirty="0">
+                <a:solidFill>
+                  <a:srgbClr val="E6E6E6">
+                    <a:alpha val="80000"/>
+                  </a:srgbClr>
+                </a:solidFill>
+                <a:uFillTx/>
+                <a:latin typeface="Noto Sans SC"/>
+                <a:ea typeface="Noto Sans SC"/>
+              </a:rPr>
               <a:t>月完成最终成果汇报交付。</a:t>
             </a:r>
-            <a:endParaRPr lang="en-US" sz="1300" b="0" u="none" strike="noStrike">
+            <a:endParaRPr lang="en-US" sz="1300" b="0" u="none" strike="noStrike" dirty="0">
               <a:solidFill>
                 <a:srgbClr val="FFFFFF"/>
               </a:solidFill>
@@ -13083,7 +12759,7 @@
       </p:grpSpPr>
       <p:sp>
         <p:nvSpPr>
-          <p:cNvPr id="294" name="AutoShape 2"/>
+          <p:cNvPr id="323" name="AutoShape 2"/>
           <p:cNvSpPr/>
           <p:nvPr/>
         </p:nvSpPr>
@@ -13098,8 +12774,8 @@
             </a:avLst>
           </a:prstGeom>
           <a:solidFill>
-            <a:srgbClr val="000000">
-              <a:alpha val="50000"/>
+            <a:srgbClr val="0F172A">
+              <a:alpha val="60000"/>
             </a:srgbClr>
           </a:solidFill>
           <a:ln w="25400">
@@ -13142,7 +12818,7 @@
       </p:sp>
       <p:sp>
         <p:nvSpPr>
-          <p:cNvPr id="295" name="AutoShape 3"/>
+          <p:cNvPr id="324" name="AutoShape 3"/>
           <p:cNvSpPr/>
           <p:nvPr/>
         </p:nvSpPr>
@@ -13194,7 +12870,7 @@
                 <a:latin typeface="Noto Sans SC"/>
                 <a:ea typeface="Noto Sans SC"/>
               </a:rPr>
-              <a:t>项目亮点与难点</a:t>
+              <a:t>代码仓库结构</a:t>
             </a:r>
             <a:endParaRPr lang="en-US" sz="3200" b="0" u="none" strike="noStrike">
               <a:solidFill>
@@ -13208,14 +12884,14 @@
       </p:sp>
       <p:sp>
         <p:nvSpPr>
-          <p:cNvPr id="296" name="AutoShape 4"/>
+          <p:cNvPr id="325" name="AutoShape 4"/>
           <p:cNvSpPr/>
           <p:nvPr/>
         </p:nvSpPr>
         <p:spPr>
           <a:xfrm>
-            <a:off x="762120" y="1650960"/>
-            <a:ext cx="5206680" cy="1460160"/>
+            <a:off x="762120" y="1778040"/>
+            <a:ext cx="5270040" cy="3682800"/>
           </a:xfrm>
           <a:prstGeom prst="roundRect">
             <a:avLst>
@@ -13223,14 +12899,14 @@
             </a:avLst>
           </a:prstGeom>
           <a:solidFill>
-            <a:srgbClr val="2BD1FC">
-              <a:alpha val="12000"/>
+            <a:srgbClr val="FFFFFF">
+              <a:alpha val="8000"/>
             </a:srgbClr>
           </a:solidFill>
           <a:ln w="12700">
             <a:solidFill>
               <a:srgbClr val="2BD1FC">
-                <a:alpha val="50000"/>
+                <a:alpha val="40000"/>
               </a:srgbClr>
             </a:solidFill>
             <a:round/>
@@ -13272,7 +12948,7 @@
       </p:sp>
       <p:pic>
         <p:nvPicPr>
-          <p:cNvPr id="297" name="Picture 5"/>
+          <p:cNvPr id="326" name="Picture 5"/>
           <p:cNvPicPr/>
           <p:nvPr/>
         </p:nvPicPr>
@@ -13288,8 +12964,8 @@
         </p:blipFill>
         <p:spPr>
           <a:xfrm>
-            <a:off x="952560" y="1841400"/>
-            <a:ext cx="456840" cy="456840"/>
+            <a:off x="1015920" y="1968480"/>
+            <a:ext cx="304560" cy="304560"/>
           </a:xfrm>
           <a:prstGeom prst="rect">
             <a:avLst/>
@@ -13302,14 +12978,14 @@
       </p:pic>
       <p:sp>
         <p:nvSpPr>
-          <p:cNvPr id="298" name="AutoShape 6"/>
+          <p:cNvPr id="327" name="AutoShape 6"/>
           <p:cNvSpPr/>
           <p:nvPr/>
         </p:nvSpPr>
         <p:spPr>
           <a:xfrm>
-            <a:off x="1650960" y="1778040"/>
-            <a:ext cx="4063680" cy="380520"/>
+            <a:off x="1460520" y="1930320"/>
+            <a:ext cx="4317480" cy="380520"/>
           </a:xfrm>
           <a:prstGeom prst="rect">
             <a:avLst/>
@@ -13354,7 +13030,7 @@
                 <a:latin typeface="Noto Sans SC"/>
                 <a:ea typeface="Noto Sans SC"/>
               </a:rPr>
-              <a:t>多游戏架构统一封装</a:t>
+              <a:t>模块化文件组织</a:t>
             </a:r>
             <a:endParaRPr lang="en-US" sz="1800" b="0" u="none" strike="noStrike">
               <a:solidFill>
@@ -13368,14 +13044,14 @@
       </p:sp>
       <p:cxnSp>
         <p:nvCxnSpPr>
-          <p:cNvPr id="299" name="Connector 7"/>
+          <p:cNvPr id="328" name="Connector 7"/>
           <p:cNvCxnSpPr/>
           <p:nvPr/>
         </p:nvCxnSpPr>
         <p:spPr>
           <a:xfrm>
-            <a:off x="952200" y="2412720"/>
-            <a:ext cx="4826520" cy="360"/>
+            <a:off x="1015920" y="2539800"/>
+            <a:ext cx="4762800" cy="360"/>
           </a:xfrm>
           <a:prstGeom prst="straightConnector1">
             <a:avLst/>
@@ -13383,7 +13059,7 @@
           <a:ln w="12700">
             <a:solidFill>
               <a:srgbClr val="FFFFFF">
-                <a:alpha val="20000"/>
+                <a:alpha val="15000"/>
               </a:srgbClr>
             </a:solidFill>
             <a:prstDash val="dash"/>
@@ -13393,14 +13069,14 @@
       </p:cxnSp>
       <p:sp>
         <p:nvSpPr>
-          <p:cNvPr id="300" name="AutoShape 8"/>
+          <p:cNvPr id="329" name="AutoShape 8"/>
           <p:cNvSpPr/>
           <p:nvPr/>
         </p:nvSpPr>
         <p:spPr>
           <a:xfrm>
-            <a:off x="952560" y="2540160"/>
-            <a:ext cx="4825800" cy="507600"/>
+            <a:off x="1015920" y="2793960"/>
+            <a:ext cx="4762080" cy="2412720"/>
           </a:xfrm>
           <a:prstGeom prst="rect">
             <a:avLst/>
@@ -13430,50 +13106,188 @@
           <a:p>
             <a:pPr>
               <a:lnSpc>
-                <a:spcPct val="108000"/>
+                <a:spcPct val="125000"/>
               </a:lnSpc>
               <a:tabLst>
                 <a:tab pos="0" algn="l"/>
               </a:tabLst>
             </a:pPr>
             <a:r>
+              <a:rPr lang="zh-CN" sz="1400" b="0" u="none" strike="noStrike">
+                <a:solidFill>
+                  <a:srgbClr val="E2E8F0"/>
+                </a:solidFill>
+                <a:uFillTx/>
+                <a:latin typeface="Noto Sans SC"/>
+                <a:ea typeface="Noto Sans SC"/>
+              </a:rPr>
+              <a:t>以</a:t>
+            </a:r>
+            <a:r>
+              <a:rPr lang="en-US" sz="1400" b="1" u="none" strike="noStrike">
+                <a:solidFill>
+                  <a:srgbClr val="E2E8F0"/>
+                </a:solidFill>
+                <a:uFillTx/>
+                <a:latin typeface="Noto Sans SC"/>
+                <a:ea typeface="Noto Sans SC"/>
+              </a:rPr>
+              <a:t>game-hub/</a:t>
+            </a:r>
+            <a:r>
+              <a:rPr lang="zh-CN" sz="1400" b="0" u="none" strike="noStrike">
+                <a:solidFill>
+                  <a:srgbClr val="E2E8F0"/>
+                </a:solidFill>
+                <a:uFillTx/>
+                <a:latin typeface="Noto Sans SC"/>
+                <a:ea typeface="Noto Sans SC"/>
+              </a:rPr>
+              <a:t>为根目录，入口文件</a:t>
+            </a:r>
+            <a:r>
+              <a:rPr lang="en-US" sz="1400" b="1" u="none" strike="noStrike">
+                <a:solidFill>
+                  <a:srgbClr val="E2E8F0"/>
+                </a:solidFill>
+                <a:uFillTx/>
+                <a:latin typeface="Noto Sans SC"/>
+                <a:ea typeface="Noto Sans SC"/>
+              </a:rPr>
+              <a:t>index.html</a:t>
+            </a:r>
+            <a:r>
+              <a:rPr lang="zh-CN" sz="1400" b="0" u="none" strike="noStrike">
+                <a:solidFill>
+                  <a:srgbClr val="E2E8F0"/>
+                </a:solidFill>
+                <a:uFillTx/>
+                <a:latin typeface="Noto Sans SC"/>
+                <a:ea typeface="Noto Sans SC"/>
+              </a:rPr>
+              <a:t>作为游戏回廊，统一调度所有游戏模块。每个游戏均为独立 </a:t>
+            </a:r>
+            <a:r>
+              <a:rPr lang="en-US" sz="1400" b="0" u="none" strike="noStrike">
+                <a:solidFill>
+                  <a:srgbClr val="E2E8F0"/>
+                </a:solidFill>
+                <a:uFillTx/>
+                <a:latin typeface="Noto Sans SC"/>
+                <a:ea typeface="Noto Sans SC"/>
+              </a:rPr>
+              <a:t>HTML </a:t>
+            </a:r>
+            <a:r>
+              <a:rPr lang="zh-CN" sz="1400" b="0" u="none" strike="noStrike">
+                <a:solidFill>
+                  <a:srgbClr val="E2E8F0"/>
+                </a:solidFill>
+                <a:uFillTx/>
+                <a:latin typeface="Noto Sans SC"/>
+                <a:ea typeface="Noto Sans SC"/>
+              </a:rPr>
+              <a:t>文件，按开发者职责划分，结构清晰易维护。资源集中存放于</a:t>
+            </a:r>
+            <a:r>
+              <a:rPr lang="en-US" sz="1400" b="1" u="none" strike="noStrike">
+                <a:solidFill>
+                  <a:srgbClr val="E2E8F0"/>
+                </a:solidFill>
+                <a:uFillTx/>
+                <a:latin typeface="Noto Sans SC"/>
+                <a:ea typeface="Noto Sans SC"/>
+              </a:rPr>
+              <a:t>assets/</a:t>
+            </a:r>
+            <a:r>
+              <a:rPr lang="zh-CN" sz="1400" b="0" u="none" strike="noStrike">
+                <a:solidFill>
+                  <a:srgbClr val="E2E8F0"/>
+                </a:solidFill>
+                <a:uFillTx/>
+                <a:latin typeface="Noto Sans SC"/>
+                <a:ea typeface="Noto Sans SC"/>
+              </a:rPr>
+              <a:t>，文档归档于</a:t>
+            </a:r>
+            <a:r>
+              <a:rPr lang="en-US" sz="1400" b="1" u="none" strike="noStrike">
+                <a:solidFill>
+                  <a:srgbClr val="E2E8F0"/>
+                </a:solidFill>
+                <a:uFillTx/>
+                <a:latin typeface="Noto Sans SC"/>
+                <a:ea typeface="Noto Sans SC"/>
+              </a:rPr>
+              <a:t>docs/</a:t>
+            </a:r>
+            <a:r>
+              <a:rPr lang="zh-CN" sz="1400" b="0" u="none" strike="noStrike">
+                <a:solidFill>
+                  <a:srgbClr val="E2E8F0"/>
+                </a:solidFill>
+                <a:uFillTx/>
+                <a:latin typeface="Noto Sans SC"/>
+                <a:ea typeface="Noto Sans SC"/>
+              </a:rPr>
+              <a:t>，确保项目工程化规范。</a:t>
+            </a:r>
+            <a:endParaRPr lang="en-US" sz="1400" b="0" u="none" strike="noStrike">
+              <a:solidFill>
+                <a:srgbClr val="FFFFFF"/>
+              </a:solidFill>
+              <a:uFillTx/>
+              <a:latin typeface="Noto Sans CJK SC"/>
+            </a:endParaRPr>
+          </a:p>
+          <a:p>
+            <a:pPr>
+              <a:lnSpc>
+                <a:spcPct val="125000"/>
+              </a:lnSpc>
+              <a:tabLst>
+                <a:tab pos="0" algn="l"/>
+              </a:tabLst>
+            </a:pPr>
+            <a:r>
               <a:rPr lang="zh-CN" sz="1300" b="0" u="none" strike="noStrike">
                 <a:solidFill>
                   <a:srgbClr val="FFFFFF">
-                    <a:alpha val="90000"/>
+                    <a:alpha val="60000"/>
                   </a:srgbClr>
                 </a:solidFill>
                 <a:uFillTx/>
                 <a:latin typeface="Noto Sans SC"/>
                 <a:ea typeface="Noto Sans SC"/>
               </a:rPr>
-              <a:t>将各游戏模块独立封装，通过统一入口整合调度；利用</a:t>
+              <a:t>分工：李玥峰（入口页）、李少华（</a:t>
             </a:r>
             <a:r>
               <a:rPr lang="en-US" sz="1300" b="0" u="none" strike="noStrike">
                 <a:solidFill>
                   <a:srgbClr val="FFFFFF">
-                    <a:alpha val="90000"/>
+                    <a:alpha val="60000"/>
                   </a:srgbClr>
                 </a:solidFill>
                 <a:uFillTx/>
                 <a:latin typeface="Noto Sans SC"/>
                 <a:ea typeface="Noto Sans SC"/>
               </a:rPr>
-              <a:t>LocalStorage</a:t>
+              <a:t>5</a:t>
             </a:r>
             <a:r>
               <a:rPr lang="zh-CN" sz="1300" b="0" u="none" strike="noStrike">
                 <a:solidFill>
                   <a:srgbClr val="FFFFFF">
-                    <a:alpha val="90000"/>
+                    <a:alpha val="60000"/>
                   </a:srgbClr>
                 </a:solidFill>
                 <a:uFillTx/>
                 <a:latin typeface="Noto Sans SC"/>
                 <a:ea typeface="Noto Sans SC"/>
               </a:rPr>
-              <a:t>实现用户最高分数据的持久化存储，确保数据不丢失。</a:t>
+              <a:t>款基础游戏）、李振豪（策略类游戏）。</a:t>
             </a:r>
             <a:endParaRPr lang="en-US" sz="1300" b="0" u="none" strike="noStrike">
               <a:solidFill>
@@ -13487,14 +13301,14 @@
       </p:sp>
       <p:sp>
         <p:nvSpPr>
-          <p:cNvPr id="301" name="AutoShape 9"/>
+          <p:cNvPr id="330" name="AutoShape 9"/>
           <p:cNvSpPr/>
           <p:nvPr/>
         </p:nvSpPr>
         <p:spPr>
           <a:xfrm>
-            <a:off x="762120" y="3365640"/>
-            <a:ext cx="5206680" cy="1460160"/>
+            <a:off x="6159600" y="1778040"/>
+            <a:ext cx="5270040" cy="3682800"/>
           </a:xfrm>
           <a:prstGeom prst="roundRect">
             <a:avLst>
@@ -13502,14 +13316,14 @@
             </a:avLst>
           </a:prstGeom>
           <a:solidFill>
-            <a:srgbClr val="2BD1FC">
-              <a:alpha val="12000"/>
+            <a:srgbClr val="FFFFFF">
+              <a:alpha val="8000"/>
             </a:srgbClr>
           </a:solidFill>
           <a:ln w="12700">
             <a:solidFill>
               <a:srgbClr val="2BD1FC">
-                <a:alpha val="50000"/>
+                <a:alpha val="40000"/>
               </a:srgbClr>
             </a:solidFill>
             <a:round/>
@@ -13551,7 +13365,7 @@
       </p:sp>
       <p:pic>
         <p:nvPicPr>
-          <p:cNvPr id="302" name="Picture 10"/>
+          <p:cNvPr id="331" name="Picture 10"/>
           <p:cNvPicPr/>
           <p:nvPr/>
         </p:nvPicPr>
@@ -13567,8 +13381,8 @@
         </p:blipFill>
         <p:spPr>
           <a:xfrm>
-            <a:off x="952560" y="3556080"/>
-            <a:ext cx="456840" cy="456840"/>
+            <a:off x="6413400" y="1968480"/>
+            <a:ext cx="304560" cy="304560"/>
           </a:xfrm>
           <a:prstGeom prst="rect">
             <a:avLst/>
@@ -13581,14 +13395,14 @@
       </p:pic>
       <p:sp>
         <p:nvSpPr>
-          <p:cNvPr id="303" name="AutoShape 11"/>
+          <p:cNvPr id="332" name="AutoShape 11"/>
           <p:cNvSpPr/>
           <p:nvPr/>
         </p:nvSpPr>
         <p:spPr>
           <a:xfrm>
-            <a:off x="1650960" y="3492360"/>
-            <a:ext cx="4063680" cy="380520"/>
+            <a:off x="6858000" y="1930320"/>
+            <a:ext cx="4317480" cy="380520"/>
           </a:xfrm>
           <a:prstGeom prst="rect">
             <a:avLst/>
@@ -13625,6 +13439,17 @@
               </a:tabLst>
             </a:pPr>
             <a:r>
+              <a:rPr lang="en-US" sz="1800" b="1" u="none" strike="noStrike">
+                <a:solidFill>
+                  <a:srgbClr val="2BD1FC"/>
+                </a:solidFill>
+                <a:uFillTx/>
+                <a:latin typeface="Noto Sans SC"/>
+                <a:ea typeface="Noto Sans SC"/>
+              </a:rPr>
+              <a:t>Git Flow </a:t>
+            </a:r>
+            <a:r>
               <a:rPr lang="zh-CN" sz="1800" b="1" u="none" strike="noStrike">
                 <a:solidFill>
                   <a:srgbClr val="2BD1FC"/>
@@ -13633,29 +13458,7 @@
                 <a:latin typeface="Noto Sans SC"/>
                 <a:ea typeface="Noto Sans SC"/>
               </a:rPr>
-              <a:t>高性能 </a:t>
-            </a:r>
-            <a:r>
-              <a:rPr lang="en-US" sz="1800" b="1" u="none" strike="noStrike">
-                <a:solidFill>
-                  <a:srgbClr val="2BD1FC"/>
-                </a:solidFill>
-                <a:uFillTx/>
-                <a:latin typeface="Noto Sans SC"/>
-                <a:ea typeface="Noto Sans SC"/>
-              </a:rPr>
-              <a:t>Canvas </a:t>
-            </a:r>
-            <a:r>
-              <a:rPr lang="zh-CN" sz="1800" b="1" u="none" strike="noStrike">
-                <a:solidFill>
-                  <a:srgbClr val="2BD1FC"/>
-                </a:solidFill>
-                <a:uFillTx/>
-                <a:latin typeface="Noto Sans SC"/>
-                <a:ea typeface="Noto Sans SC"/>
-              </a:rPr>
-              <a:t>流畅渲染</a:t>
+              <a:t>分支协作策略</a:t>
             </a:r>
             <a:endParaRPr lang="en-US" sz="1800" b="0" u="none" strike="noStrike">
               <a:solidFill>
@@ -13669,14 +13472,14 @@
       </p:sp>
       <p:cxnSp>
         <p:nvCxnSpPr>
-          <p:cNvPr id="304" name="Connector 12"/>
+          <p:cNvPr id="333" name="Connector 12"/>
           <p:cNvCxnSpPr/>
           <p:nvPr/>
         </p:nvCxnSpPr>
         <p:spPr>
           <a:xfrm>
-            <a:off x="952200" y="4127400"/>
-            <a:ext cx="4826520" cy="360"/>
+            <a:off x="6413400" y="2539800"/>
+            <a:ext cx="4762800" cy="360"/>
           </a:xfrm>
           <a:prstGeom prst="straightConnector1">
             <a:avLst/>
@@ -13684,7 +13487,7 @@
           <a:ln w="12700">
             <a:solidFill>
               <a:srgbClr val="FFFFFF">
-                <a:alpha val="20000"/>
+                <a:alpha val="15000"/>
               </a:srgbClr>
             </a:solidFill>
             <a:prstDash val="dash"/>
@@ -13694,14 +13497,14 @@
       </p:cxnSp>
       <p:sp>
         <p:nvSpPr>
-          <p:cNvPr id="305" name="AutoShape 13"/>
+          <p:cNvPr id="334" name="AutoShape 13"/>
           <p:cNvSpPr/>
           <p:nvPr/>
         </p:nvSpPr>
         <p:spPr>
           <a:xfrm>
-            <a:off x="952560" y="4254480"/>
-            <a:ext cx="4825800" cy="507600"/>
+            <a:off x="6413400" y="2793960"/>
+            <a:ext cx="4762080" cy="2412720"/>
           </a:xfrm>
           <a:prstGeom prst="rect">
             <a:avLst/>
@@ -13731,102 +13534,140 @@
           <a:p>
             <a:pPr>
               <a:lnSpc>
-                <a:spcPct val="108000"/>
+                <a:spcPct val="125000"/>
               </a:lnSpc>
               <a:tabLst>
                 <a:tab pos="0" algn="l"/>
               </a:tabLst>
             </a:pPr>
             <a:r>
+              <a:rPr lang="zh-CN" sz="1400" b="0" u="none" strike="noStrike">
+                <a:solidFill>
+                  <a:srgbClr val="E2E8F0"/>
+                </a:solidFill>
+                <a:uFillTx/>
+                <a:latin typeface="Noto Sans SC"/>
+                <a:ea typeface="Noto Sans SC"/>
+              </a:rPr>
+              <a:t>采用标准的 </a:t>
+            </a:r>
+            <a:r>
+              <a:rPr lang="en-US" sz="1400" b="0" u="none" strike="noStrike">
+                <a:solidFill>
+                  <a:srgbClr val="E2E8F0"/>
+                </a:solidFill>
+                <a:uFillTx/>
+                <a:latin typeface="Noto Sans SC"/>
+                <a:ea typeface="Noto Sans SC"/>
+              </a:rPr>
+              <a:t>Git Flow </a:t>
+            </a:r>
+            <a:r>
+              <a:rPr lang="zh-CN" sz="1400" b="0" u="none" strike="noStrike">
+                <a:solidFill>
+                  <a:srgbClr val="E2E8F0"/>
+                </a:solidFill>
+                <a:uFillTx/>
+                <a:latin typeface="Noto Sans SC"/>
+                <a:ea typeface="Noto Sans SC"/>
+              </a:rPr>
+              <a:t>工作流：</a:t>
+            </a:r>
+            <a:r>
+              <a:rPr lang="en-US" sz="1400" b="1" u="none" strike="noStrike">
+                <a:solidFill>
+                  <a:srgbClr val="E2E8F0"/>
+                </a:solidFill>
+                <a:uFillTx/>
+                <a:latin typeface="Noto Sans SC"/>
+                <a:ea typeface="Noto Sans SC"/>
+              </a:rPr>
+              <a:t>main</a:t>
+            </a:r>
+            <a:r>
+              <a:rPr lang="zh-CN" sz="1400" b="0" u="none" strike="noStrike">
+                <a:solidFill>
+                  <a:srgbClr val="E2E8F0"/>
+                </a:solidFill>
+                <a:uFillTx/>
+                <a:latin typeface="Noto Sans SC"/>
+                <a:ea typeface="Noto Sans SC"/>
+              </a:rPr>
+              <a:t>为生产分支，</a:t>
+            </a:r>
+            <a:r>
+              <a:rPr lang="en-US" sz="1400" b="1" u="none" strike="noStrike">
+                <a:solidFill>
+                  <a:srgbClr val="E2E8F0"/>
+                </a:solidFill>
+                <a:uFillTx/>
+                <a:latin typeface="Noto Sans SC"/>
+                <a:ea typeface="Noto Sans SC"/>
+              </a:rPr>
+              <a:t>develop</a:t>
+            </a:r>
+            <a:r>
+              <a:rPr lang="zh-CN" sz="1400" b="0" u="none" strike="noStrike">
+                <a:solidFill>
+                  <a:srgbClr val="E2E8F0"/>
+                </a:solidFill>
+                <a:uFillTx/>
+                <a:latin typeface="Noto Sans SC"/>
+                <a:ea typeface="Noto Sans SC"/>
+              </a:rPr>
+              <a:t>为集成分支。基于功能切分</a:t>
+            </a:r>
+            <a:r>
+              <a:rPr lang="en-US" sz="1400" b="1" u="none" strike="noStrike">
+                <a:solidFill>
+                  <a:srgbClr val="E2E8F0"/>
+                </a:solidFill>
+                <a:uFillTx/>
+                <a:latin typeface="Noto Sans SC"/>
+                <a:ea typeface="Noto Sans SC"/>
+              </a:rPr>
+              <a:t>feature</a:t>
+            </a:r>
+            <a:r>
+              <a:rPr lang="zh-CN" sz="1400" b="0" u="none" strike="noStrike">
+                <a:solidFill>
+                  <a:srgbClr val="E2E8F0"/>
+                </a:solidFill>
+                <a:uFillTx/>
+                <a:latin typeface="Noto Sans SC"/>
+                <a:ea typeface="Noto Sans SC"/>
+              </a:rPr>
+              <a:t>分支，实现界面、不同游戏模块、集成测试的并行开发，互不干扰。</a:t>
+            </a:r>
+            <a:endParaRPr lang="en-US" sz="1400" b="0" u="none" strike="noStrike">
+              <a:solidFill>
+                <a:srgbClr val="FFFFFF"/>
+              </a:solidFill>
+              <a:uFillTx/>
+              <a:latin typeface="Noto Sans CJK SC"/>
+            </a:endParaRPr>
+          </a:p>
+          <a:p>
+            <a:pPr>
+              <a:lnSpc>
+                <a:spcPct val="125000"/>
+              </a:lnSpc>
+              <a:tabLst>
+                <a:tab pos="0" algn="l"/>
+              </a:tabLst>
+            </a:pPr>
+            <a:r>
               <a:rPr lang="zh-CN" sz="1300" b="0" u="none" strike="noStrike">
                 <a:solidFill>
                   <a:srgbClr val="FFFFFF">
-                    <a:alpha val="90000"/>
+                    <a:alpha val="60000"/>
                   </a:srgbClr>
                 </a:solidFill>
                 <a:uFillTx/>
                 <a:latin typeface="Noto Sans SC"/>
                 <a:ea typeface="Noto Sans SC"/>
               </a:rPr>
-              <a:t>采用 </a:t>
-            </a:r>
-            <a:r>
-              <a:rPr lang="en-US" sz="1300" b="0" u="none" strike="noStrike">
-                <a:solidFill>
-                  <a:srgbClr val="FFFFFF">
-                    <a:alpha val="90000"/>
-                  </a:srgbClr>
-                </a:solidFill>
-                <a:uFillTx/>
-                <a:latin typeface="Noto Sans SC"/>
-                <a:ea typeface="Noto Sans SC"/>
-              </a:rPr>
-              <a:t>requestAnimationFrame </a:t>
-            </a:r>
-            <a:r>
-              <a:rPr lang="zh-CN" sz="1300" b="0" u="none" strike="noStrike">
-                <a:solidFill>
-                  <a:srgbClr val="FFFFFF">
-                    <a:alpha val="90000"/>
-                  </a:srgbClr>
-                </a:solidFill>
-                <a:uFillTx/>
-                <a:latin typeface="Noto Sans SC"/>
-                <a:ea typeface="Noto Sans SC"/>
-              </a:rPr>
-              <a:t>实现</a:t>
-            </a:r>
-            <a:r>
-              <a:rPr lang="en-US" sz="1300" b="0" u="none" strike="noStrike">
-                <a:solidFill>
-                  <a:srgbClr val="FFFFFF">
-                    <a:alpha val="90000"/>
-                  </a:srgbClr>
-                </a:solidFill>
-                <a:uFillTx/>
-                <a:latin typeface="Noto Sans SC"/>
-                <a:ea typeface="Noto Sans SC"/>
-              </a:rPr>
-              <a:t>60</a:t>
-            </a:r>
-            <a:r>
-              <a:rPr lang="zh-CN" sz="1300" b="0" u="none" strike="noStrike">
-                <a:solidFill>
-                  <a:srgbClr val="FFFFFF">
-                    <a:alpha val="90000"/>
-                  </a:srgbClr>
-                </a:solidFill>
-                <a:uFillTx/>
-                <a:latin typeface="Noto Sans SC"/>
-                <a:ea typeface="Noto Sans SC"/>
-              </a:rPr>
-              <a:t>帧流畅动画；引入对象池模式管理子弹与粒子特效，显著减少内存开销与</a:t>
-            </a:r>
-            <a:r>
-              <a:rPr lang="en-US" sz="1300" b="0" u="none" strike="noStrike">
-                <a:solidFill>
-                  <a:srgbClr val="FFFFFF">
-                    <a:alpha val="90000"/>
-                  </a:srgbClr>
-                </a:solidFill>
-                <a:uFillTx/>
-                <a:latin typeface="Noto Sans SC"/>
-                <a:ea typeface="Noto Sans SC"/>
-              </a:rPr>
-              <a:t>GC</a:t>
-            </a:r>
-            <a:r>
-              <a:rPr lang="zh-CN" sz="1300" b="0" u="none" strike="noStrike">
-                <a:solidFill>
-                  <a:srgbClr val="FFFFFF">
-                    <a:alpha val="90000"/>
-                  </a:srgbClr>
-                </a:solidFill>
-                <a:uFillTx/>
-                <a:latin typeface="Noto Sans SC"/>
-                <a:ea typeface="Noto Sans SC"/>
-              </a:rPr>
-              <a:t>频率。</a:t>
+              <a:t>优势：代码版本可控，功能迭代独立，便于代码审查与合并，保障主干分支的稳定性。</a:t>
             </a:r>
             <a:endParaRPr lang="en-US" sz="1300" b="0" u="none" strike="noStrike">
               <a:solidFill>
@@ -13840,14 +13681,14 @@
       </p:sp>
       <p:sp>
         <p:nvSpPr>
-          <p:cNvPr id="306" name="AutoShape 14"/>
+          <p:cNvPr id="335" name="AutoShape 14"/>
           <p:cNvSpPr/>
           <p:nvPr/>
         </p:nvSpPr>
         <p:spPr>
           <a:xfrm>
-            <a:off x="762120" y="5079960"/>
-            <a:ext cx="5206680" cy="1460160"/>
+            <a:off x="762120" y="5715000"/>
+            <a:ext cx="5270040" cy="888480"/>
           </a:xfrm>
           <a:prstGeom prst="roundRect">
             <a:avLst>
@@ -13856,13 +13697,13 @@
           </a:prstGeom>
           <a:solidFill>
             <a:srgbClr val="2BD1FC">
-              <a:alpha val="12000"/>
+              <a:alpha val="10000"/>
             </a:srgbClr>
           </a:solidFill>
           <a:ln w="12700">
             <a:solidFill>
               <a:srgbClr val="2BD1FC">
-                <a:alpha val="50000"/>
+                <a:alpha val="20000"/>
               </a:srgbClr>
             </a:solidFill>
             <a:round/>
@@ -13904,7 +13745,7 @@
       </p:sp>
       <p:pic>
         <p:nvPicPr>
-          <p:cNvPr id="307" name="Picture 15"/>
+          <p:cNvPr id="336" name="Picture 15"/>
           <p:cNvPicPr/>
           <p:nvPr/>
         </p:nvPicPr>
@@ -13920,8 +13761,8 @@
         </p:blipFill>
         <p:spPr>
           <a:xfrm>
-            <a:off x="952560" y="5270400"/>
-            <a:ext cx="456840" cy="456840"/>
+            <a:off x="952560" y="5880240"/>
+            <a:ext cx="355320" cy="355320"/>
           </a:xfrm>
           <a:prstGeom prst="rect">
             <a:avLst/>
@@ -13934,14 +13775,14 @@
       </p:pic>
       <p:sp>
         <p:nvSpPr>
-          <p:cNvPr id="308" name="AutoShape 16"/>
+          <p:cNvPr id="337" name="AutoShape 16"/>
           <p:cNvSpPr/>
           <p:nvPr/>
         </p:nvSpPr>
         <p:spPr>
           <a:xfrm>
-            <a:off x="1650960" y="5207040"/>
-            <a:ext cx="4063680" cy="380520"/>
+            <a:off x="1460520" y="5816520"/>
+            <a:ext cx="4444560" cy="685440"/>
           </a:xfrm>
           <a:prstGeom prst="rect">
             <a:avLst/>
@@ -13971,24 +13812,40 @@
           <a:p>
             <a:pPr>
               <a:lnSpc>
-                <a:spcPct val="125000"/>
+                <a:spcPct val="108000"/>
               </a:lnSpc>
               <a:tabLst>
                 <a:tab pos="0" algn="l"/>
               </a:tabLst>
             </a:pPr>
             <a:r>
-              <a:rPr lang="zh-CN" sz="1800" b="1" u="none" strike="noStrike">
-                <a:solidFill>
-                  <a:srgbClr val="2BD1FC"/>
-                </a:solidFill>
-                <a:uFillTx/>
-                <a:latin typeface="Noto Sans SC"/>
-                <a:ea typeface="Noto Sans SC"/>
-              </a:rPr>
-              <a:t>全端输入事件适配方案</a:t>
-            </a:r>
-            <a:endParaRPr lang="en-US" sz="1800" b="0" u="none" strike="noStrike">
+              <a:rPr lang="zh-CN" sz="1400" b="1" u="none" strike="noStrike">
+                <a:solidFill>
+                  <a:srgbClr val="FFFFFF"/>
+                </a:solidFill>
+                <a:uFillTx/>
+                <a:latin typeface="Noto Sans SC"/>
+                <a:ea typeface="Noto Sans SC"/>
+              </a:rPr>
+              <a:t>职责清晰，资源归一</a:t>
+            </a:r>
+            <a:br>
+              <a:rPr sz="1600"/>
+            </a:br>
+            <a:r>
+              <a:rPr lang="zh-CN" sz="1200" b="0" u="none" strike="noStrike">
+                <a:solidFill>
+                  <a:srgbClr val="FFFFFF">
+                    <a:alpha val="70000"/>
+                  </a:srgbClr>
+                </a:solidFill>
+                <a:uFillTx/>
+                <a:latin typeface="Noto Sans SC"/>
+                <a:ea typeface="Noto Sans SC"/>
+              </a:rPr>
+              <a:t>每个游戏模块独立封装，静态资源与文档分类管理，降低耦合度，提升维护效率。</a:t>
+            </a:r>
+            <a:endParaRPr lang="en-US" sz="1200" b="0" u="none" strike="noStrike">
               <a:solidFill>
                 <a:srgbClr val="FFFFFF"/>
               </a:solidFill>
@@ -13998,199 +13855,16 @@
           </a:p>
         </p:txBody>
       </p:sp>
-      <p:cxnSp>
-        <p:nvCxnSpPr>
-          <p:cNvPr id="309" name="Connector 17"/>
-          <p:cNvCxnSpPr/>
-          <p:nvPr/>
-        </p:nvCxnSpPr>
-        <p:spPr>
-          <a:xfrm>
-            <a:off x="952200" y="5841720"/>
-            <a:ext cx="4826520" cy="360"/>
-          </a:xfrm>
-          <a:prstGeom prst="straightConnector1">
-            <a:avLst/>
-          </a:prstGeom>
-          <a:ln w="12700">
-            <a:solidFill>
-              <a:srgbClr val="FFFFFF">
-                <a:alpha val="20000"/>
-              </a:srgbClr>
-            </a:solidFill>
-            <a:prstDash val="dash"/>
-            <a:round/>
-          </a:ln>
-        </p:spPr>
-      </p:cxnSp>
-      <p:sp>
-        <p:nvSpPr>
-          <p:cNvPr id="310" name="AutoShape 18"/>
+      <p:sp>
+        <p:nvSpPr>
+          <p:cNvPr id="338" name="AutoShape 17"/>
           <p:cNvSpPr/>
           <p:nvPr/>
         </p:nvSpPr>
         <p:spPr>
           <a:xfrm>
-            <a:off x="952560" y="5905440"/>
-            <a:ext cx="4825800" cy="571320"/>
-          </a:xfrm>
-          <a:prstGeom prst="rect">
-            <a:avLst/>
-          </a:prstGeom>
-          <a:noFill/>
-          <a:ln w="12700">
-            <a:noFill/>
-          </a:ln>
-        </p:spPr>
-        <p:style>
-          <a:lnRef idx="0">
-            <a:scrgbClr r="0" g="0" b="0"/>
-          </a:lnRef>
-          <a:fillRef idx="0">
-            <a:scrgbClr r="0" g="0" b="0"/>
-          </a:fillRef>
-          <a:effectRef idx="0">
-            <a:scrgbClr r="0" g="0" b="0"/>
-          </a:effectRef>
-          <a:fontRef idx="minor"/>
-        </p:style>
-        <p:txBody>
-          <a:bodyPr lIns="0" tIns="0" rIns="0" bIns="0" anchor="ctr">
-            <a:noAutofit/>
-          </a:bodyPr>
-          <a:lstStyle/>
-          <a:p>
-            <a:pPr>
-              <a:lnSpc>
-                <a:spcPct val="108000"/>
-              </a:lnSpc>
-              <a:tabLst>
-                <a:tab pos="0" algn="l"/>
-              </a:tabLst>
-            </a:pPr>
-            <a:r>
-              <a:rPr lang="zh-CN" sz="1300" b="0" u="none" strike="noStrike">
-                <a:solidFill>
-                  <a:srgbClr val="FFFFFF">
-                    <a:alpha val="90000"/>
-                  </a:srgbClr>
-                </a:solidFill>
-                <a:uFillTx/>
-                <a:latin typeface="Noto Sans SC"/>
-                <a:ea typeface="Noto Sans SC"/>
-              </a:rPr>
-              <a:t>完美兼容键盘、鼠标与移动端触摸事件；针对移动端浏览器做防误触滚动处理，保障操作精准度与体验一致性。</a:t>
-            </a:r>
-            <a:endParaRPr lang="en-US" sz="1300" b="0" u="none" strike="noStrike">
-              <a:solidFill>
-                <a:srgbClr val="FFFFFF"/>
-              </a:solidFill>
-              <a:uFillTx/>
-              <a:latin typeface="Noto Sans CJK SC"/>
-            </a:endParaRPr>
-          </a:p>
-        </p:txBody>
-      </p:sp>
-      <p:cxnSp>
-        <p:nvCxnSpPr>
-          <p:cNvPr id="311" name="Connector 19"/>
-          <p:cNvCxnSpPr/>
-          <p:nvPr/>
-        </p:nvCxnSpPr>
-        <p:spPr>
-          <a:xfrm>
-            <a:off x="6349680" y="1650960"/>
-            <a:ext cx="360" cy="4889880"/>
-          </a:xfrm>
-          <a:prstGeom prst="straightConnector1">
-            <a:avLst/>
-          </a:prstGeom>
-          <a:ln w="12700">
-            <a:solidFill>
-              <a:srgbClr val="FFFFFF">
-                <a:alpha val="15000"/>
-              </a:srgbClr>
-            </a:solidFill>
-            <a:round/>
-          </a:ln>
-        </p:spPr>
-      </p:cxnSp>
-      <p:sp>
-        <p:nvSpPr>
-          <p:cNvPr id="312" name="AutoShape 20"/>
-          <p:cNvSpPr/>
-          <p:nvPr/>
-        </p:nvSpPr>
-        <p:spPr>
-          <a:xfrm>
-            <a:off x="6603840" y="1650960"/>
-            <a:ext cx="4952520" cy="380520"/>
-          </a:xfrm>
-          <a:prstGeom prst="rect">
-            <a:avLst/>
-          </a:prstGeom>
-          <a:noFill/>
-          <a:ln w="12700">
-            <a:noFill/>
-          </a:ln>
-        </p:spPr>
-        <p:style>
-          <a:lnRef idx="0">
-            <a:scrgbClr r="0" g="0" b="0"/>
-          </a:lnRef>
-          <a:fillRef idx="0">
-            <a:scrgbClr r="0" g="0" b="0"/>
-          </a:fillRef>
-          <a:effectRef idx="0">
-            <a:scrgbClr r="0" g="0" b="0"/>
-          </a:effectRef>
-          <a:fontRef idx="minor"/>
-        </p:style>
-        <p:txBody>
-          <a:bodyPr lIns="0" tIns="0" rIns="0" bIns="0" anchor="ctr">
-            <a:noAutofit/>
-          </a:bodyPr>
-          <a:lstStyle/>
-          <a:p>
-            <a:pPr>
-              <a:lnSpc>
-                <a:spcPct val="125000"/>
-              </a:lnSpc>
-              <a:tabLst>
-                <a:tab pos="0" algn="l"/>
-              </a:tabLst>
-            </a:pPr>
-            <a:r>
-              <a:rPr lang="zh-CN" sz="2000" b="1" u="none" strike="noStrike">
-                <a:solidFill>
-                  <a:srgbClr val="FFFFFF"/>
-                </a:solidFill>
-                <a:uFillTx/>
-                <a:latin typeface="Noto Sans SC"/>
-                <a:ea typeface="Noto Sans SC"/>
-              </a:rPr>
-              <a:t>核心难点攻坚与突破</a:t>
-            </a:r>
-            <a:endParaRPr lang="en-US" sz="2000" b="0" u="none" strike="noStrike">
-              <a:solidFill>
-                <a:srgbClr val="FFFFFF"/>
-              </a:solidFill>
-              <a:uFillTx/>
-              <a:latin typeface="Noto Sans CJK SC"/>
-            </a:endParaRPr>
-          </a:p>
-        </p:txBody>
-      </p:sp>
-      <p:sp>
-        <p:nvSpPr>
-          <p:cNvPr id="313" name="AutoShape 21"/>
-          <p:cNvSpPr/>
-          <p:nvPr/>
-        </p:nvSpPr>
-        <p:spPr>
-          <a:xfrm>
-            <a:off x="6603840" y="2286000"/>
-            <a:ext cx="4952520" cy="952200"/>
+            <a:off x="6159600" y="5715000"/>
+            <a:ext cx="5270040" cy="888480"/>
           </a:xfrm>
           <a:prstGeom prst="roundRect">
             <a:avLst>
@@ -14198,12 +13872,17 @@
             </a:avLst>
           </a:prstGeom>
           <a:solidFill>
-            <a:srgbClr val="FFFFFF">
-              <a:alpha val="5000"/>
+            <a:srgbClr val="2BD1FC">
+              <a:alpha val="10000"/>
             </a:srgbClr>
           </a:solidFill>
-          <a:ln w="25400">
-            <a:noFill/>
+          <a:ln w="12700">
+            <a:solidFill>
+              <a:srgbClr val="2BD1FC">
+                <a:alpha val="20000"/>
+              </a:srgbClr>
+            </a:solidFill>
+            <a:round/>
           </a:ln>
         </p:spPr>
         <p:style>
@@ -14240,26 +13919,52 @@
           </a:p>
         </p:txBody>
       </p:sp>
-      <p:sp>
-        <p:nvSpPr>
-          <p:cNvPr id="314" name="AutoShape 22"/>
+      <p:pic>
+        <p:nvPicPr>
+          <p:cNvPr id="339" name="Picture 18"/>
+          <p:cNvPicPr/>
+          <p:nvPr/>
+        </p:nvPicPr>
+        <p:blipFill>
+          <a:blip r:embed="rId10">
+            <a:extLst>
+              <a:ext uri="{96DAC541-7B7A-43D3-8B79-37D633B846F1}">
+                <asvg:svgBlip xmlns:asvg="http://schemas.microsoft.com/office/drawing/2016/SVG/main" r:embed="rId11"/>
+              </a:ext>
+            </a:extLst>
+          </a:blip>
+          <a:stretch/>
+        </p:blipFill>
+        <p:spPr>
+          <a:xfrm>
+            <a:off x="6350040" y="5880240"/>
+            <a:ext cx="355320" cy="355320"/>
+          </a:xfrm>
+          <a:prstGeom prst="rect">
+            <a:avLst/>
+          </a:prstGeom>
+          <a:noFill/>
+          <a:ln w="0">
+            <a:noFill/>
+          </a:ln>
+        </p:spPr>
+      </p:pic>
+      <p:sp>
+        <p:nvSpPr>
+          <p:cNvPr id="340" name="AutoShape 19"/>
           <p:cNvSpPr/>
           <p:nvPr/>
         </p:nvSpPr>
         <p:spPr>
           <a:xfrm>
-            <a:off x="6603840" y="2286000"/>
-            <a:ext cx="50400" cy="952200"/>
-          </a:xfrm>
-          <a:prstGeom prst="roundRect">
-            <a:avLst>
-              <a:gd name="adj" fmla="val 0"/>
-            </a:avLst>
-          </a:prstGeom>
-          <a:solidFill>
-            <a:srgbClr val="EC4899"/>
-          </a:solidFill>
-          <a:ln w="25400">
+            <a:off x="6858000" y="5816520"/>
+            <a:ext cx="4444560" cy="685440"/>
+          </a:xfrm>
+          <a:prstGeom prst="rect">
+            <a:avLst/>
+          </a:prstGeom>
+          <a:noFill/>
+          <a:ln w="12700">
             <a:noFill/>
           </a:ln>
         </p:spPr>
@@ -14276,74 +13981,21 @@
           <a:fontRef idx="minor"/>
         </p:style>
         <p:txBody>
-          <a:bodyPr lIns="25200" tIns="63360" rIns="25200" bIns="63360" anchor="ctr">
+          <a:bodyPr lIns="0" tIns="0" rIns="0" bIns="0" anchor="ctr">
             <a:noAutofit/>
           </a:bodyPr>
           <a:lstStyle/>
           <a:p>
-            <a:pPr algn="ctr">
-              <a:lnSpc>
-                <a:spcPct val="100000"/>
-              </a:lnSpc>
-            </a:pPr>
-            <a:endParaRPr lang="en-US" sz="1400" b="0" u="none" strike="noStrike">
-              <a:solidFill>
-                <a:srgbClr val="000000"/>
-              </a:solidFill>
-              <a:uFillTx/>
-              <a:latin typeface="Arial"/>
-              <a:ea typeface="Arial"/>
-            </a:endParaRPr>
-          </a:p>
-        </p:txBody>
-      </p:sp>
-      <p:sp>
-        <p:nvSpPr>
-          <p:cNvPr id="315" name="AutoShape 23"/>
-          <p:cNvSpPr/>
-          <p:nvPr/>
-        </p:nvSpPr>
-        <p:spPr>
-          <a:xfrm>
-            <a:off x="6794640" y="2349360"/>
-            <a:ext cx="4635000" cy="825120"/>
-          </a:xfrm>
-          <a:prstGeom prst="rect">
-            <a:avLst/>
-          </a:prstGeom>
-          <a:noFill/>
-          <a:ln w="12700">
-            <a:noFill/>
-          </a:ln>
-        </p:spPr>
-        <p:style>
-          <a:lnRef idx="0">
-            <a:scrgbClr r="0" g="0" b="0"/>
-          </a:lnRef>
-          <a:fillRef idx="0">
-            <a:scrgbClr r="0" g="0" b="0"/>
-          </a:fillRef>
-          <a:effectRef idx="0">
-            <a:scrgbClr r="0" g="0" b="0"/>
-          </a:effectRef>
-          <a:fontRef idx="minor"/>
-        </p:style>
-        <p:txBody>
-          <a:bodyPr lIns="0" tIns="0" rIns="0" bIns="0" anchor="ctr">
-            <a:noAutofit/>
-          </a:bodyPr>
-          <a:lstStyle/>
-          <a:p>
             <a:pPr>
               <a:lnSpc>
-                <a:spcPct val="125000"/>
+                <a:spcPct val="108000"/>
               </a:lnSpc>
               <a:tabLst>
                 <a:tab pos="0" algn="l"/>
               </a:tabLst>
             </a:pPr>
             <a:r>
-              <a:rPr lang="zh-CN" sz="1500" b="1" u="none" strike="noStrike">
+              <a:rPr lang="zh-CN" sz="1400" b="1" u="none" strike="noStrike">
                 <a:solidFill>
                   <a:srgbClr val="FFFFFF"/>
                 </a:solidFill>
@@ -14351,685 +14003,36 @@
                 <a:latin typeface="Noto Sans SC"/>
                 <a:ea typeface="Noto Sans SC"/>
               </a:rPr>
-              <a:t>碰撞检测精度优化</a:t>
-            </a:r>
-            <a:r>
-              <a:rPr lang="en-US" sz="1300" b="0" u="none" strike="noStrike">
+              <a:t>分支隔离，高效并行</a:t>
+            </a:r>
+            <a:br>
+              <a:rPr sz="1600"/>
+            </a:br>
+            <a:r>
+              <a:rPr lang="en-US" sz="1200" b="0" u="none" strike="noStrike">
                 <a:solidFill>
                   <a:srgbClr val="FFFFFF">
-                    <a:alpha val="60000"/>
+                    <a:alpha val="70000"/>
                   </a:srgbClr>
                 </a:solidFill>
                 <a:uFillTx/>
                 <a:latin typeface="Noto Sans SC"/>
                 <a:ea typeface="Noto Sans SC"/>
               </a:rPr>
-              <a:t>| </a:t>
-            </a:r>
-            <a:r>
-              <a:rPr lang="zh-CN" sz="1300" b="0" u="none" strike="noStrike">
+              <a:t>Feature</a:t>
+            </a:r>
+            <a:r>
+              <a:rPr lang="zh-CN" sz="1200" b="0" u="none" strike="noStrike">
                 <a:solidFill>
                   <a:srgbClr val="FFFFFF">
-                    <a:alpha val="60000"/>
+                    <a:alpha val="70000"/>
                   </a:srgbClr>
                 </a:solidFill>
                 <a:uFillTx/>
                 <a:latin typeface="Noto Sans SC"/>
                 <a:ea typeface="Noto Sans SC"/>
               </a:rPr>
-              <a:t>负责人：李少华</a:t>
-            </a:r>
-            <a:endParaRPr lang="en-US" sz="1300" b="0" u="none" strike="noStrike">
-              <a:solidFill>
-                <a:srgbClr val="FFFFFF"/>
-              </a:solidFill>
-              <a:uFillTx/>
-              <a:latin typeface="Noto Sans CJK SC"/>
-            </a:endParaRPr>
-          </a:p>
-          <a:p>
-            <a:pPr>
-              <a:lnSpc>
-                <a:spcPct val="117000"/>
-              </a:lnSpc>
-              <a:tabLst>
-                <a:tab pos="0" algn="l"/>
-              </a:tabLst>
-            </a:pPr>
-            <a:r>
-              <a:rPr lang="zh-CN" sz="1200" b="0" u="none" strike="noStrike">
-                <a:solidFill>
-                  <a:srgbClr val="FFFFFF">
-                    <a:alpha val="80000"/>
-                  </a:srgbClr>
-                </a:solidFill>
-                <a:uFillTx/>
-                <a:latin typeface="Noto Sans SC"/>
-                <a:ea typeface="Noto Sans SC"/>
-              </a:rPr>
-              <a:t>采用</a:t>
-            </a:r>
-            <a:r>
-              <a:rPr lang="en-US" sz="1200" b="0" u="none" strike="noStrike">
-                <a:solidFill>
-                  <a:srgbClr val="FFFFFF">
-                    <a:alpha val="80000"/>
-                  </a:srgbClr>
-                </a:solidFill>
-                <a:uFillTx/>
-                <a:latin typeface="Noto Sans SC"/>
-                <a:ea typeface="Noto Sans SC"/>
-              </a:rPr>
-              <a:t>AABB</a:t>
-            </a:r>
-            <a:r>
-              <a:rPr lang="zh-CN" sz="1200" b="0" u="none" strike="noStrike">
-                <a:solidFill>
-                  <a:srgbClr val="FFFFFF">
-                    <a:alpha val="80000"/>
-                  </a:srgbClr>
-                </a:solidFill>
-                <a:uFillTx/>
-                <a:latin typeface="Noto Sans SC"/>
-                <a:ea typeface="Noto Sans SC"/>
-              </a:rPr>
-              <a:t>轴对齐包围盒算法，配合边界补偿机制，解决复杂场景下的误判与穿透问题，提升物理交互的真实感。</a:t>
-            </a:r>
-            <a:endParaRPr lang="en-US" sz="1200" b="0" u="none" strike="noStrike">
-              <a:solidFill>
-                <a:srgbClr val="FFFFFF"/>
-              </a:solidFill>
-              <a:uFillTx/>
-              <a:latin typeface="Noto Sans CJK SC"/>
-            </a:endParaRPr>
-          </a:p>
-        </p:txBody>
-      </p:sp>
-      <p:sp>
-        <p:nvSpPr>
-          <p:cNvPr id="316" name="AutoShape 24"/>
-          <p:cNvSpPr/>
-          <p:nvPr/>
-        </p:nvSpPr>
-        <p:spPr>
-          <a:xfrm>
-            <a:off x="6603840" y="3429000"/>
-            <a:ext cx="4952520" cy="952200"/>
-          </a:xfrm>
-          <a:prstGeom prst="roundRect">
-            <a:avLst>
-              <a:gd name="adj" fmla="val 0"/>
-            </a:avLst>
-          </a:prstGeom>
-          <a:solidFill>
-            <a:srgbClr val="FFFFFF">
-              <a:alpha val="5000"/>
-            </a:srgbClr>
-          </a:solidFill>
-          <a:ln w="25400">
-            <a:noFill/>
-          </a:ln>
-        </p:spPr>
-        <p:style>
-          <a:lnRef idx="0">
-            <a:scrgbClr r="0" g="0" b="0"/>
-          </a:lnRef>
-          <a:fillRef idx="0">
-            <a:scrgbClr r="0" g="0" b="0"/>
-          </a:fillRef>
-          <a:effectRef idx="0">
-            <a:scrgbClr r="0" g="0" b="0"/>
-          </a:effectRef>
-          <a:fontRef idx="minor"/>
-        </p:style>
-        <p:txBody>
-          <a:bodyPr lIns="63360" tIns="63360" rIns="63360" bIns="63360" anchor="ctr">
-            <a:noAutofit/>
-          </a:bodyPr>
-          <a:lstStyle/>
-          <a:p>
-            <a:pPr algn="ctr">
-              <a:lnSpc>
-                <a:spcPct val="100000"/>
-              </a:lnSpc>
-            </a:pPr>
-            <a:endParaRPr lang="en-US" sz="1400" b="0" u="none" strike="noStrike">
-              <a:solidFill>
-                <a:srgbClr val="000000"/>
-              </a:solidFill>
-              <a:uFillTx/>
-              <a:latin typeface="Arial"/>
-              <a:ea typeface="Arial"/>
-            </a:endParaRPr>
-          </a:p>
-        </p:txBody>
-      </p:sp>
-      <p:sp>
-        <p:nvSpPr>
-          <p:cNvPr id="317" name="AutoShape 25"/>
-          <p:cNvSpPr/>
-          <p:nvPr/>
-        </p:nvSpPr>
-        <p:spPr>
-          <a:xfrm>
-            <a:off x="6603840" y="3429000"/>
-            <a:ext cx="50400" cy="952200"/>
-          </a:xfrm>
-          <a:prstGeom prst="roundRect">
-            <a:avLst>
-              <a:gd name="adj" fmla="val 0"/>
-            </a:avLst>
-          </a:prstGeom>
-          <a:solidFill>
-            <a:srgbClr val="A855F7"/>
-          </a:solidFill>
-          <a:ln w="25400">
-            <a:noFill/>
-          </a:ln>
-        </p:spPr>
-        <p:style>
-          <a:lnRef idx="0">
-            <a:scrgbClr r="0" g="0" b="0"/>
-          </a:lnRef>
-          <a:fillRef idx="0">
-            <a:scrgbClr r="0" g="0" b="0"/>
-          </a:fillRef>
-          <a:effectRef idx="0">
-            <a:scrgbClr r="0" g="0" b="0"/>
-          </a:effectRef>
-          <a:fontRef idx="minor"/>
-        </p:style>
-        <p:txBody>
-          <a:bodyPr lIns="25200" tIns="63360" rIns="25200" bIns="63360" anchor="ctr">
-            <a:noAutofit/>
-          </a:bodyPr>
-          <a:lstStyle/>
-          <a:p>
-            <a:pPr algn="ctr">
-              <a:lnSpc>
-                <a:spcPct val="100000"/>
-              </a:lnSpc>
-            </a:pPr>
-            <a:endParaRPr lang="en-US" sz="1400" b="0" u="none" strike="noStrike">
-              <a:solidFill>
-                <a:srgbClr val="000000"/>
-              </a:solidFill>
-              <a:uFillTx/>
-              <a:latin typeface="Arial"/>
-              <a:ea typeface="Arial"/>
-            </a:endParaRPr>
-          </a:p>
-        </p:txBody>
-      </p:sp>
-      <p:sp>
-        <p:nvSpPr>
-          <p:cNvPr id="318" name="AutoShape 26"/>
-          <p:cNvSpPr/>
-          <p:nvPr/>
-        </p:nvSpPr>
-        <p:spPr>
-          <a:xfrm>
-            <a:off x="6794640" y="3492360"/>
-            <a:ext cx="4635000" cy="825120"/>
-          </a:xfrm>
-          <a:prstGeom prst="rect">
-            <a:avLst/>
-          </a:prstGeom>
-          <a:noFill/>
-          <a:ln w="12700">
-            <a:noFill/>
-          </a:ln>
-        </p:spPr>
-        <p:style>
-          <a:lnRef idx="0">
-            <a:scrgbClr r="0" g="0" b="0"/>
-          </a:lnRef>
-          <a:fillRef idx="0">
-            <a:scrgbClr r="0" g="0" b="0"/>
-          </a:fillRef>
-          <a:effectRef idx="0">
-            <a:scrgbClr r="0" g="0" b="0"/>
-          </a:effectRef>
-          <a:fontRef idx="minor"/>
-        </p:style>
-        <p:txBody>
-          <a:bodyPr lIns="0" tIns="0" rIns="0" bIns="0" anchor="ctr">
-            <a:noAutofit/>
-          </a:bodyPr>
-          <a:lstStyle/>
-          <a:p>
-            <a:pPr>
-              <a:lnSpc>
-                <a:spcPct val="125000"/>
-              </a:lnSpc>
-              <a:tabLst>
-                <a:tab pos="0" algn="l"/>
-              </a:tabLst>
-            </a:pPr>
-            <a:r>
-              <a:rPr lang="zh-CN" sz="1500" b="1" u="none" strike="noStrike">
-                <a:solidFill>
-                  <a:srgbClr val="FFFFFF"/>
-                </a:solidFill>
-                <a:uFillTx/>
-                <a:latin typeface="Noto Sans SC"/>
-                <a:ea typeface="Noto Sans SC"/>
-              </a:rPr>
-              <a:t>复杂形变与状态管理</a:t>
-            </a:r>
-            <a:r>
-              <a:rPr lang="en-US" sz="1300" b="0" u="none" strike="noStrike">
-                <a:solidFill>
-                  <a:srgbClr val="FFFFFF">
-                    <a:alpha val="60000"/>
-                  </a:srgbClr>
-                </a:solidFill>
-                <a:uFillTx/>
-                <a:latin typeface="Noto Sans SC"/>
-                <a:ea typeface="Noto Sans SC"/>
-              </a:rPr>
-              <a:t>| </a:t>
-            </a:r>
-            <a:r>
-              <a:rPr lang="zh-CN" sz="1300" b="0" u="none" strike="noStrike">
-                <a:solidFill>
-                  <a:srgbClr val="FFFFFF">
-                    <a:alpha val="60000"/>
-                  </a:srgbClr>
-                </a:solidFill>
-                <a:uFillTx/>
-                <a:latin typeface="Noto Sans SC"/>
-                <a:ea typeface="Noto Sans SC"/>
-              </a:rPr>
-              <a:t>负责人：李振豪</a:t>
-            </a:r>
-            <a:endParaRPr lang="en-US" sz="1300" b="0" u="none" strike="noStrike">
-              <a:solidFill>
-                <a:srgbClr val="FFFFFF"/>
-              </a:solidFill>
-              <a:uFillTx/>
-              <a:latin typeface="Noto Sans CJK SC"/>
-            </a:endParaRPr>
-          </a:p>
-          <a:p>
-            <a:pPr>
-              <a:lnSpc>
-                <a:spcPct val="117000"/>
-              </a:lnSpc>
-              <a:tabLst>
-                <a:tab pos="0" algn="l"/>
-              </a:tabLst>
-            </a:pPr>
-            <a:r>
-              <a:rPr lang="zh-CN" sz="1200" b="0" u="none" strike="noStrike">
-                <a:solidFill>
-                  <a:srgbClr val="FFFFFF">
-                    <a:alpha val="80000"/>
-                  </a:srgbClr>
-                </a:solidFill>
-                <a:uFillTx/>
-                <a:latin typeface="Noto Sans SC"/>
-                <a:ea typeface="Noto Sans SC"/>
-              </a:rPr>
-              <a:t>俄罗斯方块通过矩阵旋转</a:t>
-            </a:r>
-            <a:r>
-              <a:rPr lang="en-US" sz="1200" b="0" u="none" strike="noStrike">
-                <a:solidFill>
-                  <a:srgbClr val="FFFFFF">
-                    <a:alpha val="80000"/>
-                  </a:srgbClr>
-                </a:solidFill>
-                <a:uFillTx/>
-                <a:latin typeface="Noto Sans SC"/>
-                <a:ea typeface="Noto Sans SC"/>
-              </a:rPr>
-              <a:t>+</a:t>
-            </a:r>
-            <a:r>
-              <a:rPr lang="zh-CN" sz="1200" b="0" u="none" strike="noStrike">
-                <a:solidFill>
-                  <a:srgbClr val="FFFFFF">
-                    <a:alpha val="80000"/>
-                  </a:srgbClr>
-                </a:solidFill>
-                <a:uFillTx/>
-                <a:latin typeface="Noto Sans SC"/>
-                <a:ea typeface="Noto Sans SC"/>
-              </a:rPr>
-              <a:t>踢墙检测处理边界；五子棋利用四方向向量遍历算法实现</a:t>
-            </a:r>
-            <a:r>
-              <a:rPr lang="en-US" sz="1200" b="0" u="none" strike="noStrike">
-                <a:solidFill>
-                  <a:srgbClr val="FFFFFF">
-                    <a:alpha val="80000"/>
-                  </a:srgbClr>
-                </a:solidFill>
-                <a:uFillTx/>
-                <a:latin typeface="Noto Sans SC"/>
-                <a:ea typeface="Noto Sans SC"/>
-              </a:rPr>
-              <a:t>O(1)</a:t>
-            </a:r>
-            <a:r>
-              <a:rPr lang="zh-CN" sz="1200" b="0" u="none" strike="noStrike">
-                <a:solidFill>
-                  <a:srgbClr val="FFFFFF">
-                    <a:alpha val="80000"/>
-                  </a:srgbClr>
-                </a:solidFill>
-                <a:uFillTx/>
-                <a:latin typeface="Noto Sans SC"/>
-                <a:ea typeface="Noto Sans SC"/>
-              </a:rPr>
-              <a:t>时间复杂度的胜利判定逻辑。</a:t>
-            </a:r>
-            <a:endParaRPr lang="en-US" sz="1200" b="0" u="none" strike="noStrike">
-              <a:solidFill>
-                <a:srgbClr val="FFFFFF"/>
-              </a:solidFill>
-              <a:uFillTx/>
-              <a:latin typeface="Noto Sans CJK SC"/>
-            </a:endParaRPr>
-          </a:p>
-        </p:txBody>
-      </p:sp>
-      <p:sp>
-        <p:nvSpPr>
-          <p:cNvPr id="319" name="AutoShape 27"/>
-          <p:cNvSpPr/>
-          <p:nvPr/>
-        </p:nvSpPr>
-        <p:spPr>
-          <a:xfrm>
-            <a:off x="6603840" y="4572000"/>
-            <a:ext cx="4952520" cy="952200"/>
-          </a:xfrm>
-          <a:prstGeom prst="roundRect">
-            <a:avLst>
-              <a:gd name="adj" fmla="val 0"/>
-            </a:avLst>
-          </a:prstGeom>
-          <a:solidFill>
-            <a:srgbClr val="FFFFFF">
-              <a:alpha val="5000"/>
-            </a:srgbClr>
-          </a:solidFill>
-          <a:ln w="25400">
-            <a:noFill/>
-          </a:ln>
-        </p:spPr>
-        <p:style>
-          <a:lnRef idx="0">
-            <a:scrgbClr r="0" g="0" b="0"/>
-          </a:lnRef>
-          <a:fillRef idx="0">
-            <a:scrgbClr r="0" g="0" b="0"/>
-          </a:fillRef>
-          <a:effectRef idx="0">
-            <a:scrgbClr r="0" g="0" b="0"/>
-          </a:effectRef>
-          <a:fontRef idx="minor"/>
-        </p:style>
-        <p:txBody>
-          <a:bodyPr lIns="63360" tIns="63360" rIns="63360" bIns="63360" anchor="ctr">
-            <a:noAutofit/>
-          </a:bodyPr>
-          <a:lstStyle/>
-          <a:p>
-            <a:pPr algn="ctr">
-              <a:lnSpc>
-                <a:spcPct val="100000"/>
-              </a:lnSpc>
-            </a:pPr>
-            <a:endParaRPr lang="en-US" sz="1400" b="0" u="none" strike="noStrike">
-              <a:solidFill>
-                <a:srgbClr val="000000"/>
-              </a:solidFill>
-              <a:uFillTx/>
-              <a:latin typeface="Arial"/>
-              <a:ea typeface="Arial"/>
-            </a:endParaRPr>
-          </a:p>
-        </p:txBody>
-      </p:sp>
-      <p:sp>
-        <p:nvSpPr>
-          <p:cNvPr id="320" name="AutoShape 28"/>
-          <p:cNvSpPr/>
-          <p:nvPr/>
-        </p:nvSpPr>
-        <p:spPr>
-          <a:xfrm>
-            <a:off x="6603840" y="4572000"/>
-            <a:ext cx="50400" cy="952200"/>
-          </a:xfrm>
-          <a:prstGeom prst="roundRect">
-            <a:avLst>
-              <a:gd name="adj" fmla="val 0"/>
-            </a:avLst>
-          </a:prstGeom>
-          <a:solidFill>
-            <a:srgbClr val="EAB308"/>
-          </a:solidFill>
-          <a:ln w="25400">
-            <a:noFill/>
-          </a:ln>
-        </p:spPr>
-        <p:style>
-          <a:lnRef idx="0">
-            <a:scrgbClr r="0" g="0" b="0"/>
-          </a:lnRef>
-          <a:fillRef idx="0">
-            <a:scrgbClr r="0" g="0" b="0"/>
-          </a:fillRef>
-          <a:effectRef idx="0">
-            <a:scrgbClr r="0" g="0" b="0"/>
-          </a:effectRef>
-          <a:fontRef idx="minor"/>
-        </p:style>
-        <p:txBody>
-          <a:bodyPr lIns="25200" tIns="63360" rIns="25200" bIns="63360" anchor="ctr">
-            <a:noAutofit/>
-          </a:bodyPr>
-          <a:lstStyle/>
-          <a:p>
-            <a:pPr algn="ctr">
-              <a:lnSpc>
-                <a:spcPct val="100000"/>
-              </a:lnSpc>
-            </a:pPr>
-            <a:endParaRPr lang="en-US" sz="1400" b="0" u="none" strike="noStrike">
-              <a:solidFill>
-                <a:srgbClr val="000000"/>
-              </a:solidFill>
-              <a:uFillTx/>
-              <a:latin typeface="Arial"/>
-              <a:ea typeface="Arial"/>
-            </a:endParaRPr>
-          </a:p>
-        </p:txBody>
-      </p:sp>
-      <p:sp>
-        <p:nvSpPr>
-          <p:cNvPr id="321" name="AutoShape 29"/>
-          <p:cNvSpPr/>
-          <p:nvPr/>
-        </p:nvSpPr>
-        <p:spPr>
-          <a:xfrm>
-            <a:off x="6794640" y="4635360"/>
-            <a:ext cx="4635000" cy="825120"/>
-          </a:xfrm>
-          <a:prstGeom prst="rect">
-            <a:avLst/>
-          </a:prstGeom>
-          <a:noFill/>
-          <a:ln w="12700">
-            <a:noFill/>
-          </a:ln>
-        </p:spPr>
-        <p:style>
-          <a:lnRef idx="0">
-            <a:scrgbClr r="0" g="0" b="0"/>
-          </a:lnRef>
-          <a:fillRef idx="0">
-            <a:scrgbClr r="0" g="0" b="0"/>
-          </a:fillRef>
-          <a:effectRef idx="0">
-            <a:scrgbClr r="0" g="0" b="0"/>
-          </a:effectRef>
-          <a:fontRef idx="minor"/>
-        </p:style>
-        <p:txBody>
-          <a:bodyPr lIns="0" tIns="0" rIns="0" bIns="0" anchor="ctr">
-            <a:noAutofit/>
-          </a:bodyPr>
-          <a:lstStyle/>
-          <a:p>
-            <a:pPr>
-              <a:lnSpc>
-                <a:spcPct val="125000"/>
-              </a:lnSpc>
-              <a:tabLst>
-                <a:tab pos="0" algn="l"/>
-              </a:tabLst>
-            </a:pPr>
-            <a:r>
-              <a:rPr lang="zh-CN" sz="1500" b="1" u="none" strike="noStrike">
-                <a:solidFill>
-                  <a:srgbClr val="FFFFFF"/>
-                </a:solidFill>
-                <a:uFillTx/>
-                <a:latin typeface="Noto Sans SC"/>
-                <a:ea typeface="Noto Sans SC"/>
-              </a:rPr>
-              <a:t>数据解耦与系统整合</a:t>
-            </a:r>
-            <a:r>
-              <a:rPr lang="en-US" sz="1300" b="0" u="none" strike="noStrike">
-                <a:solidFill>
-                  <a:srgbClr val="FFFFFF">
-                    <a:alpha val="60000"/>
-                  </a:srgbClr>
-                </a:solidFill>
-                <a:uFillTx/>
-                <a:latin typeface="Noto Sans SC"/>
-                <a:ea typeface="Noto Sans SC"/>
-              </a:rPr>
-              <a:t>| </a:t>
-            </a:r>
-            <a:r>
-              <a:rPr lang="zh-CN" sz="1300" b="0" u="none" strike="noStrike">
-                <a:solidFill>
-                  <a:srgbClr val="FFFFFF">
-                    <a:alpha val="60000"/>
-                  </a:srgbClr>
-                </a:solidFill>
-                <a:uFillTx/>
-                <a:latin typeface="Noto Sans SC"/>
-                <a:ea typeface="Noto Sans SC"/>
-              </a:rPr>
-              <a:t>负责人：李想、李少华</a:t>
-            </a:r>
-            <a:endParaRPr lang="en-US" sz="1300" b="0" u="none" strike="noStrike">
-              <a:solidFill>
-                <a:srgbClr val="FFFFFF"/>
-              </a:solidFill>
-              <a:uFillTx/>
-              <a:latin typeface="Noto Sans CJK SC"/>
-            </a:endParaRPr>
-          </a:p>
-          <a:p>
-            <a:pPr>
-              <a:lnSpc>
-                <a:spcPct val="117000"/>
-              </a:lnSpc>
-              <a:tabLst>
-                <a:tab pos="0" algn="l"/>
-              </a:tabLst>
-            </a:pPr>
-            <a:r>
-              <a:rPr lang="zh-CN" sz="1200" b="0" u="none" strike="noStrike">
-                <a:solidFill>
-                  <a:srgbClr val="FFFFFF">
-                    <a:alpha val="80000"/>
-                  </a:srgbClr>
-                </a:solidFill>
-                <a:uFillTx/>
-                <a:latin typeface="Noto Sans SC"/>
-                <a:ea typeface="Noto Sans SC"/>
-              </a:rPr>
-              <a:t>推箱子关卡采用二维数组深拷贝管理状态回溯；制定统一接口规范，实现多游戏模块的插拔式加载与状态隔离。</a:t>
-            </a:r>
-            <a:endParaRPr lang="en-US" sz="1200" b="0" u="none" strike="noStrike">
-              <a:solidFill>
-                <a:srgbClr val="FFFFFF"/>
-              </a:solidFill>
-              <a:uFillTx/>
-              <a:latin typeface="Noto Sans CJK SC"/>
-            </a:endParaRPr>
-          </a:p>
-        </p:txBody>
-      </p:sp>
-      <p:sp>
-        <p:nvSpPr>
-          <p:cNvPr id="322" name="AutoShape 30"/>
-          <p:cNvSpPr/>
-          <p:nvPr/>
-        </p:nvSpPr>
-        <p:spPr>
-          <a:xfrm>
-            <a:off x="6603840" y="5778360"/>
-            <a:ext cx="4952520" cy="761760"/>
-          </a:xfrm>
-          <a:prstGeom prst="rect">
-            <a:avLst/>
-          </a:prstGeom>
-          <a:noFill/>
-          <a:ln w="12700">
-            <a:noFill/>
-          </a:ln>
-        </p:spPr>
-        <p:style>
-          <a:lnRef idx="0">
-            <a:scrgbClr r="0" g="0" b="0"/>
-          </a:lnRef>
-          <a:fillRef idx="0">
-            <a:scrgbClr r="0" g="0" b="0"/>
-          </a:fillRef>
-          <a:effectRef idx="0">
-            <a:scrgbClr r="0" g="0" b="0"/>
-          </a:effectRef>
-          <a:fontRef idx="minor"/>
-        </p:style>
-        <p:txBody>
-          <a:bodyPr lIns="0" tIns="0" rIns="0" bIns="0" anchor="ctr">
-            <a:noAutofit/>
-          </a:bodyPr>
-          <a:lstStyle/>
-          <a:p>
-            <a:pPr>
-              <a:lnSpc>
-                <a:spcPct val="117000"/>
-              </a:lnSpc>
-              <a:tabLst>
-                <a:tab pos="0" algn="l"/>
-              </a:tabLst>
-            </a:pPr>
-            <a:r>
-              <a:rPr lang="zh-CN" sz="1200" b="0" u="none" strike="noStrike">
-                <a:solidFill>
-                  <a:srgbClr val="FFFFFF">
-                    <a:alpha val="60000"/>
-                  </a:srgbClr>
-                </a:solidFill>
-                <a:uFillTx/>
-                <a:latin typeface="Noto Sans SC"/>
-                <a:ea typeface="Noto Sans SC"/>
-              </a:rPr>
-              <a:t>通过标准化接口与算法选型，团队攻克了底层技术难题，不仅保证了游戏运行的稳定性，也为后续功能扩展奠定了坚实基础。</a:t>
+              <a:t>分支模式让多位开发者同时推进不同任务，代码合并有序，规避版本冲突风险。</a:t>
             </a:r>
             <a:endParaRPr lang="en-US" sz="1200" b="0" u="none" strike="noStrike">
               <a:solidFill>
@@ -15079,1329 +14082,6 @@
       </p:grpSpPr>
       <p:sp>
         <p:nvSpPr>
-          <p:cNvPr id="323" name="AutoShape 2"/>
-          <p:cNvSpPr/>
-          <p:nvPr/>
-        </p:nvSpPr>
-        <p:spPr>
-          <a:xfrm>
-            <a:off x="0" y="0"/>
-            <a:ext cx="12191760" cy="6857640"/>
-          </a:xfrm>
-          <a:prstGeom prst="roundRect">
-            <a:avLst>
-              <a:gd name="adj" fmla="val 0"/>
-            </a:avLst>
-          </a:prstGeom>
-          <a:solidFill>
-            <a:srgbClr val="0F172A">
-              <a:alpha val="60000"/>
-            </a:srgbClr>
-          </a:solidFill>
-          <a:ln w="25400">
-            <a:noFill/>
-          </a:ln>
-        </p:spPr>
-        <p:style>
-          <a:lnRef idx="0">
-            <a:scrgbClr r="0" g="0" b="0"/>
-          </a:lnRef>
-          <a:fillRef idx="0">
-            <a:scrgbClr r="0" g="0" b="0"/>
-          </a:fillRef>
-          <a:effectRef idx="0">
-            <a:scrgbClr r="0" g="0" b="0"/>
-          </a:effectRef>
-          <a:fontRef idx="minor"/>
-        </p:style>
-        <p:txBody>
-          <a:bodyPr lIns="63360" tIns="63360" rIns="63360" bIns="63360" anchor="ctr">
-            <a:noAutofit/>
-          </a:bodyPr>
-          <a:lstStyle/>
-          <a:p>
-            <a:pPr algn="ctr">
-              <a:lnSpc>
-                <a:spcPct val="100000"/>
-              </a:lnSpc>
-            </a:pPr>
-            <a:endParaRPr lang="en-US" sz="1400" b="0" u="none" strike="noStrike">
-              <a:solidFill>
-                <a:srgbClr val="000000"/>
-              </a:solidFill>
-              <a:uFillTx/>
-              <a:latin typeface="Arial"/>
-              <a:ea typeface="Arial"/>
-            </a:endParaRPr>
-          </a:p>
-        </p:txBody>
-      </p:sp>
-      <p:sp>
-        <p:nvSpPr>
-          <p:cNvPr id="324" name="AutoShape 3"/>
-          <p:cNvSpPr/>
-          <p:nvPr/>
-        </p:nvSpPr>
-        <p:spPr>
-          <a:xfrm>
-            <a:off x="762120" y="507960"/>
-            <a:ext cx="10667520" cy="634680"/>
-          </a:xfrm>
-          <a:prstGeom prst="rect">
-            <a:avLst/>
-          </a:prstGeom>
-          <a:noFill/>
-          <a:ln w="12700">
-            <a:noFill/>
-          </a:ln>
-        </p:spPr>
-        <p:style>
-          <a:lnRef idx="0">
-            <a:scrgbClr r="0" g="0" b="0"/>
-          </a:lnRef>
-          <a:fillRef idx="0">
-            <a:scrgbClr r="0" g="0" b="0"/>
-          </a:fillRef>
-          <a:effectRef idx="0">
-            <a:scrgbClr r="0" g="0" b="0"/>
-          </a:effectRef>
-          <a:fontRef idx="minor"/>
-        </p:style>
-        <p:txBody>
-          <a:bodyPr lIns="0" tIns="0" rIns="0" bIns="0" anchor="ctr">
-            <a:noAutofit/>
-          </a:bodyPr>
-          <a:lstStyle/>
-          <a:p>
-            <a:pPr>
-              <a:lnSpc>
-                <a:spcPct val="125000"/>
-              </a:lnSpc>
-              <a:tabLst>
-                <a:tab pos="0" algn="l"/>
-              </a:tabLst>
-            </a:pPr>
-            <a:r>
-              <a:rPr lang="zh-CN" sz="3200" b="1" u="none" strike="noStrike">
-                <a:solidFill>
-                  <a:srgbClr val="FFFFFF"/>
-                </a:solidFill>
-                <a:uFillTx/>
-                <a:latin typeface="Noto Sans SC"/>
-                <a:ea typeface="Noto Sans SC"/>
-              </a:rPr>
-              <a:t>代码仓库结构</a:t>
-            </a:r>
-            <a:endParaRPr lang="en-US" sz="3200" b="0" u="none" strike="noStrike">
-              <a:solidFill>
-                <a:srgbClr val="FFFFFF"/>
-              </a:solidFill>
-              <a:uFillTx/>
-              <a:latin typeface="Noto Sans CJK SC"/>
-            </a:endParaRPr>
-          </a:p>
-        </p:txBody>
-      </p:sp>
-      <p:sp>
-        <p:nvSpPr>
-          <p:cNvPr id="325" name="AutoShape 4"/>
-          <p:cNvSpPr/>
-          <p:nvPr/>
-        </p:nvSpPr>
-        <p:spPr>
-          <a:xfrm>
-            <a:off x="762120" y="1778040"/>
-            <a:ext cx="5270040" cy="3682800"/>
-          </a:xfrm>
-          <a:prstGeom prst="roundRect">
-            <a:avLst>
-              <a:gd name="adj" fmla="val 0"/>
-            </a:avLst>
-          </a:prstGeom>
-          <a:solidFill>
-            <a:srgbClr val="FFFFFF">
-              <a:alpha val="8000"/>
-            </a:srgbClr>
-          </a:solidFill>
-          <a:ln w="12700">
-            <a:solidFill>
-              <a:srgbClr val="2BD1FC">
-                <a:alpha val="40000"/>
-              </a:srgbClr>
-            </a:solidFill>
-            <a:round/>
-          </a:ln>
-        </p:spPr>
-        <p:style>
-          <a:lnRef idx="0">
-            <a:scrgbClr r="0" g="0" b="0"/>
-          </a:lnRef>
-          <a:fillRef idx="0">
-            <a:scrgbClr r="0" g="0" b="0"/>
-          </a:fillRef>
-          <a:effectRef idx="0">
-            <a:scrgbClr r="0" g="0" b="0"/>
-          </a:effectRef>
-          <a:fontRef idx="minor"/>
-        </p:style>
-        <p:txBody>
-          <a:bodyPr lIns="63360" tIns="63360" rIns="63360" bIns="63360" anchor="ctr">
-            <a:noAutofit/>
-          </a:bodyPr>
-          <a:lstStyle/>
-          <a:p>
-            <a:pPr algn="ctr">
-              <a:lnSpc>
-                <a:spcPct val="100000"/>
-              </a:lnSpc>
-            </a:pPr>
-            <a:endParaRPr lang="en-US" sz="1400" b="0" u="none" strike="noStrike">
-              <a:solidFill>
-                <a:srgbClr val="000000"/>
-              </a:solidFill>
-              <a:uFillTx/>
-              <a:latin typeface="Arial"/>
-              <a:ea typeface="Arial"/>
-            </a:endParaRPr>
-          </a:p>
-        </p:txBody>
-      </p:sp>
-      <p:pic>
-        <p:nvPicPr>
-          <p:cNvPr id="326" name="Picture 5"/>
-          <p:cNvPicPr/>
-          <p:nvPr/>
-        </p:nvPicPr>
-        <p:blipFill>
-          <a:blip r:embed="rId4">
-            <a:extLst>
-              <a:ext uri="{96DAC541-7B7A-43D3-8B79-37D633B846F1}">
-                <asvg:svgBlip xmlns:asvg="http://schemas.microsoft.com/office/drawing/2016/SVG/main" r:embed="rId5"/>
-              </a:ext>
-            </a:extLst>
-          </a:blip>
-          <a:stretch/>
-        </p:blipFill>
-        <p:spPr>
-          <a:xfrm>
-            <a:off x="1015920" y="1968480"/>
-            <a:ext cx="304560" cy="304560"/>
-          </a:xfrm>
-          <a:prstGeom prst="rect">
-            <a:avLst/>
-          </a:prstGeom>
-          <a:noFill/>
-          <a:ln w="0">
-            <a:noFill/>
-          </a:ln>
-        </p:spPr>
-      </p:pic>
-      <p:sp>
-        <p:nvSpPr>
-          <p:cNvPr id="327" name="AutoShape 6"/>
-          <p:cNvSpPr/>
-          <p:nvPr/>
-        </p:nvSpPr>
-        <p:spPr>
-          <a:xfrm>
-            <a:off x="1460520" y="1930320"/>
-            <a:ext cx="4317480" cy="380520"/>
-          </a:xfrm>
-          <a:prstGeom prst="rect">
-            <a:avLst/>
-          </a:prstGeom>
-          <a:noFill/>
-          <a:ln w="12700">
-            <a:noFill/>
-          </a:ln>
-        </p:spPr>
-        <p:style>
-          <a:lnRef idx="0">
-            <a:scrgbClr r="0" g="0" b="0"/>
-          </a:lnRef>
-          <a:fillRef idx="0">
-            <a:scrgbClr r="0" g="0" b="0"/>
-          </a:fillRef>
-          <a:effectRef idx="0">
-            <a:scrgbClr r="0" g="0" b="0"/>
-          </a:effectRef>
-          <a:fontRef idx="minor"/>
-        </p:style>
-        <p:txBody>
-          <a:bodyPr lIns="0" tIns="0" rIns="0" bIns="0" anchor="ctr">
-            <a:noAutofit/>
-          </a:bodyPr>
-          <a:lstStyle/>
-          <a:p>
-            <a:pPr>
-              <a:lnSpc>
-                <a:spcPct val="125000"/>
-              </a:lnSpc>
-              <a:tabLst>
-                <a:tab pos="0" algn="l"/>
-              </a:tabLst>
-            </a:pPr>
-            <a:r>
-              <a:rPr lang="zh-CN" sz="1800" b="1" u="none" strike="noStrike">
-                <a:solidFill>
-                  <a:srgbClr val="2BD1FC"/>
-                </a:solidFill>
-                <a:uFillTx/>
-                <a:latin typeface="Noto Sans SC"/>
-                <a:ea typeface="Noto Sans SC"/>
-              </a:rPr>
-              <a:t>模块化文件组织</a:t>
-            </a:r>
-            <a:endParaRPr lang="en-US" sz="1800" b="0" u="none" strike="noStrike">
-              <a:solidFill>
-                <a:srgbClr val="FFFFFF"/>
-              </a:solidFill>
-              <a:uFillTx/>
-              <a:latin typeface="Noto Sans CJK SC"/>
-            </a:endParaRPr>
-          </a:p>
-        </p:txBody>
-      </p:sp>
-      <p:cxnSp>
-        <p:nvCxnSpPr>
-          <p:cNvPr id="328" name="Connector 7"/>
-          <p:cNvCxnSpPr/>
-          <p:nvPr/>
-        </p:nvCxnSpPr>
-        <p:spPr>
-          <a:xfrm>
-            <a:off x="1015920" y="2539800"/>
-            <a:ext cx="4762800" cy="360"/>
-          </a:xfrm>
-          <a:prstGeom prst="straightConnector1">
-            <a:avLst/>
-          </a:prstGeom>
-          <a:ln w="12700">
-            <a:solidFill>
-              <a:srgbClr val="FFFFFF">
-                <a:alpha val="15000"/>
-              </a:srgbClr>
-            </a:solidFill>
-            <a:prstDash val="dash"/>
-            <a:round/>
-          </a:ln>
-        </p:spPr>
-      </p:cxnSp>
-      <p:sp>
-        <p:nvSpPr>
-          <p:cNvPr id="329" name="AutoShape 8"/>
-          <p:cNvSpPr/>
-          <p:nvPr/>
-        </p:nvSpPr>
-        <p:spPr>
-          <a:xfrm>
-            <a:off x="1015920" y="2793960"/>
-            <a:ext cx="4762080" cy="2412720"/>
-          </a:xfrm>
-          <a:prstGeom prst="rect">
-            <a:avLst/>
-          </a:prstGeom>
-          <a:noFill/>
-          <a:ln w="12700">
-            <a:noFill/>
-          </a:ln>
-        </p:spPr>
-        <p:style>
-          <a:lnRef idx="0">
-            <a:scrgbClr r="0" g="0" b="0"/>
-          </a:lnRef>
-          <a:fillRef idx="0">
-            <a:scrgbClr r="0" g="0" b="0"/>
-          </a:fillRef>
-          <a:effectRef idx="0">
-            <a:scrgbClr r="0" g="0" b="0"/>
-          </a:effectRef>
-          <a:fontRef idx="minor"/>
-        </p:style>
-        <p:txBody>
-          <a:bodyPr lIns="0" tIns="0" rIns="0" bIns="0" anchor="ctr">
-            <a:noAutofit/>
-          </a:bodyPr>
-          <a:lstStyle/>
-          <a:p>
-            <a:pPr>
-              <a:lnSpc>
-                <a:spcPct val="125000"/>
-              </a:lnSpc>
-              <a:tabLst>
-                <a:tab pos="0" algn="l"/>
-              </a:tabLst>
-            </a:pPr>
-            <a:r>
-              <a:rPr lang="zh-CN" sz="1400" b="0" u="none" strike="noStrike">
-                <a:solidFill>
-                  <a:srgbClr val="E2E8F0"/>
-                </a:solidFill>
-                <a:uFillTx/>
-                <a:latin typeface="Noto Sans SC"/>
-                <a:ea typeface="Noto Sans SC"/>
-              </a:rPr>
-              <a:t>以</a:t>
-            </a:r>
-            <a:r>
-              <a:rPr lang="en-US" sz="1400" b="1" u="none" strike="noStrike">
-                <a:solidFill>
-                  <a:srgbClr val="E2E8F0"/>
-                </a:solidFill>
-                <a:uFillTx/>
-                <a:latin typeface="Noto Sans SC"/>
-                <a:ea typeface="Noto Sans SC"/>
-              </a:rPr>
-              <a:t>game-hub/</a:t>
-            </a:r>
-            <a:r>
-              <a:rPr lang="zh-CN" sz="1400" b="0" u="none" strike="noStrike">
-                <a:solidFill>
-                  <a:srgbClr val="E2E8F0"/>
-                </a:solidFill>
-                <a:uFillTx/>
-                <a:latin typeface="Noto Sans SC"/>
-                <a:ea typeface="Noto Sans SC"/>
-              </a:rPr>
-              <a:t>为根目录，入口文件</a:t>
-            </a:r>
-            <a:r>
-              <a:rPr lang="en-US" sz="1400" b="1" u="none" strike="noStrike">
-                <a:solidFill>
-                  <a:srgbClr val="E2E8F0"/>
-                </a:solidFill>
-                <a:uFillTx/>
-                <a:latin typeface="Noto Sans SC"/>
-                <a:ea typeface="Noto Sans SC"/>
-              </a:rPr>
-              <a:t>index.html</a:t>
-            </a:r>
-            <a:r>
-              <a:rPr lang="zh-CN" sz="1400" b="0" u="none" strike="noStrike">
-                <a:solidFill>
-                  <a:srgbClr val="E2E8F0"/>
-                </a:solidFill>
-                <a:uFillTx/>
-                <a:latin typeface="Noto Sans SC"/>
-                <a:ea typeface="Noto Sans SC"/>
-              </a:rPr>
-              <a:t>作为游戏回廊，统一调度所有游戏模块。每个游戏均为独立 </a:t>
-            </a:r>
-            <a:r>
-              <a:rPr lang="en-US" sz="1400" b="0" u="none" strike="noStrike">
-                <a:solidFill>
-                  <a:srgbClr val="E2E8F0"/>
-                </a:solidFill>
-                <a:uFillTx/>
-                <a:latin typeface="Noto Sans SC"/>
-                <a:ea typeface="Noto Sans SC"/>
-              </a:rPr>
-              <a:t>HTML </a:t>
-            </a:r>
-            <a:r>
-              <a:rPr lang="zh-CN" sz="1400" b="0" u="none" strike="noStrike">
-                <a:solidFill>
-                  <a:srgbClr val="E2E8F0"/>
-                </a:solidFill>
-                <a:uFillTx/>
-                <a:latin typeface="Noto Sans SC"/>
-                <a:ea typeface="Noto Sans SC"/>
-              </a:rPr>
-              <a:t>文件，按开发者职责划分，结构清晰易维护。资源集中存放于</a:t>
-            </a:r>
-            <a:r>
-              <a:rPr lang="en-US" sz="1400" b="1" u="none" strike="noStrike">
-                <a:solidFill>
-                  <a:srgbClr val="E2E8F0"/>
-                </a:solidFill>
-                <a:uFillTx/>
-                <a:latin typeface="Noto Sans SC"/>
-                <a:ea typeface="Noto Sans SC"/>
-              </a:rPr>
-              <a:t>assets/</a:t>
-            </a:r>
-            <a:r>
-              <a:rPr lang="zh-CN" sz="1400" b="0" u="none" strike="noStrike">
-                <a:solidFill>
-                  <a:srgbClr val="E2E8F0"/>
-                </a:solidFill>
-                <a:uFillTx/>
-                <a:latin typeface="Noto Sans SC"/>
-                <a:ea typeface="Noto Sans SC"/>
-              </a:rPr>
-              <a:t>，文档归档于</a:t>
-            </a:r>
-            <a:r>
-              <a:rPr lang="en-US" sz="1400" b="1" u="none" strike="noStrike">
-                <a:solidFill>
-                  <a:srgbClr val="E2E8F0"/>
-                </a:solidFill>
-                <a:uFillTx/>
-                <a:latin typeface="Noto Sans SC"/>
-                <a:ea typeface="Noto Sans SC"/>
-              </a:rPr>
-              <a:t>docs/</a:t>
-            </a:r>
-            <a:r>
-              <a:rPr lang="zh-CN" sz="1400" b="0" u="none" strike="noStrike">
-                <a:solidFill>
-                  <a:srgbClr val="E2E8F0"/>
-                </a:solidFill>
-                <a:uFillTx/>
-                <a:latin typeface="Noto Sans SC"/>
-                <a:ea typeface="Noto Sans SC"/>
-              </a:rPr>
-              <a:t>，确保项目工程化规范。</a:t>
-            </a:r>
-            <a:endParaRPr lang="en-US" sz="1400" b="0" u="none" strike="noStrike">
-              <a:solidFill>
-                <a:srgbClr val="FFFFFF"/>
-              </a:solidFill>
-              <a:uFillTx/>
-              <a:latin typeface="Noto Sans CJK SC"/>
-            </a:endParaRPr>
-          </a:p>
-          <a:p>
-            <a:pPr>
-              <a:lnSpc>
-                <a:spcPct val="125000"/>
-              </a:lnSpc>
-              <a:tabLst>
-                <a:tab pos="0" algn="l"/>
-              </a:tabLst>
-            </a:pPr>
-            <a:r>
-              <a:rPr lang="zh-CN" sz="1300" b="0" u="none" strike="noStrike">
-                <a:solidFill>
-                  <a:srgbClr val="FFFFFF">
-                    <a:alpha val="60000"/>
-                  </a:srgbClr>
-                </a:solidFill>
-                <a:uFillTx/>
-                <a:latin typeface="Noto Sans SC"/>
-                <a:ea typeface="Noto Sans SC"/>
-              </a:rPr>
-              <a:t>分工：李玥峰（入口页）、李少华（</a:t>
-            </a:r>
-            <a:r>
-              <a:rPr lang="en-US" sz="1300" b="0" u="none" strike="noStrike">
-                <a:solidFill>
-                  <a:srgbClr val="FFFFFF">
-                    <a:alpha val="60000"/>
-                  </a:srgbClr>
-                </a:solidFill>
-                <a:uFillTx/>
-                <a:latin typeface="Noto Sans SC"/>
-                <a:ea typeface="Noto Sans SC"/>
-              </a:rPr>
-              <a:t>5</a:t>
-            </a:r>
-            <a:r>
-              <a:rPr lang="zh-CN" sz="1300" b="0" u="none" strike="noStrike">
-                <a:solidFill>
-                  <a:srgbClr val="FFFFFF">
-                    <a:alpha val="60000"/>
-                  </a:srgbClr>
-                </a:solidFill>
-                <a:uFillTx/>
-                <a:latin typeface="Noto Sans SC"/>
-                <a:ea typeface="Noto Sans SC"/>
-              </a:rPr>
-              <a:t>款基础游戏）、李振豪（策略类游戏）。</a:t>
-            </a:r>
-            <a:endParaRPr lang="en-US" sz="1300" b="0" u="none" strike="noStrike">
-              <a:solidFill>
-                <a:srgbClr val="FFFFFF"/>
-              </a:solidFill>
-              <a:uFillTx/>
-              <a:latin typeface="Noto Sans CJK SC"/>
-            </a:endParaRPr>
-          </a:p>
-        </p:txBody>
-      </p:sp>
-      <p:sp>
-        <p:nvSpPr>
-          <p:cNvPr id="330" name="AutoShape 9"/>
-          <p:cNvSpPr/>
-          <p:nvPr/>
-        </p:nvSpPr>
-        <p:spPr>
-          <a:xfrm>
-            <a:off x="6159600" y="1778040"/>
-            <a:ext cx="5270040" cy="3682800"/>
-          </a:xfrm>
-          <a:prstGeom prst="roundRect">
-            <a:avLst>
-              <a:gd name="adj" fmla="val 0"/>
-            </a:avLst>
-          </a:prstGeom>
-          <a:solidFill>
-            <a:srgbClr val="FFFFFF">
-              <a:alpha val="8000"/>
-            </a:srgbClr>
-          </a:solidFill>
-          <a:ln w="12700">
-            <a:solidFill>
-              <a:srgbClr val="2BD1FC">
-                <a:alpha val="40000"/>
-              </a:srgbClr>
-            </a:solidFill>
-            <a:round/>
-          </a:ln>
-        </p:spPr>
-        <p:style>
-          <a:lnRef idx="0">
-            <a:scrgbClr r="0" g="0" b="0"/>
-          </a:lnRef>
-          <a:fillRef idx="0">
-            <a:scrgbClr r="0" g="0" b="0"/>
-          </a:fillRef>
-          <a:effectRef idx="0">
-            <a:scrgbClr r="0" g="0" b="0"/>
-          </a:effectRef>
-          <a:fontRef idx="minor"/>
-        </p:style>
-        <p:txBody>
-          <a:bodyPr lIns="63360" tIns="63360" rIns="63360" bIns="63360" anchor="ctr">
-            <a:noAutofit/>
-          </a:bodyPr>
-          <a:lstStyle/>
-          <a:p>
-            <a:pPr algn="ctr">
-              <a:lnSpc>
-                <a:spcPct val="100000"/>
-              </a:lnSpc>
-            </a:pPr>
-            <a:endParaRPr lang="en-US" sz="1400" b="0" u="none" strike="noStrike">
-              <a:solidFill>
-                <a:srgbClr val="000000"/>
-              </a:solidFill>
-              <a:uFillTx/>
-              <a:latin typeface="Arial"/>
-              <a:ea typeface="Arial"/>
-            </a:endParaRPr>
-          </a:p>
-        </p:txBody>
-      </p:sp>
-      <p:pic>
-        <p:nvPicPr>
-          <p:cNvPr id="331" name="Picture 10"/>
-          <p:cNvPicPr/>
-          <p:nvPr/>
-        </p:nvPicPr>
-        <p:blipFill>
-          <a:blip r:embed="rId6">
-            <a:extLst>
-              <a:ext uri="{96DAC541-7B7A-43D3-8B79-37D633B846F1}">
-                <asvg:svgBlip xmlns:asvg="http://schemas.microsoft.com/office/drawing/2016/SVG/main" r:embed="rId7"/>
-              </a:ext>
-            </a:extLst>
-          </a:blip>
-          <a:stretch/>
-        </p:blipFill>
-        <p:spPr>
-          <a:xfrm>
-            <a:off x="6413400" y="1968480"/>
-            <a:ext cx="304560" cy="304560"/>
-          </a:xfrm>
-          <a:prstGeom prst="rect">
-            <a:avLst/>
-          </a:prstGeom>
-          <a:noFill/>
-          <a:ln w="0">
-            <a:noFill/>
-          </a:ln>
-        </p:spPr>
-      </p:pic>
-      <p:sp>
-        <p:nvSpPr>
-          <p:cNvPr id="332" name="AutoShape 11"/>
-          <p:cNvSpPr/>
-          <p:nvPr/>
-        </p:nvSpPr>
-        <p:spPr>
-          <a:xfrm>
-            <a:off x="6858000" y="1930320"/>
-            <a:ext cx="4317480" cy="380520"/>
-          </a:xfrm>
-          <a:prstGeom prst="rect">
-            <a:avLst/>
-          </a:prstGeom>
-          <a:noFill/>
-          <a:ln w="12700">
-            <a:noFill/>
-          </a:ln>
-        </p:spPr>
-        <p:style>
-          <a:lnRef idx="0">
-            <a:scrgbClr r="0" g="0" b="0"/>
-          </a:lnRef>
-          <a:fillRef idx="0">
-            <a:scrgbClr r="0" g="0" b="0"/>
-          </a:fillRef>
-          <a:effectRef idx="0">
-            <a:scrgbClr r="0" g="0" b="0"/>
-          </a:effectRef>
-          <a:fontRef idx="minor"/>
-        </p:style>
-        <p:txBody>
-          <a:bodyPr lIns="0" tIns="0" rIns="0" bIns="0" anchor="ctr">
-            <a:noAutofit/>
-          </a:bodyPr>
-          <a:lstStyle/>
-          <a:p>
-            <a:pPr>
-              <a:lnSpc>
-                <a:spcPct val="125000"/>
-              </a:lnSpc>
-              <a:tabLst>
-                <a:tab pos="0" algn="l"/>
-              </a:tabLst>
-            </a:pPr>
-            <a:r>
-              <a:rPr lang="en-US" sz="1800" b="1" u="none" strike="noStrike">
-                <a:solidFill>
-                  <a:srgbClr val="2BD1FC"/>
-                </a:solidFill>
-                <a:uFillTx/>
-                <a:latin typeface="Noto Sans SC"/>
-                <a:ea typeface="Noto Sans SC"/>
-              </a:rPr>
-              <a:t>Git Flow </a:t>
-            </a:r>
-            <a:r>
-              <a:rPr lang="zh-CN" sz="1800" b="1" u="none" strike="noStrike">
-                <a:solidFill>
-                  <a:srgbClr val="2BD1FC"/>
-                </a:solidFill>
-                <a:uFillTx/>
-                <a:latin typeface="Noto Sans SC"/>
-                <a:ea typeface="Noto Sans SC"/>
-              </a:rPr>
-              <a:t>分支协作策略</a:t>
-            </a:r>
-            <a:endParaRPr lang="en-US" sz="1800" b="0" u="none" strike="noStrike">
-              <a:solidFill>
-                <a:srgbClr val="FFFFFF"/>
-              </a:solidFill>
-              <a:uFillTx/>
-              <a:latin typeface="Noto Sans CJK SC"/>
-            </a:endParaRPr>
-          </a:p>
-        </p:txBody>
-      </p:sp>
-      <p:cxnSp>
-        <p:nvCxnSpPr>
-          <p:cNvPr id="333" name="Connector 12"/>
-          <p:cNvCxnSpPr/>
-          <p:nvPr/>
-        </p:nvCxnSpPr>
-        <p:spPr>
-          <a:xfrm>
-            <a:off x="6413400" y="2539800"/>
-            <a:ext cx="4762800" cy="360"/>
-          </a:xfrm>
-          <a:prstGeom prst="straightConnector1">
-            <a:avLst/>
-          </a:prstGeom>
-          <a:ln w="12700">
-            <a:solidFill>
-              <a:srgbClr val="FFFFFF">
-                <a:alpha val="15000"/>
-              </a:srgbClr>
-            </a:solidFill>
-            <a:prstDash val="dash"/>
-            <a:round/>
-          </a:ln>
-        </p:spPr>
-      </p:cxnSp>
-      <p:sp>
-        <p:nvSpPr>
-          <p:cNvPr id="334" name="AutoShape 13"/>
-          <p:cNvSpPr/>
-          <p:nvPr/>
-        </p:nvSpPr>
-        <p:spPr>
-          <a:xfrm>
-            <a:off x="6413400" y="2793960"/>
-            <a:ext cx="4762080" cy="2412720"/>
-          </a:xfrm>
-          <a:prstGeom prst="rect">
-            <a:avLst/>
-          </a:prstGeom>
-          <a:noFill/>
-          <a:ln w="12700">
-            <a:noFill/>
-          </a:ln>
-        </p:spPr>
-        <p:style>
-          <a:lnRef idx="0">
-            <a:scrgbClr r="0" g="0" b="0"/>
-          </a:lnRef>
-          <a:fillRef idx="0">
-            <a:scrgbClr r="0" g="0" b="0"/>
-          </a:fillRef>
-          <a:effectRef idx="0">
-            <a:scrgbClr r="0" g="0" b="0"/>
-          </a:effectRef>
-          <a:fontRef idx="minor"/>
-        </p:style>
-        <p:txBody>
-          <a:bodyPr lIns="0" tIns="0" rIns="0" bIns="0" anchor="ctr">
-            <a:noAutofit/>
-          </a:bodyPr>
-          <a:lstStyle/>
-          <a:p>
-            <a:pPr>
-              <a:lnSpc>
-                <a:spcPct val="125000"/>
-              </a:lnSpc>
-              <a:tabLst>
-                <a:tab pos="0" algn="l"/>
-              </a:tabLst>
-            </a:pPr>
-            <a:r>
-              <a:rPr lang="zh-CN" sz="1400" b="0" u="none" strike="noStrike">
-                <a:solidFill>
-                  <a:srgbClr val="E2E8F0"/>
-                </a:solidFill>
-                <a:uFillTx/>
-                <a:latin typeface="Noto Sans SC"/>
-                <a:ea typeface="Noto Sans SC"/>
-              </a:rPr>
-              <a:t>采用标准的 </a:t>
-            </a:r>
-            <a:r>
-              <a:rPr lang="en-US" sz="1400" b="0" u="none" strike="noStrike">
-                <a:solidFill>
-                  <a:srgbClr val="E2E8F0"/>
-                </a:solidFill>
-                <a:uFillTx/>
-                <a:latin typeface="Noto Sans SC"/>
-                <a:ea typeface="Noto Sans SC"/>
-              </a:rPr>
-              <a:t>Git Flow </a:t>
-            </a:r>
-            <a:r>
-              <a:rPr lang="zh-CN" sz="1400" b="0" u="none" strike="noStrike">
-                <a:solidFill>
-                  <a:srgbClr val="E2E8F0"/>
-                </a:solidFill>
-                <a:uFillTx/>
-                <a:latin typeface="Noto Sans SC"/>
-                <a:ea typeface="Noto Sans SC"/>
-              </a:rPr>
-              <a:t>工作流：</a:t>
-            </a:r>
-            <a:r>
-              <a:rPr lang="en-US" sz="1400" b="1" u="none" strike="noStrike">
-                <a:solidFill>
-                  <a:srgbClr val="E2E8F0"/>
-                </a:solidFill>
-                <a:uFillTx/>
-                <a:latin typeface="Noto Sans SC"/>
-                <a:ea typeface="Noto Sans SC"/>
-              </a:rPr>
-              <a:t>main</a:t>
-            </a:r>
-            <a:r>
-              <a:rPr lang="zh-CN" sz="1400" b="0" u="none" strike="noStrike">
-                <a:solidFill>
-                  <a:srgbClr val="E2E8F0"/>
-                </a:solidFill>
-                <a:uFillTx/>
-                <a:latin typeface="Noto Sans SC"/>
-                <a:ea typeface="Noto Sans SC"/>
-              </a:rPr>
-              <a:t>为生产分支，</a:t>
-            </a:r>
-            <a:r>
-              <a:rPr lang="en-US" sz="1400" b="1" u="none" strike="noStrike">
-                <a:solidFill>
-                  <a:srgbClr val="E2E8F0"/>
-                </a:solidFill>
-                <a:uFillTx/>
-                <a:latin typeface="Noto Sans SC"/>
-                <a:ea typeface="Noto Sans SC"/>
-              </a:rPr>
-              <a:t>develop</a:t>
-            </a:r>
-            <a:r>
-              <a:rPr lang="zh-CN" sz="1400" b="0" u="none" strike="noStrike">
-                <a:solidFill>
-                  <a:srgbClr val="E2E8F0"/>
-                </a:solidFill>
-                <a:uFillTx/>
-                <a:latin typeface="Noto Sans SC"/>
-                <a:ea typeface="Noto Sans SC"/>
-              </a:rPr>
-              <a:t>为集成分支。基于功能切分</a:t>
-            </a:r>
-            <a:r>
-              <a:rPr lang="en-US" sz="1400" b="1" u="none" strike="noStrike">
-                <a:solidFill>
-                  <a:srgbClr val="E2E8F0"/>
-                </a:solidFill>
-                <a:uFillTx/>
-                <a:latin typeface="Noto Sans SC"/>
-                <a:ea typeface="Noto Sans SC"/>
-              </a:rPr>
-              <a:t>feature</a:t>
-            </a:r>
-            <a:r>
-              <a:rPr lang="zh-CN" sz="1400" b="0" u="none" strike="noStrike">
-                <a:solidFill>
-                  <a:srgbClr val="E2E8F0"/>
-                </a:solidFill>
-                <a:uFillTx/>
-                <a:latin typeface="Noto Sans SC"/>
-                <a:ea typeface="Noto Sans SC"/>
-              </a:rPr>
-              <a:t>分支，实现界面、不同游戏模块、集成测试的并行开发，互不干扰。</a:t>
-            </a:r>
-            <a:endParaRPr lang="en-US" sz="1400" b="0" u="none" strike="noStrike">
-              <a:solidFill>
-                <a:srgbClr val="FFFFFF"/>
-              </a:solidFill>
-              <a:uFillTx/>
-              <a:latin typeface="Noto Sans CJK SC"/>
-            </a:endParaRPr>
-          </a:p>
-          <a:p>
-            <a:pPr>
-              <a:lnSpc>
-                <a:spcPct val="125000"/>
-              </a:lnSpc>
-              <a:tabLst>
-                <a:tab pos="0" algn="l"/>
-              </a:tabLst>
-            </a:pPr>
-            <a:r>
-              <a:rPr lang="zh-CN" sz="1300" b="0" u="none" strike="noStrike">
-                <a:solidFill>
-                  <a:srgbClr val="FFFFFF">
-                    <a:alpha val="60000"/>
-                  </a:srgbClr>
-                </a:solidFill>
-                <a:uFillTx/>
-                <a:latin typeface="Noto Sans SC"/>
-                <a:ea typeface="Noto Sans SC"/>
-              </a:rPr>
-              <a:t>优势：代码版本可控，功能迭代独立，便于代码审查与合并，保障主干分支的稳定性。</a:t>
-            </a:r>
-            <a:endParaRPr lang="en-US" sz="1300" b="0" u="none" strike="noStrike">
-              <a:solidFill>
-                <a:srgbClr val="FFFFFF"/>
-              </a:solidFill>
-              <a:uFillTx/>
-              <a:latin typeface="Noto Sans CJK SC"/>
-            </a:endParaRPr>
-          </a:p>
-        </p:txBody>
-      </p:sp>
-      <p:sp>
-        <p:nvSpPr>
-          <p:cNvPr id="335" name="AutoShape 14"/>
-          <p:cNvSpPr/>
-          <p:nvPr/>
-        </p:nvSpPr>
-        <p:spPr>
-          <a:xfrm>
-            <a:off x="762120" y="5715000"/>
-            <a:ext cx="5270040" cy="888480"/>
-          </a:xfrm>
-          <a:prstGeom prst="roundRect">
-            <a:avLst>
-              <a:gd name="adj" fmla="val 0"/>
-            </a:avLst>
-          </a:prstGeom>
-          <a:solidFill>
-            <a:srgbClr val="2BD1FC">
-              <a:alpha val="10000"/>
-            </a:srgbClr>
-          </a:solidFill>
-          <a:ln w="12700">
-            <a:solidFill>
-              <a:srgbClr val="2BD1FC">
-                <a:alpha val="20000"/>
-              </a:srgbClr>
-            </a:solidFill>
-            <a:round/>
-          </a:ln>
-        </p:spPr>
-        <p:style>
-          <a:lnRef idx="0">
-            <a:scrgbClr r="0" g="0" b="0"/>
-          </a:lnRef>
-          <a:fillRef idx="0">
-            <a:scrgbClr r="0" g="0" b="0"/>
-          </a:fillRef>
-          <a:effectRef idx="0">
-            <a:scrgbClr r="0" g="0" b="0"/>
-          </a:effectRef>
-          <a:fontRef idx="minor"/>
-        </p:style>
-        <p:txBody>
-          <a:bodyPr lIns="63360" tIns="63360" rIns="63360" bIns="63360" anchor="ctr">
-            <a:noAutofit/>
-          </a:bodyPr>
-          <a:lstStyle/>
-          <a:p>
-            <a:pPr algn="ctr">
-              <a:lnSpc>
-                <a:spcPct val="100000"/>
-              </a:lnSpc>
-            </a:pPr>
-            <a:endParaRPr lang="en-US" sz="1400" b="0" u="none" strike="noStrike">
-              <a:solidFill>
-                <a:srgbClr val="000000"/>
-              </a:solidFill>
-              <a:uFillTx/>
-              <a:latin typeface="Arial"/>
-              <a:ea typeface="Arial"/>
-            </a:endParaRPr>
-          </a:p>
-        </p:txBody>
-      </p:sp>
-      <p:pic>
-        <p:nvPicPr>
-          <p:cNvPr id="336" name="Picture 15"/>
-          <p:cNvPicPr/>
-          <p:nvPr/>
-        </p:nvPicPr>
-        <p:blipFill>
-          <a:blip r:embed="rId8">
-            <a:extLst>
-              <a:ext uri="{96DAC541-7B7A-43D3-8B79-37D633B846F1}">
-                <asvg:svgBlip xmlns:asvg="http://schemas.microsoft.com/office/drawing/2016/SVG/main" r:embed="rId9"/>
-              </a:ext>
-            </a:extLst>
-          </a:blip>
-          <a:stretch/>
-        </p:blipFill>
-        <p:spPr>
-          <a:xfrm>
-            <a:off x="952560" y="5880240"/>
-            <a:ext cx="355320" cy="355320"/>
-          </a:xfrm>
-          <a:prstGeom prst="rect">
-            <a:avLst/>
-          </a:prstGeom>
-          <a:noFill/>
-          <a:ln w="0">
-            <a:noFill/>
-          </a:ln>
-        </p:spPr>
-      </p:pic>
-      <p:sp>
-        <p:nvSpPr>
-          <p:cNvPr id="337" name="AutoShape 16"/>
-          <p:cNvSpPr/>
-          <p:nvPr/>
-        </p:nvSpPr>
-        <p:spPr>
-          <a:xfrm>
-            <a:off x="1460520" y="5816520"/>
-            <a:ext cx="4444560" cy="685440"/>
-          </a:xfrm>
-          <a:prstGeom prst="rect">
-            <a:avLst/>
-          </a:prstGeom>
-          <a:noFill/>
-          <a:ln w="12700">
-            <a:noFill/>
-          </a:ln>
-        </p:spPr>
-        <p:style>
-          <a:lnRef idx="0">
-            <a:scrgbClr r="0" g="0" b="0"/>
-          </a:lnRef>
-          <a:fillRef idx="0">
-            <a:scrgbClr r="0" g="0" b="0"/>
-          </a:fillRef>
-          <a:effectRef idx="0">
-            <a:scrgbClr r="0" g="0" b="0"/>
-          </a:effectRef>
-          <a:fontRef idx="minor"/>
-        </p:style>
-        <p:txBody>
-          <a:bodyPr lIns="0" tIns="0" rIns="0" bIns="0" anchor="ctr">
-            <a:noAutofit/>
-          </a:bodyPr>
-          <a:lstStyle/>
-          <a:p>
-            <a:pPr>
-              <a:lnSpc>
-                <a:spcPct val="108000"/>
-              </a:lnSpc>
-              <a:tabLst>
-                <a:tab pos="0" algn="l"/>
-              </a:tabLst>
-            </a:pPr>
-            <a:r>
-              <a:rPr lang="zh-CN" sz="1400" b="1" u="none" strike="noStrike">
-                <a:solidFill>
-                  <a:srgbClr val="FFFFFF"/>
-                </a:solidFill>
-                <a:uFillTx/>
-                <a:latin typeface="Noto Sans SC"/>
-                <a:ea typeface="Noto Sans SC"/>
-              </a:rPr>
-              <a:t>职责清晰，资源归一</a:t>
-            </a:r>
-            <a:br>
-              <a:rPr sz="1600"/>
-            </a:br>
-            <a:r>
-              <a:rPr lang="zh-CN" sz="1200" b="0" u="none" strike="noStrike">
-                <a:solidFill>
-                  <a:srgbClr val="FFFFFF">
-                    <a:alpha val="70000"/>
-                  </a:srgbClr>
-                </a:solidFill>
-                <a:uFillTx/>
-                <a:latin typeface="Noto Sans SC"/>
-                <a:ea typeface="Noto Sans SC"/>
-              </a:rPr>
-              <a:t>每个游戏模块独立封装，静态资源与文档分类管理，降低耦合度，提升维护效率。</a:t>
-            </a:r>
-            <a:endParaRPr lang="en-US" sz="1200" b="0" u="none" strike="noStrike">
-              <a:solidFill>
-                <a:srgbClr val="FFFFFF"/>
-              </a:solidFill>
-              <a:uFillTx/>
-              <a:latin typeface="Noto Sans CJK SC"/>
-            </a:endParaRPr>
-          </a:p>
-        </p:txBody>
-      </p:sp>
-      <p:sp>
-        <p:nvSpPr>
-          <p:cNvPr id="338" name="AutoShape 17"/>
-          <p:cNvSpPr/>
-          <p:nvPr/>
-        </p:nvSpPr>
-        <p:spPr>
-          <a:xfrm>
-            <a:off x="6159600" y="5715000"/>
-            <a:ext cx="5270040" cy="888480"/>
-          </a:xfrm>
-          <a:prstGeom prst="roundRect">
-            <a:avLst>
-              <a:gd name="adj" fmla="val 0"/>
-            </a:avLst>
-          </a:prstGeom>
-          <a:solidFill>
-            <a:srgbClr val="2BD1FC">
-              <a:alpha val="10000"/>
-            </a:srgbClr>
-          </a:solidFill>
-          <a:ln w="12700">
-            <a:solidFill>
-              <a:srgbClr val="2BD1FC">
-                <a:alpha val="20000"/>
-              </a:srgbClr>
-            </a:solidFill>
-            <a:round/>
-          </a:ln>
-        </p:spPr>
-        <p:style>
-          <a:lnRef idx="0">
-            <a:scrgbClr r="0" g="0" b="0"/>
-          </a:lnRef>
-          <a:fillRef idx="0">
-            <a:scrgbClr r="0" g="0" b="0"/>
-          </a:fillRef>
-          <a:effectRef idx="0">
-            <a:scrgbClr r="0" g="0" b="0"/>
-          </a:effectRef>
-          <a:fontRef idx="minor"/>
-        </p:style>
-        <p:txBody>
-          <a:bodyPr lIns="63360" tIns="63360" rIns="63360" bIns="63360" anchor="ctr">
-            <a:noAutofit/>
-          </a:bodyPr>
-          <a:lstStyle/>
-          <a:p>
-            <a:pPr algn="ctr">
-              <a:lnSpc>
-                <a:spcPct val="100000"/>
-              </a:lnSpc>
-            </a:pPr>
-            <a:endParaRPr lang="en-US" sz="1400" b="0" u="none" strike="noStrike">
-              <a:solidFill>
-                <a:srgbClr val="000000"/>
-              </a:solidFill>
-              <a:uFillTx/>
-              <a:latin typeface="Arial"/>
-              <a:ea typeface="Arial"/>
-            </a:endParaRPr>
-          </a:p>
-        </p:txBody>
-      </p:sp>
-      <p:pic>
-        <p:nvPicPr>
-          <p:cNvPr id="339" name="Picture 18"/>
-          <p:cNvPicPr/>
-          <p:nvPr/>
-        </p:nvPicPr>
-        <p:blipFill>
-          <a:blip r:embed="rId10">
-            <a:extLst>
-              <a:ext uri="{96DAC541-7B7A-43D3-8B79-37D633B846F1}">
-                <asvg:svgBlip xmlns:asvg="http://schemas.microsoft.com/office/drawing/2016/SVG/main" r:embed="rId11"/>
-              </a:ext>
-            </a:extLst>
-          </a:blip>
-          <a:stretch/>
-        </p:blipFill>
-        <p:spPr>
-          <a:xfrm>
-            <a:off x="6350040" y="5880240"/>
-            <a:ext cx="355320" cy="355320"/>
-          </a:xfrm>
-          <a:prstGeom prst="rect">
-            <a:avLst/>
-          </a:prstGeom>
-          <a:noFill/>
-          <a:ln w="0">
-            <a:noFill/>
-          </a:ln>
-        </p:spPr>
-      </p:pic>
-      <p:sp>
-        <p:nvSpPr>
-          <p:cNvPr id="340" name="AutoShape 19"/>
-          <p:cNvSpPr/>
-          <p:nvPr/>
-        </p:nvSpPr>
-        <p:spPr>
-          <a:xfrm>
-            <a:off x="6858000" y="5816520"/>
-            <a:ext cx="4444560" cy="685440"/>
-          </a:xfrm>
-          <a:prstGeom prst="rect">
-            <a:avLst/>
-          </a:prstGeom>
-          <a:noFill/>
-          <a:ln w="12700">
-            <a:noFill/>
-          </a:ln>
-        </p:spPr>
-        <p:style>
-          <a:lnRef idx="0">
-            <a:scrgbClr r="0" g="0" b="0"/>
-          </a:lnRef>
-          <a:fillRef idx="0">
-            <a:scrgbClr r="0" g="0" b="0"/>
-          </a:fillRef>
-          <a:effectRef idx="0">
-            <a:scrgbClr r="0" g="0" b="0"/>
-          </a:effectRef>
-          <a:fontRef idx="minor"/>
-        </p:style>
-        <p:txBody>
-          <a:bodyPr lIns="0" tIns="0" rIns="0" bIns="0" anchor="ctr">
-            <a:noAutofit/>
-          </a:bodyPr>
-          <a:lstStyle/>
-          <a:p>
-            <a:pPr>
-              <a:lnSpc>
-                <a:spcPct val="108000"/>
-              </a:lnSpc>
-              <a:tabLst>
-                <a:tab pos="0" algn="l"/>
-              </a:tabLst>
-            </a:pPr>
-            <a:r>
-              <a:rPr lang="zh-CN" sz="1400" b="1" u="none" strike="noStrike">
-                <a:solidFill>
-                  <a:srgbClr val="FFFFFF"/>
-                </a:solidFill>
-                <a:uFillTx/>
-                <a:latin typeface="Noto Sans SC"/>
-                <a:ea typeface="Noto Sans SC"/>
-              </a:rPr>
-              <a:t>分支隔离，高效并行</a:t>
-            </a:r>
-            <a:br>
-              <a:rPr sz="1600"/>
-            </a:br>
-            <a:r>
-              <a:rPr lang="en-US" sz="1200" b="0" u="none" strike="noStrike">
-                <a:solidFill>
-                  <a:srgbClr val="FFFFFF">
-                    <a:alpha val="70000"/>
-                  </a:srgbClr>
-                </a:solidFill>
-                <a:uFillTx/>
-                <a:latin typeface="Noto Sans SC"/>
-                <a:ea typeface="Noto Sans SC"/>
-              </a:rPr>
-              <a:t>Feature</a:t>
-            </a:r>
-            <a:r>
-              <a:rPr lang="zh-CN" sz="1200" b="0" u="none" strike="noStrike">
-                <a:solidFill>
-                  <a:srgbClr val="FFFFFF">
-                    <a:alpha val="70000"/>
-                  </a:srgbClr>
-                </a:solidFill>
-                <a:uFillTx/>
-                <a:latin typeface="Noto Sans SC"/>
-                <a:ea typeface="Noto Sans SC"/>
-              </a:rPr>
-              <a:t>分支模式让多位开发者同时推进不同任务，代码合并有序，规避版本冲突风险。</a:t>
-            </a:r>
-            <a:endParaRPr lang="en-US" sz="1200" b="0" u="none" strike="noStrike">
-              <a:solidFill>
-                <a:srgbClr val="FFFFFF"/>
-              </a:solidFill>
-              <a:uFillTx/>
-              <a:latin typeface="Noto Sans CJK SC"/>
-            </a:endParaRPr>
-          </a:p>
-        </p:txBody>
-      </p:sp>
-    </p:spTree>
-  </p:cSld>
-  <p:clrMapOvr>
-    <a:masterClrMapping/>
-  </p:clrMapOvr>
-</p:sld>
-</file>
-
-<file path=ppt/slides/slide14.xml><?xml version="1.0" encoding="utf-8"?>
-<p:sld xmlns:a="http://schemas.openxmlformats.org/drawingml/2006/main" xmlns:r="http://schemas.openxmlformats.org/officeDocument/2006/relationships" xmlns:p="http://schemas.openxmlformats.org/presentationml/2006/main">
-  <p:cSld>
-    <p:bg>
-      <p:bgPr>
-        <a:blipFill rotWithShape="0">
-          <a:blip r:embed="rId3"/>
-          <a:stretch>
-            <a:fillRect/>
-          </a:stretch>
-        </a:blipFill>
-        <a:effectLst/>
-      </p:bgPr>
-    </p:bg>
-    <p:spTree>
-      <p:nvGrpSpPr>
-        <p:cNvPr id="1" name=""/>
-        <p:cNvGrpSpPr/>
-        <p:nvPr/>
-      </p:nvGrpSpPr>
-      <p:grpSpPr>
-        <a:xfrm>
-          <a:off x="0" y="0"/>
-          <a:ext cx="0" cy="0"/>
-          <a:chOff x="0" y="0"/>
-          <a:chExt cx="0" cy="0"/>
-        </a:xfrm>
-      </p:grpSpPr>
-      <p:sp>
-        <p:nvSpPr>
           <p:cNvPr id="341" name="AutoShape 2"/>
           <p:cNvSpPr/>
           <p:nvPr/>
@@ -19110,7 +16790,7 @@
               </a:tabLst>
             </a:pPr>
             <a:r>
-              <a:rPr lang="zh-CN" sz="1300" b="0" u="none" strike="noStrike">
+              <a:rPr lang="zh-CN" sz="1300" b="0" u="none" strike="noStrike" dirty="0">
                 <a:solidFill>
                   <a:srgbClr val="FFFFFF">
                     <a:alpha val="80000"/>
@@ -19120,9 +16800,22 @@
                 <a:latin typeface="Noto Sans SC"/>
                 <a:ea typeface="Noto Sans SC"/>
               </a:rPr>
-              <a:t>负责开发：小恐龙跑酷、打地鼠、飞机打怪兽、推箱子、贪吃蛇，涵盖跑酷、点击、射击、策略解谜等多种经典玩法。</a:t>
-            </a:r>
-            <a:endParaRPr lang="en-US" sz="1300" b="0" u="none" strike="noStrike">
+              <a:t>负责开发：小恐龙跑酷、打地鼠、飞机打怪兽、推箱子、贪吃蛇，涵盖跑酷、点击、射击、策略解谜等多种经典玩法</a:t>
+            </a:r>
+            <a:r>
+              <a:rPr lang="zh-CN" altLang="en-US" sz="1300" b="0" u="none" strike="noStrike" dirty="0">
+                <a:solidFill>
+                  <a:srgbClr val="FFFFFF">
+                    <a:alpha val="80000"/>
+                  </a:srgbClr>
+                </a:solidFill>
+                <a:uFillTx/>
+                <a:latin typeface="Noto Sans SC"/>
+                <a:ea typeface="Noto Sans SC"/>
+              </a:rPr>
+              <a:t>，上传仓库。</a:t>
+            </a:r>
+            <a:endParaRPr lang="en-US" sz="1300" b="0" u="none" strike="noStrike" dirty="0">
               <a:solidFill>
                 <a:srgbClr val="FFFFFF"/>
               </a:solidFill>
@@ -21966,7 +19659,7 @@
         <p:spPr>
           <a:xfrm>
             <a:off x="762120" y="1778040"/>
-            <a:ext cx="5270040" cy="1968120"/>
+            <a:ext cx="10857960" cy="1968120"/>
           </a:xfrm>
           <a:prstGeom prst="roundRect">
             <a:avLst>
@@ -22120,13 +19813,15 @@
       <p:cxnSp>
         <p:nvCxnSpPr>
           <p:cNvPr id="102" name="Connector 7"/>
-          <p:cNvCxnSpPr/>
+          <p:cNvCxnSpPr>
+            <a:cxnSpLocks/>
+          </p:cNvCxnSpPr>
           <p:nvPr/>
         </p:nvCxnSpPr>
         <p:spPr>
           <a:xfrm>
             <a:off x="1015920" y="2539800"/>
-            <a:ext cx="4762800" cy="360"/>
+            <a:ext cx="10413720" cy="0"/>
           </a:xfrm>
           <a:prstGeom prst="straightConnector1">
             <a:avLst/>
@@ -22151,7 +19846,7 @@
         <p:spPr>
           <a:xfrm>
             <a:off x="1015920" y="2666880"/>
-            <a:ext cx="4762080" cy="952200"/>
+            <a:ext cx="10509202" cy="886392"/>
           </a:xfrm>
           <a:prstGeom prst="rect">
             <a:avLst/>
@@ -22188,7 +19883,7 @@
               </a:tabLst>
             </a:pPr>
             <a:r>
-              <a:rPr lang="zh-CN" sz="1400" b="0" u="none" strike="noStrike">
+              <a:rPr lang="zh-CN" sz="1400" b="0" u="none" strike="noStrike" dirty="0">
                 <a:solidFill>
                   <a:srgbClr val="FFFFFF">
                     <a:alpha val="90000"/>
@@ -22201,7 +19896,7 @@
               <a:t>基于 </a:t>
             </a:r>
             <a:r>
-              <a:rPr lang="en-US" sz="1400" b="0" u="none" strike="noStrike">
+              <a:rPr lang="en-US" sz="1400" b="0" u="none" strike="noStrike" dirty="0">
                 <a:solidFill>
                   <a:srgbClr val="FFFFFF">
                     <a:alpha val="90000"/>
@@ -22214,7 +19909,7 @@
               <a:t>HTML5 </a:t>
             </a:r>
             <a:r>
-              <a:rPr lang="zh-CN" sz="1400" b="0" u="none" strike="noStrike">
+              <a:rPr lang="zh-CN" sz="1400" b="0" u="none" strike="noStrike" dirty="0">
                 <a:solidFill>
                   <a:srgbClr val="FFFFFF">
                     <a:alpha val="90000"/>
@@ -22227,7 +19922,7 @@
               <a:t>构建语义化页面结构，结合 </a:t>
             </a:r>
             <a:r>
-              <a:rPr lang="en-US" sz="1400" b="0" u="none" strike="noStrike">
+              <a:rPr lang="en-US" sz="1400" b="0" u="none" strike="noStrike" dirty="0">
                 <a:solidFill>
                   <a:srgbClr val="FFFFFF">
                     <a:alpha val="90000"/>
@@ -22240,19 +19935,43 @@
               <a:t>CSS3 </a:t>
             </a:r>
             <a:r>
-              <a:rPr lang="zh-CN" sz="1400" b="0" u="none" strike="noStrike">
+              <a:rPr lang="zh-CN" altLang="en-US" sz="1400" dirty="0">
                 <a:solidFill>
                   <a:srgbClr val="FFFFFF">
                     <a:alpha val="90000"/>
                   </a:srgbClr>
                 </a:solidFill>
+                <a:latin typeface="Noto Sans SC"/>
+                <a:ea typeface="Noto Sans SC"/>
+              </a:rPr>
+              <a:t>以及</a:t>
+            </a:r>
+            <a:r>
+              <a:rPr lang="en-US" altLang="zh-CN" sz="1400" dirty="0">
+                <a:solidFill>
+                  <a:srgbClr val="FFFFFF">
+                    <a:alpha val="90000"/>
+                  </a:srgbClr>
+                </a:solidFill>
+                <a:latin typeface="Noto Sans SC"/>
+                <a:ea typeface="Noto Sans SC"/>
+              </a:rPr>
+              <a:t>JavaScript </a:t>
+            </a:r>
+            <a:r>
+              <a:rPr lang="zh-CN" sz="1400" b="0" u="none" strike="noStrike" dirty="0">
+                <a:solidFill>
+                  <a:srgbClr val="FFFFFF">
+                    <a:alpha val="90000"/>
+                  </a:srgbClr>
+                </a:solidFill>
                 <a:uFillTx/>
                 <a:latin typeface="Noto Sans SC"/>
                 <a:ea typeface="Noto Sans SC"/>
               </a:rPr>
               <a:t>实现渐变背景、毛玻璃质感与全端响应式布局，打造沉浸式的游戏视觉容器，适配多尺寸屏幕设备。</a:t>
             </a:r>
-            <a:endParaRPr lang="en-US" sz="1400" b="0" u="none" strike="noStrike">
+            <a:endParaRPr lang="en-US" sz="1400" b="0" u="none" strike="noStrike" dirty="0">
               <a:solidFill>
                 <a:srgbClr val="FFFFFF"/>
               </a:solidFill>
@@ -22264,14 +19983,14 @@
       </p:sp>
       <p:sp>
         <p:nvSpPr>
-          <p:cNvPr id="104" name="AutoShape 9"/>
+          <p:cNvPr id="114" name="AutoShape 19"/>
           <p:cNvSpPr/>
           <p:nvPr/>
         </p:nvSpPr>
         <p:spPr>
           <a:xfrm>
-            <a:off x="6350040" y="1778040"/>
-            <a:ext cx="5270040" cy="1968120"/>
+            <a:off x="762120" y="4191120"/>
+            <a:ext cx="10857960" cy="1968120"/>
           </a:xfrm>
           <a:prstGeom prst="roundRect">
             <a:avLst>
@@ -22328,7 +20047,7 @@
       </p:sp>
       <p:pic>
         <p:nvPicPr>
-          <p:cNvPr id="105" name="Picture 10"/>
+          <p:cNvPr id="115" name="Picture 20"/>
           <p:cNvPicPr/>
           <p:nvPr/>
         </p:nvPicPr>
@@ -22344,7 +20063,7 @@
         </p:blipFill>
         <p:spPr>
           <a:xfrm>
-            <a:off x="6603840" y="1968480"/>
+            <a:off x="1015920" y="4431960"/>
             <a:ext cx="406080" cy="406080"/>
           </a:xfrm>
           <a:prstGeom prst="rect">
@@ -22358,13 +20077,13 @@
       </p:pic>
       <p:sp>
         <p:nvSpPr>
-          <p:cNvPr id="106" name="AutoShape 11"/>
+          <p:cNvPr id="116" name="AutoShape 21"/>
           <p:cNvSpPr/>
           <p:nvPr/>
         </p:nvSpPr>
         <p:spPr>
           <a:xfrm>
-            <a:off x="7238880" y="1930320"/>
+            <a:off x="1650960" y="4388445"/>
             <a:ext cx="4063680" cy="444240"/>
           </a:xfrm>
           <a:prstGeom prst="rect">
@@ -22402,7 +20121,7 @@
               </a:tabLst>
             </a:pPr>
             <a:r>
-              <a:rPr lang="zh-CN" sz="2000" b="1" u="none" strike="noStrike">
+              <a:rPr lang="zh-CN" sz="2000" b="1" u="none" strike="noStrike" dirty="0">
                 <a:solidFill>
                   <a:srgbClr val="2BD1FC"/>
                 </a:solidFill>
@@ -22410,9 +20129,9 @@
                 <a:latin typeface="Noto Sans SC"/>
                 <a:ea typeface="Noto Sans SC"/>
               </a:rPr>
-              <a:t>游戏层：核心渲染与逻辑</a:t>
-            </a:r>
-            <a:endParaRPr lang="en-US" sz="2000" b="0" u="none" strike="noStrike">
+              <a:t>工具链：工程化与交互控制</a:t>
+            </a:r>
+            <a:endParaRPr lang="en-US" sz="2000" b="0" u="none" strike="noStrike" dirty="0">
               <a:solidFill>
                 <a:srgbClr val="FFFFFF"/>
               </a:solidFill>
@@ -22424,14 +20143,16 @@
       </p:sp>
       <p:cxnSp>
         <p:nvCxnSpPr>
-          <p:cNvPr id="107" name="Connector 12"/>
-          <p:cNvCxnSpPr/>
+          <p:cNvPr id="117" name="Connector 22"/>
+          <p:cNvCxnSpPr>
+            <a:cxnSpLocks/>
+          </p:cNvCxnSpPr>
           <p:nvPr/>
         </p:nvCxnSpPr>
         <p:spPr>
-          <a:xfrm>
-            <a:off x="6603840" y="2539800"/>
-            <a:ext cx="4762800" cy="360"/>
+          <a:xfrm flipV="1">
+            <a:off x="1015920" y="4953240"/>
+            <a:ext cx="10350720" cy="126720"/>
           </a:xfrm>
           <a:prstGeom prst="straightConnector1">
             <a:avLst/>
@@ -22449,14 +20170,14 @@
       </p:cxnSp>
       <p:sp>
         <p:nvSpPr>
-          <p:cNvPr id="108" name="AutoShape 13"/>
+          <p:cNvPr id="118" name="AutoShape 23"/>
           <p:cNvSpPr/>
           <p:nvPr/>
         </p:nvSpPr>
         <p:spPr>
           <a:xfrm>
-            <a:off x="6603840" y="2666880"/>
-            <a:ext cx="4762080" cy="952200"/>
+            <a:off x="1015920" y="5079960"/>
+            <a:ext cx="10350000" cy="952200"/>
           </a:xfrm>
           <a:prstGeom prst="rect">
             <a:avLst/>
@@ -22493,7 +20214,7 @@
               </a:tabLst>
             </a:pPr>
             <a:r>
-              <a:rPr lang="zh-CN" sz="1400" b="0" u="none" strike="noStrike">
+              <a:rPr lang="zh-CN" sz="1400" b="0" u="none" strike="noStrike" dirty="0">
                 <a:solidFill>
                   <a:srgbClr val="FFFFFF">
                     <a:alpha val="90000"/>
@@ -22503,10 +20224,10 @@
                 <a:latin typeface="Noto Sans SC"/>
                 <a:ea typeface="Noto Sans SC"/>
               </a:rPr>
-              <a:t>利用 </a:t>
-            </a:r>
-            <a:r>
-              <a:rPr lang="en-US" sz="1400" b="0" u="none" strike="noStrike">
+              <a:t>通过 </a:t>
+            </a:r>
+            <a:r>
+              <a:rPr lang="en-US" sz="1400" b="0" u="none" strike="noStrike" dirty="0">
                 <a:solidFill>
                   <a:srgbClr val="FFFFFF">
                     <a:alpha val="90000"/>
@@ -22516,10 +20237,10 @@
                 <a:latin typeface="Noto Sans SC"/>
                 <a:ea typeface="Noto Sans SC"/>
               </a:rPr>
-              <a:t>Canvas API </a:t>
-            </a:r>
-            <a:r>
-              <a:rPr lang="zh-CN" sz="1400" b="0" u="none" strike="noStrike">
+              <a:t>Git </a:t>
+            </a:r>
+            <a:r>
+              <a:rPr lang="zh-CN" sz="1400" b="0" u="none" strike="noStrike" dirty="0">
                 <a:solidFill>
                   <a:srgbClr val="FFFFFF">
                     <a:alpha val="90000"/>
@@ -22529,593 +20250,9 @@
                 <a:latin typeface="Noto Sans SC"/>
                 <a:ea typeface="Noto Sans SC"/>
               </a:rPr>
-              <a:t>进行高性能图形绘制与帧动画管理，通过原生 </a:t>
-            </a:r>
-            <a:r>
-              <a:rPr lang="en-US" sz="1400" b="0" u="none" strike="noStrike">
-                <a:solidFill>
-                  <a:srgbClr val="FFFFFF">
-                    <a:alpha val="90000"/>
-                  </a:srgbClr>
-                </a:solidFill>
-                <a:uFillTx/>
-                <a:latin typeface="Noto Sans SC"/>
-                <a:ea typeface="Noto Sans SC"/>
-              </a:rPr>
-              <a:t>ES6+ </a:t>
-            </a:r>
-            <a:r>
-              <a:rPr lang="zh-CN" sz="1400" b="0" u="none" strike="noStrike">
-                <a:solidFill>
-                  <a:srgbClr val="FFFFFF">
-                    <a:alpha val="90000"/>
-                  </a:srgbClr>
-                </a:solidFill>
-                <a:uFillTx/>
-                <a:latin typeface="Noto Sans SC"/>
-                <a:ea typeface="Noto Sans SC"/>
-              </a:rPr>
-              <a:t>实现碰撞检测、物理运动与计分系统，保障游戏运行的流畅与稳定。</a:t>
-            </a:r>
-            <a:endParaRPr lang="en-US" sz="1400" b="0" u="none" strike="noStrike">
-              <a:solidFill>
-                <a:srgbClr val="FFFFFF"/>
-              </a:solidFill>
-              <a:uFillTx/>
-              <a:latin typeface="Noto Sans CJK SC"/>
-            </a:endParaRPr>
-          </a:p>
-        </p:txBody>
-      </p:sp>
-      <p:sp>
-        <p:nvSpPr>
-          <p:cNvPr id="109" name="AutoShape 14"/>
-          <p:cNvSpPr/>
-          <p:nvPr/>
-        </p:nvSpPr>
-        <p:spPr>
-          <a:xfrm>
-            <a:off x="762120" y="4191120"/>
-            <a:ext cx="5270040" cy="1968120"/>
-          </a:xfrm>
-          <a:prstGeom prst="roundRect">
-            <a:avLst>
-              <a:gd name="adj" fmla="val 0"/>
-            </a:avLst>
-          </a:prstGeom>
-          <a:solidFill>
-            <a:srgbClr val="FFFFFF">
-              <a:alpha val="8000"/>
-            </a:srgbClr>
-          </a:solidFill>
-          <a:ln w="12700">
-            <a:solidFill>
-              <a:srgbClr val="2BD1FC">
-                <a:alpha val="30000"/>
-              </a:srgbClr>
-            </a:solidFill>
-            <a:round/>
-          </a:ln>
-        </p:spPr>
-        <p:style>
-          <a:lnRef idx="0">
-            <a:scrgbClr r="0" g="0" b="0"/>
-          </a:lnRef>
-          <a:fillRef idx="0">
-            <a:scrgbClr r="0" g="0" b="0"/>
-          </a:fillRef>
-          <a:effectRef idx="0">
-            <a:scrgbClr r="0" g="0" b="0"/>
-          </a:effectRef>
-          <a:fontRef idx="minor"/>
-        </p:style>
-        <p:txBody>
-          <a:bodyPr lIns="63360" tIns="63360" rIns="63360" bIns="63360" anchor="ctr">
-            <a:noAutofit/>
-          </a:bodyPr>
-          <a:lstStyle/>
-          <a:p>
-            <a:pPr algn="ctr">
-              <a:lnSpc>
-                <a:spcPct val="100000"/>
-              </a:lnSpc>
-            </a:pPr>
-            <a:endParaRPr lang="en-US" sz="1400" b="0" u="none" strike="noStrike">
-              <a:solidFill>
-                <a:srgbClr val="000000"/>
-              </a:solidFill>
-              <a:uFillTx/>
-              <a:latin typeface="Arial"/>
-              <a:ea typeface="Arial"/>
-            </a:endParaRPr>
-          </a:p>
-        </p:txBody>
-      </p:sp>
-      <p:pic>
-        <p:nvPicPr>
-          <p:cNvPr id="110" name="Picture 15"/>
-          <p:cNvPicPr/>
-          <p:nvPr/>
-        </p:nvPicPr>
-        <p:blipFill>
-          <a:blip r:embed="rId8">
-            <a:extLst>
-              <a:ext uri="{96DAC541-7B7A-43D3-8B79-37D633B846F1}">
-                <asvg:svgBlip xmlns:asvg="http://schemas.microsoft.com/office/drawing/2016/SVG/main" r:embed="rId9"/>
-              </a:ext>
-            </a:extLst>
-          </a:blip>
-          <a:stretch/>
-        </p:blipFill>
-        <p:spPr>
-          <a:xfrm>
-            <a:off x="1015920" y="4381560"/>
-            <a:ext cx="406080" cy="406080"/>
-          </a:xfrm>
-          <a:prstGeom prst="rect">
-            <a:avLst/>
-          </a:prstGeom>
-          <a:noFill/>
-          <a:ln w="0">
-            <a:noFill/>
-          </a:ln>
-        </p:spPr>
-      </p:pic>
-      <p:sp>
-        <p:nvSpPr>
-          <p:cNvPr id="111" name="AutoShape 16"/>
-          <p:cNvSpPr/>
-          <p:nvPr/>
-        </p:nvSpPr>
-        <p:spPr>
-          <a:xfrm>
-            <a:off x="1650960" y="4343400"/>
-            <a:ext cx="4063680" cy="444240"/>
-          </a:xfrm>
-          <a:prstGeom prst="rect">
-            <a:avLst/>
-          </a:prstGeom>
-          <a:noFill/>
-          <a:ln w="12700">
-            <a:noFill/>
-          </a:ln>
-        </p:spPr>
-        <p:style>
-          <a:lnRef idx="0">
-            <a:scrgbClr r="0" g="0" b="0"/>
-          </a:lnRef>
-          <a:fillRef idx="0">
-            <a:scrgbClr r="0" g="0" b="0"/>
-          </a:fillRef>
-          <a:effectRef idx="0">
-            <a:scrgbClr r="0" g="0" b="0"/>
-          </a:effectRef>
-          <a:fontRef idx="minor"/>
-        </p:style>
-        <p:txBody>
-          <a:bodyPr lIns="0" tIns="0" rIns="0" bIns="0" anchor="ctr">
-            <a:noAutofit/>
-          </a:bodyPr>
-          <a:lstStyle/>
-          <a:p>
-            <a:pPr>
-              <a:lnSpc>
-                <a:spcPct val="125000"/>
-              </a:lnSpc>
-              <a:tabLst>
-                <a:tab pos="0" algn="l"/>
-              </a:tabLst>
-            </a:pPr>
-            <a:r>
-              <a:rPr lang="zh-CN" sz="2000" b="1" u="none" strike="noStrike">
-                <a:solidFill>
-                  <a:srgbClr val="2BD1FC"/>
-                </a:solidFill>
-                <a:uFillTx/>
-                <a:latin typeface="Noto Sans SC"/>
-                <a:ea typeface="Noto Sans SC"/>
-              </a:rPr>
-              <a:t>数据层：状态与持久化存储</a:t>
-            </a:r>
-            <a:endParaRPr lang="en-US" sz="2000" b="0" u="none" strike="noStrike">
-              <a:solidFill>
-                <a:srgbClr val="FFFFFF"/>
-              </a:solidFill>
-              <a:uFillTx/>
-              <a:latin typeface="Noto Sans CJK SC"/>
-            </a:endParaRPr>
-          </a:p>
-        </p:txBody>
-      </p:sp>
-      <p:cxnSp>
-        <p:nvCxnSpPr>
-          <p:cNvPr id="112" name="Connector 17"/>
-          <p:cNvCxnSpPr/>
-          <p:nvPr/>
-        </p:nvCxnSpPr>
-        <p:spPr>
-          <a:xfrm>
-            <a:off x="1015920" y="4952880"/>
-            <a:ext cx="4762800" cy="360"/>
-          </a:xfrm>
-          <a:prstGeom prst="straightConnector1">
-            <a:avLst/>
-          </a:prstGeom>
-          <a:ln w="12700">
-            <a:solidFill>
-              <a:srgbClr val="FFFFFF">
-                <a:alpha val="15000"/>
-              </a:srgbClr>
-            </a:solidFill>
-            <a:prstDash val="dash"/>
-            <a:round/>
-          </a:ln>
-        </p:spPr>
-      </p:cxnSp>
-      <p:sp>
-        <p:nvSpPr>
-          <p:cNvPr id="113" name="AutoShape 18"/>
-          <p:cNvSpPr/>
-          <p:nvPr/>
-        </p:nvSpPr>
-        <p:spPr>
-          <a:xfrm>
-            <a:off x="1015920" y="5079960"/>
-            <a:ext cx="4762080" cy="952200"/>
-          </a:xfrm>
-          <a:prstGeom prst="rect">
-            <a:avLst/>
-          </a:prstGeom>
-          <a:noFill/>
-          <a:ln w="12700">
-            <a:noFill/>
-          </a:ln>
-        </p:spPr>
-        <p:style>
-          <a:lnRef idx="0">
-            <a:scrgbClr r="0" g="0" b="0"/>
-          </a:lnRef>
-          <a:fillRef idx="0">
-            <a:scrgbClr r="0" g="0" b="0"/>
-          </a:fillRef>
-          <a:effectRef idx="0">
-            <a:scrgbClr r="0" g="0" b="0"/>
-          </a:effectRef>
-          <a:fontRef idx="minor"/>
-        </p:style>
-        <p:txBody>
-          <a:bodyPr lIns="0" tIns="0" rIns="0" bIns="0" anchor="ctr">
-            <a:noAutofit/>
-          </a:bodyPr>
-          <a:lstStyle/>
-          <a:p>
-            <a:pPr>
-              <a:lnSpc>
-                <a:spcPct val="108000"/>
-              </a:lnSpc>
-              <a:tabLst>
-                <a:tab pos="0" algn="l"/>
-              </a:tabLst>
-            </a:pPr>
-            <a:r>
-              <a:rPr lang="zh-CN" sz="1400" b="0" u="none" strike="noStrike">
-                <a:solidFill>
-                  <a:srgbClr val="FFFFFF">
-                    <a:alpha val="90000"/>
-                  </a:srgbClr>
-                </a:solidFill>
-                <a:uFillTx/>
-                <a:latin typeface="Noto Sans SC"/>
-                <a:ea typeface="Noto Sans SC"/>
-              </a:rPr>
-              <a:t>采用 </a:t>
-            </a:r>
-            <a:r>
-              <a:rPr lang="en-US" sz="1400" b="0" u="none" strike="noStrike">
-                <a:solidFill>
-                  <a:srgbClr val="FFFFFF">
-                    <a:alpha val="90000"/>
-                  </a:srgbClr>
-                </a:solidFill>
-                <a:uFillTx/>
-                <a:latin typeface="Noto Sans SC"/>
-                <a:ea typeface="Noto Sans SC"/>
-              </a:rPr>
-              <a:t>LocalStorage </a:t>
-            </a:r>
-            <a:r>
-              <a:rPr lang="zh-CN" sz="1400" b="0" u="none" strike="noStrike">
-                <a:solidFill>
-                  <a:srgbClr val="FFFFFF">
-                    <a:alpha val="90000"/>
-                  </a:srgbClr>
-                </a:solidFill>
-                <a:uFillTx/>
-                <a:latin typeface="Noto Sans SC"/>
-                <a:ea typeface="Noto Sans SC"/>
-              </a:rPr>
-              <a:t>实现用户游戏进度与最高分数据的本地持久化存储，轻量高效且无需后端依赖，确保数据在页面刷新后不丢失。</a:t>
-            </a:r>
-            <a:endParaRPr lang="en-US" sz="1400" b="0" u="none" strike="noStrike">
-              <a:solidFill>
-                <a:srgbClr val="FFFFFF"/>
-              </a:solidFill>
-              <a:uFillTx/>
-              <a:latin typeface="Noto Sans CJK SC"/>
-            </a:endParaRPr>
-          </a:p>
-        </p:txBody>
-      </p:sp>
-      <p:sp>
-        <p:nvSpPr>
-          <p:cNvPr id="114" name="AutoShape 19"/>
-          <p:cNvSpPr/>
-          <p:nvPr/>
-        </p:nvSpPr>
-        <p:spPr>
-          <a:xfrm>
-            <a:off x="6350040" y="4191120"/>
-            <a:ext cx="5270040" cy="1968120"/>
-          </a:xfrm>
-          <a:prstGeom prst="roundRect">
-            <a:avLst>
-              <a:gd name="adj" fmla="val 0"/>
-            </a:avLst>
-          </a:prstGeom>
-          <a:solidFill>
-            <a:srgbClr val="FFFFFF">
-              <a:alpha val="8000"/>
-            </a:srgbClr>
-          </a:solidFill>
-          <a:ln w="12700">
-            <a:solidFill>
-              <a:srgbClr val="2BD1FC">
-                <a:alpha val="30000"/>
-              </a:srgbClr>
-            </a:solidFill>
-            <a:round/>
-          </a:ln>
-        </p:spPr>
-        <p:style>
-          <a:lnRef idx="0">
-            <a:scrgbClr r="0" g="0" b="0"/>
-          </a:lnRef>
-          <a:fillRef idx="0">
-            <a:scrgbClr r="0" g="0" b="0"/>
-          </a:fillRef>
-          <a:effectRef idx="0">
-            <a:scrgbClr r="0" g="0" b="0"/>
-          </a:effectRef>
-          <a:fontRef idx="minor"/>
-        </p:style>
-        <p:txBody>
-          <a:bodyPr lIns="63360" tIns="63360" rIns="63360" bIns="63360" anchor="ctr">
-            <a:noAutofit/>
-          </a:bodyPr>
-          <a:lstStyle/>
-          <a:p>
-            <a:pPr algn="ctr">
-              <a:lnSpc>
-                <a:spcPct val="100000"/>
-              </a:lnSpc>
-            </a:pPr>
-            <a:endParaRPr lang="en-US" sz="1400" b="0" u="none" strike="noStrike">
-              <a:solidFill>
-                <a:srgbClr val="000000"/>
-              </a:solidFill>
-              <a:uFillTx/>
-              <a:latin typeface="Arial"/>
-              <a:ea typeface="Arial"/>
-            </a:endParaRPr>
-          </a:p>
-        </p:txBody>
-      </p:sp>
-      <p:pic>
-        <p:nvPicPr>
-          <p:cNvPr id="115" name="Picture 20"/>
-          <p:cNvPicPr/>
-          <p:nvPr/>
-        </p:nvPicPr>
-        <p:blipFill>
-          <a:blip r:embed="rId10">
-            <a:extLst>
-              <a:ext uri="{96DAC541-7B7A-43D3-8B79-37D633B846F1}">
-                <asvg:svgBlip xmlns:asvg="http://schemas.microsoft.com/office/drawing/2016/SVG/main" r:embed="rId11"/>
-              </a:ext>
-            </a:extLst>
-          </a:blip>
-          <a:stretch/>
-        </p:blipFill>
-        <p:spPr>
-          <a:xfrm>
-            <a:off x="6603840" y="4381560"/>
-            <a:ext cx="406080" cy="406080"/>
-          </a:xfrm>
-          <a:prstGeom prst="rect">
-            <a:avLst/>
-          </a:prstGeom>
-          <a:noFill/>
-          <a:ln w="0">
-            <a:noFill/>
-          </a:ln>
-        </p:spPr>
-      </p:pic>
-      <p:sp>
-        <p:nvSpPr>
-          <p:cNvPr id="116" name="AutoShape 21"/>
-          <p:cNvSpPr/>
-          <p:nvPr/>
-        </p:nvSpPr>
-        <p:spPr>
-          <a:xfrm>
-            <a:off x="7238880" y="4343400"/>
-            <a:ext cx="4063680" cy="444240"/>
-          </a:xfrm>
-          <a:prstGeom prst="rect">
-            <a:avLst/>
-          </a:prstGeom>
-          <a:noFill/>
-          <a:ln w="12700">
-            <a:noFill/>
-          </a:ln>
-        </p:spPr>
-        <p:style>
-          <a:lnRef idx="0">
-            <a:scrgbClr r="0" g="0" b="0"/>
-          </a:lnRef>
-          <a:fillRef idx="0">
-            <a:scrgbClr r="0" g="0" b="0"/>
-          </a:fillRef>
-          <a:effectRef idx="0">
-            <a:scrgbClr r="0" g="0" b="0"/>
-          </a:effectRef>
-          <a:fontRef idx="minor"/>
-        </p:style>
-        <p:txBody>
-          <a:bodyPr lIns="0" tIns="0" rIns="0" bIns="0" anchor="ctr">
-            <a:noAutofit/>
-          </a:bodyPr>
-          <a:lstStyle/>
-          <a:p>
-            <a:pPr>
-              <a:lnSpc>
-                <a:spcPct val="125000"/>
-              </a:lnSpc>
-              <a:tabLst>
-                <a:tab pos="0" algn="l"/>
-              </a:tabLst>
-            </a:pPr>
-            <a:r>
-              <a:rPr lang="zh-CN" sz="2000" b="1" u="none" strike="noStrike">
-                <a:solidFill>
-                  <a:srgbClr val="2BD1FC"/>
-                </a:solidFill>
-                <a:uFillTx/>
-                <a:latin typeface="Noto Sans SC"/>
-                <a:ea typeface="Noto Sans SC"/>
-              </a:rPr>
-              <a:t>工具链：工程化与交互控制</a:t>
-            </a:r>
-            <a:endParaRPr lang="en-US" sz="2000" b="0" u="none" strike="noStrike">
-              <a:solidFill>
-                <a:srgbClr val="FFFFFF"/>
-              </a:solidFill>
-              <a:uFillTx/>
-              <a:latin typeface="Noto Sans CJK SC"/>
-            </a:endParaRPr>
-          </a:p>
-        </p:txBody>
-      </p:sp>
-      <p:cxnSp>
-        <p:nvCxnSpPr>
-          <p:cNvPr id="117" name="Connector 22"/>
-          <p:cNvCxnSpPr/>
-          <p:nvPr/>
-        </p:nvCxnSpPr>
-        <p:spPr>
-          <a:xfrm>
-            <a:off x="6603840" y="4952880"/>
-            <a:ext cx="4762800" cy="360"/>
-          </a:xfrm>
-          <a:prstGeom prst="straightConnector1">
-            <a:avLst/>
-          </a:prstGeom>
-          <a:ln w="12700">
-            <a:solidFill>
-              <a:srgbClr val="FFFFFF">
-                <a:alpha val="15000"/>
-              </a:srgbClr>
-            </a:solidFill>
-            <a:prstDash val="dash"/>
-            <a:round/>
-          </a:ln>
-        </p:spPr>
-      </p:cxnSp>
-      <p:sp>
-        <p:nvSpPr>
-          <p:cNvPr id="118" name="AutoShape 23"/>
-          <p:cNvSpPr/>
-          <p:nvPr/>
-        </p:nvSpPr>
-        <p:spPr>
-          <a:xfrm>
-            <a:off x="6603840" y="5079960"/>
-            <a:ext cx="4762080" cy="952200"/>
-          </a:xfrm>
-          <a:prstGeom prst="rect">
-            <a:avLst/>
-          </a:prstGeom>
-          <a:noFill/>
-          <a:ln w="12700">
-            <a:noFill/>
-          </a:ln>
-        </p:spPr>
-        <p:style>
-          <a:lnRef idx="0">
-            <a:scrgbClr r="0" g="0" b="0"/>
-          </a:lnRef>
-          <a:fillRef idx="0">
-            <a:scrgbClr r="0" g="0" b="0"/>
-          </a:fillRef>
-          <a:effectRef idx="0">
-            <a:scrgbClr r="0" g="0" b="0"/>
-          </a:effectRef>
-          <a:fontRef idx="minor"/>
-        </p:style>
-        <p:txBody>
-          <a:bodyPr lIns="0" tIns="0" rIns="0" bIns="0" anchor="ctr">
-            <a:noAutofit/>
-          </a:bodyPr>
-          <a:lstStyle/>
-          <a:p>
-            <a:pPr>
-              <a:lnSpc>
-                <a:spcPct val="108000"/>
-              </a:lnSpc>
-              <a:tabLst>
-                <a:tab pos="0" algn="l"/>
-              </a:tabLst>
-            </a:pPr>
-            <a:r>
-              <a:rPr lang="zh-CN" sz="1400" b="0" u="none" strike="noStrike">
-                <a:solidFill>
-                  <a:srgbClr val="FFFFFF">
-                    <a:alpha val="90000"/>
-                  </a:srgbClr>
-                </a:solidFill>
-                <a:uFillTx/>
-                <a:latin typeface="Noto Sans SC"/>
-                <a:ea typeface="Noto Sans SC"/>
-              </a:rPr>
-              <a:t>通过 </a:t>
-            </a:r>
-            <a:r>
-              <a:rPr lang="en-US" sz="1400" b="0" u="none" strike="noStrike">
-                <a:solidFill>
-                  <a:srgbClr val="FFFFFF">
-                    <a:alpha val="90000"/>
-                  </a:srgbClr>
-                </a:solidFill>
-                <a:uFillTx/>
-                <a:latin typeface="Noto Sans SC"/>
-                <a:ea typeface="Noto Sans SC"/>
-              </a:rPr>
-              <a:t>Git </a:t>
-            </a:r>
-            <a:r>
-              <a:rPr lang="zh-CN" sz="1400" b="0" u="none" strike="noStrike">
-                <a:solidFill>
-                  <a:srgbClr val="FFFFFF">
-                    <a:alpha val="90000"/>
-                  </a:srgbClr>
-                </a:solidFill>
-                <a:uFillTx/>
-                <a:latin typeface="Noto Sans SC"/>
-                <a:ea typeface="Noto Sans SC"/>
-              </a:rPr>
               <a:t>进行版本管理与协作开发，封装统一的事件监听模块，完美兼容键盘、鼠标及移动端触摸交互，配合模块化开发规范提升维护性。</a:t>
             </a:r>
-            <a:endParaRPr lang="en-US" sz="1400" b="0" u="none" strike="noStrike">
+            <a:endParaRPr lang="en-US" sz="1400" b="0" u="none" strike="noStrike" dirty="0">
               <a:solidFill>
                 <a:srgbClr val="FFFFFF"/>
               </a:solidFill>
@@ -23426,7 +20563,7 @@
               </a:tabLst>
             </a:pPr>
             <a:r>
-              <a:rPr lang="zh-CN" sz="1800" b="1" u="none" strike="noStrike">
+              <a:rPr lang="zh-CN" sz="1800" b="1" u="none" strike="noStrike" dirty="0">
                 <a:solidFill>
                   <a:srgbClr val="2BD1FC"/>
                 </a:solidFill>
@@ -23437,7 +20574,7 @@
               <a:t>李想 </a:t>
             </a:r>
             <a:r>
-              <a:rPr lang="en-US" sz="1800" b="1" u="none" strike="noStrike">
+              <a:rPr lang="en-US" sz="1800" b="1" u="none" strike="noStrike" dirty="0">
                 <a:solidFill>
                   <a:srgbClr val="2BD1FC"/>
                 </a:solidFill>
@@ -23448,7 +20585,7 @@
               <a:t>· </a:t>
             </a:r>
             <a:r>
-              <a:rPr lang="zh-CN" sz="1800" b="1" u="none" strike="noStrike">
+              <a:rPr lang="zh-CN" sz="1800" b="1" u="none" strike="noStrike" dirty="0">
                 <a:solidFill>
                   <a:srgbClr val="2BD1FC"/>
                 </a:solidFill>
@@ -23458,7 +20595,7 @@
               </a:rPr>
               <a:t>项目统筹与整合</a:t>
             </a:r>
-            <a:endParaRPr lang="en-US" sz="1800" b="0" u="none" strike="noStrike">
+            <a:endParaRPr lang="en-US" sz="1800" b="0" u="none" strike="noStrike" dirty="0">
               <a:solidFill>
                 <a:srgbClr val="FFFFFF"/>
               </a:solidFill>
@@ -23476,7 +20613,7 @@
               </a:tabLst>
             </a:pPr>
             <a:r>
-              <a:rPr lang="zh-CN" sz="1400" b="0" u="none" strike="noStrike">
+              <a:rPr lang="zh-CN" sz="1400" b="0" u="none" strike="noStrike" dirty="0">
                 <a:solidFill>
                   <a:srgbClr val="FFFFFF">
                     <a:alpha val="80000"/>
@@ -23486,35 +20623,9 @@
                 <a:latin typeface="Noto Sans SC"/>
                 <a:ea typeface="Noto Sans SC"/>
               </a:rPr>
-              <a:t>负责</a:t>
-            </a:r>
-            <a:r>
-              <a:rPr lang="en-US" sz="1400" b="0" u="none" strike="noStrike">
-                <a:solidFill>
-                  <a:srgbClr val="FFFFFF">
-                    <a:alpha val="80000"/>
-                  </a:srgbClr>
-                </a:solidFill>
-                <a:uFillTx/>
-                <a:latin typeface="Noto Sans SC"/>
-                <a:ea typeface="Noto Sans SC"/>
-              </a:rPr>
-              <a:t>Git</a:t>
-            </a:r>
-            <a:r>
-              <a:rPr lang="zh-CN" sz="1400" b="0" u="none" strike="noStrike">
-                <a:solidFill>
-                  <a:srgbClr val="FFFFFF">
-                    <a:alpha val="80000"/>
-                  </a:srgbClr>
-                </a:solidFill>
-                <a:uFillTx/>
-                <a:latin typeface="Noto Sans SC"/>
-                <a:ea typeface="Noto Sans SC"/>
-              </a:rPr>
-              <a:t>仓库统一管理、各模块代码接口对接与最终集成，把控项目整体进度与技术规范，确保各开发环节高效协同。</a:t>
-            </a:r>
-            <a:endParaRPr lang="en-US" sz="1400" b="0" u="none" strike="noStrike">
+              <a:t>负责统一管理、各模块代码接口对接与最终集成，把控项目整体进度与技术规范，确保各开发环节高效协同。</a:t>
+            </a:r>
+            <a:endParaRPr lang="en-US" sz="1400" b="0" u="none" strike="noStrike" dirty="0">
               <a:solidFill>
                 <a:srgbClr val="FFFFFF"/>
               </a:solidFill>
@@ -24078,7 +21189,7 @@
               </a:tabLst>
             </a:pPr>
             <a:r>
-              <a:rPr lang="zh-CN" sz="1300" b="0" u="none" strike="noStrike">
+              <a:rPr lang="zh-CN" sz="1300" b="0" u="none" strike="noStrike" dirty="0">
                 <a:solidFill>
                   <a:srgbClr val="FFFFFF">
                     <a:alpha val="70000"/>
@@ -24091,7 +21202,7 @@
               <a:t>独立完成</a:t>
             </a:r>
             <a:r>
-              <a:rPr lang="en-US" sz="1300" b="0" u="none" strike="noStrike">
+              <a:rPr lang="en-US" sz="1300" b="0" u="none" strike="noStrike" dirty="0">
                 <a:solidFill>
                   <a:srgbClr val="FFFFFF">
                     <a:alpha val="70000"/>
@@ -24104,7 +21215,7 @@
               <a:t>5</a:t>
             </a:r>
             <a:r>
-              <a:rPr lang="zh-CN" sz="1300" b="0" u="none" strike="noStrike">
+              <a:rPr lang="zh-CN" sz="1300" b="0" u="none" strike="noStrike" dirty="0">
                 <a:solidFill>
                   <a:srgbClr val="FFFFFF">
                     <a:alpha val="70000"/>
@@ -24114,9 +21225,35 @@
                 <a:latin typeface="Noto Sans SC"/>
                 <a:ea typeface="Noto Sans SC"/>
               </a:rPr>
-              <a:t>款核心游戏开发：小恐龙快跑、打地鼠、飞机大战、推箱子、贪吃蛇，是项目中游戏内容的主要产出者。</a:t>
-            </a:r>
-            <a:endParaRPr lang="en-US" sz="1300" b="0" u="none" strike="noStrike">
+              <a:t>款核心游戏开发：小恐龙快跑、打地鼠、飞机大战、推箱子、贪吃蛇，</a:t>
+            </a:r>
+            <a:r>
+              <a:rPr lang="zh-CN" altLang="en-US" sz="1300" b="0" u="none" strike="noStrike" dirty="0">
+                <a:solidFill>
+                  <a:srgbClr val="FFFFFF">
+                    <a:alpha val="70000"/>
+                  </a:srgbClr>
+                </a:solidFill>
+                <a:uFillTx/>
+                <a:latin typeface="Noto Sans SC"/>
+                <a:ea typeface="Noto Sans SC"/>
+              </a:rPr>
+              <a:t>并上传仓库</a:t>
+            </a:r>
+            <a:r>
+              <a:rPr lang="zh-CN" sz="1300" b="0" u="none" strike="noStrike" dirty="0">
+                <a:solidFill>
+                  <a:srgbClr val="FFFFFF">
+                    <a:alpha val="70000"/>
+                  </a:srgbClr>
+                </a:solidFill>
+                <a:uFillTx/>
+                <a:latin typeface="Noto Sans SC"/>
+                <a:ea typeface="Noto Sans SC"/>
+              </a:rPr>
+              <a:t>是项目中游戏内容的主要产出者。</a:t>
+            </a:r>
+            <a:endParaRPr lang="en-US" sz="1300" b="0" u="none" strike="noStrike" dirty="0">
               <a:solidFill>
                 <a:srgbClr val="FFFFFF"/>
               </a:solidFill>

--- a/documents/经典游戏回廊 2· 项目汇报.pptx
+++ b/documents/经典游戏回廊 2· 项目汇报.pptx
@@ -5,7 +5,7 @@
     <p:sldMasterId id="2147483648" r:id="rId1"/>
   </p:sldMasterIdLst>
   <p:notesMasterIdLst>
-    <p:notesMasterId r:id="rId15"/>
+    <p:notesMasterId r:id="rId14"/>
   </p:notesMasterIdLst>
   <p:sldIdLst>
     <p:sldId id="256" r:id="rId2"/>
@@ -18,9 +18,8 @@
     <p:sldId id="263" r:id="rId9"/>
     <p:sldId id="264" r:id="rId10"/>
     <p:sldId id="265" r:id="rId11"/>
-    <p:sldId id="266" r:id="rId12"/>
-    <p:sldId id="268" r:id="rId13"/>
-    <p:sldId id="269" r:id="rId14"/>
+    <p:sldId id="268" r:id="rId12"/>
+    <p:sldId id="269" r:id="rId13"/>
   </p:sldIdLst>
   <p:sldSz cx="12192000" cy="6858000"/>
   <p:notesSz cx="6858000" cy="9144000"/>
@@ -1251,7 +1250,7 @@
       </p:grpSpPr>
       <p:sp>
         <p:nvSpPr>
-          <p:cNvPr id="419" name="PlaceHolder 1"/>
+          <p:cNvPr id="431" name="PlaceHolder 1"/>
           <p:cNvSpPr>
             <a:spLocks noGrp="1"/>
           </p:cNvSpPr>
@@ -1294,12 +1293,12 @@
       </p:sp>
       <p:sp>
         <p:nvSpPr>
-          <p:cNvPr id="420" name="PlaceHolder 2"/>
+          <p:cNvPr id="432" name="PlaceHolder 2"/>
           <p:cNvSpPr>
             <a:spLocks noGrp="1"/>
           </p:cNvSpPr>
           <p:nvPr>
-            <p:ph type="dt" idx="34"/>
+            <p:ph type="dt" idx="40"/>
           </p:nvPr>
         </p:nvSpPr>
         <p:spPr>
@@ -1363,7 +1362,7 @@
       </p:sp>
       <p:sp>
         <p:nvSpPr>
-          <p:cNvPr id="421" name="PlaceHolder 3"/>
+          <p:cNvPr id="433" name="PlaceHolder 3"/>
           <p:cNvSpPr>
             <a:spLocks noGrp="1" noRot="1" noChangeAspect="1"/>
           </p:cNvSpPr>
@@ -1386,7 +1385,7 @@
       </p:sp>
       <p:sp>
         <p:nvSpPr>
-          <p:cNvPr id="422" name="PlaceHolder 4"/>
+          <p:cNvPr id="434" name="PlaceHolder 4"/>
           <p:cNvSpPr>
             <a:spLocks noGrp="1"/>
           </p:cNvSpPr>
@@ -1430,7 +1429,7 @@
                 <a:uFillTx/>
                 <a:latin typeface="Noto Sans CJK SC"/>
               </a:rPr>
-              <a:t>回顾整个开发过程，我们制定了清晰的里程碑计划。从第一周完成界面开发，到第二周完成所有游戏的核心代码，再到第三周进行整合和测试，每一步都按计划推进。目前，除了最后的代码整合和</a:t>
+              <a:t>这是我们项目的代码仓库结构和</a:t>
             </a:r>
             <a:r>
               <a:rPr lang="en-US" sz="1400" b="0" u="none" strike="noStrike">
@@ -1440,7 +1439,7 @@
                 <a:uFillTx/>
                 <a:latin typeface="Noto Sans CJK SC"/>
               </a:rPr>
-              <a:t>PPT</a:t>
+              <a:t>Git</a:t>
             </a:r>
             <a:r>
               <a:rPr lang="zh-CN" sz="1400" b="0" u="none" strike="noStrike">
@@ -1450,7 +1449,87 @@
                 <a:uFillTx/>
                 <a:latin typeface="Noto Sans CJK SC"/>
               </a:rPr>
-              <a:t>制作外，大部分工作已经完成。这个进度条也直观地展示了我们当前的完成状态。</a:t>
+              <a:t>分支策略。文件结构清晰，每个游戏都是一个独立的</a:t>
+            </a:r>
+            <a:r>
+              <a:rPr lang="en-US" sz="1400" b="0" u="none" strike="noStrike">
+                <a:solidFill>
+                  <a:srgbClr val="000000"/>
+                </a:solidFill>
+                <a:uFillTx/>
+                <a:latin typeface="Noto Sans CJK SC"/>
+              </a:rPr>
+              <a:t>HTML</a:t>
+            </a:r>
+            <a:r>
+              <a:rPr lang="zh-CN" sz="1400" b="0" u="none" strike="noStrike">
+                <a:solidFill>
+                  <a:srgbClr val="000000"/>
+                </a:solidFill>
+                <a:uFillTx/>
+                <a:latin typeface="Noto Sans CJK SC"/>
+              </a:rPr>
+              <a:t>文件，便于维护和扩展。我们采用了</a:t>
+            </a:r>
+            <a:r>
+              <a:rPr lang="en-US" sz="1400" b="0" u="none" strike="noStrike">
+                <a:solidFill>
+                  <a:srgbClr val="000000"/>
+                </a:solidFill>
+                <a:uFillTx/>
+                <a:latin typeface="Noto Sans CJK SC"/>
+              </a:rPr>
+              <a:t>Git Flow</a:t>
+            </a:r>
+            <a:r>
+              <a:rPr lang="zh-CN" sz="1400" b="0" u="none" strike="noStrike">
+                <a:solidFill>
+                  <a:srgbClr val="000000"/>
+                </a:solidFill>
+                <a:uFillTx/>
+                <a:latin typeface="Noto Sans CJK SC"/>
+              </a:rPr>
+              <a:t>工作流，为每个功能模块创建独立的</a:t>
+            </a:r>
+            <a:r>
+              <a:rPr lang="en-US" sz="1400" b="0" u="none" strike="noStrike">
+                <a:solidFill>
+                  <a:srgbClr val="000000"/>
+                </a:solidFill>
+                <a:uFillTx/>
+                <a:latin typeface="Noto Sans CJK SC"/>
+              </a:rPr>
+              <a:t>feature</a:t>
+            </a:r>
+            <a:r>
+              <a:rPr lang="zh-CN" sz="1400" b="0" u="none" strike="noStrike">
+                <a:solidFill>
+                  <a:srgbClr val="000000"/>
+                </a:solidFill>
+                <a:uFillTx/>
+                <a:latin typeface="Noto Sans CJK SC"/>
+              </a:rPr>
+              <a:t>分支，如界面、不同同学的游戏开发等，最后合并到</a:t>
+            </a:r>
+            <a:r>
+              <a:rPr lang="en-US" sz="1400" b="0" u="none" strike="noStrike">
+                <a:solidFill>
+                  <a:srgbClr val="000000"/>
+                </a:solidFill>
+                <a:uFillTx/>
+                <a:latin typeface="Noto Sans CJK SC"/>
+              </a:rPr>
+              <a:t>develop</a:t>
+            </a:r>
+            <a:r>
+              <a:rPr lang="zh-CN" sz="1400" b="0" u="none" strike="noStrike">
+                <a:solidFill>
+                  <a:srgbClr val="000000"/>
+                </a:solidFill>
+                <a:uFillTx/>
+                <a:latin typeface="Noto Sans CJK SC"/>
+              </a:rPr>
+              <a:t>分支进行集成测试，确保了代码管理的规范和高效。</a:t>
             </a:r>
             <a:endParaRPr lang="en-US" sz="1400" b="0" u="none" strike="noStrike">
               <a:solidFill>
@@ -1464,12 +1543,12 @@
       </p:sp>
       <p:sp>
         <p:nvSpPr>
-          <p:cNvPr id="423" name="PlaceHolder 5"/>
+          <p:cNvPr id="435" name="PlaceHolder 5"/>
           <p:cNvSpPr>
             <a:spLocks noGrp="1"/>
           </p:cNvSpPr>
           <p:nvPr>
-            <p:ph type="ftr" idx="35"/>
+            <p:ph type="ftr" idx="41"/>
           </p:nvPr>
         </p:nvSpPr>
         <p:spPr>
@@ -1506,12 +1585,12 @@
       </p:sp>
       <p:sp>
         <p:nvSpPr>
-          <p:cNvPr id="424" name="PlaceHolder 6"/>
+          <p:cNvPr id="436" name="PlaceHolder 6"/>
           <p:cNvSpPr>
             <a:spLocks noGrp="1"/>
           </p:cNvSpPr>
           <p:nvPr>
-            <p:ph type="sldNum" idx="36"/>
+            <p:ph type="sldNum" idx="42"/>
           </p:nvPr>
         </p:nvSpPr>
         <p:spPr>
@@ -1582,435 +1661,6 @@
 </file>
 
 <file path=ppt/notesSlides/notesSlide12.xml><?xml version="1.0" encoding="utf-8"?>
-<p:notes xmlns:a="http://schemas.openxmlformats.org/drawingml/2006/main" xmlns:r="http://schemas.openxmlformats.org/officeDocument/2006/relationships" xmlns:p="http://schemas.openxmlformats.org/presentationml/2006/main">
-  <p:cSld>
-    <p:spTree>
-      <p:nvGrpSpPr>
-        <p:cNvPr id="1" name=""/>
-        <p:cNvGrpSpPr/>
-        <p:nvPr/>
-      </p:nvGrpSpPr>
-      <p:grpSpPr>
-        <a:xfrm>
-          <a:off x="0" y="0"/>
-          <a:ext cx="0" cy="0"/>
-          <a:chOff x="0" y="0"/>
-          <a:chExt cx="0" cy="0"/>
-        </a:xfrm>
-      </p:grpSpPr>
-      <p:sp>
-        <p:nvSpPr>
-          <p:cNvPr id="431" name="PlaceHolder 1"/>
-          <p:cNvSpPr>
-            <a:spLocks noGrp="1"/>
-          </p:cNvSpPr>
-          <p:nvPr>
-            <p:ph type="hdr"/>
-          </p:nvPr>
-        </p:nvSpPr>
-        <p:spPr>
-          <a:xfrm>
-            <a:off x="0" y="0"/>
-            <a:ext cx="3962160" cy="342720"/>
-          </a:xfrm>
-          <a:prstGeom prst="rect">
-            <a:avLst/>
-          </a:prstGeom>
-          <a:noFill/>
-          <a:ln w="0">
-            <a:noFill/>
-          </a:ln>
-        </p:spPr>
-        <p:txBody>
-          <a:bodyPr lIns="91440" tIns="45720" rIns="91440" bIns="45720" anchor="t">
-            <a:noAutofit/>
-          </a:bodyPr>
-          <a:lstStyle/>
-          <a:p>
-            <a:pPr indent="0">
-              <a:buNone/>
-            </a:pPr>
-            <a:endParaRPr lang="en-US" sz="1200" b="0" u="none" strike="noStrike">
-              <a:solidFill>
-                <a:srgbClr val="000000"/>
-              </a:solidFill>
-              <a:uFillTx/>
-              <a:latin typeface="Arial"/>
-              <a:ea typeface="Arial"/>
-            </a:endParaRPr>
-          </a:p>
-        </p:txBody>
-      </p:sp>
-      <p:sp>
-        <p:nvSpPr>
-          <p:cNvPr id="432" name="PlaceHolder 2"/>
-          <p:cNvSpPr>
-            <a:spLocks noGrp="1"/>
-          </p:cNvSpPr>
-          <p:nvPr>
-            <p:ph type="dt" idx="40"/>
-          </p:nvPr>
-        </p:nvSpPr>
-        <p:spPr>
-          <a:xfrm>
-            <a:off x="5180040" y="0"/>
-            <a:ext cx="3962160" cy="342720"/>
-          </a:xfrm>
-          <a:prstGeom prst="rect">
-            <a:avLst/>
-          </a:prstGeom>
-          <a:noFill/>
-          <a:ln w="0">
-            <a:noFill/>
-          </a:ln>
-        </p:spPr>
-        <p:txBody>
-          <a:bodyPr lIns="91440" tIns="45720" rIns="91440" bIns="45720" anchor="t">
-            <a:noAutofit/>
-          </a:bodyPr>
-          <a:lstStyle>
-            <a:lvl1pPr indent="0" algn="r">
-              <a:lnSpc>
-                <a:spcPct val="100000"/>
-              </a:lnSpc>
-              <a:buNone/>
-              <a:defRPr lang="cs-CZ" sz="1200" b="0" u="none" strike="noStrike">
-                <a:solidFill>
-                  <a:srgbClr val="000000"/>
-                </a:solidFill>
-                <a:uFillTx/>
-                <a:latin typeface="Noto Sans CJK SC"/>
-              </a:defRPr>
-            </a:lvl1pPr>
-          </a:lstStyle>
-          <a:p>
-            <a:pPr indent="0" algn="r">
-              <a:lnSpc>
-                <a:spcPct val="100000"/>
-              </a:lnSpc>
-              <a:buNone/>
-            </a:pPr>
-            <a:r>
-              <a:rPr lang="cs-CZ" sz="1200" b="0" u="none" strike="noStrike">
-                <a:solidFill>
-                  <a:srgbClr val="000000"/>
-                </a:solidFill>
-                <a:uFillTx/>
-                <a:latin typeface="Noto Sans CJK SC"/>
-              </a:rPr>
-              <a:t>1.7.2013</a:t>
-            </a:r>
-            <a:endParaRPr lang="en-US" sz="1200" b="0" u="none" strike="noStrike">
-              <a:solidFill>
-                <a:srgbClr val="000000"/>
-              </a:solidFill>
-              <a:uFillTx/>
-              <a:latin typeface="Noto Sans CJK SC"/>
-            </a:endParaRPr>
-          </a:p>
-        </p:txBody>
-      </p:sp>
-      <p:sp>
-        <p:nvSpPr>
-          <p:cNvPr id="433" name="PlaceHolder 3"/>
-          <p:cNvSpPr>
-            <a:spLocks noGrp="1" noRot="1" noChangeAspect="1"/>
-          </p:cNvSpPr>
-          <p:nvPr>
-            <p:ph type="sldImg"/>
-          </p:nvPr>
-        </p:nvSpPr>
-        <p:spPr>
-          <a:xfrm>
-            <a:off x="2857680" y="512640"/>
-            <a:ext cx="3428640" cy="2566800"/>
-          </a:xfrm>
-          <a:prstGeom prst="rect">
-            <a:avLst/>
-          </a:prstGeom>
-          <a:ln w="0">
-            <a:noFill/>
-          </a:ln>
-        </p:spPr>
-      </p:sp>
-      <p:sp>
-        <p:nvSpPr>
-          <p:cNvPr id="434" name="PlaceHolder 4"/>
-          <p:cNvSpPr>
-            <a:spLocks noGrp="1"/>
-          </p:cNvSpPr>
-          <p:nvPr>
-            <p:ph type="body"/>
-          </p:nvPr>
-        </p:nvSpPr>
-        <p:spPr>
-          <a:xfrm>
-            <a:off x="914400" y="3251160"/>
-            <a:ext cx="7314840" cy="3080880"/>
-          </a:xfrm>
-          <a:prstGeom prst="rect">
-            <a:avLst/>
-          </a:prstGeom>
-          <a:noFill/>
-          <a:ln w="0">
-            <a:noFill/>
-          </a:ln>
-        </p:spPr>
-        <p:txBody>
-          <a:bodyPr lIns="91440" tIns="45720" rIns="91440" bIns="45720" anchor="ctr">
-            <a:noAutofit/>
-          </a:bodyPr>
-          <a:lstStyle/>
-          <a:p>
-            <a:pPr indent="0">
-              <a:lnSpc>
-                <a:spcPct val="100000"/>
-              </a:lnSpc>
-              <a:buNone/>
-              <a:tabLst>
-                <a:tab pos="0" algn="l"/>
-              </a:tabLst>
-            </a:pPr>
-            <a:r>
-              <a:rPr lang="zh-CN" sz="1400" b="0" u="none" strike="noStrike">
-                <a:solidFill>
-                  <a:srgbClr val="000000"/>
-                </a:solidFill>
-                <a:uFillTx/>
-                <a:latin typeface="Noto Sans CJK SC"/>
-              </a:rPr>
-              <a:t>这是我们项目的代码仓库结构和</a:t>
-            </a:r>
-            <a:r>
-              <a:rPr lang="en-US" sz="1400" b="0" u="none" strike="noStrike">
-                <a:solidFill>
-                  <a:srgbClr val="000000"/>
-                </a:solidFill>
-                <a:uFillTx/>
-                <a:latin typeface="Noto Sans CJK SC"/>
-              </a:rPr>
-              <a:t>Git</a:t>
-            </a:r>
-            <a:r>
-              <a:rPr lang="zh-CN" sz="1400" b="0" u="none" strike="noStrike">
-                <a:solidFill>
-                  <a:srgbClr val="000000"/>
-                </a:solidFill>
-                <a:uFillTx/>
-                <a:latin typeface="Noto Sans CJK SC"/>
-              </a:rPr>
-              <a:t>分支策略。文件结构清晰，每个游戏都是一个独立的</a:t>
-            </a:r>
-            <a:r>
-              <a:rPr lang="en-US" sz="1400" b="0" u="none" strike="noStrike">
-                <a:solidFill>
-                  <a:srgbClr val="000000"/>
-                </a:solidFill>
-                <a:uFillTx/>
-                <a:latin typeface="Noto Sans CJK SC"/>
-              </a:rPr>
-              <a:t>HTML</a:t>
-            </a:r>
-            <a:r>
-              <a:rPr lang="zh-CN" sz="1400" b="0" u="none" strike="noStrike">
-                <a:solidFill>
-                  <a:srgbClr val="000000"/>
-                </a:solidFill>
-                <a:uFillTx/>
-                <a:latin typeface="Noto Sans CJK SC"/>
-              </a:rPr>
-              <a:t>文件，便于维护和扩展。我们采用了</a:t>
-            </a:r>
-            <a:r>
-              <a:rPr lang="en-US" sz="1400" b="0" u="none" strike="noStrike">
-                <a:solidFill>
-                  <a:srgbClr val="000000"/>
-                </a:solidFill>
-                <a:uFillTx/>
-                <a:latin typeface="Noto Sans CJK SC"/>
-              </a:rPr>
-              <a:t>Git Flow</a:t>
-            </a:r>
-            <a:r>
-              <a:rPr lang="zh-CN" sz="1400" b="0" u="none" strike="noStrike">
-                <a:solidFill>
-                  <a:srgbClr val="000000"/>
-                </a:solidFill>
-                <a:uFillTx/>
-                <a:latin typeface="Noto Sans CJK SC"/>
-              </a:rPr>
-              <a:t>工作流，为每个功能模块创建独立的</a:t>
-            </a:r>
-            <a:r>
-              <a:rPr lang="en-US" sz="1400" b="0" u="none" strike="noStrike">
-                <a:solidFill>
-                  <a:srgbClr val="000000"/>
-                </a:solidFill>
-                <a:uFillTx/>
-                <a:latin typeface="Noto Sans CJK SC"/>
-              </a:rPr>
-              <a:t>feature</a:t>
-            </a:r>
-            <a:r>
-              <a:rPr lang="zh-CN" sz="1400" b="0" u="none" strike="noStrike">
-                <a:solidFill>
-                  <a:srgbClr val="000000"/>
-                </a:solidFill>
-                <a:uFillTx/>
-                <a:latin typeface="Noto Sans CJK SC"/>
-              </a:rPr>
-              <a:t>分支，如界面、不同同学的游戏开发等，最后合并到</a:t>
-            </a:r>
-            <a:r>
-              <a:rPr lang="en-US" sz="1400" b="0" u="none" strike="noStrike">
-                <a:solidFill>
-                  <a:srgbClr val="000000"/>
-                </a:solidFill>
-                <a:uFillTx/>
-                <a:latin typeface="Noto Sans CJK SC"/>
-              </a:rPr>
-              <a:t>develop</a:t>
-            </a:r>
-            <a:r>
-              <a:rPr lang="zh-CN" sz="1400" b="0" u="none" strike="noStrike">
-                <a:solidFill>
-                  <a:srgbClr val="000000"/>
-                </a:solidFill>
-                <a:uFillTx/>
-                <a:latin typeface="Noto Sans CJK SC"/>
-              </a:rPr>
-              <a:t>分支进行集成测试，确保了代码管理的规范和高效。</a:t>
-            </a:r>
-            <a:endParaRPr lang="en-US" sz="1400" b="0" u="none" strike="noStrike">
-              <a:solidFill>
-                <a:srgbClr val="000000"/>
-              </a:solidFill>
-              <a:uFillTx/>
-              <a:latin typeface="Noto Sans CJK SC"/>
-            </a:endParaRPr>
-          </a:p>
-        </p:txBody>
-      </p:sp>
-      <p:sp>
-        <p:nvSpPr>
-          <p:cNvPr id="435" name="PlaceHolder 5"/>
-          <p:cNvSpPr>
-            <a:spLocks noGrp="1"/>
-          </p:cNvSpPr>
-          <p:nvPr>
-            <p:ph type="ftr" idx="41"/>
-          </p:nvPr>
-        </p:nvSpPr>
-        <p:spPr>
-          <a:xfrm>
-            <a:off x="0" y="6502320"/>
-            <a:ext cx="3962160" cy="340920"/>
-          </a:xfrm>
-          <a:prstGeom prst="rect">
-            <a:avLst/>
-          </a:prstGeom>
-          <a:noFill/>
-          <a:ln w="0">
-            <a:noFill/>
-          </a:ln>
-        </p:spPr>
-        <p:txBody>
-          <a:bodyPr lIns="91440" tIns="45720" rIns="91440" bIns="45720" anchor="b">
-            <a:noAutofit/>
-          </a:bodyPr>
-          <a:lstStyle/>
-          <a:p>
-            <a:pPr indent="0">
-              <a:buNone/>
-            </a:pPr>
-            <a:endParaRPr lang="en-US" sz="1200" b="0" u="none" strike="noStrike">
-              <a:solidFill>
-                <a:srgbClr val="000000"/>
-              </a:solidFill>
-              <a:uFillTx/>
-              <a:latin typeface="Noto Sans CJK SC"/>
-            </a:endParaRPr>
-          </a:p>
-        </p:txBody>
-      </p:sp>
-      <p:sp>
-        <p:nvSpPr>
-          <p:cNvPr id="436" name="PlaceHolder 6"/>
-          <p:cNvSpPr>
-            <a:spLocks noGrp="1"/>
-          </p:cNvSpPr>
-          <p:nvPr>
-            <p:ph type="sldNum" idx="42"/>
-          </p:nvPr>
-        </p:nvSpPr>
-        <p:spPr>
-          <a:xfrm>
-            <a:off x="5180040" y="6502320"/>
-            <a:ext cx="3962160" cy="340920"/>
-          </a:xfrm>
-          <a:prstGeom prst="rect">
-            <a:avLst/>
-          </a:prstGeom>
-          <a:noFill/>
-          <a:ln w="0">
-            <a:noFill/>
-          </a:ln>
-        </p:spPr>
-        <p:txBody>
-          <a:bodyPr lIns="91440" tIns="45720" rIns="91440" bIns="45720" anchor="b">
-            <a:noAutofit/>
-          </a:bodyPr>
-          <a:lstStyle>
-            <a:lvl1pPr indent="0" algn="r">
-              <a:lnSpc>
-                <a:spcPct val="100000"/>
-              </a:lnSpc>
-              <a:buNone/>
-              <a:defRPr lang="cs-CZ" sz="1200" b="0" u="none" strike="noStrike">
-                <a:solidFill>
-                  <a:srgbClr val="000000"/>
-                </a:solidFill>
-                <a:uFillTx/>
-                <a:latin typeface="Noto Sans CJK SC"/>
-              </a:defRPr>
-            </a:lvl1pPr>
-          </a:lstStyle>
-          <a:p>
-            <a:pPr indent="0" algn="r">
-              <a:lnSpc>
-                <a:spcPct val="100000"/>
-              </a:lnSpc>
-              <a:buNone/>
-            </a:pPr>
-            <a:r>
-              <a:rPr lang="cs-CZ" sz="1200" b="0" u="none" strike="noStrike">
-                <a:solidFill>
-                  <a:srgbClr val="000000"/>
-                </a:solidFill>
-                <a:uFillTx/>
-                <a:latin typeface="Noto Sans CJK SC"/>
-              </a:rPr>
-              <a:t>‹#›</a:t>
-            </a:r>
-            <a:endParaRPr lang="en-US" sz="1200" b="0" u="none" strike="noStrike">
-              <a:solidFill>
-                <a:srgbClr val="000000"/>
-              </a:solidFill>
-              <a:uFillTx/>
-              <a:latin typeface="Noto Sans CJK SC"/>
-            </a:endParaRPr>
-          </a:p>
-        </p:txBody>
-      </p:sp>
-    </p:spTree>
-  </p:cSld>
-  <p:clrMapOvr>
-    <a:masterClrMapping/>
-  </p:clrMapOvr>
-</p:notes>
-</file>
-
-<file path=ppt/notesSlides/notesSlide13.xml><?xml version="1.0" encoding="utf-8"?>
 <p:notes xmlns:a="http://schemas.openxmlformats.org/drawingml/2006/main" xmlns:r="http://schemas.openxmlformats.org/officeDocument/2006/relationships" xmlns:p="http://schemas.openxmlformats.org/presentationml/2006/main">
   <p:cSld>
     <p:spTree>
@@ -9225,7 +8875,7 @@
       </p:grpSpPr>
       <p:sp>
         <p:nvSpPr>
-          <p:cNvPr id="246" name="AutoShape 2"/>
+          <p:cNvPr id="323" name="AutoShape 2"/>
           <p:cNvSpPr/>
           <p:nvPr/>
         </p:nvSpPr>
@@ -9240,8 +8890,8 @@
             </a:avLst>
           </a:prstGeom>
           <a:solidFill>
-            <a:srgbClr val="000000">
-              <a:alpha val="50000"/>
+            <a:srgbClr val="0F172A">
+              <a:alpha val="60000"/>
             </a:srgbClr>
           </a:solidFill>
           <a:ln w="25400">
@@ -9284,14 +8934,14 @@
       </p:sp>
       <p:sp>
         <p:nvSpPr>
-          <p:cNvPr id="247" name="AutoShape 3"/>
+          <p:cNvPr id="324" name="AutoShape 3"/>
           <p:cNvSpPr/>
           <p:nvPr/>
         </p:nvSpPr>
         <p:spPr>
           <a:xfrm>
             <a:off x="762120" y="507960"/>
-            <a:ext cx="10667520" cy="571320"/>
+            <a:ext cx="10667520" cy="634680"/>
           </a:xfrm>
           <a:prstGeom prst="rect">
             <a:avLst/>
@@ -9336,7 +8986,7 @@
                 <a:latin typeface="Noto Sans SC"/>
                 <a:ea typeface="Noto Sans SC"/>
               </a:rPr>
-              <a:t>开发进度与里程碑</a:t>
+              <a:t>代码仓库结构</a:t>
             </a:r>
             <a:endParaRPr lang="en-US" sz="3200" b="0" u="none" strike="noStrike">
               <a:solidFill>
@@ -9348,1679 +8998,16 @@
           </a:p>
         </p:txBody>
       </p:sp>
-      <p:cxnSp>
-        <p:nvCxnSpPr>
-          <p:cNvPr id="248" name="Connector 4"/>
-          <p:cNvCxnSpPr/>
-          <p:nvPr/>
-        </p:nvCxnSpPr>
-        <p:spPr>
-          <a:xfrm>
-            <a:off x="6095880" y="1650960"/>
-            <a:ext cx="360" cy="4445280"/>
-          </a:xfrm>
-          <a:prstGeom prst="straightConnector1">
-            <a:avLst/>
-          </a:prstGeom>
-          <a:ln w="12700">
-            <a:solidFill>
-              <a:srgbClr val="FFFFFF">
-                <a:alpha val="20000"/>
-              </a:srgbClr>
-            </a:solidFill>
-            <a:prstDash val="dash"/>
-            <a:round/>
-          </a:ln>
-        </p:spPr>
-      </p:cxnSp>
-      <p:sp>
-        <p:nvSpPr>
-          <p:cNvPr id="249" name="AutoShape 5"/>
+      <p:sp>
+        <p:nvSpPr>
+          <p:cNvPr id="325" name="AutoShape 4"/>
           <p:cNvSpPr/>
           <p:nvPr/>
         </p:nvSpPr>
         <p:spPr>
           <a:xfrm>
-            <a:off x="762120" y="1650960"/>
-            <a:ext cx="5079600" cy="380520"/>
-          </a:xfrm>
-          <a:prstGeom prst="rect">
-            <a:avLst/>
-          </a:prstGeom>
-          <a:noFill/>
-          <a:ln w="12700">
-            <a:noFill/>
-          </a:ln>
-        </p:spPr>
-        <p:style>
-          <a:lnRef idx="0">
-            <a:scrgbClr r="0" g="0" b="0"/>
-          </a:lnRef>
-          <a:fillRef idx="0">
-            <a:scrgbClr r="0" g="0" b="0"/>
-          </a:fillRef>
-          <a:effectRef idx="0">
-            <a:scrgbClr r="0" g="0" b="0"/>
-          </a:effectRef>
-          <a:fontRef idx="minor"/>
-        </p:style>
-        <p:txBody>
-          <a:bodyPr lIns="0" tIns="0" rIns="0" bIns="0" anchor="ctr">
-            <a:noAutofit/>
-          </a:bodyPr>
-          <a:lstStyle/>
-          <a:p>
-            <a:pPr>
-              <a:lnSpc>
-                <a:spcPct val="125000"/>
-              </a:lnSpc>
-              <a:tabLst>
-                <a:tab pos="0" algn="l"/>
-              </a:tabLst>
-            </a:pPr>
-            <a:r>
-              <a:rPr lang="en-US" sz="2000" b="1" u="none" strike="noStrike">
-                <a:solidFill>
-                  <a:srgbClr val="2BD1FC"/>
-                </a:solidFill>
-                <a:uFillTx/>
-                <a:latin typeface="Noto Sans SC"/>
-                <a:ea typeface="Noto Sans SC"/>
-              </a:rPr>
-              <a:t>▍ </a:t>
-            </a:r>
-            <a:r>
-              <a:rPr lang="zh-CN" sz="2000" b="1" u="none" strike="noStrike">
-                <a:solidFill>
-                  <a:srgbClr val="2BD1FC"/>
-                </a:solidFill>
-                <a:uFillTx/>
-                <a:latin typeface="Noto Sans SC"/>
-                <a:ea typeface="Noto Sans SC"/>
-              </a:rPr>
-              <a:t>当前开发进度概览</a:t>
-            </a:r>
-            <a:endParaRPr lang="en-US" sz="2000" b="0" u="none" strike="noStrike">
-              <a:solidFill>
-                <a:srgbClr val="FFFFFF"/>
-              </a:solidFill>
-              <a:uFillTx/>
-              <a:latin typeface="Noto Sans CJK SC"/>
-            </a:endParaRPr>
-          </a:p>
-        </p:txBody>
-      </p:sp>
-      <p:sp>
-        <p:nvSpPr>
-          <p:cNvPr id="250" name="AutoShape 6"/>
-          <p:cNvSpPr/>
-          <p:nvPr/>
-        </p:nvSpPr>
-        <p:spPr>
-          <a:xfrm>
-            <a:off x="762120" y="2413080"/>
-            <a:ext cx="2412720" cy="304560"/>
-          </a:xfrm>
-          <a:prstGeom prst="rect">
-            <a:avLst/>
-          </a:prstGeom>
-          <a:noFill/>
-          <a:ln w="12700">
-            <a:noFill/>
-          </a:ln>
-        </p:spPr>
-        <p:style>
-          <a:lnRef idx="0">
-            <a:scrgbClr r="0" g="0" b="0"/>
-          </a:lnRef>
-          <a:fillRef idx="0">
-            <a:scrgbClr r="0" g="0" b="0"/>
-          </a:fillRef>
-          <a:effectRef idx="0">
-            <a:scrgbClr r="0" g="0" b="0"/>
-          </a:effectRef>
-          <a:fontRef idx="minor"/>
-        </p:style>
-        <p:txBody>
-          <a:bodyPr lIns="0" tIns="0" rIns="0" bIns="0" anchor="ctr">
-            <a:noAutofit/>
-          </a:bodyPr>
-          <a:lstStyle/>
-          <a:p>
-            <a:pPr>
-              <a:lnSpc>
-                <a:spcPct val="125000"/>
-              </a:lnSpc>
-              <a:tabLst>
-                <a:tab pos="0" algn="l"/>
-              </a:tabLst>
-            </a:pPr>
-            <a:r>
-              <a:rPr lang="zh-CN" sz="1400" b="0" u="none" strike="noStrike">
-                <a:solidFill>
-                  <a:srgbClr val="FFFFFF">
-                    <a:alpha val="90000"/>
-                  </a:srgbClr>
-                </a:solidFill>
-                <a:uFillTx/>
-                <a:latin typeface="Noto Sans SC"/>
-                <a:ea typeface="Noto Sans SC"/>
-              </a:rPr>
-              <a:t>需求分析 </a:t>
-            </a:r>
-            <a:r>
-              <a:rPr lang="en-US" sz="1400" b="0" u="none" strike="noStrike">
-                <a:solidFill>
-                  <a:srgbClr val="FFFFFF">
-                    <a:alpha val="90000"/>
-                  </a:srgbClr>
-                </a:solidFill>
-                <a:uFillTx/>
-                <a:latin typeface="Noto Sans SC"/>
-                <a:ea typeface="Noto Sans SC"/>
-              </a:rPr>
-              <a:t>&amp; </a:t>
-            </a:r>
-            <a:r>
-              <a:rPr lang="zh-CN" sz="1400" b="0" u="none" strike="noStrike">
-                <a:solidFill>
-                  <a:srgbClr val="FFFFFF">
-                    <a:alpha val="90000"/>
-                  </a:srgbClr>
-                </a:solidFill>
-                <a:uFillTx/>
-                <a:latin typeface="Noto Sans SC"/>
-                <a:ea typeface="Noto Sans SC"/>
-              </a:rPr>
-              <a:t>技术选型</a:t>
-            </a:r>
-            <a:endParaRPr lang="en-US" sz="1400" b="0" u="none" strike="noStrike">
-              <a:solidFill>
-                <a:srgbClr val="FFFFFF"/>
-              </a:solidFill>
-              <a:uFillTx/>
-              <a:latin typeface="Noto Sans CJK SC"/>
-            </a:endParaRPr>
-          </a:p>
-        </p:txBody>
-      </p:sp>
-      <p:sp>
-        <p:nvSpPr>
-          <p:cNvPr id="251" name="AutoShape 7"/>
-          <p:cNvSpPr/>
-          <p:nvPr/>
-        </p:nvSpPr>
-        <p:spPr>
-          <a:xfrm>
-            <a:off x="762120" y="2793960"/>
-            <a:ext cx="2412720" cy="75960"/>
-          </a:xfrm>
-          <a:prstGeom prst="roundRect">
-            <a:avLst>
-              <a:gd name="adj" fmla="val 0"/>
-            </a:avLst>
-          </a:prstGeom>
-          <a:solidFill>
-            <a:srgbClr val="FFFFFF">
-              <a:alpha val="15000"/>
-            </a:srgbClr>
-          </a:solidFill>
-          <a:ln w="25400">
-            <a:noFill/>
-          </a:ln>
-        </p:spPr>
-        <p:style>
-          <a:lnRef idx="0">
-            <a:scrgbClr r="0" g="0" b="0"/>
-          </a:lnRef>
-          <a:fillRef idx="0">
-            <a:scrgbClr r="0" g="0" b="0"/>
-          </a:fillRef>
-          <a:effectRef idx="0">
-            <a:scrgbClr r="0" g="0" b="0"/>
-          </a:effectRef>
-          <a:fontRef idx="minor"/>
-        </p:style>
-        <p:txBody>
-          <a:bodyPr lIns="63360" tIns="38160" rIns="63360" bIns="38160" anchor="ctr">
-            <a:noAutofit/>
-          </a:bodyPr>
-          <a:lstStyle/>
-          <a:p>
-            <a:pPr algn="ctr">
-              <a:lnSpc>
-                <a:spcPct val="100000"/>
-              </a:lnSpc>
-            </a:pPr>
-            <a:endParaRPr lang="en-US" sz="1400" b="0" u="none" strike="noStrike">
-              <a:solidFill>
-                <a:srgbClr val="000000"/>
-              </a:solidFill>
-              <a:uFillTx/>
-              <a:latin typeface="Arial"/>
-              <a:ea typeface="Arial"/>
-            </a:endParaRPr>
-          </a:p>
-        </p:txBody>
-      </p:sp>
-      <p:sp>
-        <p:nvSpPr>
-          <p:cNvPr id="252" name="AutoShape 8"/>
-          <p:cNvSpPr/>
-          <p:nvPr/>
-        </p:nvSpPr>
-        <p:spPr>
-          <a:xfrm>
-            <a:off x="762120" y="2793960"/>
-            <a:ext cx="2412720" cy="75960"/>
-          </a:xfrm>
-          <a:prstGeom prst="roundRect">
-            <a:avLst>
-              <a:gd name="adj" fmla="val 0"/>
-            </a:avLst>
-          </a:prstGeom>
-          <a:solidFill>
-            <a:srgbClr val="2BD1FC"/>
-          </a:solidFill>
-          <a:ln w="25400">
-            <a:noFill/>
-          </a:ln>
-        </p:spPr>
-        <p:style>
-          <a:lnRef idx="0">
-            <a:scrgbClr r="0" g="0" b="0"/>
-          </a:lnRef>
-          <a:fillRef idx="0">
-            <a:scrgbClr r="0" g="0" b="0"/>
-          </a:fillRef>
-          <a:effectRef idx="0">
-            <a:scrgbClr r="0" g="0" b="0"/>
-          </a:effectRef>
-          <a:fontRef idx="minor"/>
-        </p:style>
-        <p:txBody>
-          <a:bodyPr lIns="63360" tIns="38160" rIns="63360" bIns="38160" anchor="ctr">
-            <a:noAutofit/>
-          </a:bodyPr>
-          <a:lstStyle/>
-          <a:p>
-            <a:pPr algn="ctr">
-              <a:lnSpc>
-                <a:spcPct val="100000"/>
-              </a:lnSpc>
-            </a:pPr>
-            <a:endParaRPr lang="en-US" sz="1400" b="0" u="none" strike="noStrike">
-              <a:solidFill>
-                <a:srgbClr val="000000"/>
-              </a:solidFill>
-              <a:uFillTx/>
-              <a:latin typeface="Arial"/>
-              <a:ea typeface="Arial"/>
-            </a:endParaRPr>
-          </a:p>
-        </p:txBody>
-      </p:sp>
-      <p:sp>
-        <p:nvSpPr>
-          <p:cNvPr id="253" name="AutoShape 9"/>
-          <p:cNvSpPr/>
-          <p:nvPr/>
-        </p:nvSpPr>
-        <p:spPr>
-          <a:xfrm>
-            <a:off x="762120" y="2984400"/>
-            <a:ext cx="2412720" cy="253800"/>
-          </a:xfrm>
-          <a:prstGeom prst="rect">
-            <a:avLst/>
-          </a:prstGeom>
-          <a:noFill/>
-          <a:ln w="12700">
-            <a:noFill/>
-          </a:ln>
-        </p:spPr>
-        <p:style>
-          <a:lnRef idx="0">
-            <a:scrgbClr r="0" g="0" b="0"/>
-          </a:lnRef>
-          <a:fillRef idx="0">
-            <a:scrgbClr r="0" g="0" b="0"/>
-          </a:fillRef>
-          <a:effectRef idx="0">
-            <a:scrgbClr r="0" g="0" b="0"/>
-          </a:effectRef>
-          <a:fontRef idx="minor"/>
-        </p:style>
-        <p:txBody>
-          <a:bodyPr lIns="0" tIns="0" rIns="0" bIns="0" anchor="ctr">
-            <a:noAutofit/>
-          </a:bodyPr>
-          <a:lstStyle/>
-          <a:p>
-            <a:pPr>
-              <a:lnSpc>
-                <a:spcPct val="125000"/>
-              </a:lnSpc>
-              <a:tabLst>
-                <a:tab pos="0" algn="l"/>
-              </a:tabLst>
-            </a:pPr>
-            <a:r>
-              <a:rPr lang="zh-CN" sz="1200" b="0" u="none" strike="noStrike">
-                <a:solidFill>
-                  <a:srgbClr val="FFFFFF">
-                    <a:alpha val="60000"/>
-                  </a:srgbClr>
-                </a:solidFill>
-                <a:uFillTx/>
-                <a:latin typeface="Noto Sans SC"/>
-                <a:ea typeface="Noto Sans SC"/>
-              </a:rPr>
-              <a:t>基础架构已完善，技术栈选型完成 </a:t>
-            </a:r>
-            <a:r>
-              <a:rPr lang="en-US" sz="1200" b="0" u="none" strike="noStrike">
-                <a:solidFill>
-                  <a:srgbClr val="FFFFFF">
-                    <a:alpha val="60000"/>
-                  </a:srgbClr>
-                </a:solidFill>
-                <a:uFillTx/>
-                <a:latin typeface="Noto Sans SC"/>
-                <a:ea typeface="Noto Sans SC"/>
-              </a:rPr>
-              <a:t>(100%)</a:t>
-            </a:r>
-            <a:endParaRPr lang="en-US" sz="1200" b="0" u="none" strike="noStrike">
-              <a:solidFill>
-                <a:srgbClr val="FFFFFF"/>
-              </a:solidFill>
-              <a:uFillTx/>
-              <a:latin typeface="Noto Sans CJK SC"/>
-            </a:endParaRPr>
-          </a:p>
-        </p:txBody>
-      </p:sp>
-      <p:sp>
-        <p:nvSpPr>
-          <p:cNvPr id="254" name="AutoShape 10"/>
-          <p:cNvSpPr/>
-          <p:nvPr/>
-        </p:nvSpPr>
-        <p:spPr>
-          <a:xfrm>
-            <a:off x="762120" y="3809880"/>
-            <a:ext cx="2412720" cy="304560"/>
-          </a:xfrm>
-          <a:prstGeom prst="rect">
-            <a:avLst/>
-          </a:prstGeom>
-          <a:noFill/>
-          <a:ln w="12700">
-            <a:noFill/>
-          </a:ln>
-        </p:spPr>
-        <p:style>
-          <a:lnRef idx="0">
-            <a:scrgbClr r="0" g="0" b="0"/>
-          </a:lnRef>
-          <a:fillRef idx="0">
-            <a:scrgbClr r="0" g="0" b="0"/>
-          </a:fillRef>
-          <a:effectRef idx="0">
-            <a:scrgbClr r="0" g="0" b="0"/>
-          </a:effectRef>
-          <a:fontRef idx="minor"/>
-        </p:style>
-        <p:txBody>
-          <a:bodyPr lIns="0" tIns="0" rIns="0" bIns="0" anchor="ctr">
-            <a:noAutofit/>
-          </a:bodyPr>
-          <a:lstStyle/>
-          <a:p>
-            <a:pPr>
-              <a:lnSpc>
-                <a:spcPct val="125000"/>
-              </a:lnSpc>
-              <a:tabLst>
-                <a:tab pos="0" algn="l"/>
-              </a:tabLst>
-            </a:pPr>
-            <a:r>
-              <a:rPr lang="zh-CN" sz="1400" b="0" u="none" strike="noStrike">
-                <a:solidFill>
-                  <a:srgbClr val="FFFFFF">
-                    <a:alpha val="90000"/>
-                  </a:srgbClr>
-                </a:solidFill>
-                <a:uFillTx/>
-                <a:latin typeface="Noto Sans SC"/>
-                <a:ea typeface="Noto Sans SC"/>
-              </a:rPr>
-              <a:t>分工确认 </a:t>
-            </a:r>
-            <a:r>
-              <a:rPr lang="en-US" sz="1400" b="0" u="none" strike="noStrike">
-                <a:solidFill>
-                  <a:srgbClr val="FFFFFF">
-                    <a:alpha val="90000"/>
-                  </a:srgbClr>
-                </a:solidFill>
-                <a:uFillTx/>
-                <a:latin typeface="Noto Sans SC"/>
-                <a:ea typeface="Noto Sans SC"/>
-              </a:rPr>
-              <a:t>&amp; </a:t>
-            </a:r>
-            <a:r>
-              <a:rPr lang="zh-CN" sz="1400" b="0" u="none" strike="noStrike">
-                <a:solidFill>
-                  <a:srgbClr val="FFFFFF">
-                    <a:alpha val="90000"/>
-                  </a:srgbClr>
-                </a:solidFill>
-                <a:uFillTx/>
-                <a:latin typeface="Noto Sans SC"/>
-                <a:ea typeface="Noto Sans SC"/>
-              </a:rPr>
-              <a:t>界面开发</a:t>
-            </a:r>
-            <a:endParaRPr lang="en-US" sz="1400" b="0" u="none" strike="noStrike">
-              <a:solidFill>
-                <a:srgbClr val="FFFFFF"/>
-              </a:solidFill>
-              <a:uFillTx/>
-              <a:latin typeface="Noto Sans CJK SC"/>
-            </a:endParaRPr>
-          </a:p>
-        </p:txBody>
-      </p:sp>
-      <p:sp>
-        <p:nvSpPr>
-          <p:cNvPr id="255" name="AutoShape 11"/>
-          <p:cNvSpPr/>
-          <p:nvPr/>
-        </p:nvSpPr>
-        <p:spPr>
-          <a:xfrm>
-            <a:off x="762120" y="4191120"/>
-            <a:ext cx="2412720" cy="75960"/>
-          </a:xfrm>
-          <a:prstGeom prst="roundRect">
-            <a:avLst>
-              <a:gd name="adj" fmla="val 0"/>
-            </a:avLst>
-          </a:prstGeom>
-          <a:solidFill>
-            <a:srgbClr val="FFFFFF">
-              <a:alpha val="15000"/>
-            </a:srgbClr>
-          </a:solidFill>
-          <a:ln w="25400">
-            <a:noFill/>
-          </a:ln>
-        </p:spPr>
-        <p:style>
-          <a:lnRef idx="0">
-            <a:scrgbClr r="0" g="0" b="0"/>
-          </a:lnRef>
-          <a:fillRef idx="0">
-            <a:scrgbClr r="0" g="0" b="0"/>
-          </a:fillRef>
-          <a:effectRef idx="0">
-            <a:scrgbClr r="0" g="0" b="0"/>
-          </a:effectRef>
-          <a:fontRef idx="minor"/>
-        </p:style>
-        <p:txBody>
-          <a:bodyPr lIns="63360" tIns="38160" rIns="63360" bIns="38160" anchor="ctr">
-            <a:noAutofit/>
-          </a:bodyPr>
-          <a:lstStyle/>
-          <a:p>
-            <a:pPr algn="ctr">
-              <a:lnSpc>
-                <a:spcPct val="100000"/>
-              </a:lnSpc>
-            </a:pPr>
-            <a:endParaRPr lang="en-US" sz="1400" b="0" u="none" strike="noStrike">
-              <a:solidFill>
-                <a:srgbClr val="000000"/>
-              </a:solidFill>
-              <a:uFillTx/>
-              <a:latin typeface="Arial"/>
-              <a:ea typeface="Arial"/>
-            </a:endParaRPr>
-          </a:p>
-        </p:txBody>
-      </p:sp>
-      <p:sp>
-        <p:nvSpPr>
-          <p:cNvPr id="256" name="AutoShape 12"/>
-          <p:cNvSpPr/>
-          <p:nvPr/>
-        </p:nvSpPr>
-        <p:spPr>
-          <a:xfrm>
-            <a:off x="762120" y="4191120"/>
-            <a:ext cx="2412720" cy="75960"/>
-          </a:xfrm>
-          <a:prstGeom prst="roundRect">
-            <a:avLst>
-              <a:gd name="adj" fmla="val 0"/>
-            </a:avLst>
-          </a:prstGeom>
-          <a:solidFill>
-            <a:srgbClr val="2BD1FC"/>
-          </a:solidFill>
-          <a:ln w="25400">
-            <a:noFill/>
-          </a:ln>
-        </p:spPr>
-        <p:style>
-          <a:lnRef idx="0">
-            <a:scrgbClr r="0" g="0" b="0"/>
-          </a:lnRef>
-          <a:fillRef idx="0">
-            <a:scrgbClr r="0" g="0" b="0"/>
-          </a:fillRef>
-          <a:effectRef idx="0">
-            <a:scrgbClr r="0" g="0" b="0"/>
-          </a:effectRef>
-          <a:fontRef idx="minor"/>
-        </p:style>
-        <p:txBody>
-          <a:bodyPr lIns="63360" tIns="38160" rIns="63360" bIns="38160" anchor="ctr">
-            <a:noAutofit/>
-          </a:bodyPr>
-          <a:lstStyle/>
-          <a:p>
-            <a:pPr algn="ctr">
-              <a:lnSpc>
-                <a:spcPct val="100000"/>
-              </a:lnSpc>
-            </a:pPr>
-            <a:endParaRPr lang="en-US" sz="1400" b="0" u="none" strike="noStrike">
-              <a:solidFill>
-                <a:srgbClr val="000000"/>
-              </a:solidFill>
-              <a:uFillTx/>
-              <a:latin typeface="Arial"/>
-              <a:ea typeface="Arial"/>
-            </a:endParaRPr>
-          </a:p>
-        </p:txBody>
-      </p:sp>
-      <p:sp>
-        <p:nvSpPr>
-          <p:cNvPr id="257" name="AutoShape 13"/>
-          <p:cNvSpPr/>
-          <p:nvPr/>
-        </p:nvSpPr>
-        <p:spPr>
-          <a:xfrm>
-            <a:off x="762120" y="4381560"/>
-            <a:ext cx="2412720" cy="571320"/>
-          </a:xfrm>
-          <a:prstGeom prst="rect">
-            <a:avLst/>
-          </a:prstGeom>
-          <a:noFill/>
-          <a:ln w="12700">
-            <a:noFill/>
-          </a:ln>
-        </p:spPr>
-        <p:style>
-          <a:lnRef idx="0">
-            <a:scrgbClr r="0" g="0" b="0"/>
-          </a:lnRef>
-          <a:fillRef idx="0">
-            <a:scrgbClr r="0" g="0" b="0"/>
-          </a:fillRef>
-          <a:effectRef idx="0">
-            <a:scrgbClr r="0" g="0" b="0"/>
-          </a:effectRef>
-          <a:fontRef idx="minor"/>
-        </p:style>
-        <p:txBody>
-          <a:bodyPr lIns="0" tIns="0" rIns="0" bIns="0" anchor="ctr">
-            <a:noAutofit/>
-          </a:bodyPr>
-          <a:lstStyle/>
-          <a:p>
-            <a:pPr>
-              <a:lnSpc>
-                <a:spcPct val="100000"/>
-              </a:lnSpc>
-              <a:tabLst>
-                <a:tab pos="0" algn="l"/>
-              </a:tabLst>
-            </a:pPr>
-            <a:r>
-              <a:rPr lang="zh-CN" sz="1200" b="0" u="none" strike="noStrike">
-                <a:solidFill>
-                  <a:srgbClr val="FFFFFF">
-                    <a:alpha val="60000"/>
-                  </a:srgbClr>
-                </a:solidFill>
-                <a:uFillTx/>
-                <a:latin typeface="Noto Sans SC"/>
-                <a:ea typeface="Noto Sans SC"/>
-              </a:rPr>
-              <a:t>界面框架搭建完毕，人员职责明确，由李玥峰主导设计实现 </a:t>
-            </a:r>
-            <a:r>
-              <a:rPr lang="en-US" sz="1200" b="0" u="none" strike="noStrike">
-                <a:solidFill>
-                  <a:srgbClr val="FFFFFF">
-                    <a:alpha val="60000"/>
-                  </a:srgbClr>
-                </a:solidFill>
-                <a:uFillTx/>
-                <a:latin typeface="Noto Sans SC"/>
-                <a:ea typeface="Noto Sans SC"/>
-              </a:rPr>
-              <a:t>(100%)</a:t>
-            </a:r>
-            <a:endParaRPr lang="en-US" sz="1200" b="0" u="none" strike="noStrike">
-              <a:solidFill>
-                <a:srgbClr val="FFFFFF"/>
-              </a:solidFill>
-              <a:uFillTx/>
-              <a:latin typeface="Noto Sans CJK SC"/>
-            </a:endParaRPr>
-          </a:p>
-        </p:txBody>
-      </p:sp>
-      <p:sp>
-        <p:nvSpPr>
-          <p:cNvPr id="258" name="AutoShape 14"/>
-          <p:cNvSpPr/>
-          <p:nvPr/>
-        </p:nvSpPr>
-        <p:spPr>
-          <a:xfrm>
-            <a:off x="3429000" y="2413080"/>
-            <a:ext cx="2412720" cy="304560"/>
-          </a:xfrm>
-          <a:prstGeom prst="rect">
-            <a:avLst/>
-          </a:prstGeom>
-          <a:noFill/>
-          <a:ln w="12700">
-            <a:noFill/>
-          </a:ln>
-        </p:spPr>
-        <p:style>
-          <a:lnRef idx="0">
-            <a:scrgbClr r="0" g="0" b="0"/>
-          </a:lnRef>
-          <a:fillRef idx="0">
-            <a:scrgbClr r="0" g="0" b="0"/>
-          </a:fillRef>
-          <a:effectRef idx="0">
-            <a:scrgbClr r="0" g="0" b="0"/>
-          </a:effectRef>
-          <a:fontRef idx="minor"/>
-        </p:style>
-        <p:txBody>
-          <a:bodyPr lIns="0" tIns="0" rIns="0" bIns="0" anchor="ctr">
-            <a:noAutofit/>
-          </a:bodyPr>
-          <a:lstStyle/>
-          <a:p>
-            <a:pPr>
-              <a:lnSpc>
-                <a:spcPct val="125000"/>
-              </a:lnSpc>
-              <a:tabLst>
-                <a:tab pos="0" algn="l"/>
-              </a:tabLst>
-            </a:pPr>
-            <a:r>
-              <a:rPr lang="zh-CN" sz="1400" b="0" u="none" strike="noStrike">
-                <a:solidFill>
-                  <a:srgbClr val="FFFFFF">
-                    <a:alpha val="90000"/>
-                  </a:srgbClr>
-                </a:solidFill>
-                <a:uFillTx/>
-                <a:latin typeface="Noto Sans SC"/>
-                <a:ea typeface="Noto Sans SC"/>
-              </a:rPr>
-              <a:t>核心游戏开发</a:t>
-            </a:r>
-            <a:endParaRPr lang="en-US" sz="1400" b="0" u="none" strike="noStrike">
-              <a:solidFill>
-                <a:srgbClr val="FFFFFF"/>
-              </a:solidFill>
-              <a:uFillTx/>
-              <a:latin typeface="Noto Sans CJK SC"/>
-            </a:endParaRPr>
-          </a:p>
-        </p:txBody>
-      </p:sp>
-      <p:sp>
-        <p:nvSpPr>
-          <p:cNvPr id="259" name="AutoShape 15"/>
-          <p:cNvSpPr/>
-          <p:nvPr/>
-        </p:nvSpPr>
-        <p:spPr>
-          <a:xfrm>
-            <a:off x="3429000" y="2793960"/>
-            <a:ext cx="2412720" cy="75960"/>
-          </a:xfrm>
-          <a:prstGeom prst="roundRect">
-            <a:avLst>
-              <a:gd name="adj" fmla="val 0"/>
-            </a:avLst>
-          </a:prstGeom>
-          <a:solidFill>
-            <a:srgbClr val="FFFFFF">
-              <a:alpha val="15000"/>
-            </a:srgbClr>
-          </a:solidFill>
-          <a:ln w="25400">
-            <a:noFill/>
-          </a:ln>
-        </p:spPr>
-        <p:style>
-          <a:lnRef idx="0">
-            <a:scrgbClr r="0" g="0" b="0"/>
-          </a:lnRef>
-          <a:fillRef idx="0">
-            <a:scrgbClr r="0" g="0" b="0"/>
-          </a:fillRef>
-          <a:effectRef idx="0">
-            <a:scrgbClr r="0" g="0" b="0"/>
-          </a:effectRef>
-          <a:fontRef idx="minor"/>
-        </p:style>
-        <p:txBody>
-          <a:bodyPr lIns="63360" tIns="38160" rIns="63360" bIns="38160" anchor="ctr">
-            <a:noAutofit/>
-          </a:bodyPr>
-          <a:lstStyle/>
-          <a:p>
-            <a:pPr algn="ctr">
-              <a:lnSpc>
-                <a:spcPct val="100000"/>
-              </a:lnSpc>
-            </a:pPr>
-            <a:endParaRPr lang="en-US" sz="1400" b="0" u="none" strike="noStrike">
-              <a:solidFill>
-                <a:srgbClr val="000000"/>
-              </a:solidFill>
-              <a:uFillTx/>
-              <a:latin typeface="Arial"/>
-              <a:ea typeface="Arial"/>
-            </a:endParaRPr>
-          </a:p>
-        </p:txBody>
-      </p:sp>
-      <p:sp>
-        <p:nvSpPr>
-          <p:cNvPr id="260" name="AutoShape 16"/>
-          <p:cNvSpPr/>
-          <p:nvPr/>
-        </p:nvSpPr>
-        <p:spPr>
-          <a:xfrm>
-            <a:off x="3429000" y="2793960"/>
-            <a:ext cx="2412720" cy="75960"/>
-          </a:xfrm>
-          <a:prstGeom prst="roundRect">
-            <a:avLst>
-              <a:gd name="adj" fmla="val 0"/>
-            </a:avLst>
-          </a:prstGeom>
-          <a:solidFill>
-            <a:srgbClr val="2BD1FC"/>
-          </a:solidFill>
-          <a:ln w="25400">
-            <a:noFill/>
-          </a:ln>
-        </p:spPr>
-        <p:style>
-          <a:lnRef idx="0">
-            <a:scrgbClr r="0" g="0" b="0"/>
-          </a:lnRef>
-          <a:fillRef idx="0">
-            <a:scrgbClr r="0" g="0" b="0"/>
-          </a:fillRef>
-          <a:effectRef idx="0">
-            <a:scrgbClr r="0" g="0" b="0"/>
-          </a:effectRef>
-          <a:fontRef idx="minor"/>
-        </p:style>
-        <p:txBody>
-          <a:bodyPr lIns="63360" tIns="38160" rIns="63360" bIns="38160" anchor="ctr">
-            <a:noAutofit/>
-          </a:bodyPr>
-          <a:lstStyle/>
-          <a:p>
-            <a:pPr algn="ctr">
-              <a:lnSpc>
-                <a:spcPct val="100000"/>
-              </a:lnSpc>
-            </a:pPr>
-            <a:endParaRPr lang="en-US" sz="1400" b="0" u="none" strike="noStrike">
-              <a:solidFill>
-                <a:srgbClr val="000000"/>
-              </a:solidFill>
-              <a:uFillTx/>
-              <a:latin typeface="Arial"/>
-              <a:ea typeface="Arial"/>
-            </a:endParaRPr>
-          </a:p>
-        </p:txBody>
-      </p:sp>
-      <p:sp>
-        <p:nvSpPr>
-          <p:cNvPr id="261" name="AutoShape 17"/>
-          <p:cNvSpPr/>
-          <p:nvPr/>
-        </p:nvSpPr>
-        <p:spPr>
-          <a:xfrm>
-            <a:off x="3429000" y="2984400"/>
-            <a:ext cx="2412720" cy="571320"/>
-          </a:xfrm>
-          <a:prstGeom prst="rect">
-            <a:avLst/>
-          </a:prstGeom>
-          <a:noFill/>
-          <a:ln w="12700">
-            <a:noFill/>
-          </a:ln>
-        </p:spPr>
-        <p:style>
-          <a:lnRef idx="0">
-            <a:scrgbClr r="0" g="0" b="0"/>
-          </a:lnRef>
-          <a:fillRef idx="0">
-            <a:scrgbClr r="0" g="0" b="0"/>
-          </a:fillRef>
-          <a:effectRef idx="0">
-            <a:scrgbClr r="0" g="0" b="0"/>
-          </a:effectRef>
-          <a:fontRef idx="minor"/>
-        </p:style>
-        <p:txBody>
-          <a:bodyPr lIns="0" tIns="0" rIns="0" bIns="0" anchor="ctr">
-            <a:noAutofit/>
-          </a:bodyPr>
-          <a:lstStyle/>
-          <a:p>
-            <a:pPr>
-              <a:lnSpc>
-                <a:spcPct val="100000"/>
-              </a:lnSpc>
-              <a:tabLst>
-                <a:tab pos="0" algn="l"/>
-              </a:tabLst>
-            </a:pPr>
-            <a:r>
-              <a:rPr lang="zh-CN" sz="1200" b="0" u="none" strike="noStrike">
-                <a:solidFill>
-                  <a:srgbClr val="FFFFFF">
-                    <a:alpha val="60000"/>
-                  </a:srgbClr>
-                </a:solidFill>
-                <a:uFillTx/>
-                <a:latin typeface="Noto Sans SC"/>
-                <a:ea typeface="Noto Sans SC"/>
-              </a:rPr>
-              <a:t>李少华</a:t>
-            </a:r>
-            <a:r>
-              <a:rPr lang="en-US" sz="1200" b="0" u="none" strike="noStrike">
-                <a:solidFill>
-                  <a:srgbClr val="FFFFFF">
-                    <a:alpha val="60000"/>
-                  </a:srgbClr>
-                </a:solidFill>
-                <a:uFillTx/>
-                <a:latin typeface="Noto Sans SC"/>
-                <a:ea typeface="Noto Sans SC"/>
-              </a:rPr>
-              <a:t>(5</a:t>
-            </a:r>
-            <a:r>
-              <a:rPr lang="zh-CN" sz="1200" b="0" u="none" strike="noStrike">
-                <a:solidFill>
-                  <a:srgbClr val="FFFFFF">
-                    <a:alpha val="60000"/>
-                  </a:srgbClr>
-                </a:solidFill>
-                <a:uFillTx/>
-                <a:latin typeface="Noto Sans SC"/>
-                <a:ea typeface="Noto Sans SC"/>
-              </a:rPr>
-              <a:t>款</a:t>
-            </a:r>
-            <a:r>
-              <a:rPr lang="en-US" sz="1200" b="0" u="none" strike="noStrike">
-                <a:solidFill>
-                  <a:srgbClr val="FFFFFF">
-                    <a:alpha val="60000"/>
-                  </a:srgbClr>
-                </a:solidFill>
-                <a:uFillTx/>
-                <a:latin typeface="Noto Sans SC"/>
-                <a:ea typeface="Noto Sans SC"/>
-              </a:rPr>
-              <a:t>)+</a:t>
-            </a:r>
-            <a:r>
-              <a:rPr lang="zh-CN" sz="1200" b="0" u="none" strike="noStrike">
-                <a:solidFill>
-                  <a:srgbClr val="FFFFFF">
-                    <a:alpha val="60000"/>
-                  </a:srgbClr>
-                </a:solidFill>
-                <a:uFillTx/>
-                <a:latin typeface="Noto Sans SC"/>
-                <a:ea typeface="Noto Sans SC"/>
-              </a:rPr>
-              <a:t>李振豪</a:t>
-            </a:r>
-            <a:r>
-              <a:rPr lang="en-US" sz="1200" b="0" u="none" strike="noStrike">
-                <a:solidFill>
-                  <a:srgbClr val="FFFFFF">
-                    <a:alpha val="60000"/>
-                  </a:srgbClr>
-                </a:solidFill>
-                <a:uFillTx/>
-                <a:latin typeface="Noto Sans SC"/>
-                <a:ea typeface="Noto Sans SC"/>
-              </a:rPr>
-              <a:t>(2</a:t>
-            </a:r>
-            <a:r>
-              <a:rPr lang="zh-CN" sz="1200" b="0" u="none" strike="noStrike">
-                <a:solidFill>
-                  <a:srgbClr val="FFFFFF">
-                    <a:alpha val="60000"/>
-                  </a:srgbClr>
-                </a:solidFill>
-                <a:uFillTx/>
-                <a:latin typeface="Noto Sans SC"/>
-                <a:ea typeface="Noto Sans SC"/>
-              </a:rPr>
-              <a:t>款</a:t>
-            </a:r>
-            <a:r>
-              <a:rPr lang="en-US" sz="1200" b="0" u="none" strike="noStrike">
-                <a:solidFill>
-                  <a:srgbClr val="FFFFFF">
-                    <a:alpha val="60000"/>
-                  </a:srgbClr>
-                </a:solidFill>
-                <a:uFillTx/>
-                <a:latin typeface="Noto Sans SC"/>
-                <a:ea typeface="Noto Sans SC"/>
-              </a:rPr>
-              <a:t>)</a:t>
-            </a:r>
-            <a:r>
-              <a:rPr lang="zh-CN" sz="1200" b="0" u="none" strike="noStrike">
-                <a:solidFill>
-                  <a:srgbClr val="FFFFFF">
-                    <a:alpha val="60000"/>
-                  </a:srgbClr>
-                </a:solidFill>
-                <a:uFillTx/>
-                <a:latin typeface="Noto Sans SC"/>
-                <a:ea typeface="Noto Sans SC"/>
-              </a:rPr>
-              <a:t>完成全部游戏逻辑编写，功能验收通过 </a:t>
-            </a:r>
-            <a:r>
-              <a:rPr lang="en-US" sz="1200" b="0" u="none" strike="noStrike">
-                <a:solidFill>
-                  <a:srgbClr val="FFFFFF">
-                    <a:alpha val="60000"/>
-                  </a:srgbClr>
-                </a:solidFill>
-                <a:uFillTx/>
-                <a:latin typeface="Noto Sans SC"/>
-                <a:ea typeface="Noto Sans SC"/>
-              </a:rPr>
-              <a:t>(100%)</a:t>
-            </a:r>
-            <a:endParaRPr lang="en-US" sz="1200" b="0" u="none" strike="noStrike">
-              <a:solidFill>
-                <a:srgbClr val="FFFFFF"/>
-              </a:solidFill>
-              <a:uFillTx/>
-              <a:latin typeface="Noto Sans CJK SC"/>
-            </a:endParaRPr>
-          </a:p>
-        </p:txBody>
-      </p:sp>
-      <p:sp>
-        <p:nvSpPr>
-          <p:cNvPr id="262" name="AutoShape 18"/>
-          <p:cNvSpPr/>
-          <p:nvPr/>
-        </p:nvSpPr>
-        <p:spPr>
-          <a:xfrm>
-            <a:off x="3429000" y="3809880"/>
-            <a:ext cx="2412720" cy="304560"/>
-          </a:xfrm>
-          <a:prstGeom prst="rect">
-            <a:avLst/>
-          </a:prstGeom>
-          <a:noFill/>
-          <a:ln w="12700">
-            <a:noFill/>
-          </a:ln>
-        </p:spPr>
-        <p:style>
-          <a:lnRef idx="0">
-            <a:scrgbClr r="0" g="0" b="0"/>
-          </a:lnRef>
-          <a:fillRef idx="0">
-            <a:scrgbClr r="0" g="0" b="0"/>
-          </a:fillRef>
-          <a:effectRef idx="0">
-            <a:scrgbClr r="0" g="0" b="0"/>
-          </a:effectRef>
-          <a:fontRef idx="minor"/>
-        </p:style>
-        <p:txBody>
-          <a:bodyPr lIns="0" tIns="0" rIns="0" bIns="0" anchor="ctr">
-            <a:noAutofit/>
-          </a:bodyPr>
-          <a:lstStyle/>
-          <a:p>
-            <a:pPr>
-              <a:lnSpc>
-                <a:spcPct val="125000"/>
-              </a:lnSpc>
-              <a:tabLst>
-                <a:tab pos="0" algn="l"/>
-              </a:tabLst>
-            </a:pPr>
-            <a:r>
-              <a:rPr lang="zh-CN" sz="1400" b="0" u="none" strike="noStrike">
-                <a:solidFill>
-                  <a:srgbClr val="FFFFFF">
-                    <a:alpha val="90000"/>
-                  </a:srgbClr>
-                </a:solidFill>
-                <a:uFillTx/>
-                <a:latin typeface="Noto Sans SC"/>
-                <a:ea typeface="Noto Sans SC"/>
-              </a:rPr>
-              <a:t>项目代码整合</a:t>
-            </a:r>
-            <a:endParaRPr lang="en-US" sz="1400" b="0" u="none" strike="noStrike">
-              <a:solidFill>
-                <a:srgbClr val="FFFFFF"/>
-              </a:solidFill>
-              <a:uFillTx/>
-              <a:latin typeface="Noto Sans CJK SC"/>
-            </a:endParaRPr>
-          </a:p>
-        </p:txBody>
-      </p:sp>
-      <p:sp>
-        <p:nvSpPr>
-          <p:cNvPr id="263" name="AutoShape 19"/>
-          <p:cNvSpPr/>
-          <p:nvPr/>
-        </p:nvSpPr>
-        <p:spPr>
-          <a:xfrm>
-            <a:off x="3429000" y="4191120"/>
-            <a:ext cx="2412720" cy="75960"/>
-          </a:xfrm>
-          <a:prstGeom prst="roundRect">
-            <a:avLst>
-              <a:gd name="adj" fmla="val 0"/>
-            </a:avLst>
-          </a:prstGeom>
-          <a:solidFill>
-            <a:srgbClr val="FFFFFF">
-              <a:alpha val="15000"/>
-            </a:srgbClr>
-          </a:solidFill>
-          <a:ln w="25400">
-            <a:noFill/>
-          </a:ln>
-        </p:spPr>
-        <p:style>
-          <a:lnRef idx="0">
-            <a:scrgbClr r="0" g="0" b="0"/>
-          </a:lnRef>
-          <a:fillRef idx="0">
-            <a:scrgbClr r="0" g="0" b="0"/>
-          </a:fillRef>
-          <a:effectRef idx="0">
-            <a:scrgbClr r="0" g="0" b="0"/>
-          </a:effectRef>
-          <a:fontRef idx="minor"/>
-        </p:style>
-        <p:txBody>
-          <a:bodyPr lIns="63360" tIns="38160" rIns="63360" bIns="38160" anchor="ctr">
-            <a:noAutofit/>
-          </a:bodyPr>
-          <a:lstStyle/>
-          <a:p>
-            <a:pPr algn="ctr">
-              <a:lnSpc>
-                <a:spcPct val="100000"/>
-              </a:lnSpc>
-            </a:pPr>
-            <a:endParaRPr lang="en-US" sz="1400" b="0" u="none" strike="noStrike">
-              <a:solidFill>
-                <a:srgbClr val="000000"/>
-              </a:solidFill>
-              <a:uFillTx/>
-              <a:latin typeface="Arial"/>
-              <a:ea typeface="Arial"/>
-            </a:endParaRPr>
-          </a:p>
-        </p:txBody>
-      </p:sp>
-      <p:sp>
-        <p:nvSpPr>
-          <p:cNvPr id="264" name="AutoShape 20"/>
-          <p:cNvSpPr/>
-          <p:nvPr/>
-        </p:nvSpPr>
-        <p:spPr>
-          <a:xfrm>
-            <a:off x="3429000" y="4191120"/>
-            <a:ext cx="1929960" cy="75960"/>
-          </a:xfrm>
-          <a:prstGeom prst="roundRect">
-            <a:avLst>
-              <a:gd name="adj" fmla="val 0"/>
-            </a:avLst>
-          </a:prstGeom>
-          <a:solidFill>
-            <a:srgbClr val="2BD1FC">
-              <a:alpha val="80000"/>
-            </a:srgbClr>
-          </a:solidFill>
-          <a:ln w="25400">
-            <a:noFill/>
-          </a:ln>
-        </p:spPr>
-        <p:style>
-          <a:lnRef idx="0">
-            <a:scrgbClr r="0" g="0" b="0"/>
-          </a:lnRef>
-          <a:fillRef idx="0">
-            <a:scrgbClr r="0" g="0" b="0"/>
-          </a:fillRef>
-          <a:effectRef idx="0">
-            <a:scrgbClr r="0" g="0" b="0"/>
-          </a:effectRef>
-          <a:fontRef idx="minor"/>
-        </p:style>
-        <p:txBody>
-          <a:bodyPr lIns="63360" tIns="38160" rIns="63360" bIns="38160" anchor="ctr">
-            <a:noAutofit/>
-          </a:bodyPr>
-          <a:lstStyle/>
-          <a:p>
-            <a:pPr algn="ctr">
-              <a:lnSpc>
-                <a:spcPct val="100000"/>
-              </a:lnSpc>
-            </a:pPr>
-            <a:endParaRPr lang="en-US" sz="1400" b="0" u="none" strike="noStrike">
-              <a:solidFill>
-                <a:srgbClr val="000000"/>
-              </a:solidFill>
-              <a:uFillTx/>
-              <a:latin typeface="Arial"/>
-              <a:ea typeface="Arial"/>
-            </a:endParaRPr>
-          </a:p>
-        </p:txBody>
-      </p:sp>
-      <p:sp>
-        <p:nvSpPr>
-          <p:cNvPr id="265" name="AutoShape 21"/>
-          <p:cNvSpPr/>
-          <p:nvPr/>
-        </p:nvSpPr>
-        <p:spPr>
-          <a:xfrm>
-            <a:off x="3429000" y="4381560"/>
-            <a:ext cx="2412720" cy="571320"/>
-          </a:xfrm>
-          <a:prstGeom prst="rect">
-            <a:avLst/>
-          </a:prstGeom>
-          <a:noFill/>
-          <a:ln w="12700">
-            <a:noFill/>
-          </a:ln>
-        </p:spPr>
-        <p:style>
-          <a:lnRef idx="0">
-            <a:scrgbClr r="0" g="0" b="0"/>
-          </a:lnRef>
-          <a:fillRef idx="0">
-            <a:scrgbClr r="0" g="0" b="0"/>
-          </a:fillRef>
-          <a:effectRef idx="0">
-            <a:scrgbClr r="0" g="0" b="0"/>
-          </a:effectRef>
-          <a:fontRef idx="minor"/>
-        </p:style>
-        <p:txBody>
-          <a:bodyPr lIns="0" tIns="0" rIns="0" bIns="0" anchor="ctr">
-            <a:noAutofit/>
-          </a:bodyPr>
-          <a:lstStyle/>
-          <a:p>
-            <a:pPr>
-              <a:lnSpc>
-                <a:spcPct val="100000"/>
-              </a:lnSpc>
-              <a:tabLst>
-                <a:tab pos="0" algn="l"/>
-              </a:tabLst>
-            </a:pPr>
-            <a:r>
-              <a:rPr lang="zh-CN" sz="1200" b="0" u="none" strike="noStrike">
-                <a:solidFill>
-                  <a:srgbClr val="FFFFFF">
-                    <a:alpha val="60000"/>
-                  </a:srgbClr>
-                </a:solidFill>
-                <a:uFillTx/>
-                <a:latin typeface="Noto Sans SC"/>
-                <a:ea typeface="Noto Sans SC"/>
-              </a:rPr>
-              <a:t>李想负责模块对接与仓库管理，联调阶段进行中，整体进度已达</a:t>
-            </a:r>
-            <a:r>
-              <a:rPr lang="en-US" sz="1200" b="0" u="none" strike="noStrike">
-                <a:solidFill>
-                  <a:srgbClr val="FFFFFF">
-                    <a:alpha val="60000"/>
-                  </a:srgbClr>
-                </a:solidFill>
-                <a:uFillTx/>
-                <a:latin typeface="Noto Sans SC"/>
-                <a:ea typeface="Noto Sans SC"/>
-              </a:rPr>
-              <a:t>80%</a:t>
-            </a:r>
-            <a:r>
-              <a:rPr lang="zh-CN" sz="1200" b="0" u="none" strike="noStrike">
-                <a:solidFill>
-                  <a:srgbClr val="FFFFFF">
-                    <a:alpha val="60000"/>
-                  </a:srgbClr>
-                </a:solidFill>
-                <a:uFillTx/>
-                <a:latin typeface="Noto Sans SC"/>
-                <a:ea typeface="Noto Sans SC"/>
-              </a:rPr>
-              <a:t>。</a:t>
-            </a:r>
-            <a:endParaRPr lang="en-US" sz="1200" b="0" u="none" strike="noStrike">
-              <a:solidFill>
-                <a:srgbClr val="FFFFFF"/>
-              </a:solidFill>
-              <a:uFillTx/>
-              <a:latin typeface="Noto Sans CJK SC"/>
-            </a:endParaRPr>
-          </a:p>
-        </p:txBody>
-      </p:sp>
-      <p:sp>
-        <p:nvSpPr>
-          <p:cNvPr id="266" name="AutoShape 22"/>
-          <p:cNvSpPr/>
-          <p:nvPr/>
-        </p:nvSpPr>
-        <p:spPr>
-          <a:xfrm>
-            <a:off x="762120" y="5460840"/>
-            <a:ext cx="5079600" cy="761760"/>
-          </a:xfrm>
-          <a:prstGeom prst="roundRect">
-            <a:avLst>
-              <a:gd name="adj" fmla="val 0"/>
-            </a:avLst>
-          </a:prstGeom>
-          <a:solidFill>
-            <a:srgbClr val="2BD1FC">
-              <a:alpha val="10000"/>
-            </a:srgbClr>
-          </a:solidFill>
-          <a:ln w="12700">
-            <a:solidFill>
-              <a:srgbClr val="2BD1FC">
-                <a:alpha val="30000"/>
-              </a:srgbClr>
-            </a:solidFill>
-            <a:round/>
-          </a:ln>
-        </p:spPr>
-        <p:style>
-          <a:lnRef idx="0">
-            <a:scrgbClr r="0" g="0" b="0"/>
-          </a:lnRef>
-          <a:fillRef idx="0">
-            <a:scrgbClr r="0" g="0" b="0"/>
-          </a:fillRef>
-          <a:effectRef idx="0">
-            <a:scrgbClr r="0" g="0" b="0"/>
-          </a:effectRef>
-          <a:fontRef idx="minor"/>
-        </p:style>
-        <p:txBody>
-          <a:bodyPr lIns="63360" tIns="63360" rIns="63360" bIns="63360" anchor="ctr">
-            <a:noAutofit/>
-          </a:bodyPr>
-          <a:lstStyle/>
-          <a:p>
-            <a:pPr algn="ctr">
-              <a:lnSpc>
-                <a:spcPct val="100000"/>
-              </a:lnSpc>
-            </a:pPr>
-            <a:endParaRPr lang="en-US" sz="1400" b="0" u="none" strike="noStrike">
-              <a:solidFill>
-                <a:srgbClr val="000000"/>
-              </a:solidFill>
-              <a:uFillTx/>
-              <a:latin typeface="Arial"/>
-              <a:ea typeface="Arial"/>
-            </a:endParaRPr>
-          </a:p>
-        </p:txBody>
-      </p:sp>
-      <p:sp>
-        <p:nvSpPr>
-          <p:cNvPr id="267" name="AutoShape 23"/>
-          <p:cNvSpPr/>
-          <p:nvPr/>
-        </p:nvSpPr>
-        <p:spPr>
-          <a:xfrm>
-            <a:off x="888840" y="5562720"/>
-            <a:ext cx="4825800" cy="558360"/>
-          </a:xfrm>
-          <a:prstGeom prst="rect">
-            <a:avLst/>
-          </a:prstGeom>
-          <a:noFill/>
-          <a:ln w="12700">
-            <a:noFill/>
-          </a:ln>
-        </p:spPr>
-        <p:style>
-          <a:lnRef idx="0">
-            <a:scrgbClr r="0" g="0" b="0"/>
-          </a:lnRef>
-          <a:fillRef idx="0">
-            <a:scrgbClr r="0" g="0" b="0"/>
-          </a:fillRef>
-          <a:effectRef idx="0">
-            <a:scrgbClr r="0" g="0" b="0"/>
-          </a:effectRef>
-          <a:fontRef idx="minor"/>
-        </p:style>
-        <p:txBody>
-          <a:bodyPr lIns="0" tIns="0" rIns="0" bIns="0" anchor="ctr">
-            <a:noAutofit/>
-          </a:bodyPr>
-          <a:lstStyle/>
-          <a:p>
-            <a:pPr>
-              <a:lnSpc>
-                <a:spcPct val="108000"/>
-              </a:lnSpc>
-              <a:tabLst>
-                <a:tab pos="0" algn="l"/>
-              </a:tabLst>
-            </a:pPr>
-            <a:r>
-              <a:rPr lang="zh-CN" sz="1300" b="1" u="none" strike="noStrike">
-                <a:solidFill>
-                  <a:srgbClr val="FFFFFF"/>
-                </a:solidFill>
-                <a:uFillTx/>
-                <a:latin typeface="Noto Sans SC"/>
-                <a:ea typeface="Noto Sans SC"/>
-              </a:rPr>
-              <a:t>待启动任务：文档与</a:t>
-            </a:r>
-            <a:r>
-              <a:rPr lang="en-US" sz="1300" b="1" u="none" strike="noStrike">
-                <a:solidFill>
-                  <a:srgbClr val="FFFFFF"/>
-                </a:solidFill>
-                <a:uFillTx/>
-                <a:latin typeface="Noto Sans SC"/>
-                <a:ea typeface="Noto Sans SC"/>
-              </a:rPr>
-              <a:t>PPT</a:t>
-            </a:r>
-            <a:r>
-              <a:rPr lang="zh-CN" sz="1300" b="1" u="none" strike="noStrike">
-                <a:solidFill>
-                  <a:srgbClr val="FFFFFF"/>
-                </a:solidFill>
-                <a:uFillTx/>
-                <a:latin typeface="Noto Sans SC"/>
-                <a:ea typeface="Noto Sans SC"/>
-              </a:rPr>
-              <a:t>制作 </a:t>
-            </a:r>
-            <a:r>
-              <a:rPr lang="en-US" sz="1300" b="1" u="none" strike="noStrike">
-                <a:solidFill>
-                  <a:srgbClr val="FFFFFF"/>
-                </a:solidFill>
-                <a:uFillTx/>
-                <a:latin typeface="Noto Sans SC"/>
-                <a:ea typeface="Noto Sans SC"/>
-              </a:rPr>
-              <a:t>(</a:t>
-            </a:r>
-            <a:r>
-              <a:rPr lang="zh-CN" sz="1300" b="1" u="none" strike="noStrike">
-                <a:solidFill>
-                  <a:srgbClr val="FFFFFF"/>
-                </a:solidFill>
-                <a:uFillTx/>
-                <a:latin typeface="Noto Sans SC"/>
-                <a:ea typeface="Noto Sans SC"/>
-              </a:rPr>
-              <a:t>负责人：贾耀翔、王一鑫</a:t>
-            </a:r>
-            <a:r>
-              <a:rPr lang="en-US" sz="1300" b="1" u="none" strike="noStrike">
-                <a:solidFill>
-                  <a:srgbClr val="FFFFFF"/>
-                </a:solidFill>
-                <a:uFillTx/>
-                <a:latin typeface="Noto Sans SC"/>
-                <a:ea typeface="Noto Sans SC"/>
-              </a:rPr>
-              <a:t>)</a:t>
-            </a:r>
-            <a:br>
-              <a:rPr sz="1600"/>
-            </a:br>
-            <a:r>
-              <a:rPr lang="zh-CN" sz="1200" b="0" u="none" strike="noStrike">
-                <a:solidFill>
-                  <a:srgbClr val="FFFFFF">
-                    <a:alpha val="70000"/>
-                  </a:srgbClr>
-                </a:solidFill>
-                <a:uFillTx/>
-                <a:latin typeface="Noto Sans SC"/>
-                <a:ea typeface="Noto Sans SC"/>
-              </a:rPr>
-              <a:t>当前进度 </a:t>
-            </a:r>
-            <a:r>
-              <a:rPr lang="en-US" sz="1200" b="0" u="none" strike="noStrike">
-                <a:solidFill>
-                  <a:srgbClr val="FFFFFF">
-                    <a:alpha val="70000"/>
-                  </a:srgbClr>
-                </a:solidFill>
-                <a:uFillTx/>
-                <a:latin typeface="Noto Sans SC"/>
-                <a:ea typeface="Noto Sans SC"/>
-              </a:rPr>
-              <a:t>0%</a:t>
-            </a:r>
-            <a:r>
-              <a:rPr lang="zh-CN" sz="1200" b="0" u="none" strike="noStrike">
-                <a:solidFill>
-                  <a:srgbClr val="FFFFFF">
-                    <a:alpha val="70000"/>
-                  </a:srgbClr>
-                </a:solidFill>
-                <a:uFillTx/>
-                <a:latin typeface="Noto Sans SC"/>
-                <a:ea typeface="Noto Sans SC"/>
-              </a:rPr>
-              <a:t>，计划代码整合完毕后启动，需输出需求文档、项目说明</a:t>
-            </a:r>
-            <a:r>
-              <a:rPr lang="en-US" sz="1200" b="0" u="none" strike="noStrike">
-                <a:solidFill>
-                  <a:srgbClr val="FFFFFF">
-                    <a:alpha val="70000"/>
-                  </a:srgbClr>
-                </a:solidFill>
-                <a:uFillTx/>
-                <a:latin typeface="Noto Sans SC"/>
-                <a:ea typeface="Noto Sans SC"/>
-              </a:rPr>
-              <a:t>PPT</a:t>
-            </a:r>
-            <a:r>
-              <a:rPr lang="zh-CN" sz="1200" b="0" u="none" strike="noStrike">
-                <a:solidFill>
-                  <a:srgbClr val="FFFFFF">
-                    <a:alpha val="70000"/>
-                  </a:srgbClr>
-                </a:solidFill>
-                <a:uFillTx/>
-                <a:latin typeface="Noto Sans SC"/>
-                <a:ea typeface="Noto Sans SC"/>
-              </a:rPr>
-              <a:t>及演示素材。</a:t>
-            </a:r>
-            <a:endParaRPr lang="en-US" sz="1200" b="0" u="none" strike="noStrike">
-              <a:solidFill>
-                <a:srgbClr val="FFFFFF"/>
-              </a:solidFill>
-              <a:uFillTx/>
-              <a:latin typeface="Noto Sans CJK SC"/>
-            </a:endParaRPr>
-          </a:p>
-        </p:txBody>
-      </p:sp>
-      <p:sp>
-        <p:nvSpPr>
-          <p:cNvPr id="268" name="AutoShape 24"/>
-          <p:cNvSpPr/>
-          <p:nvPr/>
-        </p:nvSpPr>
-        <p:spPr>
-          <a:xfrm>
-            <a:off x="6477120" y="1650960"/>
-            <a:ext cx="5079600" cy="380520"/>
-          </a:xfrm>
-          <a:prstGeom prst="rect">
-            <a:avLst/>
-          </a:prstGeom>
-          <a:noFill/>
-          <a:ln w="12700">
-            <a:noFill/>
-          </a:ln>
-        </p:spPr>
-        <p:style>
-          <a:lnRef idx="0">
-            <a:scrgbClr r="0" g="0" b="0"/>
-          </a:lnRef>
-          <a:fillRef idx="0">
-            <a:scrgbClr r="0" g="0" b="0"/>
-          </a:fillRef>
-          <a:effectRef idx="0">
-            <a:scrgbClr r="0" g="0" b="0"/>
-          </a:effectRef>
-          <a:fontRef idx="minor"/>
-        </p:style>
-        <p:txBody>
-          <a:bodyPr lIns="0" tIns="0" rIns="0" bIns="0" anchor="ctr">
-            <a:noAutofit/>
-          </a:bodyPr>
-          <a:lstStyle/>
-          <a:p>
-            <a:pPr>
-              <a:lnSpc>
-                <a:spcPct val="125000"/>
-              </a:lnSpc>
-              <a:tabLst>
-                <a:tab pos="0" algn="l"/>
-              </a:tabLst>
-            </a:pPr>
-            <a:r>
-              <a:rPr lang="en-US" sz="2000" b="1" u="none" strike="noStrike">
-                <a:solidFill>
-                  <a:srgbClr val="2BD1FC"/>
-                </a:solidFill>
-                <a:uFillTx/>
-                <a:latin typeface="Noto Sans SC"/>
-                <a:ea typeface="Noto Sans SC"/>
-              </a:rPr>
-              <a:t>▍ </a:t>
-            </a:r>
-            <a:r>
-              <a:rPr lang="zh-CN" sz="2000" b="1" u="none" strike="noStrike">
-                <a:solidFill>
-                  <a:srgbClr val="2BD1FC"/>
-                </a:solidFill>
-                <a:uFillTx/>
-                <a:latin typeface="Noto Sans SC"/>
-                <a:ea typeface="Noto Sans SC"/>
-              </a:rPr>
-              <a:t>关键里程碑推进计划</a:t>
-            </a:r>
-            <a:endParaRPr lang="en-US" sz="2000" b="0" u="none" strike="noStrike">
-              <a:solidFill>
-                <a:srgbClr val="FFFFFF"/>
-              </a:solidFill>
-              <a:uFillTx/>
-              <a:latin typeface="Noto Sans CJK SC"/>
-            </a:endParaRPr>
-          </a:p>
-        </p:txBody>
-      </p:sp>
-      <p:sp>
-        <p:nvSpPr>
-          <p:cNvPr id="269" name="AutoShape 25"/>
-          <p:cNvSpPr/>
-          <p:nvPr/>
-        </p:nvSpPr>
-        <p:spPr>
-          <a:xfrm>
-            <a:off x="6477120" y="2413080"/>
-            <a:ext cx="1714320" cy="1714320"/>
+            <a:off x="762120" y="1778040"/>
+            <a:ext cx="5270040" cy="3682800"/>
           </a:xfrm>
           <a:prstGeom prst="roundRect">
             <a:avLst>
@@ -11077,7 +9064,7 @@
       </p:sp>
       <p:pic>
         <p:nvPicPr>
-          <p:cNvPr id="270" name="Picture 26"/>
+          <p:cNvPr id="326" name="Picture 5"/>
           <p:cNvPicPr/>
           <p:nvPr/>
         </p:nvPicPr>
@@ -11093,7 +9080,7 @@
         </p:blipFill>
         <p:spPr>
           <a:xfrm>
-            <a:off x="6603840" y="2540160"/>
+            <a:off x="1015920" y="1968480"/>
             <a:ext cx="304560" cy="304560"/>
           </a:xfrm>
           <a:prstGeom prst="rect">
@@ -11107,14 +9094,14 @@
       </p:pic>
       <p:sp>
         <p:nvSpPr>
-          <p:cNvPr id="271" name="AutoShape 27"/>
+          <p:cNvPr id="327" name="AutoShape 6"/>
           <p:cNvSpPr/>
           <p:nvPr/>
         </p:nvSpPr>
         <p:spPr>
           <a:xfrm>
-            <a:off x="6985080" y="2540160"/>
-            <a:ext cx="1142640" cy="304560"/>
+            <a:off x="1460520" y="1930320"/>
+            <a:ext cx="4317480" cy="380520"/>
           </a:xfrm>
           <a:prstGeom prst="rect">
             <a:avLst/>
@@ -11151,61 +9138,17 @@
               </a:tabLst>
             </a:pPr>
             <a:r>
-              <a:rPr lang="zh-CN" sz="1400" b="1" u="none" strike="noStrike">
-                <a:solidFill>
-                  <a:srgbClr val="FFFFFF"/>
-                </a:solidFill>
-                <a:uFillTx/>
-                <a:latin typeface="Noto Sans SC"/>
-                <a:ea typeface="Noto Sans SC"/>
-              </a:rPr>
-              <a:t>第</a:t>
-            </a:r>
-            <a:r>
-              <a:rPr lang="en-US" sz="1400" b="1" u="none" strike="noStrike">
-                <a:solidFill>
-                  <a:srgbClr val="FFFFFF"/>
-                </a:solidFill>
-                <a:uFillTx/>
-                <a:latin typeface="Noto Sans SC"/>
-                <a:ea typeface="Noto Sans SC"/>
-              </a:rPr>
-              <a:t>1</a:t>
-            </a:r>
-            <a:r>
-              <a:rPr lang="zh-CN" sz="1400" b="1" u="none" strike="noStrike">
-                <a:solidFill>
-                  <a:srgbClr val="FFFFFF"/>
-                </a:solidFill>
-                <a:uFillTx/>
-                <a:latin typeface="Noto Sans SC"/>
-                <a:ea typeface="Noto Sans SC"/>
-              </a:rPr>
-              <a:t>周 </a:t>
-            </a:r>
-            <a:r>
-              <a:rPr lang="en-US" sz="1400" b="1" u="none" strike="noStrike">
-                <a:solidFill>
-                  <a:srgbClr val="FFFFFF"/>
-                </a:solidFill>
-                <a:uFillTx/>
-                <a:latin typeface="Noto Sans SC"/>
-                <a:ea typeface="Noto Sans SC"/>
-              </a:rPr>
-              <a:t>· </a:t>
-            </a:r>
-            <a:r>
-              <a:rPr lang="zh-CN" sz="1400" b="1" u="none" strike="noStrike">
-                <a:solidFill>
-                  <a:srgbClr val="FFFFFF"/>
-                </a:solidFill>
-                <a:uFillTx/>
-                <a:latin typeface="Noto Sans SC"/>
-                <a:ea typeface="Noto Sans SC"/>
-              </a:rPr>
-              <a:t>界面</a:t>
-            </a:r>
-            <a:endParaRPr lang="en-US" sz="1400" b="0" u="none" strike="noStrike">
+              <a:rPr lang="zh-CN" sz="1800" b="1" u="none" strike="noStrike">
+                <a:solidFill>
+                  <a:srgbClr val="2BD1FC"/>
+                </a:solidFill>
+                <a:uFillTx/>
+                <a:latin typeface="Noto Sans SC"/>
+                <a:ea typeface="Noto Sans SC"/>
+              </a:rPr>
+              <a:t>模块化文件组织</a:t>
+            </a:r>
+            <a:endParaRPr lang="en-US" sz="1800" b="0" u="none" strike="noStrike">
               <a:solidFill>
                 <a:srgbClr val="FFFFFF"/>
               </a:solidFill>
@@ -11217,14 +9160,14 @@
       </p:sp>
       <p:cxnSp>
         <p:nvCxnSpPr>
-          <p:cNvPr id="272" name="Connector 28"/>
+          <p:cNvPr id="328" name="Connector 7"/>
           <p:cNvCxnSpPr/>
           <p:nvPr/>
         </p:nvCxnSpPr>
         <p:spPr>
           <a:xfrm>
-            <a:off x="6603840" y="3047760"/>
-            <a:ext cx="1460880" cy="360"/>
+            <a:off x="1015920" y="2539800"/>
+            <a:ext cx="4762800" cy="360"/>
           </a:xfrm>
           <a:prstGeom prst="straightConnector1">
             <a:avLst/>
@@ -11235,20 +9178,21 @@
                 <a:alpha val="15000"/>
               </a:srgbClr>
             </a:solidFill>
+            <a:prstDash val="dash"/>
             <a:round/>
           </a:ln>
         </p:spPr>
       </p:cxnSp>
       <p:sp>
         <p:nvSpPr>
-          <p:cNvPr id="273" name="AutoShape 29"/>
+          <p:cNvPr id="329" name="AutoShape 8"/>
           <p:cNvSpPr/>
           <p:nvPr/>
         </p:nvSpPr>
         <p:spPr>
           <a:xfrm>
-            <a:off x="6603840" y="3174840"/>
-            <a:ext cx="1460160" cy="825120"/>
+            <a:off x="1015920" y="2793960"/>
+            <a:ext cx="4762080" cy="2412720"/>
           </a:xfrm>
           <a:prstGeom prst="rect">
             <a:avLst/>
@@ -11278,94 +9222,190 @@
           <a:p>
             <a:pPr>
               <a:lnSpc>
-                <a:spcPct val="108000"/>
+                <a:spcPct val="125000"/>
               </a:lnSpc>
               <a:tabLst>
                 <a:tab pos="0" algn="l"/>
               </a:tabLst>
             </a:pPr>
             <a:r>
-              <a:rPr lang="zh-CN" sz="1100" b="0" u="none" strike="noStrike">
+              <a:rPr lang="zh-CN" sz="1400" b="0" u="none" strike="noStrike">
+                <a:solidFill>
+                  <a:srgbClr val="E2E8F0"/>
+                </a:solidFill>
+                <a:uFillTx/>
+                <a:latin typeface="Noto Sans SC"/>
+                <a:ea typeface="Noto Sans SC"/>
+              </a:rPr>
+              <a:t>以</a:t>
+            </a:r>
+            <a:r>
+              <a:rPr lang="en-US" sz="1400" b="1" u="none" strike="noStrike">
+                <a:solidFill>
+                  <a:srgbClr val="E2E8F0"/>
+                </a:solidFill>
+                <a:uFillTx/>
+                <a:latin typeface="Noto Sans SC"/>
+                <a:ea typeface="Noto Sans SC"/>
+              </a:rPr>
+              <a:t>game-hub/</a:t>
+            </a:r>
+            <a:r>
+              <a:rPr lang="zh-CN" sz="1400" b="0" u="none" strike="noStrike">
+                <a:solidFill>
+                  <a:srgbClr val="E2E8F0"/>
+                </a:solidFill>
+                <a:uFillTx/>
+                <a:latin typeface="Noto Sans SC"/>
+                <a:ea typeface="Noto Sans SC"/>
+              </a:rPr>
+              <a:t>为根目录，入口文件</a:t>
+            </a:r>
+            <a:r>
+              <a:rPr lang="en-US" sz="1400" b="1" u="none" strike="noStrike">
+                <a:solidFill>
+                  <a:srgbClr val="E2E8F0"/>
+                </a:solidFill>
+                <a:uFillTx/>
+                <a:latin typeface="Noto Sans SC"/>
+                <a:ea typeface="Noto Sans SC"/>
+              </a:rPr>
+              <a:t>index.html</a:t>
+            </a:r>
+            <a:r>
+              <a:rPr lang="zh-CN" sz="1400" b="0" u="none" strike="noStrike">
+                <a:solidFill>
+                  <a:srgbClr val="E2E8F0"/>
+                </a:solidFill>
+                <a:uFillTx/>
+                <a:latin typeface="Noto Sans SC"/>
+                <a:ea typeface="Noto Sans SC"/>
+              </a:rPr>
+              <a:t>作为游戏回廊，统一调度所有游戏模块。每个游戏均为独立 </a:t>
+            </a:r>
+            <a:r>
+              <a:rPr lang="en-US" sz="1400" b="0" u="none" strike="noStrike">
+                <a:solidFill>
+                  <a:srgbClr val="E2E8F0"/>
+                </a:solidFill>
+                <a:uFillTx/>
+                <a:latin typeface="Noto Sans SC"/>
+                <a:ea typeface="Noto Sans SC"/>
+              </a:rPr>
+              <a:t>HTML </a:t>
+            </a:r>
+            <a:r>
+              <a:rPr lang="zh-CN" sz="1400" b="0" u="none" strike="noStrike">
+                <a:solidFill>
+                  <a:srgbClr val="E2E8F0"/>
+                </a:solidFill>
+                <a:uFillTx/>
+                <a:latin typeface="Noto Sans SC"/>
+                <a:ea typeface="Noto Sans SC"/>
+              </a:rPr>
+              <a:t>文件，按开发者职责划分，结构清晰易维护。资源集中存放于</a:t>
+            </a:r>
+            <a:r>
+              <a:rPr lang="en-US" sz="1400" b="1" u="none" strike="noStrike">
+                <a:solidFill>
+                  <a:srgbClr val="E2E8F0"/>
+                </a:solidFill>
+                <a:uFillTx/>
+                <a:latin typeface="Noto Sans SC"/>
+                <a:ea typeface="Noto Sans SC"/>
+              </a:rPr>
+              <a:t>assets/</a:t>
+            </a:r>
+            <a:r>
+              <a:rPr lang="zh-CN" sz="1400" b="0" u="none" strike="noStrike">
+                <a:solidFill>
+                  <a:srgbClr val="E2E8F0"/>
+                </a:solidFill>
+                <a:uFillTx/>
+                <a:latin typeface="Noto Sans SC"/>
+                <a:ea typeface="Noto Sans SC"/>
+              </a:rPr>
+              <a:t>，文档归档于</a:t>
+            </a:r>
+            <a:r>
+              <a:rPr lang="en-US" sz="1400" b="1" u="none" strike="noStrike">
+                <a:solidFill>
+                  <a:srgbClr val="E2E8F0"/>
+                </a:solidFill>
+                <a:uFillTx/>
+                <a:latin typeface="Noto Sans SC"/>
+                <a:ea typeface="Noto Sans SC"/>
+              </a:rPr>
+              <a:t>docs/</a:t>
+            </a:r>
+            <a:r>
+              <a:rPr lang="zh-CN" sz="1400" b="0" u="none" strike="noStrike">
+                <a:solidFill>
+                  <a:srgbClr val="E2E8F0"/>
+                </a:solidFill>
+                <a:uFillTx/>
+                <a:latin typeface="Noto Sans SC"/>
+                <a:ea typeface="Noto Sans SC"/>
+              </a:rPr>
+              <a:t>，确保项目工程化规范。</a:t>
+            </a:r>
+            <a:endParaRPr lang="en-US" sz="1400" b="0" u="none" strike="noStrike">
+              <a:solidFill>
+                <a:srgbClr val="FFFFFF"/>
+              </a:solidFill>
+              <a:uFillTx/>
+              <a:latin typeface="Noto Sans CJK SC"/>
+            </a:endParaRPr>
+          </a:p>
+          <a:p>
+            <a:pPr>
+              <a:lnSpc>
+                <a:spcPct val="125000"/>
+              </a:lnSpc>
+              <a:tabLst>
+                <a:tab pos="0" algn="l"/>
+              </a:tabLst>
+            </a:pPr>
+            <a:r>
+              <a:rPr lang="zh-CN" sz="1300" b="0" u="none" strike="noStrike">
                 <a:solidFill>
                   <a:srgbClr val="FFFFFF">
-                    <a:alpha val="70000"/>
+                    <a:alpha val="60000"/>
                   </a:srgbClr>
                 </a:solidFill>
                 <a:uFillTx/>
                 <a:latin typeface="Noto Sans SC"/>
                 <a:ea typeface="Noto Sans SC"/>
               </a:rPr>
-              <a:t>负责人：李玥峰</a:t>
-            </a:r>
-            <a:br>
-              <a:rPr sz="1100"/>
-            </a:br>
-            <a:r>
-              <a:rPr lang="zh-CN" sz="1100" b="0" u="none" strike="noStrike">
+              <a:t>分工：李玥峰（入口页）、李少华（</a:t>
+            </a:r>
+            <a:r>
+              <a:rPr lang="en-US" sz="1300" b="0" u="none" strike="noStrike">
                 <a:solidFill>
                   <a:srgbClr val="FFFFFF">
-                    <a:alpha val="70000"/>
+                    <a:alpha val="60000"/>
                   </a:srgbClr>
                 </a:solidFill>
                 <a:uFillTx/>
                 <a:latin typeface="Noto Sans SC"/>
                 <a:ea typeface="Noto Sans SC"/>
               </a:rPr>
-              <a:t>完成游戏回廊界面与</a:t>
-            </a:r>
-            <a:r>
-              <a:rPr lang="en-US" sz="1100" b="0" u="none" strike="noStrike">
+              <a:t>5</a:t>
+            </a:r>
+            <a:r>
+              <a:rPr lang="zh-CN" sz="1300" b="0" u="none" strike="noStrike">
                 <a:solidFill>
                   <a:srgbClr val="FFFFFF">
-                    <a:alpha val="70000"/>
+                    <a:alpha val="60000"/>
                   </a:srgbClr>
                 </a:solidFill>
                 <a:uFillTx/>
                 <a:latin typeface="Noto Sans SC"/>
                 <a:ea typeface="Noto Sans SC"/>
               </a:rPr>
-              <a:t>7</a:t>
-            </a:r>
-            <a:r>
-              <a:rPr lang="zh-CN" sz="1100" b="0" u="none" strike="noStrike">
-                <a:solidFill>
-                  <a:srgbClr val="FFFFFF">
-                    <a:alpha val="70000"/>
-                  </a:srgbClr>
-                </a:solidFill>
-                <a:uFillTx/>
-                <a:latin typeface="Noto Sans SC"/>
-                <a:ea typeface="Noto Sans SC"/>
-              </a:rPr>
-              <a:t>个游戏基础框架，确定最终</a:t>
-            </a:r>
-            <a:r>
-              <a:rPr lang="en-US" sz="1100" b="0" u="none" strike="noStrike">
-                <a:solidFill>
-                  <a:srgbClr val="FFFFFF">
-                    <a:alpha val="70000"/>
-                  </a:srgbClr>
-                </a:solidFill>
-                <a:uFillTx/>
-                <a:latin typeface="Noto Sans SC"/>
-                <a:ea typeface="Noto Sans SC"/>
-              </a:rPr>
-              <a:t>UI</a:t>
-            </a:r>
-            <a:r>
-              <a:rPr lang="zh-CN" sz="1100" b="0" u="none" strike="noStrike">
-                <a:solidFill>
-                  <a:srgbClr val="FFFFFF">
-                    <a:alpha val="70000"/>
-                  </a:srgbClr>
-                </a:solidFill>
-                <a:uFillTx/>
-                <a:latin typeface="Noto Sans SC"/>
-                <a:ea typeface="Noto Sans SC"/>
-              </a:rPr>
-              <a:t>视觉风格。</a:t>
-            </a:r>
-            <a:endParaRPr lang="en-US" sz="1100" b="0" u="none" strike="noStrike">
+              <a:t>款基础游戏）、李振豪（策略类游戏）。</a:t>
+            </a:r>
+            <a:endParaRPr lang="en-US" sz="1300" b="0" u="none" strike="noStrike">
               <a:solidFill>
                 <a:srgbClr val="FFFFFF"/>
               </a:solidFill>
@@ -11377,14 +9417,14 @@
       </p:sp>
       <p:sp>
         <p:nvSpPr>
-          <p:cNvPr id="274" name="AutoShape 30"/>
+          <p:cNvPr id="330" name="AutoShape 9"/>
           <p:cNvSpPr/>
           <p:nvPr/>
         </p:nvSpPr>
         <p:spPr>
           <a:xfrm>
-            <a:off x="8318520" y="2413080"/>
-            <a:ext cx="1714320" cy="1714320"/>
+            <a:off x="6159600" y="1778040"/>
+            <a:ext cx="5270040" cy="3682800"/>
           </a:xfrm>
           <a:prstGeom prst="roundRect">
             <a:avLst>
@@ -11441,1930 +9481,6 @@
       </p:sp>
       <p:pic>
         <p:nvPicPr>
-          <p:cNvPr id="275" name="Picture 31"/>
-          <p:cNvPicPr/>
-          <p:nvPr/>
-        </p:nvPicPr>
-        <p:blipFill>
-          <a:blip r:embed="rId6">
-            <a:extLst>
-              <a:ext uri="{96DAC541-7B7A-43D3-8B79-37D633B846F1}">
-                <asvg:svgBlip xmlns:asvg="http://schemas.microsoft.com/office/drawing/2016/SVG/main" r:embed="rId7"/>
-              </a:ext>
-            </a:extLst>
-          </a:blip>
-          <a:stretch/>
-        </p:blipFill>
-        <p:spPr>
-          <a:xfrm>
-            <a:off x="8445600" y="2540160"/>
-            <a:ext cx="304560" cy="304560"/>
-          </a:xfrm>
-          <a:prstGeom prst="rect">
-            <a:avLst/>
-          </a:prstGeom>
-          <a:noFill/>
-          <a:ln w="0">
-            <a:noFill/>
-          </a:ln>
-        </p:spPr>
-      </p:pic>
-      <p:sp>
-        <p:nvSpPr>
-          <p:cNvPr id="276" name="AutoShape 32"/>
-          <p:cNvSpPr/>
-          <p:nvPr/>
-        </p:nvSpPr>
-        <p:spPr>
-          <a:xfrm>
-            <a:off x="8826480" y="2540160"/>
-            <a:ext cx="1142640" cy="304560"/>
-          </a:xfrm>
-          <a:prstGeom prst="rect">
-            <a:avLst/>
-          </a:prstGeom>
-          <a:noFill/>
-          <a:ln w="12700">
-            <a:noFill/>
-          </a:ln>
-        </p:spPr>
-        <p:style>
-          <a:lnRef idx="0">
-            <a:scrgbClr r="0" g="0" b="0"/>
-          </a:lnRef>
-          <a:fillRef idx="0">
-            <a:scrgbClr r="0" g="0" b="0"/>
-          </a:fillRef>
-          <a:effectRef idx="0">
-            <a:scrgbClr r="0" g="0" b="0"/>
-          </a:effectRef>
-          <a:fontRef idx="minor"/>
-        </p:style>
-        <p:txBody>
-          <a:bodyPr lIns="0" tIns="0" rIns="0" bIns="0" anchor="ctr">
-            <a:noAutofit/>
-          </a:bodyPr>
-          <a:lstStyle/>
-          <a:p>
-            <a:pPr>
-              <a:lnSpc>
-                <a:spcPct val="125000"/>
-              </a:lnSpc>
-              <a:tabLst>
-                <a:tab pos="0" algn="l"/>
-              </a:tabLst>
-            </a:pPr>
-            <a:r>
-              <a:rPr lang="zh-CN" sz="1400" b="1" u="none" strike="noStrike">
-                <a:solidFill>
-                  <a:srgbClr val="FFFFFF"/>
-                </a:solidFill>
-                <a:uFillTx/>
-                <a:latin typeface="Noto Sans SC"/>
-                <a:ea typeface="Noto Sans SC"/>
-              </a:rPr>
-              <a:t>第</a:t>
-            </a:r>
-            <a:r>
-              <a:rPr lang="en-US" sz="1400" b="1" u="none" strike="noStrike">
-                <a:solidFill>
-                  <a:srgbClr val="FFFFFF"/>
-                </a:solidFill>
-                <a:uFillTx/>
-                <a:latin typeface="Noto Sans SC"/>
-                <a:ea typeface="Noto Sans SC"/>
-              </a:rPr>
-              <a:t>2</a:t>
-            </a:r>
-            <a:r>
-              <a:rPr lang="zh-CN" sz="1400" b="1" u="none" strike="noStrike">
-                <a:solidFill>
-                  <a:srgbClr val="FFFFFF"/>
-                </a:solidFill>
-                <a:uFillTx/>
-                <a:latin typeface="Noto Sans SC"/>
-                <a:ea typeface="Noto Sans SC"/>
-              </a:rPr>
-              <a:t>周 </a:t>
-            </a:r>
-            <a:r>
-              <a:rPr lang="en-US" sz="1400" b="1" u="none" strike="noStrike">
-                <a:solidFill>
-                  <a:srgbClr val="FFFFFF"/>
-                </a:solidFill>
-                <a:uFillTx/>
-                <a:latin typeface="Noto Sans SC"/>
-                <a:ea typeface="Noto Sans SC"/>
-              </a:rPr>
-              <a:t>· </a:t>
-            </a:r>
-            <a:r>
-              <a:rPr lang="zh-CN" sz="1400" b="1" u="none" strike="noStrike">
-                <a:solidFill>
-                  <a:srgbClr val="FFFFFF"/>
-                </a:solidFill>
-                <a:uFillTx/>
-                <a:latin typeface="Noto Sans SC"/>
-                <a:ea typeface="Noto Sans SC"/>
-              </a:rPr>
-              <a:t>核心</a:t>
-            </a:r>
-            <a:endParaRPr lang="en-US" sz="1400" b="0" u="none" strike="noStrike">
-              <a:solidFill>
-                <a:srgbClr val="FFFFFF"/>
-              </a:solidFill>
-              <a:uFillTx/>
-              <a:latin typeface="Noto Sans CJK SC"/>
-            </a:endParaRPr>
-          </a:p>
-        </p:txBody>
-      </p:sp>
-      <p:cxnSp>
-        <p:nvCxnSpPr>
-          <p:cNvPr id="277" name="Connector 33"/>
-          <p:cNvCxnSpPr/>
-          <p:nvPr/>
-        </p:nvCxnSpPr>
-        <p:spPr>
-          <a:xfrm>
-            <a:off x="8445240" y="3047760"/>
-            <a:ext cx="1460880" cy="360"/>
-          </a:xfrm>
-          <a:prstGeom prst="straightConnector1">
-            <a:avLst/>
-          </a:prstGeom>
-          <a:ln w="12700">
-            <a:solidFill>
-              <a:srgbClr val="FFFFFF">
-                <a:alpha val="15000"/>
-              </a:srgbClr>
-            </a:solidFill>
-            <a:round/>
-          </a:ln>
-        </p:spPr>
-      </p:cxnSp>
-      <p:sp>
-        <p:nvSpPr>
-          <p:cNvPr id="278" name="AutoShape 34"/>
-          <p:cNvSpPr/>
-          <p:nvPr/>
-        </p:nvSpPr>
-        <p:spPr>
-          <a:xfrm>
-            <a:off x="8445600" y="3174840"/>
-            <a:ext cx="1460160" cy="825120"/>
-          </a:xfrm>
-          <a:prstGeom prst="rect">
-            <a:avLst/>
-          </a:prstGeom>
-          <a:noFill/>
-          <a:ln w="12700">
-            <a:noFill/>
-          </a:ln>
-        </p:spPr>
-        <p:style>
-          <a:lnRef idx="0">
-            <a:scrgbClr r="0" g="0" b="0"/>
-          </a:lnRef>
-          <a:fillRef idx="0">
-            <a:scrgbClr r="0" g="0" b="0"/>
-          </a:fillRef>
-          <a:effectRef idx="0">
-            <a:scrgbClr r="0" g="0" b="0"/>
-          </a:effectRef>
-          <a:fontRef idx="minor"/>
-        </p:style>
-        <p:txBody>
-          <a:bodyPr lIns="0" tIns="0" rIns="0" bIns="0" anchor="ctr">
-            <a:noAutofit/>
-          </a:bodyPr>
-          <a:lstStyle/>
-          <a:p>
-            <a:pPr>
-              <a:lnSpc>
-                <a:spcPct val="108000"/>
-              </a:lnSpc>
-              <a:tabLst>
-                <a:tab pos="0" algn="l"/>
-              </a:tabLst>
-            </a:pPr>
-            <a:r>
-              <a:rPr lang="zh-CN" sz="1100" b="0" u="none" strike="noStrike">
-                <a:solidFill>
-                  <a:srgbClr val="FFFFFF">
-                    <a:alpha val="70000"/>
-                  </a:srgbClr>
-                </a:solidFill>
-                <a:uFillTx/>
-                <a:latin typeface="Noto Sans SC"/>
-                <a:ea typeface="Noto Sans SC"/>
-              </a:rPr>
-              <a:t>负责人：李少华、李振豪</a:t>
-            </a:r>
-            <a:br>
-              <a:rPr sz="1100"/>
-            </a:br>
-            <a:r>
-              <a:rPr lang="zh-CN" sz="1100" b="0" u="none" strike="noStrike">
-                <a:solidFill>
-                  <a:srgbClr val="FFFFFF">
-                    <a:alpha val="70000"/>
-                  </a:srgbClr>
-                </a:solidFill>
-                <a:uFillTx/>
-                <a:latin typeface="Noto Sans SC"/>
-                <a:ea typeface="Noto Sans SC"/>
-              </a:rPr>
-              <a:t>完成</a:t>
-            </a:r>
-            <a:r>
-              <a:rPr lang="en-US" sz="1100" b="0" u="none" strike="noStrike">
-                <a:solidFill>
-                  <a:srgbClr val="FFFFFF">
-                    <a:alpha val="70000"/>
-                  </a:srgbClr>
-                </a:solidFill>
-                <a:uFillTx/>
-                <a:latin typeface="Noto Sans SC"/>
-                <a:ea typeface="Noto Sans SC"/>
-              </a:rPr>
-              <a:t>7</a:t>
-            </a:r>
-            <a:r>
-              <a:rPr lang="zh-CN" sz="1100" b="0" u="none" strike="noStrike">
-                <a:solidFill>
-                  <a:srgbClr val="FFFFFF">
-                    <a:alpha val="70000"/>
-                  </a:srgbClr>
-                </a:solidFill>
-                <a:uFillTx/>
-                <a:latin typeface="Noto Sans SC"/>
-                <a:ea typeface="Noto Sans SC"/>
-              </a:rPr>
-              <a:t>款游戏完整功能代码编写，实现核心玩法与交互逻辑闭环。</a:t>
-            </a:r>
-            <a:endParaRPr lang="en-US" sz="1100" b="0" u="none" strike="noStrike">
-              <a:solidFill>
-                <a:srgbClr val="FFFFFF"/>
-              </a:solidFill>
-              <a:uFillTx/>
-              <a:latin typeface="Noto Sans CJK SC"/>
-            </a:endParaRPr>
-          </a:p>
-        </p:txBody>
-      </p:sp>
-      <p:sp>
-        <p:nvSpPr>
-          <p:cNvPr id="279" name="AutoShape 35"/>
-          <p:cNvSpPr/>
-          <p:nvPr/>
-        </p:nvSpPr>
-        <p:spPr>
-          <a:xfrm>
-            <a:off x="10032840" y="2413080"/>
-            <a:ext cx="1714320" cy="1714320"/>
-          </a:xfrm>
-          <a:prstGeom prst="roundRect">
-            <a:avLst>
-              <a:gd name="adj" fmla="val 0"/>
-            </a:avLst>
-          </a:prstGeom>
-          <a:solidFill>
-            <a:srgbClr val="FFFFFF">
-              <a:alpha val="8000"/>
-            </a:srgbClr>
-          </a:solidFill>
-          <a:ln w="12700">
-            <a:solidFill>
-              <a:srgbClr val="2BD1FC">
-                <a:alpha val="40000"/>
-              </a:srgbClr>
-            </a:solidFill>
-            <a:round/>
-          </a:ln>
-        </p:spPr>
-        <p:style>
-          <a:lnRef idx="0">
-            <a:scrgbClr r="0" g="0" b="0"/>
-          </a:lnRef>
-          <a:fillRef idx="0">
-            <a:scrgbClr r="0" g="0" b="0"/>
-          </a:fillRef>
-          <a:effectRef idx="0">
-            <a:scrgbClr r="0" g="0" b="0"/>
-          </a:effectRef>
-          <a:fontRef idx="minor"/>
-        </p:style>
-        <p:txBody>
-          <a:bodyPr lIns="63360" tIns="63360" rIns="63360" bIns="63360" anchor="ctr">
-            <a:noAutofit/>
-          </a:bodyPr>
-          <a:lstStyle/>
-          <a:p>
-            <a:pPr algn="ctr">
-              <a:lnSpc>
-                <a:spcPct val="100000"/>
-              </a:lnSpc>
-            </a:pPr>
-            <a:endParaRPr lang="en-US" sz="1400" b="0" u="none" strike="noStrike">
-              <a:solidFill>
-                <a:srgbClr val="000000"/>
-              </a:solidFill>
-              <a:uFillTx/>
-              <a:latin typeface="Arial"/>
-              <a:ea typeface="Arial"/>
-            </a:endParaRPr>
-          </a:p>
-        </p:txBody>
-      </p:sp>
-      <p:pic>
-        <p:nvPicPr>
-          <p:cNvPr id="280" name="Picture 36"/>
-          <p:cNvPicPr/>
-          <p:nvPr/>
-        </p:nvPicPr>
-        <p:blipFill>
-          <a:blip r:embed="rId8">
-            <a:extLst>
-              <a:ext uri="{96DAC541-7B7A-43D3-8B79-37D633B846F1}">
-                <asvg:svgBlip xmlns:asvg="http://schemas.microsoft.com/office/drawing/2016/SVG/main" r:embed="rId9"/>
-              </a:ext>
-            </a:extLst>
-          </a:blip>
-          <a:stretch/>
-        </p:blipFill>
-        <p:spPr>
-          <a:xfrm>
-            <a:off x="10159920" y="2540160"/>
-            <a:ext cx="304560" cy="304560"/>
-          </a:xfrm>
-          <a:prstGeom prst="rect">
-            <a:avLst/>
-          </a:prstGeom>
-          <a:noFill/>
-          <a:ln w="0">
-            <a:noFill/>
-          </a:ln>
-        </p:spPr>
-      </p:pic>
-      <p:sp>
-        <p:nvSpPr>
-          <p:cNvPr id="281" name="AutoShape 37"/>
-          <p:cNvSpPr/>
-          <p:nvPr/>
-        </p:nvSpPr>
-        <p:spPr>
-          <a:xfrm>
-            <a:off x="10541160" y="2540160"/>
-            <a:ext cx="1142640" cy="304560"/>
-          </a:xfrm>
-          <a:prstGeom prst="rect">
-            <a:avLst/>
-          </a:prstGeom>
-          <a:noFill/>
-          <a:ln w="12700">
-            <a:noFill/>
-          </a:ln>
-        </p:spPr>
-        <p:style>
-          <a:lnRef idx="0">
-            <a:scrgbClr r="0" g="0" b="0"/>
-          </a:lnRef>
-          <a:fillRef idx="0">
-            <a:scrgbClr r="0" g="0" b="0"/>
-          </a:fillRef>
-          <a:effectRef idx="0">
-            <a:scrgbClr r="0" g="0" b="0"/>
-          </a:effectRef>
-          <a:fontRef idx="minor"/>
-        </p:style>
-        <p:txBody>
-          <a:bodyPr lIns="0" tIns="0" rIns="0" bIns="0" anchor="ctr">
-            <a:noAutofit/>
-          </a:bodyPr>
-          <a:lstStyle/>
-          <a:p>
-            <a:pPr>
-              <a:lnSpc>
-                <a:spcPct val="125000"/>
-              </a:lnSpc>
-              <a:tabLst>
-                <a:tab pos="0" algn="l"/>
-              </a:tabLst>
-            </a:pPr>
-            <a:r>
-              <a:rPr lang="zh-CN" sz="1400" b="1" u="none" strike="noStrike">
-                <a:solidFill>
-                  <a:srgbClr val="FFFFFF"/>
-                </a:solidFill>
-                <a:uFillTx/>
-                <a:latin typeface="Noto Sans SC"/>
-                <a:ea typeface="Noto Sans SC"/>
-              </a:rPr>
-              <a:t>第</a:t>
-            </a:r>
-            <a:r>
-              <a:rPr lang="en-US" sz="1400" b="1" u="none" strike="noStrike">
-                <a:solidFill>
-                  <a:srgbClr val="FFFFFF"/>
-                </a:solidFill>
-                <a:uFillTx/>
-                <a:latin typeface="Noto Sans SC"/>
-                <a:ea typeface="Noto Sans SC"/>
-              </a:rPr>
-              <a:t>3</a:t>
-            </a:r>
-            <a:r>
-              <a:rPr lang="zh-CN" sz="1400" b="1" u="none" strike="noStrike">
-                <a:solidFill>
-                  <a:srgbClr val="FFFFFF"/>
-                </a:solidFill>
-                <a:uFillTx/>
-                <a:latin typeface="Noto Sans SC"/>
-                <a:ea typeface="Noto Sans SC"/>
-              </a:rPr>
-              <a:t>周初 </a:t>
-            </a:r>
-            <a:r>
-              <a:rPr lang="en-US" sz="1400" b="1" u="none" strike="noStrike">
-                <a:solidFill>
-                  <a:srgbClr val="FFFFFF"/>
-                </a:solidFill>
-                <a:uFillTx/>
-                <a:latin typeface="Noto Sans SC"/>
-                <a:ea typeface="Noto Sans SC"/>
-              </a:rPr>
-              <a:t>· </a:t>
-            </a:r>
-            <a:r>
-              <a:rPr lang="zh-CN" sz="1400" b="1" u="none" strike="noStrike">
-                <a:solidFill>
-                  <a:srgbClr val="FFFFFF"/>
-                </a:solidFill>
-                <a:uFillTx/>
-                <a:latin typeface="Noto Sans SC"/>
-                <a:ea typeface="Noto Sans SC"/>
-              </a:rPr>
-              <a:t>整合</a:t>
-            </a:r>
-            <a:endParaRPr lang="en-US" sz="1400" b="0" u="none" strike="noStrike">
-              <a:solidFill>
-                <a:srgbClr val="FFFFFF"/>
-              </a:solidFill>
-              <a:uFillTx/>
-              <a:latin typeface="Noto Sans CJK SC"/>
-            </a:endParaRPr>
-          </a:p>
-        </p:txBody>
-      </p:sp>
-      <p:cxnSp>
-        <p:nvCxnSpPr>
-          <p:cNvPr id="282" name="Connector 38"/>
-          <p:cNvCxnSpPr/>
-          <p:nvPr/>
-        </p:nvCxnSpPr>
-        <p:spPr>
-          <a:xfrm>
-            <a:off x="10159920" y="3047760"/>
-            <a:ext cx="1460880" cy="360"/>
-          </a:xfrm>
-          <a:prstGeom prst="straightConnector1">
-            <a:avLst/>
-          </a:prstGeom>
-          <a:ln w="12700">
-            <a:solidFill>
-              <a:srgbClr val="FFFFFF">
-                <a:alpha val="15000"/>
-              </a:srgbClr>
-            </a:solidFill>
-            <a:round/>
-          </a:ln>
-        </p:spPr>
-      </p:cxnSp>
-      <p:sp>
-        <p:nvSpPr>
-          <p:cNvPr id="283" name="AutoShape 39"/>
-          <p:cNvSpPr/>
-          <p:nvPr/>
-        </p:nvSpPr>
-        <p:spPr>
-          <a:xfrm>
-            <a:off x="10159920" y="3174840"/>
-            <a:ext cx="1460160" cy="825120"/>
-          </a:xfrm>
-          <a:prstGeom prst="rect">
-            <a:avLst/>
-          </a:prstGeom>
-          <a:noFill/>
-          <a:ln w="12700">
-            <a:noFill/>
-          </a:ln>
-        </p:spPr>
-        <p:style>
-          <a:lnRef idx="0">
-            <a:scrgbClr r="0" g="0" b="0"/>
-          </a:lnRef>
-          <a:fillRef idx="0">
-            <a:scrgbClr r="0" g="0" b="0"/>
-          </a:fillRef>
-          <a:effectRef idx="0">
-            <a:scrgbClr r="0" g="0" b="0"/>
-          </a:effectRef>
-          <a:fontRef idx="minor"/>
-        </p:style>
-        <p:txBody>
-          <a:bodyPr lIns="0" tIns="0" rIns="0" bIns="0" anchor="ctr">
-            <a:noAutofit/>
-          </a:bodyPr>
-          <a:lstStyle/>
-          <a:p>
-            <a:pPr>
-              <a:lnSpc>
-                <a:spcPct val="108000"/>
-              </a:lnSpc>
-              <a:tabLst>
-                <a:tab pos="0" algn="l"/>
-              </a:tabLst>
-            </a:pPr>
-            <a:r>
-              <a:rPr lang="zh-CN" sz="1100" b="0" u="none" strike="noStrike">
-                <a:solidFill>
-                  <a:srgbClr val="FFFFFF">
-                    <a:alpha val="70000"/>
-                  </a:srgbClr>
-                </a:solidFill>
-                <a:uFillTx/>
-                <a:latin typeface="Noto Sans SC"/>
-                <a:ea typeface="Noto Sans SC"/>
-              </a:rPr>
-              <a:t>负责人：李想</a:t>
-            </a:r>
-            <a:br>
-              <a:rPr sz="1100"/>
-            </a:br>
-            <a:r>
-              <a:rPr lang="zh-CN" sz="1100" b="0" u="none" strike="noStrike">
-                <a:solidFill>
-                  <a:srgbClr val="FFFFFF">
-                    <a:alpha val="70000"/>
-                  </a:srgbClr>
-                </a:solidFill>
-                <a:uFillTx/>
-                <a:latin typeface="Noto Sans SC"/>
-                <a:ea typeface="Noto Sans SC"/>
-              </a:rPr>
-              <a:t>模块接入主项目，建立</a:t>
-            </a:r>
-            <a:r>
-              <a:rPr lang="en-US" sz="1100" b="0" u="none" strike="noStrike">
-                <a:solidFill>
-                  <a:srgbClr val="FFFFFF">
-                    <a:alpha val="70000"/>
-                  </a:srgbClr>
-                </a:solidFill>
-                <a:uFillTx/>
-                <a:latin typeface="Noto Sans SC"/>
-                <a:ea typeface="Noto Sans SC"/>
-              </a:rPr>
-              <a:t>Git</a:t>
-            </a:r>
-            <a:r>
-              <a:rPr lang="zh-CN" sz="1100" b="0" u="none" strike="noStrike">
-                <a:solidFill>
-                  <a:srgbClr val="FFFFFF">
-                    <a:alpha val="70000"/>
-                  </a:srgbClr>
-                </a:solidFill>
-                <a:uFillTx/>
-                <a:latin typeface="Noto Sans SC"/>
-                <a:ea typeface="Noto Sans SC"/>
-              </a:rPr>
-              <a:t>版本库，输出可运行的完整整合包。</a:t>
-            </a:r>
-            <a:endParaRPr lang="en-US" sz="1100" b="0" u="none" strike="noStrike">
-              <a:solidFill>
-                <a:srgbClr val="FFFFFF"/>
-              </a:solidFill>
-              <a:uFillTx/>
-              <a:latin typeface="Noto Sans CJK SC"/>
-            </a:endParaRPr>
-          </a:p>
-        </p:txBody>
-      </p:sp>
-      <p:sp>
-        <p:nvSpPr>
-          <p:cNvPr id="284" name="AutoShape 40"/>
-          <p:cNvSpPr/>
-          <p:nvPr/>
-        </p:nvSpPr>
-        <p:spPr>
-          <a:xfrm>
-            <a:off x="6477120" y="4444920"/>
-            <a:ext cx="2539800" cy="1714320"/>
-          </a:xfrm>
-          <a:prstGeom prst="roundRect">
-            <a:avLst>
-              <a:gd name="adj" fmla="val 0"/>
-            </a:avLst>
-          </a:prstGeom>
-          <a:solidFill>
-            <a:srgbClr val="FFFFFF">
-              <a:alpha val="8000"/>
-            </a:srgbClr>
-          </a:solidFill>
-          <a:ln w="12700">
-            <a:solidFill>
-              <a:srgbClr val="2BD1FC">
-                <a:alpha val="40000"/>
-              </a:srgbClr>
-            </a:solidFill>
-            <a:round/>
-          </a:ln>
-        </p:spPr>
-        <p:style>
-          <a:lnRef idx="0">
-            <a:scrgbClr r="0" g="0" b="0"/>
-          </a:lnRef>
-          <a:fillRef idx="0">
-            <a:scrgbClr r="0" g="0" b="0"/>
-          </a:fillRef>
-          <a:effectRef idx="0">
-            <a:scrgbClr r="0" g="0" b="0"/>
-          </a:effectRef>
-          <a:fontRef idx="minor"/>
-        </p:style>
-        <p:txBody>
-          <a:bodyPr lIns="63360" tIns="63360" rIns="63360" bIns="63360" anchor="ctr">
-            <a:noAutofit/>
-          </a:bodyPr>
-          <a:lstStyle/>
-          <a:p>
-            <a:pPr algn="ctr">
-              <a:lnSpc>
-                <a:spcPct val="100000"/>
-              </a:lnSpc>
-            </a:pPr>
-            <a:endParaRPr lang="en-US" sz="1400" b="0" u="none" strike="noStrike">
-              <a:solidFill>
-                <a:srgbClr val="000000"/>
-              </a:solidFill>
-              <a:uFillTx/>
-              <a:latin typeface="Arial"/>
-              <a:ea typeface="Arial"/>
-            </a:endParaRPr>
-          </a:p>
-        </p:txBody>
-      </p:sp>
-      <p:pic>
-        <p:nvPicPr>
-          <p:cNvPr id="285" name="Picture 41"/>
-          <p:cNvPicPr/>
-          <p:nvPr/>
-        </p:nvPicPr>
-        <p:blipFill>
-          <a:blip r:embed="rId10">
-            <a:extLst>
-              <a:ext uri="{96DAC541-7B7A-43D3-8B79-37D633B846F1}">
-                <asvg:svgBlip xmlns:asvg="http://schemas.microsoft.com/office/drawing/2016/SVG/main" r:embed="rId11"/>
-              </a:ext>
-            </a:extLst>
-          </a:blip>
-          <a:stretch/>
-        </p:blipFill>
-        <p:spPr>
-          <a:xfrm>
-            <a:off x="6603840" y="4572000"/>
-            <a:ext cx="304560" cy="304560"/>
-          </a:xfrm>
-          <a:prstGeom prst="rect">
-            <a:avLst/>
-          </a:prstGeom>
-          <a:noFill/>
-          <a:ln w="0">
-            <a:noFill/>
-          </a:ln>
-        </p:spPr>
-      </p:pic>
-      <p:sp>
-        <p:nvSpPr>
-          <p:cNvPr id="286" name="AutoShape 42"/>
-          <p:cNvSpPr/>
-          <p:nvPr/>
-        </p:nvSpPr>
-        <p:spPr>
-          <a:xfrm>
-            <a:off x="6985080" y="4572000"/>
-            <a:ext cx="1904760" cy="304560"/>
-          </a:xfrm>
-          <a:prstGeom prst="rect">
-            <a:avLst/>
-          </a:prstGeom>
-          <a:noFill/>
-          <a:ln w="12700">
-            <a:noFill/>
-          </a:ln>
-        </p:spPr>
-        <p:style>
-          <a:lnRef idx="0">
-            <a:scrgbClr r="0" g="0" b="0"/>
-          </a:lnRef>
-          <a:fillRef idx="0">
-            <a:scrgbClr r="0" g="0" b="0"/>
-          </a:fillRef>
-          <a:effectRef idx="0">
-            <a:scrgbClr r="0" g="0" b="0"/>
-          </a:effectRef>
-          <a:fontRef idx="minor"/>
-        </p:style>
-        <p:txBody>
-          <a:bodyPr lIns="0" tIns="0" rIns="0" bIns="0" anchor="ctr">
-            <a:noAutofit/>
-          </a:bodyPr>
-          <a:lstStyle/>
-          <a:p>
-            <a:pPr>
-              <a:lnSpc>
-                <a:spcPct val="125000"/>
-              </a:lnSpc>
-              <a:tabLst>
-                <a:tab pos="0" algn="l"/>
-              </a:tabLst>
-            </a:pPr>
-            <a:r>
-              <a:rPr lang="zh-CN" sz="1400" b="1" u="none" strike="noStrike">
-                <a:solidFill>
-                  <a:srgbClr val="FFFFFF"/>
-                </a:solidFill>
-                <a:uFillTx/>
-                <a:latin typeface="Noto Sans SC"/>
-                <a:ea typeface="Noto Sans SC"/>
-              </a:rPr>
-              <a:t>第</a:t>
-            </a:r>
-            <a:r>
-              <a:rPr lang="en-US" sz="1400" b="1" u="none" strike="noStrike">
-                <a:solidFill>
-                  <a:srgbClr val="FFFFFF"/>
-                </a:solidFill>
-                <a:uFillTx/>
-                <a:latin typeface="Noto Sans SC"/>
-                <a:ea typeface="Noto Sans SC"/>
-              </a:rPr>
-              <a:t>3</a:t>
-            </a:r>
-            <a:r>
-              <a:rPr lang="zh-CN" sz="1400" b="1" u="none" strike="noStrike">
-                <a:solidFill>
-                  <a:srgbClr val="FFFFFF"/>
-                </a:solidFill>
-                <a:uFillTx/>
-                <a:latin typeface="Noto Sans SC"/>
-                <a:ea typeface="Noto Sans SC"/>
-              </a:rPr>
-              <a:t>周中 </a:t>
-            </a:r>
-            <a:r>
-              <a:rPr lang="en-US" sz="1400" b="1" u="none" strike="noStrike">
-                <a:solidFill>
-                  <a:srgbClr val="FFFFFF"/>
-                </a:solidFill>
-                <a:uFillTx/>
-                <a:latin typeface="Noto Sans SC"/>
-                <a:ea typeface="Noto Sans SC"/>
-              </a:rPr>
-              <a:t>· </a:t>
-            </a:r>
-            <a:r>
-              <a:rPr lang="zh-CN" sz="1400" b="1" u="none" strike="noStrike">
-                <a:solidFill>
-                  <a:srgbClr val="FFFFFF"/>
-                </a:solidFill>
-                <a:uFillTx/>
-                <a:latin typeface="Noto Sans SC"/>
-                <a:ea typeface="Noto Sans SC"/>
-              </a:rPr>
-              <a:t>测试修复</a:t>
-            </a:r>
-            <a:endParaRPr lang="en-US" sz="1400" b="0" u="none" strike="noStrike">
-              <a:solidFill>
-                <a:srgbClr val="FFFFFF"/>
-              </a:solidFill>
-              <a:uFillTx/>
-              <a:latin typeface="Noto Sans CJK SC"/>
-            </a:endParaRPr>
-          </a:p>
-        </p:txBody>
-      </p:sp>
-      <p:cxnSp>
-        <p:nvCxnSpPr>
-          <p:cNvPr id="287" name="Connector 43"/>
-          <p:cNvCxnSpPr/>
-          <p:nvPr/>
-        </p:nvCxnSpPr>
-        <p:spPr>
-          <a:xfrm>
-            <a:off x="6603840" y="5079960"/>
-            <a:ext cx="2286360" cy="360"/>
-          </a:xfrm>
-          <a:prstGeom prst="straightConnector1">
-            <a:avLst/>
-          </a:prstGeom>
-          <a:ln w="12700">
-            <a:solidFill>
-              <a:srgbClr val="FFFFFF">
-                <a:alpha val="15000"/>
-              </a:srgbClr>
-            </a:solidFill>
-            <a:round/>
-          </a:ln>
-        </p:spPr>
-      </p:cxnSp>
-      <p:sp>
-        <p:nvSpPr>
-          <p:cNvPr id="288" name="AutoShape 44"/>
-          <p:cNvSpPr/>
-          <p:nvPr/>
-        </p:nvSpPr>
-        <p:spPr>
-          <a:xfrm>
-            <a:off x="6603840" y="5207040"/>
-            <a:ext cx="2285640" cy="825120"/>
-          </a:xfrm>
-          <a:prstGeom prst="rect">
-            <a:avLst/>
-          </a:prstGeom>
-          <a:noFill/>
-          <a:ln w="12700">
-            <a:noFill/>
-          </a:ln>
-        </p:spPr>
-        <p:style>
-          <a:lnRef idx="0">
-            <a:scrgbClr r="0" g="0" b="0"/>
-          </a:lnRef>
-          <a:fillRef idx="0">
-            <a:scrgbClr r="0" g="0" b="0"/>
-          </a:fillRef>
-          <a:effectRef idx="0">
-            <a:scrgbClr r="0" g="0" b="0"/>
-          </a:effectRef>
-          <a:fontRef idx="minor"/>
-        </p:style>
-        <p:txBody>
-          <a:bodyPr lIns="0" tIns="0" rIns="0" bIns="0" anchor="ctr">
-            <a:noAutofit/>
-          </a:bodyPr>
-          <a:lstStyle/>
-          <a:p>
-            <a:pPr>
-              <a:lnSpc>
-                <a:spcPct val="108000"/>
-              </a:lnSpc>
-              <a:tabLst>
-                <a:tab pos="0" algn="l"/>
-              </a:tabLst>
-            </a:pPr>
-            <a:r>
-              <a:rPr lang="zh-CN" sz="1100" b="0" u="none" strike="noStrike">
-                <a:solidFill>
-                  <a:srgbClr val="FFFFFF">
-                    <a:alpha val="70000"/>
-                  </a:srgbClr>
-                </a:solidFill>
-                <a:uFillTx/>
-                <a:latin typeface="Noto Sans SC"/>
-                <a:ea typeface="Noto Sans SC"/>
-              </a:rPr>
-              <a:t>全员参与联调与</a:t>
-            </a:r>
-            <a:r>
-              <a:rPr lang="en-US" sz="1100" b="0" u="none" strike="noStrike">
-                <a:solidFill>
-                  <a:srgbClr val="FFFFFF">
-                    <a:alpha val="70000"/>
-                  </a:srgbClr>
-                </a:solidFill>
-                <a:uFillTx/>
-                <a:latin typeface="Noto Sans SC"/>
-                <a:ea typeface="Noto Sans SC"/>
-              </a:rPr>
-              <a:t>Bug</a:t>
-            </a:r>
-            <a:r>
-              <a:rPr lang="zh-CN" sz="1100" b="0" u="none" strike="noStrike">
-                <a:solidFill>
-                  <a:srgbClr val="FFFFFF">
-                    <a:alpha val="70000"/>
-                  </a:srgbClr>
-                </a:solidFill>
-                <a:uFillTx/>
-                <a:latin typeface="Noto Sans SC"/>
-                <a:ea typeface="Noto Sans SC"/>
-              </a:rPr>
-              <a:t>排查，重点修复跨模块兼容性问题，输出详细的</a:t>
-            </a:r>
-            <a:r>
-              <a:rPr lang="en-US" sz="1100" b="0" u="none" strike="noStrike">
-                <a:solidFill>
-                  <a:srgbClr val="FFFFFF">
-                    <a:alpha val="70000"/>
-                  </a:srgbClr>
-                </a:solidFill>
-                <a:uFillTx/>
-                <a:latin typeface="Noto Sans SC"/>
-                <a:ea typeface="Noto Sans SC"/>
-              </a:rPr>
-              <a:t>Bug</a:t>
-            </a:r>
-            <a:r>
-              <a:rPr lang="zh-CN" sz="1100" b="0" u="none" strike="noStrike">
-                <a:solidFill>
-                  <a:srgbClr val="FFFFFF">
-                    <a:alpha val="70000"/>
-                  </a:srgbClr>
-                </a:solidFill>
-                <a:uFillTx/>
-                <a:latin typeface="Noto Sans SC"/>
-                <a:ea typeface="Noto Sans SC"/>
-              </a:rPr>
-              <a:t>修复报告与测试日志，确保项目稳定性。</a:t>
-            </a:r>
-            <a:endParaRPr lang="en-US" sz="1100" b="0" u="none" strike="noStrike">
-              <a:solidFill>
-                <a:srgbClr val="FFFFFF"/>
-              </a:solidFill>
-              <a:uFillTx/>
-              <a:latin typeface="Noto Sans CJK SC"/>
-            </a:endParaRPr>
-          </a:p>
-        </p:txBody>
-      </p:sp>
-      <p:sp>
-        <p:nvSpPr>
-          <p:cNvPr id="289" name="AutoShape 45"/>
-          <p:cNvSpPr/>
-          <p:nvPr/>
-        </p:nvSpPr>
-        <p:spPr>
-          <a:xfrm>
-            <a:off x="9144000" y="4444920"/>
-            <a:ext cx="2603160" cy="1714320"/>
-          </a:xfrm>
-          <a:prstGeom prst="roundRect">
-            <a:avLst>
-              <a:gd name="adj" fmla="val 0"/>
-            </a:avLst>
-          </a:prstGeom>
-          <a:solidFill>
-            <a:srgbClr val="FFFFFF">
-              <a:alpha val="8000"/>
-            </a:srgbClr>
-          </a:solidFill>
-          <a:ln w="12700">
-            <a:solidFill>
-              <a:srgbClr val="2BD1FC">
-                <a:alpha val="40000"/>
-              </a:srgbClr>
-            </a:solidFill>
-            <a:round/>
-          </a:ln>
-        </p:spPr>
-        <p:style>
-          <a:lnRef idx="0">
-            <a:scrgbClr r="0" g="0" b="0"/>
-          </a:lnRef>
-          <a:fillRef idx="0">
-            <a:scrgbClr r="0" g="0" b="0"/>
-          </a:fillRef>
-          <a:effectRef idx="0">
-            <a:scrgbClr r="0" g="0" b="0"/>
-          </a:effectRef>
-          <a:fontRef idx="minor"/>
-        </p:style>
-        <p:txBody>
-          <a:bodyPr lIns="63360" tIns="63360" rIns="63360" bIns="63360" anchor="ctr">
-            <a:noAutofit/>
-          </a:bodyPr>
-          <a:lstStyle/>
-          <a:p>
-            <a:pPr algn="ctr">
-              <a:lnSpc>
-                <a:spcPct val="100000"/>
-              </a:lnSpc>
-            </a:pPr>
-            <a:endParaRPr lang="en-US" sz="1400" b="0" u="none" strike="noStrike">
-              <a:solidFill>
-                <a:srgbClr val="000000"/>
-              </a:solidFill>
-              <a:uFillTx/>
-              <a:latin typeface="Arial"/>
-              <a:ea typeface="Arial"/>
-            </a:endParaRPr>
-          </a:p>
-        </p:txBody>
-      </p:sp>
-      <p:pic>
-        <p:nvPicPr>
-          <p:cNvPr id="290" name="Picture 46"/>
-          <p:cNvPicPr/>
-          <p:nvPr/>
-        </p:nvPicPr>
-        <p:blipFill>
-          <a:blip r:embed="rId12">
-            <a:extLst>
-              <a:ext uri="{96DAC541-7B7A-43D3-8B79-37D633B846F1}">
-                <asvg:svgBlip xmlns:asvg="http://schemas.microsoft.com/office/drawing/2016/SVG/main" r:embed="rId13"/>
-              </a:ext>
-            </a:extLst>
-          </a:blip>
-          <a:stretch/>
-        </p:blipFill>
-        <p:spPr>
-          <a:xfrm>
-            <a:off x="9271080" y="4572000"/>
-            <a:ext cx="304560" cy="304560"/>
-          </a:xfrm>
-          <a:prstGeom prst="rect">
-            <a:avLst/>
-          </a:prstGeom>
-          <a:noFill/>
-          <a:ln w="0">
-            <a:noFill/>
-          </a:ln>
-        </p:spPr>
-      </p:pic>
-      <p:sp>
-        <p:nvSpPr>
-          <p:cNvPr id="291" name="AutoShape 47"/>
-          <p:cNvSpPr/>
-          <p:nvPr/>
-        </p:nvSpPr>
-        <p:spPr>
-          <a:xfrm>
-            <a:off x="9651960" y="4572000"/>
-            <a:ext cx="1968120" cy="304560"/>
-          </a:xfrm>
-          <a:prstGeom prst="rect">
-            <a:avLst/>
-          </a:prstGeom>
-          <a:noFill/>
-          <a:ln w="12700">
-            <a:noFill/>
-          </a:ln>
-        </p:spPr>
-        <p:style>
-          <a:lnRef idx="0">
-            <a:scrgbClr r="0" g="0" b="0"/>
-          </a:lnRef>
-          <a:fillRef idx="0">
-            <a:scrgbClr r="0" g="0" b="0"/>
-          </a:fillRef>
-          <a:effectRef idx="0">
-            <a:scrgbClr r="0" g="0" b="0"/>
-          </a:effectRef>
-          <a:fontRef idx="minor"/>
-        </p:style>
-        <p:txBody>
-          <a:bodyPr lIns="0" tIns="0" rIns="0" bIns="0" anchor="ctr">
-            <a:noAutofit/>
-          </a:bodyPr>
-          <a:lstStyle/>
-          <a:p>
-            <a:pPr>
-              <a:lnSpc>
-                <a:spcPct val="125000"/>
-              </a:lnSpc>
-              <a:tabLst>
-                <a:tab pos="0" algn="l"/>
-              </a:tabLst>
-            </a:pPr>
-            <a:r>
-              <a:rPr lang="zh-CN" sz="1400" b="1" u="none" strike="noStrike">
-                <a:solidFill>
-                  <a:srgbClr val="FFFFFF"/>
-                </a:solidFill>
-                <a:uFillTx/>
-                <a:latin typeface="Noto Sans SC"/>
-                <a:ea typeface="Noto Sans SC"/>
-              </a:rPr>
-              <a:t>第</a:t>
-            </a:r>
-            <a:r>
-              <a:rPr lang="en-US" sz="1400" b="1" u="none" strike="noStrike">
-                <a:solidFill>
-                  <a:srgbClr val="FFFFFF"/>
-                </a:solidFill>
-                <a:uFillTx/>
-                <a:latin typeface="Noto Sans SC"/>
-                <a:ea typeface="Noto Sans SC"/>
-              </a:rPr>
-              <a:t>3</a:t>
-            </a:r>
-            <a:r>
-              <a:rPr lang="zh-CN" sz="1400" b="1" u="none" strike="noStrike">
-                <a:solidFill>
-                  <a:srgbClr val="FFFFFF"/>
-                </a:solidFill>
-                <a:uFillTx/>
-                <a:latin typeface="Noto Sans SC"/>
-                <a:ea typeface="Noto Sans SC"/>
-              </a:rPr>
-              <a:t>周末 </a:t>
-            </a:r>
-            <a:r>
-              <a:rPr lang="en-US" sz="1400" b="1" u="none" strike="noStrike">
-                <a:solidFill>
-                  <a:srgbClr val="FFFFFF"/>
-                </a:solidFill>
-                <a:uFillTx/>
-                <a:latin typeface="Noto Sans SC"/>
-                <a:ea typeface="Noto Sans SC"/>
-              </a:rPr>
-              <a:t>· </a:t>
-            </a:r>
-            <a:r>
-              <a:rPr lang="zh-CN" sz="1400" b="1" u="none" strike="noStrike">
-                <a:solidFill>
-                  <a:srgbClr val="FFFFFF"/>
-                </a:solidFill>
-                <a:uFillTx/>
-                <a:latin typeface="Noto Sans SC"/>
-                <a:ea typeface="Noto Sans SC"/>
-              </a:rPr>
-              <a:t>文档交付</a:t>
-            </a:r>
-            <a:endParaRPr lang="en-US" sz="1400" b="0" u="none" strike="noStrike">
-              <a:solidFill>
-                <a:srgbClr val="FFFFFF"/>
-              </a:solidFill>
-              <a:uFillTx/>
-              <a:latin typeface="Noto Sans CJK SC"/>
-            </a:endParaRPr>
-          </a:p>
-        </p:txBody>
-      </p:sp>
-      <p:cxnSp>
-        <p:nvCxnSpPr>
-          <p:cNvPr id="292" name="Connector 48"/>
-          <p:cNvCxnSpPr/>
-          <p:nvPr/>
-        </p:nvCxnSpPr>
-        <p:spPr>
-          <a:xfrm>
-            <a:off x="9270720" y="5079960"/>
-            <a:ext cx="2350080" cy="360"/>
-          </a:xfrm>
-          <a:prstGeom prst="straightConnector1">
-            <a:avLst/>
-          </a:prstGeom>
-          <a:ln w="12700">
-            <a:solidFill>
-              <a:srgbClr val="FFFFFF">
-                <a:alpha val="15000"/>
-              </a:srgbClr>
-            </a:solidFill>
-            <a:round/>
-          </a:ln>
-        </p:spPr>
-      </p:cxnSp>
-      <p:sp>
-        <p:nvSpPr>
-          <p:cNvPr id="293" name="AutoShape 49"/>
-          <p:cNvSpPr/>
-          <p:nvPr/>
-        </p:nvSpPr>
-        <p:spPr>
-          <a:xfrm>
-            <a:off x="9271080" y="5207040"/>
-            <a:ext cx="2349000" cy="825120"/>
-          </a:xfrm>
-          <a:prstGeom prst="rect">
-            <a:avLst/>
-          </a:prstGeom>
-          <a:noFill/>
-          <a:ln w="12700">
-            <a:noFill/>
-          </a:ln>
-        </p:spPr>
-        <p:style>
-          <a:lnRef idx="0">
-            <a:scrgbClr r="0" g="0" b="0"/>
-          </a:lnRef>
-          <a:fillRef idx="0">
-            <a:scrgbClr r="0" g="0" b="0"/>
-          </a:fillRef>
-          <a:effectRef idx="0">
-            <a:scrgbClr r="0" g="0" b="0"/>
-          </a:effectRef>
-          <a:fontRef idx="minor"/>
-        </p:style>
-        <p:txBody>
-          <a:bodyPr lIns="0" tIns="0" rIns="0" bIns="0" anchor="ctr">
-            <a:noAutofit/>
-          </a:bodyPr>
-          <a:lstStyle/>
-          <a:p>
-            <a:pPr>
-              <a:lnSpc>
-                <a:spcPct val="108000"/>
-              </a:lnSpc>
-              <a:tabLst>
-                <a:tab pos="0" algn="l"/>
-              </a:tabLst>
-            </a:pPr>
-            <a:r>
-              <a:rPr lang="zh-CN" sz="1100" b="0" u="none" strike="noStrike">
-                <a:solidFill>
-                  <a:srgbClr val="FFFFFF">
-                    <a:alpha val="70000"/>
-                  </a:srgbClr>
-                </a:solidFill>
-                <a:uFillTx/>
-                <a:latin typeface="Noto Sans SC"/>
-                <a:ea typeface="Noto Sans SC"/>
-              </a:rPr>
-              <a:t>贾耀翔整理最终需求文档、项目说明</a:t>
-            </a:r>
-            <a:r>
-              <a:rPr lang="en-US" sz="1100" b="0" u="none" strike="noStrike">
-                <a:solidFill>
-                  <a:srgbClr val="FFFFFF">
-                    <a:alpha val="70000"/>
-                  </a:srgbClr>
-                </a:solidFill>
-                <a:uFillTx/>
-                <a:latin typeface="Noto Sans SC"/>
-                <a:ea typeface="Noto Sans SC"/>
-              </a:rPr>
-              <a:t>PPT</a:t>
-            </a:r>
-            <a:r>
-              <a:rPr lang="zh-CN" sz="1100" b="0" u="none" strike="noStrike">
-                <a:solidFill>
-                  <a:srgbClr val="FFFFFF">
-                    <a:alpha val="70000"/>
-                  </a:srgbClr>
-                </a:solidFill>
-                <a:uFillTx/>
-                <a:latin typeface="Noto Sans SC"/>
-                <a:ea typeface="Noto Sans SC"/>
-              </a:rPr>
-              <a:t>及演示素材，完成所有交付物归档，准备项目最终验收与成果展示汇报。</a:t>
-            </a:r>
-            <a:endParaRPr lang="en-US" sz="1100" b="0" u="none" strike="noStrike">
-              <a:solidFill>
-                <a:srgbClr val="FFFFFF"/>
-              </a:solidFill>
-              <a:uFillTx/>
-              <a:latin typeface="Noto Sans CJK SC"/>
-            </a:endParaRPr>
-          </a:p>
-        </p:txBody>
-      </p:sp>
-    </p:spTree>
-  </p:cSld>
-  <p:clrMapOvr>
-    <a:masterClrMapping/>
-  </p:clrMapOvr>
-</p:sld>
-</file>
-
-<file path=ppt/slides/slide12.xml><?xml version="1.0" encoding="utf-8"?>
-<p:sld xmlns:a="http://schemas.openxmlformats.org/drawingml/2006/main" xmlns:r="http://schemas.openxmlformats.org/officeDocument/2006/relationships" xmlns:p="http://schemas.openxmlformats.org/presentationml/2006/main">
-  <p:cSld>
-    <p:bg>
-      <p:bgPr>
-        <a:blipFill rotWithShape="0">
-          <a:blip r:embed="rId3"/>
-          <a:stretch>
-            <a:fillRect/>
-          </a:stretch>
-        </a:blipFill>
-        <a:effectLst/>
-      </p:bgPr>
-    </p:bg>
-    <p:spTree>
-      <p:nvGrpSpPr>
-        <p:cNvPr id="1" name=""/>
-        <p:cNvGrpSpPr/>
-        <p:nvPr/>
-      </p:nvGrpSpPr>
-      <p:grpSpPr>
-        <a:xfrm>
-          <a:off x="0" y="0"/>
-          <a:ext cx="0" cy="0"/>
-          <a:chOff x="0" y="0"/>
-          <a:chExt cx="0" cy="0"/>
-        </a:xfrm>
-      </p:grpSpPr>
-      <p:sp>
-        <p:nvSpPr>
-          <p:cNvPr id="323" name="AutoShape 2"/>
-          <p:cNvSpPr/>
-          <p:nvPr/>
-        </p:nvSpPr>
-        <p:spPr>
-          <a:xfrm>
-            <a:off x="0" y="0"/>
-            <a:ext cx="12191760" cy="6857640"/>
-          </a:xfrm>
-          <a:prstGeom prst="roundRect">
-            <a:avLst>
-              <a:gd name="adj" fmla="val 0"/>
-            </a:avLst>
-          </a:prstGeom>
-          <a:solidFill>
-            <a:srgbClr val="0F172A">
-              <a:alpha val="60000"/>
-            </a:srgbClr>
-          </a:solidFill>
-          <a:ln w="25400">
-            <a:noFill/>
-          </a:ln>
-        </p:spPr>
-        <p:style>
-          <a:lnRef idx="0">
-            <a:scrgbClr r="0" g="0" b="0"/>
-          </a:lnRef>
-          <a:fillRef idx="0">
-            <a:scrgbClr r="0" g="0" b="0"/>
-          </a:fillRef>
-          <a:effectRef idx="0">
-            <a:scrgbClr r="0" g="0" b="0"/>
-          </a:effectRef>
-          <a:fontRef idx="minor"/>
-        </p:style>
-        <p:txBody>
-          <a:bodyPr lIns="63360" tIns="63360" rIns="63360" bIns="63360" anchor="ctr">
-            <a:noAutofit/>
-          </a:bodyPr>
-          <a:lstStyle/>
-          <a:p>
-            <a:pPr algn="ctr">
-              <a:lnSpc>
-                <a:spcPct val="100000"/>
-              </a:lnSpc>
-            </a:pPr>
-            <a:endParaRPr lang="en-US" sz="1400" b="0" u="none" strike="noStrike">
-              <a:solidFill>
-                <a:srgbClr val="000000"/>
-              </a:solidFill>
-              <a:uFillTx/>
-              <a:latin typeface="Arial"/>
-              <a:ea typeface="Arial"/>
-            </a:endParaRPr>
-          </a:p>
-        </p:txBody>
-      </p:sp>
-      <p:sp>
-        <p:nvSpPr>
-          <p:cNvPr id="324" name="AutoShape 3"/>
-          <p:cNvSpPr/>
-          <p:nvPr/>
-        </p:nvSpPr>
-        <p:spPr>
-          <a:xfrm>
-            <a:off x="762120" y="507960"/>
-            <a:ext cx="10667520" cy="634680"/>
-          </a:xfrm>
-          <a:prstGeom prst="rect">
-            <a:avLst/>
-          </a:prstGeom>
-          <a:noFill/>
-          <a:ln w="12700">
-            <a:noFill/>
-          </a:ln>
-        </p:spPr>
-        <p:style>
-          <a:lnRef idx="0">
-            <a:scrgbClr r="0" g="0" b="0"/>
-          </a:lnRef>
-          <a:fillRef idx="0">
-            <a:scrgbClr r="0" g="0" b="0"/>
-          </a:fillRef>
-          <a:effectRef idx="0">
-            <a:scrgbClr r="0" g="0" b="0"/>
-          </a:effectRef>
-          <a:fontRef idx="minor"/>
-        </p:style>
-        <p:txBody>
-          <a:bodyPr lIns="0" tIns="0" rIns="0" bIns="0" anchor="ctr">
-            <a:noAutofit/>
-          </a:bodyPr>
-          <a:lstStyle/>
-          <a:p>
-            <a:pPr>
-              <a:lnSpc>
-                <a:spcPct val="125000"/>
-              </a:lnSpc>
-              <a:tabLst>
-                <a:tab pos="0" algn="l"/>
-              </a:tabLst>
-            </a:pPr>
-            <a:r>
-              <a:rPr lang="zh-CN" sz="3200" b="1" u="none" strike="noStrike">
-                <a:solidFill>
-                  <a:srgbClr val="FFFFFF"/>
-                </a:solidFill>
-                <a:uFillTx/>
-                <a:latin typeface="Noto Sans SC"/>
-                <a:ea typeface="Noto Sans SC"/>
-              </a:rPr>
-              <a:t>代码仓库结构</a:t>
-            </a:r>
-            <a:endParaRPr lang="en-US" sz="3200" b="0" u="none" strike="noStrike">
-              <a:solidFill>
-                <a:srgbClr val="FFFFFF"/>
-              </a:solidFill>
-              <a:uFillTx/>
-              <a:latin typeface="Noto Sans CJK SC"/>
-            </a:endParaRPr>
-          </a:p>
-        </p:txBody>
-      </p:sp>
-      <p:sp>
-        <p:nvSpPr>
-          <p:cNvPr id="325" name="AutoShape 4"/>
-          <p:cNvSpPr/>
-          <p:nvPr/>
-        </p:nvSpPr>
-        <p:spPr>
-          <a:xfrm>
-            <a:off x="762120" y="1778040"/>
-            <a:ext cx="5270040" cy="3682800"/>
-          </a:xfrm>
-          <a:prstGeom prst="roundRect">
-            <a:avLst>
-              <a:gd name="adj" fmla="val 0"/>
-            </a:avLst>
-          </a:prstGeom>
-          <a:solidFill>
-            <a:srgbClr val="FFFFFF">
-              <a:alpha val="8000"/>
-            </a:srgbClr>
-          </a:solidFill>
-          <a:ln w="12700">
-            <a:solidFill>
-              <a:srgbClr val="2BD1FC">
-                <a:alpha val="40000"/>
-              </a:srgbClr>
-            </a:solidFill>
-            <a:round/>
-          </a:ln>
-        </p:spPr>
-        <p:style>
-          <a:lnRef idx="0">
-            <a:scrgbClr r="0" g="0" b="0"/>
-          </a:lnRef>
-          <a:fillRef idx="0">
-            <a:scrgbClr r="0" g="0" b="0"/>
-          </a:fillRef>
-          <a:effectRef idx="0">
-            <a:scrgbClr r="0" g="0" b="0"/>
-          </a:effectRef>
-          <a:fontRef idx="minor"/>
-        </p:style>
-        <p:txBody>
-          <a:bodyPr lIns="63360" tIns="63360" rIns="63360" bIns="63360" anchor="ctr">
-            <a:noAutofit/>
-          </a:bodyPr>
-          <a:lstStyle/>
-          <a:p>
-            <a:pPr algn="ctr">
-              <a:lnSpc>
-                <a:spcPct val="100000"/>
-              </a:lnSpc>
-            </a:pPr>
-            <a:endParaRPr lang="en-US" sz="1400" b="0" u="none" strike="noStrike">
-              <a:solidFill>
-                <a:srgbClr val="000000"/>
-              </a:solidFill>
-              <a:uFillTx/>
-              <a:latin typeface="Arial"/>
-              <a:ea typeface="Arial"/>
-            </a:endParaRPr>
-          </a:p>
-        </p:txBody>
-      </p:sp>
-      <p:pic>
-        <p:nvPicPr>
-          <p:cNvPr id="326" name="Picture 5"/>
-          <p:cNvPicPr/>
-          <p:nvPr/>
-        </p:nvPicPr>
-        <p:blipFill>
-          <a:blip r:embed="rId4">
-            <a:extLst>
-              <a:ext uri="{96DAC541-7B7A-43D3-8B79-37D633B846F1}">
-                <asvg:svgBlip xmlns:asvg="http://schemas.microsoft.com/office/drawing/2016/SVG/main" r:embed="rId5"/>
-              </a:ext>
-            </a:extLst>
-          </a:blip>
-          <a:stretch/>
-        </p:blipFill>
-        <p:spPr>
-          <a:xfrm>
-            <a:off x="1015920" y="1968480"/>
-            <a:ext cx="304560" cy="304560"/>
-          </a:xfrm>
-          <a:prstGeom prst="rect">
-            <a:avLst/>
-          </a:prstGeom>
-          <a:noFill/>
-          <a:ln w="0">
-            <a:noFill/>
-          </a:ln>
-        </p:spPr>
-      </p:pic>
-      <p:sp>
-        <p:nvSpPr>
-          <p:cNvPr id="327" name="AutoShape 6"/>
-          <p:cNvSpPr/>
-          <p:nvPr/>
-        </p:nvSpPr>
-        <p:spPr>
-          <a:xfrm>
-            <a:off x="1460520" y="1930320"/>
-            <a:ext cx="4317480" cy="380520"/>
-          </a:xfrm>
-          <a:prstGeom prst="rect">
-            <a:avLst/>
-          </a:prstGeom>
-          <a:noFill/>
-          <a:ln w="12700">
-            <a:noFill/>
-          </a:ln>
-        </p:spPr>
-        <p:style>
-          <a:lnRef idx="0">
-            <a:scrgbClr r="0" g="0" b="0"/>
-          </a:lnRef>
-          <a:fillRef idx="0">
-            <a:scrgbClr r="0" g="0" b="0"/>
-          </a:fillRef>
-          <a:effectRef idx="0">
-            <a:scrgbClr r="0" g="0" b="0"/>
-          </a:effectRef>
-          <a:fontRef idx="minor"/>
-        </p:style>
-        <p:txBody>
-          <a:bodyPr lIns="0" tIns="0" rIns="0" bIns="0" anchor="ctr">
-            <a:noAutofit/>
-          </a:bodyPr>
-          <a:lstStyle/>
-          <a:p>
-            <a:pPr>
-              <a:lnSpc>
-                <a:spcPct val="125000"/>
-              </a:lnSpc>
-              <a:tabLst>
-                <a:tab pos="0" algn="l"/>
-              </a:tabLst>
-            </a:pPr>
-            <a:r>
-              <a:rPr lang="zh-CN" sz="1800" b="1" u="none" strike="noStrike">
-                <a:solidFill>
-                  <a:srgbClr val="2BD1FC"/>
-                </a:solidFill>
-                <a:uFillTx/>
-                <a:latin typeface="Noto Sans SC"/>
-                <a:ea typeface="Noto Sans SC"/>
-              </a:rPr>
-              <a:t>模块化文件组织</a:t>
-            </a:r>
-            <a:endParaRPr lang="en-US" sz="1800" b="0" u="none" strike="noStrike">
-              <a:solidFill>
-                <a:srgbClr val="FFFFFF"/>
-              </a:solidFill>
-              <a:uFillTx/>
-              <a:latin typeface="Noto Sans CJK SC"/>
-            </a:endParaRPr>
-          </a:p>
-        </p:txBody>
-      </p:sp>
-      <p:cxnSp>
-        <p:nvCxnSpPr>
-          <p:cNvPr id="328" name="Connector 7"/>
-          <p:cNvCxnSpPr/>
-          <p:nvPr/>
-        </p:nvCxnSpPr>
-        <p:spPr>
-          <a:xfrm>
-            <a:off x="1015920" y="2539800"/>
-            <a:ext cx="4762800" cy="360"/>
-          </a:xfrm>
-          <a:prstGeom prst="straightConnector1">
-            <a:avLst/>
-          </a:prstGeom>
-          <a:ln w="12700">
-            <a:solidFill>
-              <a:srgbClr val="FFFFFF">
-                <a:alpha val="15000"/>
-              </a:srgbClr>
-            </a:solidFill>
-            <a:prstDash val="dash"/>
-            <a:round/>
-          </a:ln>
-        </p:spPr>
-      </p:cxnSp>
-      <p:sp>
-        <p:nvSpPr>
-          <p:cNvPr id="329" name="AutoShape 8"/>
-          <p:cNvSpPr/>
-          <p:nvPr/>
-        </p:nvSpPr>
-        <p:spPr>
-          <a:xfrm>
-            <a:off x="1015920" y="2793960"/>
-            <a:ext cx="4762080" cy="2412720"/>
-          </a:xfrm>
-          <a:prstGeom prst="rect">
-            <a:avLst/>
-          </a:prstGeom>
-          <a:noFill/>
-          <a:ln w="12700">
-            <a:noFill/>
-          </a:ln>
-        </p:spPr>
-        <p:style>
-          <a:lnRef idx="0">
-            <a:scrgbClr r="0" g="0" b="0"/>
-          </a:lnRef>
-          <a:fillRef idx="0">
-            <a:scrgbClr r="0" g="0" b="0"/>
-          </a:fillRef>
-          <a:effectRef idx="0">
-            <a:scrgbClr r="0" g="0" b="0"/>
-          </a:effectRef>
-          <a:fontRef idx="minor"/>
-        </p:style>
-        <p:txBody>
-          <a:bodyPr lIns="0" tIns="0" rIns="0" bIns="0" anchor="ctr">
-            <a:noAutofit/>
-          </a:bodyPr>
-          <a:lstStyle/>
-          <a:p>
-            <a:pPr>
-              <a:lnSpc>
-                <a:spcPct val="125000"/>
-              </a:lnSpc>
-              <a:tabLst>
-                <a:tab pos="0" algn="l"/>
-              </a:tabLst>
-            </a:pPr>
-            <a:r>
-              <a:rPr lang="zh-CN" sz="1400" b="0" u="none" strike="noStrike">
-                <a:solidFill>
-                  <a:srgbClr val="E2E8F0"/>
-                </a:solidFill>
-                <a:uFillTx/>
-                <a:latin typeface="Noto Sans SC"/>
-                <a:ea typeface="Noto Sans SC"/>
-              </a:rPr>
-              <a:t>以</a:t>
-            </a:r>
-            <a:r>
-              <a:rPr lang="en-US" sz="1400" b="1" u="none" strike="noStrike">
-                <a:solidFill>
-                  <a:srgbClr val="E2E8F0"/>
-                </a:solidFill>
-                <a:uFillTx/>
-                <a:latin typeface="Noto Sans SC"/>
-                <a:ea typeface="Noto Sans SC"/>
-              </a:rPr>
-              <a:t>game-hub/</a:t>
-            </a:r>
-            <a:r>
-              <a:rPr lang="zh-CN" sz="1400" b="0" u="none" strike="noStrike">
-                <a:solidFill>
-                  <a:srgbClr val="E2E8F0"/>
-                </a:solidFill>
-                <a:uFillTx/>
-                <a:latin typeface="Noto Sans SC"/>
-                <a:ea typeface="Noto Sans SC"/>
-              </a:rPr>
-              <a:t>为根目录，入口文件</a:t>
-            </a:r>
-            <a:r>
-              <a:rPr lang="en-US" sz="1400" b="1" u="none" strike="noStrike">
-                <a:solidFill>
-                  <a:srgbClr val="E2E8F0"/>
-                </a:solidFill>
-                <a:uFillTx/>
-                <a:latin typeface="Noto Sans SC"/>
-                <a:ea typeface="Noto Sans SC"/>
-              </a:rPr>
-              <a:t>index.html</a:t>
-            </a:r>
-            <a:r>
-              <a:rPr lang="zh-CN" sz="1400" b="0" u="none" strike="noStrike">
-                <a:solidFill>
-                  <a:srgbClr val="E2E8F0"/>
-                </a:solidFill>
-                <a:uFillTx/>
-                <a:latin typeface="Noto Sans SC"/>
-                <a:ea typeface="Noto Sans SC"/>
-              </a:rPr>
-              <a:t>作为游戏回廊，统一调度所有游戏模块。每个游戏均为独立 </a:t>
-            </a:r>
-            <a:r>
-              <a:rPr lang="en-US" sz="1400" b="0" u="none" strike="noStrike">
-                <a:solidFill>
-                  <a:srgbClr val="E2E8F0"/>
-                </a:solidFill>
-                <a:uFillTx/>
-                <a:latin typeface="Noto Sans SC"/>
-                <a:ea typeface="Noto Sans SC"/>
-              </a:rPr>
-              <a:t>HTML </a:t>
-            </a:r>
-            <a:r>
-              <a:rPr lang="zh-CN" sz="1400" b="0" u="none" strike="noStrike">
-                <a:solidFill>
-                  <a:srgbClr val="E2E8F0"/>
-                </a:solidFill>
-                <a:uFillTx/>
-                <a:latin typeface="Noto Sans SC"/>
-                <a:ea typeface="Noto Sans SC"/>
-              </a:rPr>
-              <a:t>文件，按开发者职责划分，结构清晰易维护。资源集中存放于</a:t>
-            </a:r>
-            <a:r>
-              <a:rPr lang="en-US" sz="1400" b="1" u="none" strike="noStrike">
-                <a:solidFill>
-                  <a:srgbClr val="E2E8F0"/>
-                </a:solidFill>
-                <a:uFillTx/>
-                <a:latin typeface="Noto Sans SC"/>
-                <a:ea typeface="Noto Sans SC"/>
-              </a:rPr>
-              <a:t>assets/</a:t>
-            </a:r>
-            <a:r>
-              <a:rPr lang="zh-CN" sz="1400" b="0" u="none" strike="noStrike">
-                <a:solidFill>
-                  <a:srgbClr val="E2E8F0"/>
-                </a:solidFill>
-                <a:uFillTx/>
-                <a:latin typeface="Noto Sans SC"/>
-                <a:ea typeface="Noto Sans SC"/>
-              </a:rPr>
-              <a:t>，文档归档于</a:t>
-            </a:r>
-            <a:r>
-              <a:rPr lang="en-US" sz="1400" b="1" u="none" strike="noStrike">
-                <a:solidFill>
-                  <a:srgbClr val="E2E8F0"/>
-                </a:solidFill>
-                <a:uFillTx/>
-                <a:latin typeface="Noto Sans SC"/>
-                <a:ea typeface="Noto Sans SC"/>
-              </a:rPr>
-              <a:t>docs/</a:t>
-            </a:r>
-            <a:r>
-              <a:rPr lang="zh-CN" sz="1400" b="0" u="none" strike="noStrike">
-                <a:solidFill>
-                  <a:srgbClr val="E2E8F0"/>
-                </a:solidFill>
-                <a:uFillTx/>
-                <a:latin typeface="Noto Sans SC"/>
-                <a:ea typeface="Noto Sans SC"/>
-              </a:rPr>
-              <a:t>，确保项目工程化规范。</a:t>
-            </a:r>
-            <a:endParaRPr lang="en-US" sz="1400" b="0" u="none" strike="noStrike">
-              <a:solidFill>
-                <a:srgbClr val="FFFFFF"/>
-              </a:solidFill>
-              <a:uFillTx/>
-              <a:latin typeface="Noto Sans CJK SC"/>
-            </a:endParaRPr>
-          </a:p>
-          <a:p>
-            <a:pPr>
-              <a:lnSpc>
-                <a:spcPct val="125000"/>
-              </a:lnSpc>
-              <a:tabLst>
-                <a:tab pos="0" algn="l"/>
-              </a:tabLst>
-            </a:pPr>
-            <a:r>
-              <a:rPr lang="zh-CN" sz="1300" b="0" u="none" strike="noStrike">
-                <a:solidFill>
-                  <a:srgbClr val="FFFFFF">
-                    <a:alpha val="60000"/>
-                  </a:srgbClr>
-                </a:solidFill>
-                <a:uFillTx/>
-                <a:latin typeface="Noto Sans SC"/>
-                <a:ea typeface="Noto Sans SC"/>
-              </a:rPr>
-              <a:t>分工：李玥峰（入口页）、李少华（</a:t>
-            </a:r>
-            <a:r>
-              <a:rPr lang="en-US" sz="1300" b="0" u="none" strike="noStrike">
-                <a:solidFill>
-                  <a:srgbClr val="FFFFFF">
-                    <a:alpha val="60000"/>
-                  </a:srgbClr>
-                </a:solidFill>
-                <a:uFillTx/>
-                <a:latin typeface="Noto Sans SC"/>
-                <a:ea typeface="Noto Sans SC"/>
-              </a:rPr>
-              <a:t>5</a:t>
-            </a:r>
-            <a:r>
-              <a:rPr lang="zh-CN" sz="1300" b="0" u="none" strike="noStrike">
-                <a:solidFill>
-                  <a:srgbClr val="FFFFFF">
-                    <a:alpha val="60000"/>
-                  </a:srgbClr>
-                </a:solidFill>
-                <a:uFillTx/>
-                <a:latin typeface="Noto Sans SC"/>
-                <a:ea typeface="Noto Sans SC"/>
-              </a:rPr>
-              <a:t>款基础游戏）、李振豪（策略类游戏）。</a:t>
-            </a:r>
-            <a:endParaRPr lang="en-US" sz="1300" b="0" u="none" strike="noStrike">
-              <a:solidFill>
-                <a:srgbClr val="FFFFFF"/>
-              </a:solidFill>
-              <a:uFillTx/>
-              <a:latin typeface="Noto Sans CJK SC"/>
-            </a:endParaRPr>
-          </a:p>
-        </p:txBody>
-      </p:sp>
-      <p:sp>
-        <p:nvSpPr>
-          <p:cNvPr id="330" name="AutoShape 9"/>
-          <p:cNvSpPr/>
-          <p:nvPr/>
-        </p:nvSpPr>
-        <p:spPr>
-          <a:xfrm>
-            <a:off x="6159600" y="1778040"/>
-            <a:ext cx="5270040" cy="3682800"/>
-          </a:xfrm>
-          <a:prstGeom prst="roundRect">
-            <a:avLst>
-              <a:gd name="adj" fmla="val 0"/>
-            </a:avLst>
-          </a:prstGeom>
-          <a:solidFill>
-            <a:srgbClr val="FFFFFF">
-              <a:alpha val="8000"/>
-            </a:srgbClr>
-          </a:solidFill>
-          <a:ln w="12700">
-            <a:solidFill>
-              <a:srgbClr val="2BD1FC">
-                <a:alpha val="40000"/>
-              </a:srgbClr>
-            </a:solidFill>
-            <a:round/>
-          </a:ln>
-        </p:spPr>
-        <p:style>
-          <a:lnRef idx="0">
-            <a:scrgbClr r="0" g="0" b="0"/>
-          </a:lnRef>
-          <a:fillRef idx="0">
-            <a:scrgbClr r="0" g="0" b="0"/>
-          </a:fillRef>
-          <a:effectRef idx="0">
-            <a:scrgbClr r="0" g="0" b="0"/>
-          </a:effectRef>
-          <a:fontRef idx="minor"/>
-        </p:style>
-        <p:txBody>
-          <a:bodyPr lIns="63360" tIns="63360" rIns="63360" bIns="63360" anchor="ctr">
-            <a:noAutofit/>
-          </a:bodyPr>
-          <a:lstStyle/>
-          <a:p>
-            <a:pPr algn="ctr">
-              <a:lnSpc>
-                <a:spcPct val="100000"/>
-              </a:lnSpc>
-            </a:pPr>
-            <a:endParaRPr lang="en-US" sz="1400" b="0" u="none" strike="noStrike">
-              <a:solidFill>
-                <a:srgbClr val="000000"/>
-              </a:solidFill>
-              <a:uFillTx/>
-              <a:latin typeface="Arial"/>
-              <a:ea typeface="Arial"/>
-            </a:endParaRPr>
-          </a:p>
-        </p:txBody>
-      </p:sp>
-      <p:pic>
-        <p:nvPicPr>
           <p:cNvPr id="331" name="Picture 10"/>
           <p:cNvPicPr/>
           <p:nvPr/>
@@ -14052,7 +10168,7 @@
 </p:sld>
 </file>
 
-<file path=ppt/slides/slide13.xml><?xml version="1.0" encoding="utf-8"?>
+<file path=ppt/slides/slide12.xml><?xml version="1.0" encoding="utf-8"?>
 <p:sld xmlns:a="http://schemas.openxmlformats.org/drawingml/2006/main" xmlns:r="http://schemas.openxmlformats.org/officeDocument/2006/relationships" xmlns:p="http://schemas.openxmlformats.org/presentationml/2006/main">
   <p:cSld>
     <p:bg>
